--- a/recursos/presentacion.pptx
+++ b/recursos/presentacion.pptx
@@ -23,6 +23,7 @@
     <p:sldId id="271" r:id="rId22"/>
     <p:sldId id="272" r:id="rId23"/>
     <p:sldId id="273" r:id="rId24"/>
+    <p:sldId id="274" r:id="rId25"/>
   </p:sldIdLst>
   <p:sldSz cx="12191695" cy="6858000" type="screen4x3"/>
   <p:notesSz cx="6858000" cy="9144000"/>
@@ -3340,7 +3341,7 @@
                 </a:solidFill>
                 <a:latin typeface="IBM Plex Mono"/>
               </a:rPr>
-              <a:t>POR QUÉ DATOSVIVOS</a:t>
+              <a:t>CUMPLIMIENTO DEL TDR</a:t>
             </a:r>
           </a:p>
           <a:p/>
@@ -3357,7 +3358,7 @@
                 </a:solidFill>
                 <a:latin typeface="Nunito Sans"/>
               </a:rPr>
-              <a:t>Lo que nadie más hace</a:t>
+              <a:t>Nivel Avanzado, con la letra del pliego</a:t>
             </a:r>
           </a:p>
         </p:txBody>
@@ -3370,8 +3371,8 @@
         </p:nvSpPr>
         <p:spPr>
           <a:xfrm>
-            <a:off x="594360" y="1828800"/>
-            <a:ext cx="10972800" cy="4297680"/>
+            <a:off x="594360" y="1783080"/>
+            <a:ext cx="10972800" cy="4389120"/>
           </a:xfrm>
           <a:prstGeom prst="rect">
             <a:avLst/>
@@ -3386,162 +3387,194 @@
           <a:p>
             <a:pPr algn="l">
               <a:spcAft>
-                <a:spcPts val="200"/>
-              </a:spcAft>
-            </a:pPr>
-            <a:r>
-              <a:rPr sz="1700" b="1">
+                <a:spcPts val="100"/>
+              </a:spcAft>
+            </a:pPr>
+            <a:r>
+              <a:rPr sz="1500" b="1">
                 <a:solidFill>
                   <a:srgbClr val="004884"/>
                 </a:solidFill>
                 <a:latin typeface="Nunito Sans"/>
               </a:rPr>
-              <a:t>Integra los portales federados</a:t>
+              <a:t>Agentes de IA para servicios públicos</a:t>
             </a:r>
           </a:p>
           <a:p/>
           <a:p>
             <a:pPr algn="l">
               <a:spcAft>
-                <a:spcPts val="1000"/>
-              </a:spcAft>
-            </a:pPr>
-            <a:r>
-              <a:rPr sz="1500" b="0">
-                <a:solidFill>
-                  <a:srgbClr val="202124"/>
-                </a:solidFill>
-                <a:latin typeface="Nunito Sans"/>
-              </a:rPr>
-              <a:t>datos.gov.co + IGAC + Bogotá + Cali + Medellín + Valle en un catálogo comparable. Hoy, eso exige revisar sitio por sitio.</a:t>
-            </a:r>
-          </a:p>
-          <a:p>
-            <a:pPr algn="l">
-              <a:spcAft>
-                <a:spcPts val="200"/>
-              </a:spcAft>
-            </a:pPr>
-            <a:r>
-              <a:rPr sz="1700" b="1">
+                <a:spcPts val="800"/>
+              </a:spcAft>
+            </a:pPr>
+            <a:r>
+              <a:rPr sz="1300" b="0">
+                <a:solidFill>
+                  <a:srgbClr val="202124"/>
+                </a:solidFill>
+                <a:latin typeface="Nunito Sans"/>
+              </a:rPr>
+              <a:t>el agente consulta y procesa datos abiertos de manera automática para responder solicitudes ciudadanas.</a:t>
+            </a:r>
+          </a:p>
+          <a:p>
+            <a:pPr algn="l">
+              <a:spcAft>
+                <a:spcPts val="100"/>
+              </a:spcAft>
+            </a:pPr>
+            <a:r>
+              <a:rPr sz="1500" b="1">
                 <a:solidFill>
                   <a:srgbClr val="004884"/>
                 </a:solidFill>
                 <a:latin typeface="Nunito Sans"/>
               </a:rPr>
-              <a:t>Se actualiza solo</a:t>
-            </a:r>
-          </a:p>
-          <a:p>
-            <a:pPr algn="l">
-              <a:spcAft>
-                <a:spcPts val="1000"/>
-              </a:spcAft>
-            </a:pPr>
-            <a:r>
-              <a:rPr sz="1500" b="0">
-                <a:solidFill>
-                  <a:srgbClr val="202124"/>
-                </a:solidFill>
-                <a:latin typeface="Nunito Sans"/>
-              </a:rPr>
-              <a:t>panorama diario automático — no es un informe: es infraestructura viva.</a:t>
-            </a:r>
-          </a:p>
-          <a:p>
-            <a:pPr algn="l">
-              <a:spcAft>
-                <a:spcPts val="200"/>
-              </a:spcAft>
-            </a:pPr>
-            <a:r>
-              <a:rPr sz="1700" b="1">
+              <a:t>IA generativa y sistemas conversacionales</a:t>
+            </a:r>
+          </a:p>
+          <a:p>
+            <a:pPr algn="l">
+              <a:spcAft>
+                <a:spcPts val="800"/>
+              </a:spcAft>
+            </a:pPr>
+            <a:r>
+              <a:rPr sz="1300" b="0">
+                <a:solidFill>
+                  <a:srgbClr val="202124"/>
+                </a:solidFill>
+                <a:latin typeface="Nunito Sans"/>
+              </a:rPr>
+              <a:t>buscador conversacional basado en datos abiertos: NL2SQL / Text-to-SQL generativo verificado.</a:t>
+            </a:r>
+          </a:p>
+          <a:p>
+            <a:pPr algn="l">
+              <a:spcAft>
+                <a:spcPts val="100"/>
+              </a:spcAft>
+            </a:pPr>
+            <a:r>
+              <a:rPr sz="1500" b="1">
                 <a:solidFill>
                   <a:srgbClr val="004884"/>
                 </a:solidFill>
                 <a:latin typeface="Nunito Sans"/>
               </a:rPr>
-              <a:t>Verificable de punta a punta</a:t>
-            </a:r>
-          </a:p>
-          <a:p>
-            <a:pPr algn="l">
-              <a:spcAft>
-                <a:spcPts val="1000"/>
-              </a:spcAft>
-            </a:pPr>
-            <a:r>
-              <a:rPr sz="1500" b="0">
-                <a:solidFill>
-                  <a:srgbClr val="202124"/>
-                </a:solidFill>
-                <a:latin typeface="Nunito Sans"/>
-              </a:rPr>
-              <a:t>cada cifra con fuente citada; API pública para auditar los números del sitio; repo abierto y replicable.</a:t>
-            </a:r>
-          </a:p>
-          <a:p>
-            <a:pPr algn="l">
-              <a:spcAft>
-                <a:spcPts val="200"/>
-              </a:spcAft>
-            </a:pPr>
-            <a:r>
-              <a:rPr sz="1700" b="1">
+              <a:t>Modelos de lenguaje + arquitectura híbrida</a:t>
+            </a:r>
+          </a:p>
+          <a:p>
+            <a:pPr algn="l">
+              <a:spcAft>
+                <a:spcPts val="800"/>
+              </a:spcAft>
+            </a:pPr>
+            <a:r>
+              <a:rPr sz="1300" b="0">
+                <a:solidFill>
+                  <a:srgbClr val="202124"/>
+                </a:solidFill>
+                <a:latin typeface="Nunito Sans"/>
+              </a:rPr>
+              <a:t>el LLM razona, el motor determinista verifica (3 capas) — con embeddings neuronales de retrieval.</a:t>
+            </a:r>
+          </a:p>
+          <a:p>
+            <a:pPr algn="l">
+              <a:spcAft>
+                <a:spcPts val="100"/>
+              </a:spcAft>
+            </a:pPr>
+            <a:r>
+              <a:rPr sz="1500" b="1">
                 <a:solidFill>
                   <a:srgbClr val="004884"/>
                 </a:solidFill>
                 <a:latin typeface="Nunito Sans"/>
               </a:rPr>
-              <a:t>Interoperable por estándar</a:t>
-            </a:r>
-          </a:p>
-          <a:p>
-            <a:pPr algn="l">
-              <a:spcAft>
-                <a:spcPts val="1000"/>
-              </a:spcAft>
-            </a:pPr>
-            <a:r>
-              <a:rPr sz="1500" b="0">
-                <a:solidFill>
-                  <a:srgbClr val="202124"/>
-                </a:solidFill>
-                <a:latin typeface="Nunito Sans"/>
-              </a:rPr>
-              <a:t>MCP server: cualquier agente de IA puede consultar el catálogo colombiano.</a:t>
-            </a:r>
-          </a:p>
-          <a:p>
-            <a:pPr algn="l">
-              <a:spcAft>
-                <a:spcPts val="200"/>
-              </a:spcAft>
-            </a:pPr>
-            <a:r>
-              <a:rPr sz="1700" b="1">
+              <a:t>Integración de grandes volúmenes</a:t>
+            </a:r>
+          </a:p>
+          <a:p>
+            <a:pPr algn="l">
+              <a:spcAft>
+                <a:spcPts val="800"/>
+              </a:spcAft>
+            </a:pPr>
+            <a:r>
+              <a:rPr sz="1300" b="0">
+                <a:solidFill>
+                  <a:srgbClr val="202124"/>
+                </a:solidFill>
+                <a:latin typeface="Nunito Sans"/>
+              </a:rPr>
+              <a:t>25.192 datasets de 6 fuentes y 3 protocolos — muy por encima de los 3-10 conjuntos del nivel intermedio.</a:t>
+            </a:r>
+          </a:p>
+          <a:p>
+            <a:pPr algn="l">
+              <a:spcAft>
+                <a:spcPts val="100"/>
+              </a:spcAft>
+            </a:pPr>
+            <a:r>
+              <a:rPr sz="1500" b="1">
                 <a:solidFill>
                   <a:srgbClr val="004884"/>
                 </a:solidFill>
                 <a:latin typeface="Nunito Sans"/>
               </a:rPr>
-              <a:t>Accesible e institucional</a:t>
-            </a:r>
-          </a:p>
-          <a:p>
-            <a:pPr algn="l">
-              <a:spcAft>
-                <a:spcPts val="1000"/>
-              </a:spcAft>
-            </a:pPr>
-            <a:r>
-              <a:rPr sz="1500" b="0">
-                <a:solidFill>
-                  <a:srgbClr val="202124"/>
-                </a:solidFill>
-                <a:latin typeface="Nunito Sans"/>
-              </a:rPr>
-              <a:t>identidad gov.co, voz y narración (Ley 1618), sin registro y sin rastreadores.</a:t>
+              <a:t>Datos estructurados y no estructurados</a:t>
+            </a:r>
+          </a:p>
+          <a:p>
+            <a:pPr algn="l">
+              <a:spcAft>
+                <a:spcPts val="800"/>
+              </a:spcAft>
+            </a:pPr>
+            <a:r>
+              <a:rPr sz="1300" b="0">
+                <a:solidFill>
+                  <a:srgbClr val="202124"/>
+                </a:solidFill>
+                <a:latin typeface="Nunito Sans"/>
+              </a:rPr>
+              <a:t>metadata estructurada + texto libre procesado con embeddings; 29 variables curadas por dataset (el intermedio pide 10-20).</a:t>
+            </a:r>
+          </a:p>
+          <a:p>
+            <a:pPr algn="l">
+              <a:spcAft>
+                <a:spcPts val="100"/>
+              </a:spcAft>
+            </a:pPr>
+            <a:r>
+              <a:rPr sz="1500" b="1">
+                <a:solidFill>
+                  <a:srgbClr val="004884"/>
+                </a:solidFill>
+                <a:latin typeface="Nunito Sans"/>
+              </a:rPr>
+              <a:t>Automatización, escalabilidad y despliegue funcional</a:t>
+            </a:r>
+          </a:p>
+          <a:p>
+            <a:pPr algn="l">
+              <a:spcAft>
+                <a:spcPts val="800"/>
+              </a:spcAft>
+            </a:pPr>
+            <a:r>
+              <a:rPr sz="1300" b="0">
+                <a:solidFill>
+                  <a:srgbClr val="202124"/>
+                </a:solidFill>
+                <a:latin typeface="Nunito Sans"/>
+              </a:rPr>
+              <a:t>actualización diaria automática y solución EN PRODUCCIÓN: datosvivos.co.</a:t>
             </a:r>
           </a:p>
         </p:txBody>
@@ -3645,6 +3678,311 @@
                 </a:solidFill>
                 <a:latin typeface="IBM Plex Mono"/>
               </a:rPr>
+              <a:t>POR QUÉ DATOSVIVOS</a:t>
+            </a:r>
+          </a:p>
+          <a:p/>
+          <a:p>
+            <a:pPr algn="l">
+              <a:spcAft>
+                <a:spcPts val="0"/>
+              </a:spcAft>
+            </a:pPr>
+            <a:r>
+              <a:rPr sz="3200" b="1">
+                <a:solidFill>
+                  <a:srgbClr val="202124"/>
+                </a:solidFill>
+                <a:latin typeface="Nunito Sans"/>
+              </a:rPr>
+              <a:t>Lo que nadie más hace</a:t>
+            </a:r>
+          </a:p>
+        </p:txBody>
+      </p:sp>
+      <p:sp>
+        <p:nvSpPr>
+          <p:cNvPr id="3" name="TextBox 2"/>
+          <p:cNvSpPr txBox="1"/>
+          <p:nvPr/>
+        </p:nvSpPr>
+        <p:spPr>
+          <a:xfrm>
+            <a:off x="594360" y="1828800"/>
+            <a:ext cx="10972800" cy="4297680"/>
+          </a:xfrm>
+          <a:prstGeom prst="rect">
+            <a:avLst/>
+          </a:prstGeom>
+          <a:noFill/>
+        </p:spPr>
+        <p:txBody>
+          <a:bodyPr wrap="square">
+            <a:spAutoFit/>
+          </a:bodyPr>
+          <a:lstStyle/>
+          <a:p>
+            <a:pPr algn="l">
+              <a:spcAft>
+                <a:spcPts val="200"/>
+              </a:spcAft>
+            </a:pPr>
+            <a:r>
+              <a:rPr sz="1700" b="1">
+                <a:solidFill>
+                  <a:srgbClr val="004884"/>
+                </a:solidFill>
+                <a:latin typeface="Nunito Sans"/>
+              </a:rPr>
+              <a:t>Integra los portales federados</a:t>
+            </a:r>
+          </a:p>
+          <a:p/>
+          <a:p>
+            <a:pPr algn="l">
+              <a:spcAft>
+                <a:spcPts val="1000"/>
+              </a:spcAft>
+            </a:pPr>
+            <a:r>
+              <a:rPr sz="1500" b="0">
+                <a:solidFill>
+                  <a:srgbClr val="202124"/>
+                </a:solidFill>
+                <a:latin typeface="Nunito Sans"/>
+              </a:rPr>
+              <a:t>datos.gov.co + IGAC + Bogotá + Cali + Medellín + Valle en un catálogo comparable. Hoy, eso exige revisar sitio por sitio.</a:t>
+            </a:r>
+          </a:p>
+          <a:p>
+            <a:pPr algn="l">
+              <a:spcAft>
+                <a:spcPts val="200"/>
+              </a:spcAft>
+            </a:pPr>
+            <a:r>
+              <a:rPr sz="1700" b="1">
+                <a:solidFill>
+                  <a:srgbClr val="004884"/>
+                </a:solidFill>
+                <a:latin typeface="Nunito Sans"/>
+              </a:rPr>
+              <a:t>Se actualiza solo</a:t>
+            </a:r>
+          </a:p>
+          <a:p>
+            <a:pPr algn="l">
+              <a:spcAft>
+                <a:spcPts val="1000"/>
+              </a:spcAft>
+            </a:pPr>
+            <a:r>
+              <a:rPr sz="1500" b="0">
+                <a:solidFill>
+                  <a:srgbClr val="202124"/>
+                </a:solidFill>
+                <a:latin typeface="Nunito Sans"/>
+              </a:rPr>
+              <a:t>panorama diario automático — no es un informe: es infraestructura viva.</a:t>
+            </a:r>
+          </a:p>
+          <a:p>
+            <a:pPr algn="l">
+              <a:spcAft>
+                <a:spcPts val="200"/>
+              </a:spcAft>
+            </a:pPr>
+            <a:r>
+              <a:rPr sz="1700" b="1">
+                <a:solidFill>
+                  <a:srgbClr val="004884"/>
+                </a:solidFill>
+                <a:latin typeface="Nunito Sans"/>
+              </a:rPr>
+              <a:t>Verificable de punta a punta</a:t>
+            </a:r>
+          </a:p>
+          <a:p>
+            <a:pPr algn="l">
+              <a:spcAft>
+                <a:spcPts val="1000"/>
+              </a:spcAft>
+            </a:pPr>
+            <a:r>
+              <a:rPr sz="1500" b="0">
+                <a:solidFill>
+                  <a:srgbClr val="202124"/>
+                </a:solidFill>
+                <a:latin typeface="Nunito Sans"/>
+              </a:rPr>
+              <a:t>cada cifra con fuente citada; API pública para auditar los números del sitio; repo abierto y replicable.</a:t>
+            </a:r>
+          </a:p>
+          <a:p>
+            <a:pPr algn="l">
+              <a:spcAft>
+                <a:spcPts val="200"/>
+              </a:spcAft>
+            </a:pPr>
+            <a:r>
+              <a:rPr sz="1700" b="1">
+                <a:solidFill>
+                  <a:srgbClr val="004884"/>
+                </a:solidFill>
+                <a:latin typeface="Nunito Sans"/>
+              </a:rPr>
+              <a:t>Interoperable por estándar</a:t>
+            </a:r>
+          </a:p>
+          <a:p>
+            <a:pPr algn="l">
+              <a:spcAft>
+                <a:spcPts val="1000"/>
+              </a:spcAft>
+            </a:pPr>
+            <a:r>
+              <a:rPr sz="1500" b="0">
+                <a:solidFill>
+                  <a:srgbClr val="202124"/>
+                </a:solidFill>
+                <a:latin typeface="Nunito Sans"/>
+              </a:rPr>
+              <a:t>MCP server: cualquier agente de IA puede consultar el catálogo colombiano.</a:t>
+            </a:r>
+          </a:p>
+          <a:p>
+            <a:pPr algn="l">
+              <a:spcAft>
+                <a:spcPts val="200"/>
+              </a:spcAft>
+            </a:pPr>
+            <a:r>
+              <a:rPr sz="1700" b="1">
+                <a:solidFill>
+                  <a:srgbClr val="004884"/>
+                </a:solidFill>
+                <a:latin typeface="Nunito Sans"/>
+              </a:rPr>
+              <a:t>Accesible e institucional</a:t>
+            </a:r>
+          </a:p>
+          <a:p>
+            <a:pPr algn="l">
+              <a:spcAft>
+                <a:spcPts val="1000"/>
+              </a:spcAft>
+            </a:pPr>
+            <a:r>
+              <a:rPr sz="1500" b="0">
+                <a:solidFill>
+                  <a:srgbClr val="202124"/>
+                </a:solidFill>
+                <a:latin typeface="Nunito Sans"/>
+              </a:rPr>
+              <a:t>identidad gov.co, voz y narración (Ley 1618), sin registro y sin rastreadores.</a:t>
+            </a:r>
+          </a:p>
+        </p:txBody>
+      </p:sp>
+      <p:sp>
+        <p:nvSpPr>
+          <p:cNvPr id="4" name="TextBox 3"/>
+          <p:cNvSpPr txBox="1"/>
+          <p:nvPr/>
+        </p:nvSpPr>
+        <p:spPr>
+          <a:xfrm>
+            <a:off x="457200" y="6446520"/>
+            <a:ext cx="11247120" cy="320040"/>
+          </a:xfrm>
+          <a:prstGeom prst="rect">
+            <a:avLst/>
+          </a:prstGeom>
+          <a:noFill/>
+        </p:spPr>
+        <p:txBody>
+          <a:bodyPr wrap="square">
+            <a:spAutoFit/>
+          </a:bodyPr>
+          <a:lstStyle/>
+          <a:p>
+            <a:pPr algn="l">
+              <a:spcAft>
+                <a:spcPts val="600"/>
+              </a:spcAft>
+            </a:pPr>
+            <a:r>
+              <a:rPr sz="900" b="0">
+                <a:solidFill>
+                  <a:srgbClr val="5F6368"/>
+                </a:solidFill>
+                <a:latin typeface="IBM Plex Mono"/>
+              </a:rPr>
+              <a:t>DatosVivos · datosvivos.co  —  Datos al Ecosistema 2026 · Equipo 93 · Reto 7 (id 102) · Nivel Avanzado        11</a:t>
+            </a:r>
+          </a:p>
+        </p:txBody>
+      </p:sp>
+    </p:spTree>
+  </p:cSld>
+  <p:clrMapOvr>
+    <a:masterClrMapping/>
+  </p:clrMapOvr>
+</p:sld>
+</file>
+
+<file path=ppt/slides/slide12.xml><?xml version="1.0" encoding="utf-8"?>
+<p:sld xmlns:a="http://schemas.openxmlformats.org/drawingml/2006/main" xmlns:p="http://schemas.openxmlformats.org/presentationml/2006/main" xmlns:r="http://schemas.openxmlformats.org/officeDocument/2006/relationships">
+  <p:cSld>
+    <p:bg>
+      <p:bgPr>
+        <a:solidFill>
+          <a:srgbClr val="FFFFFF"/>
+        </a:solidFill>
+        <a:effectLst/>
+      </p:bgPr>
+    </p:bg>
+    <p:spTree>
+      <p:nvGrpSpPr>
+        <p:cNvPr id="1" name=""/>
+        <p:cNvGrpSpPr/>
+        <p:nvPr/>
+      </p:nvGrpSpPr>
+      <p:grpSpPr/>
+      <p:sp>
+        <p:nvSpPr>
+          <p:cNvPr id="2" name="TextBox 1"/>
+          <p:cNvSpPr txBox="1"/>
+          <p:nvPr/>
+        </p:nvSpPr>
+        <p:spPr>
+          <a:xfrm>
+            <a:off x="548640" y="411480"/>
+            <a:ext cx="11064240" cy="1554480"/>
+          </a:xfrm>
+          <a:prstGeom prst="rect">
+            <a:avLst/>
+          </a:prstGeom>
+          <a:noFill/>
+        </p:spPr>
+        <p:txBody>
+          <a:bodyPr wrap="square">
+            <a:spAutoFit/>
+          </a:bodyPr>
+          <a:lstStyle/>
+          <a:p>
+            <a:pPr algn="l">
+              <a:spcAft>
+                <a:spcPts val="600"/>
+              </a:spcAft>
+            </a:pPr>
+            <a:r>
+              <a:rPr sz="1200" b="1">
+                <a:solidFill>
+                  <a:srgbClr val="3366CC"/>
+                </a:solidFill>
+                <a:latin typeface="IBM Plex Mono"/>
+              </a:rPr>
               <a:t>IMPACTO Y ESCALABILIDAD</a:t>
             </a:r>
           </a:p>
@@ -3941,7 +4279,7 @@
                 </a:solidFill>
                 <a:latin typeface="IBM Plex Mono"/>
               </a:rPr>
-              <a:t>DatosVivos · datosvivos.co  —  Datos al Ecosistema 2026 · Equipo 93 · Reto 7 (id 102) · Nivel Avanzado        11</a:t>
+              <a:t>DatosVivos · datosvivos.co  —  Datos al Ecosistema 2026 · Equipo 93 · Reto 7 (id 102) · Nivel Avanzado        12</a:t>
             </a:r>
           </a:p>
         </p:txBody>
@@ -3954,7 +4292,7 @@
 </p:sld>
 </file>
 
-<file path=ppt/slides/slide12.xml><?xml version="1.0" encoding="utf-8"?>
+<file path=ppt/slides/slide13.xml><?xml version="1.0" encoding="utf-8"?>
 <p:sld xmlns:a="http://schemas.openxmlformats.org/drawingml/2006/main" xmlns:p="http://schemas.openxmlformats.org/presentationml/2006/main" xmlns:r="http://schemas.openxmlformats.org/officeDocument/2006/relationships">
   <p:cSld>
     <p:bg>
@@ -4107,279 +4445,6 @@
               <a:rPr sz="900" b="0">
                 <a:solidFill>
                   <a:srgbClr val="FFFFFF"/>
-                </a:solidFill>
-                <a:latin typeface="IBM Plex Mono"/>
-              </a:rPr>
-              <a:t>DatosVivos · datosvivos.co  —  Datos al Ecosistema 2026 · Equipo 93 · Reto 7 (id 102) · Nivel Avanzado        12</a:t>
-            </a:r>
-          </a:p>
-        </p:txBody>
-      </p:sp>
-    </p:spTree>
-  </p:cSld>
-  <p:clrMapOvr>
-    <a:masterClrMapping/>
-  </p:clrMapOvr>
-</p:sld>
-</file>
-
-<file path=ppt/slides/slide13.xml><?xml version="1.0" encoding="utf-8"?>
-<p:sld xmlns:a="http://schemas.openxmlformats.org/drawingml/2006/main" xmlns:p="http://schemas.openxmlformats.org/presentationml/2006/main" xmlns:r="http://schemas.openxmlformats.org/officeDocument/2006/relationships">
-  <p:cSld>
-    <p:bg>
-      <p:bgPr>
-        <a:solidFill>
-          <a:srgbClr val="FFFFFF"/>
-        </a:solidFill>
-        <a:effectLst/>
-      </p:bgPr>
-    </p:bg>
-    <p:spTree>
-      <p:nvGrpSpPr>
-        <p:cNvPr id="1" name=""/>
-        <p:cNvGrpSpPr/>
-        <p:nvPr/>
-      </p:nvGrpSpPr>
-      <p:grpSpPr/>
-      <p:sp>
-        <p:nvSpPr>
-          <p:cNvPr id="2" name="TextBox 1"/>
-          <p:cNvSpPr txBox="1"/>
-          <p:nvPr/>
-        </p:nvSpPr>
-        <p:spPr>
-          <a:xfrm>
-            <a:off x="548640" y="411480"/>
-            <a:ext cx="11064240" cy="1554480"/>
-          </a:xfrm>
-          <a:prstGeom prst="rect">
-            <a:avLst/>
-          </a:prstGeom>
-          <a:noFill/>
-        </p:spPr>
-        <p:txBody>
-          <a:bodyPr wrap="square">
-            <a:spAutoFit/>
-          </a:bodyPr>
-          <a:lstStyle/>
-          <a:p>
-            <a:pPr algn="l">
-              <a:spcAft>
-                <a:spcPts val="600"/>
-              </a:spcAft>
-            </a:pPr>
-            <a:r>
-              <a:rPr sz="1200" b="1">
-                <a:solidFill>
-                  <a:srgbClr val="3366CC"/>
-                </a:solidFill>
-                <a:latin typeface="IBM Plex Mono"/>
-              </a:rPr>
-              <a:t>RESPALDO TÉCNICO · B1</a:t>
-            </a:r>
-          </a:p>
-          <a:p/>
-          <a:p>
-            <a:pPr algn="l">
-              <a:spcAft>
-                <a:spcPts val="0"/>
-              </a:spcAft>
-            </a:pPr>
-            <a:r>
-              <a:rPr sz="2800" b="1">
-                <a:solidFill>
-                  <a:srgbClr val="202124"/>
-                </a:solidFill>
-                <a:latin typeface="Nunito Sans"/>
-              </a:rPr>
-              <a:t>Arquitectura de 3 capas (fiel al plan inicial de inscripción)</a:t>
-            </a:r>
-          </a:p>
-        </p:txBody>
-      </p:sp>
-      <p:sp>
-        <p:nvSpPr>
-          <p:cNvPr id="3" name="TextBox 2"/>
-          <p:cNvSpPr txBox="1"/>
-          <p:nvPr/>
-        </p:nvSpPr>
-        <p:spPr>
-          <a:xfrm>
-            <a:off x="594360" y="1828800"/>
-            <a:ext cx="10972800" cy="4297680"/>
-          </a:xfrm>
-          <a:prstGeom prst="rect">
-            <a:avLst/>
-          </a:prstGeom>
-          <a:noFill/>
-        </p:spPr>
-        <p:txBody>
-          <a:bodyPr wrap="square">
-            <a:spAutoFit/>
-          </a:bodyPr>
-          <a:lstStyle/>
-          <a:p>
-            <a:pPr algn="l">
-              <a:spcAft>
-                <a:spcPts val="200"/>
-              </a:spcAft>
-            </a:pPr>
-            <a:r>
-              <a:rPr sz="1700" b="1">
-                <a:solidFill>
-                  <a:srgbClr val="004884"/>
-                </a:solidFill>
-                <a:latin typeface="Nunito Sans"/>
-              </a:rPr>
-              <a:t>Capa MCP</a:t>
-            </a:r>
-          </a:p>
-          <a:p/>
-          <a:p>
-            <a:pPr algn="l">
-              <a:spcAft>
-                <a:spcPts val="1000"/>
-              </a:spcAft>
-            </a:pPr>
-            <a:r>
-              <a:rPr sz="1500" b="0">
-                <a:solidFill>
-                  <a:srgbClr val="202124"/>
-                </a:solidFill>
-                <a:latin typeface="Nunito Sans"/>
-              </a:rPr>
-              <a:t>servidor MCP sobre las APIs Socrata de datos.gov.co (Discovery, SODA, Metadata) — search_datasets · get_metadata · query_data · cross_datasets.</a:t>
-            </a:r>
-          </a:p>
-          <a:p>
-            <a:pPr algn="l">
-              <a:spcAft>
-                <a:spcPts val="200"/>
-              </a:spcAft>
-            </a:pPr>
-            <a:r>
-              <a:rPr sz="1700" b="1">
-                <a:solidFill>
-                  <a:srgbClr val="004884"/>
-                </a:solidFill>
-                <a:latin typeface="Nunito Sans"/>
-              </a:rPr>
-              <a:t>Capa motor</a:t>
-            </a:r>
-          </a:p>
-          <a:p>
-            <a:pPr algn="l">
-              <a:spcAft>
-                <a:spcPts val="1000"/>
-              </a:spcAft>
-            </a:pPr>
-            <a:r>
-              <a:rPr sz="1500" b="0">
-                <a:solidFill>
-                  <a:srgbClr val="202124"/>
-                </a:solidFill>
-                <a:latin typeface="Nunito Sans"/>
-              </a:rPr>
-              <a:t>FastAPI + PostgreSQL (catálogo curado, vistas _decisor) + ChromaDB (retrieval) + DuckDB (federados con CSV externo) + backend LLM intercambiable (LLM_BACKEND = ollama | anthropic).</a:t>
-            </a:r>
-          </a:p>
-          <a:p>
-            <a:pPr algn="l">
-              <a:spcAft>
-                <a:spcPts val="200"/>
-              </a:spcAft>
-            </a:pPr>
-            <a:r>
-              <a:rPr sz="1700" b="1">
-                <a:solidFill>
-                  <a:srgbClr val="004884"/>
-                </a:solidFill>
-                <a:latin typeface="Nunito Sans"/>
-              </a:rPr>
-              <a:t>Capa presentación</a:t>
-            </a:r>
-          </a:p>
-          <a:p>
-            <a:pPr algn="l">
-              <a:spcAft>
-                <a:spcPts val="1000"/>
-              </a:spcAft>
-            </a:pPr>
-            <a:r>
-              <a:rPr sz="1500" b="0">
-                <a:solidFill>
-                  <a:srgbClr val="202124"/>
-                </a:solidFill>
-                <a:latin typeface="Nunito Sans"/>
-              </a:rPr>
-              <a:t>Next.js (panorama + buscador SSE) y Power BI (tablero publish-to-web sobre CSVs públicos de la API). Evolución documentada: Streamlit → Next.js (ADR-011).</a:t>
-            </a:r>
-          </a:p>
-          <a:p>
-            <a:pPr algn="l">
-              <a:spcAft>
-                <a:spcPts val="200"/>
-              </a:spcAft>
-            </a:pPr>
-            <a:r>
-              <a:rPr sz="1700" b="1">
-                <a:solidFill>
-                  <a:srgbClr val="004884"/>
-                </a:solidFill>
-                <a:latin typeface="Nunito Sans"/>
-              </a:rPr>
-              <a:t>Despliegue</a:t>
-            </a:r>
-          </a:p>
-          <a:p>
-            <a:pPr algn="l">
-              <a:spcAft>
-                <a:spcPts val="1000"/>
-              </a:spcAft>
-            </a:pPr>
-            <a:r>
-              <a:rPr sz="1500" b="0">
-                <a:solidFill>
-                  <a:srgbClr val="202124"/>
-                </a:solidFill>
-                <a:latin typeface="Nunito Sans"/>
-              </a:rPr>
-              <a:t>Docker Compose con imagen reproducible, túnel seguro de salida, cron de actualización diaria.</a:t>
-            </a:r>
-          </a:p>
-        </p:txBody>
-      </p:sp>
-      <p:sp>
-        <p:nvSpPr>
-          <p:cNvPr id="4" name="TextBox 3"/>
-          <p:cNvSpPr txBox="1"/>
-          <p:nvPr/>
-        </p:nvSpPr>
-        <p:spPr>
-          <a:xfrm>
-            <a:off x="457200" y="6446520"/>
-            <a:ext cx="11247120" cy="320040"/>
-          </a:xfrm>
-          <a:prstGeom prst="rect">
-            <a:avLst/>
-          </a:prstGeom>
-          <a:noFill/>
-        </p:spPr>
-        <p:txBody>
-          <a:bodyPr wrap="square">
-            <a:spAutoFit/>
-          </a:bodyPr>
-          <a:lstStyle/>
-          <a:p>
-            <a:pPr algn="l">
-              <a:spcAft>
-                <a:spcPts val="600"/>
-              </a:spcAft>
-            </a:pPr>
-            <a:r>
-              <a:rPr sz="900" b="0">
-                <a:solidFill>
-                  <a:srgbClr val="5F6368"/>
                 </a:solidFill>
                 <a:latin typeface="IBM Plex Mono"/>
               </a:rPr>
@@ -4448,7 +4513,7 @@
                 </a:solidFill>
                 <a:latin typeface="IBM Plex Mono"/>
               </a:rPr>
-              <a:t>RESPALDO TÉCNICO · B2</a:t>
+              <a:t>RESPALDO TÉCNICO · B1</a:t>
             </a:r>
           </a:p>
           <a:p/>
@@ -4465,7 +4530,7 @@
                 </a:solidFill>
                 <a:latin typeface="Nunito Sans"/>
               </a:rPr>
-              <a:t>Motor NL2SQL: generar no basta — hay que verificar</a:t>
+              <a:t>Arquitectura de 3 capas (fiel al plan inicial de inscripción)</a:t>
             </a:r>
           </a:p>
         </p:txBody>
@@ -4504,7 +4569,7 @@
                 </a:solidFill>
                 <a:latin typeface="Nunito Sans"/>
               </a:rPr>
-              <a:t>Capa 1 · Esquema real</a:t>
+              <a:t>Capa MCP</a:t>
             </a:r>
           </a:p>
           <a:p/>
@@ -4521,7 +4586,7 @@
                 </a:solidFill>
                 <a:latin typeface="Nunito Sans"/>
               </a:rPr>
-              <a:t>el LLM genera viendo SOLO columnas curadas reales del dataset (tipos semánticos: dimensión/métrica/fecha/geo). No puede alucinar columnas.</a:t>
+              <a:t>servidor MCP sobre las APIs Socrata de datos.gov.co (Discovery, SODA, Metadata) — search_datasets · get_metadata · query_data · cross_datasets.</a:t>
             </a:r>
           </a:p>
           <a:p>
@@ -4537,7 +4602,7 @@
                 </a:solidFill>
                 <a:latin typeface="Nunito Sans"/>
               </a:rPr>
-              <a:t>Capa 2 · Verificación estática</a:t>
+              <a:t>Capa motor</a:t>
             </a:r>
           </a:p>
           <a:p>
@@ -4553,7 +4618,7 @@
                 </a:solidFill>
                 <a:latin typeface="Nunito Sans"/>
               </a:rPr>
-              <a:t>código (no otro LLM) valida columnas, funciones permitidas, filtro territorial y solo-lectura ANTES de ejecutar.</a:t>
+              <a:t>FastAPI + PostgreSQL (catálogo curado, vistas _decisor) + ChromaDB (retrieval) + DuckDB (federados con CSV externo) + backend LLM intercambiable (LLM_BACKEND = ollama | anthropic).</a:t>
             </a:r>
           </a:p>
           <a:p>
@@ -4569,7 +4634,7 @@
                 </a:solidFill>
                 <a:latin typeface="Nunito Sans"/>
               </a:rPr>
-              <a:t>Capa 3 · Validación del resultado</a:t>
+              <a:t>Capa presentación</a:t>
             </a:r>
           </a:p>
           <a:p>
@@ -4585,7 +4650,7 @@
                 </a:solidFill>
                 <a:latin typeface="Nunito Sans"/>
               </a:rPr>
-              <a:t>toda cifra de la narrativa se contrasta contra la lista calculada de las filas; un número ajeno censura la oración.</a:t>
+              <a:t>Next.js (panorama + buscador SSE) y Power BI (tablero publish-to-web sobre CSVs públicos de la API). Evolución documentada: Streamlit → Next.js (ADR-011).</a:t>
             </a:r>
           </a:p>
           <a:p>
@@ -4601,7 +4666,7 @@
                 </a:solidFill>
                 <a:latin typeface="Nunito Sans"/>
               </a:rPr>
-              <a:t>Reparación y refusal</a:t>
+              <a:t>Despliegue</a:t>
             </a:r>
           </a:p>
           <a:p>
@@ -4617,39 +4682,7 @@
                 </a:solidFill>
                 <a:latin typeface="Nunito Sans"/>
               </a:rPr>
-              <a:t>si la verificación falla: ciclo de reparación acotado; si persiste, la respuesta se niega. Preferimos no responder a responder mal.</a:t>
-            </a:r>
-          </a:p>
-          <a:p>
-            <a:pPr algn="l">
-              <a:spcAft>
-                <a:spcPts val="200"/>
-              </a:spcAft>
-            </a:pPr>
-            <a:r>
-              <a:rPr sz="1700" b="1">
-                <a:solidFill>
-                  <a:srgbClr val="004884"/>
-                </a:solidFill>
-                <a:latin typeface="Nunito Sans"/>
-              </a:rPr>
-              <a:t>Respaldo determinista</a:t>
-            </a:r>
-          </a:p>
-          <a:p>
-            <a:pPr algn="l">
-              <a:spcAft>
-                <a:spcPts val="1000"/>
-              </a:spcAft>
-            </a:pPr>
-            <a:r>
-              <a:rPr sz="1500" b="0">
-                <a:solidFill>
-                  <a:srgbClr val="202124"/>
-                </a:solidFill>
-                <a:latin typeface="Nunito Sans"/>
-              </a:rPr>
-              <a:t>plantillas SoQL por tipo de pregunta (conteo/comparación/ranking/tendencia/mapa) como camino estructurado con chips.</a:t>
+              <a:t>Docker Compose con imagen reproducible, túnel seguro de salida, cron de actualización diaria.</a:t>
             </a:r>
           </a:p>
         </p:txBody>
@@ -4753,7 +4786,7 @@
                 </a:solidFill>
                 <a:latin typeface="IBM Plex Mono"/>
               </a:rPr>
-              <a:t>RESPALDO TÉCNICO · B3</a:t>
+              <a:t>RESPALDO TÉCNICO · B2</a:t>
             </a:r>
           </a:p>
           <a:p/>
@@ -4770,7 +4803,7 @@
                 </a:solidFill>
                 <a:latin typeface="Nunito Sans"/>
               </a:rPr>
-              <a:t>Modelo de datos: una vista curada como fuente única</a:t>
+              <a:t>Motor NL2SQL: generar no basta — hay que verificar</a:t>
             </a:r>
           </a:p>
         </p:txBody>
@@ -4809,7 +4842,7 @@
                 </a:solidFill>
                 <a:latin typeface="Nunito Sans"/>
               </a:rPr>
-              <a:t>datasets (42 columnas)</a:t>
+              <a:t>Capa 1 · Esquema real</a:t>
             </a:r>
           </a:p>
           <a:p/>
@@ -4826,7 +4859,7 @@
                 </a:solidFill>
                 <a:latin typeface="Nunito Sans"/>
               </a:rPr>
-              <a:t>una fila por dataset del catálogo integrado; upsert idempotente por dataset_id (auditado: 0 duplicados de clave).</a:t>
+              <a:t>el LLM genera viendo SOLO columnas curadas reales del dataset (tipos semánticos: dimensión/métrica/fecha/geo). No puede alucinar columnas.</a:t>
             </a:r>
           </a:p>
           <a:p>
@@ -4842,7 +4875,7 @@
                 </a:solidFill>
                 <a:latin typeface="Nunito Sans"/>
               </a:rPr>
-              <a:t>v_dataset_status_decisor (29 variables)</a:t>
+              <a:t>Capa 2 · Verificación estática</a:t>
             </a:r>
           </a:p>
           <a:p>
@@ -4858,7 +4891,7 @@
                 </a:solidFill>
                 <a:latin typeface="Nunito Sans"/>
               </a:rPr>
-              <a:t>la vista del decisor: identidad, semáforo de frescura, uso, acceso (directo/archivo/solo metadatos), territorio DIVIPOLA, calidad.</a:t>
+              <a:t>código (no otro LLM) valida columnas, funciones permitidas, filtro territorial y solo-lectura ANTES de ejecutar.</a:t>
             </a:r>
           </a:p>
           <a:p>
@@ -4874,7 +4907,7 @@
                 </a:solidFill>
                 <a:latin typeface="Nunito Sans"/>
               </a:rPr>
-              <a:t>v_entity_summary_decisor</a:t>
+              <a:t>Capa 3 · Validación del resultado</a:t>
             </a:r>
           </a:p>
           <a:p>
@@ -4890,7 +4923,7 @@
                 </a:solidFill>
                 <a:latin typeface="Nunito Sans"/>
               </a:rPr>
-              <a:t>agregado por entidad con pct_verdes: el indicador de cumplimiento listo para gestión.</a:t>
+              <a:t>toda cifra de la narrativa se contrasta contra la lista calculada de las filas; un número ajeno censura la oración.</a:t>
             </a:r>
           </a:p>
           <a:p>
@@ -4906,7 +4939,7 @@
                 </a:solidFill>
                 <a:latin typeface="Nunito Sans"/>
               </a:rPr>
-              <a:t>Una sola fuente de verdad</a:t>
+              <a:t>Reparación y refusal</a:t>
             </a:r>
           </a:p>
           <a:p>
@@ -4922,7 +4955,39 @@
                 </a:solidFill>
                 <a:latin typeface="Nunito Sans"/>
               </a:rPr>
-              <a:t>panorama web, tablero Power BI y CSVs públicos leen LA MISMA vista — imposible que se desalineen.</a:t>
+              <a:t>si la verificación falla: ciclo de reparación acotado; si persiste, la respuesta se niega. Preferimos no responder a responder mal.</a:t>
+            </a:r>
+          </a:p>
+          <a:p>
+            <a:pPr algn="l">
+              <a:spcAft>
+                <a:spcPts val="200"/>
+              </a:spcAft>
+            </a:pPr>
+            <a:r>
+              <a:rPr sz="1700" b="1">
+                <a:solidFill>
+                  <a:srgbClr val="004884"/>
+                </a:solidFill>
+                <a:latin typeface="Nunito Sans"/>
+              </a:rPr>
+              <a:t>Respaldo determinista</a:t>
+            </a:r>
+          </a:p>
+          <a:p>
+            <a:pPr algn="l">
+              <a:spcAft>
+                <a:spcPts val="1000"/>
+              </a:spcAft>
+            </a:pPr>
+            <a:r>
+              <a:rPr sz="1500" b="0">
+                <a:solidFill>
+                  <a:srgbClr val="202124"/>
+                </a:solidFill>
+                <a:latin typeface="Nunito Sans"/>
+              </a:rPr>
+              <a:t>plantillas SoQL por tipo de pregunta (conteo/comparación/ranking/tendencia/mapa) como camino estructurado con chips.</a:t>
             </a:r>
           </a:p>
         </p:txBody>
@@ -5026,7 +5091,7 @@
                 </a:solidFill>
                 <a:latin typeface="IBM Plex Mono"/>
               </a:rPr>
-              <a:t>RESPALDO TÉCNICO · B4</a:t>
+              <a:t>RESPALDO TÉCNICO · B3</a:t>
             </a:r>
           </a:p>
           <a:p/>
@@ -5043,7 +5108,7 @@
                 </a:solidFill>
                 <a:latin typeface="Nunito Sans"/>
               </a:rPr>
-              <a:t>Calidad de datos: medida, no declarada</a:t>
+              <a:t>Modelo de datos: una vista curada como fuente única</a:t>
             </a:r>
           </a:p>
         </p:txBody>
@@ -5082,7 +5147,7 @@
                 </a:solidFill>
                 <a:latin typeface="Nunito Sans"/>
               </a:rPr>
-              <a:t>Auditoría columna a columna</a:t>
+              <a:t>datasets (42 columnas)</a:t>
             </a:r>
           </a:p>
           <a:p/>
@@ -5099,7 +5164,7 @@
                 </a:solidFill>
                 <a:latin typeface="Nunito Sans"/>
               </a:rPr>
-              <a:t>17/18 columnas al 100 % de fidelidad contra la fuente Socrata (reportes versionados en eval/reports/).</a:t>
+              <a:t>una fila por dataset del catálogo integrado; upsert idempotente por dataset_id (auditado: 0 duplicados de clave).</a:t>
             </a:r>
           </a:p>
           <a:p>
@@ -5115,7 +5180,7 @@
                 </a:solidFill>
                 <a:latin typeface="Nunito Sans"/>
               </a:rPr>
-              <a:t>Clasificación continua</a:t>
+              <a:t>v_dataset_status_decisor (29 variables)</a:t>
             </a:r>
           </a:p>
           <a:p>
@@ -5131,7 +5196,7 @@
                 </a:solidFill>
                 <a:latin typeface="Nunito Sans"/>
               </a:rPr>
-              <a:t>los 2.996 reportes administrativos (Ley 1712) se separan de los datos temáticos automáticamente, en cada corrida del ETL.</a:t>
+              <a:t>la vista del decisor: identidad, semáforo de frescura, uso, acceso (directo/archivo/solo metadatos), territorio DIVIPOLA, calidad.</a:t>
             </a:r>
           </a:p>
           <a:p>
@@ -5147,7 +5212,7 @@
                 </a:solidFill>
                 <a:latin typeface="Nunito Sans"/>
               </a:rPr>
-              <a:t>Inferencia territorial</a:t>
+              <a:t>v_entity_summary_decisor</a:t>
             </a:r>
           </a:p>
           <a:p>
@@ -5163,7 +5228,7 @@
                 </a:solidFill>
                 <a:latin typeface="Nunito Sans"/>
               </a:rPr>
-              <a:t>códigos DIVIPOLA asignados por IA con confianza registrada (~89 % de cobertura del catálogo).</a:t>
+              <a:t>agregado por entidad con pct_verdes: el indicador de cumplimiento listo para gestión.</a:t>
             </a:r>
           </a:p>
           <a:p>
@@ -5179,7 +5244,7 @@
                 </a:solidFill>
                 <a:latin typeface="Nunito Sans"/>
               </a:rPr>
-              <a:t>Guardas anti-basura</a:t>
+              <a:t>Una sola fuente de verdad</a:t>
             </a:r>
           </a:p>
           <a:p>
@@ -5195,39 +5260,7 @@
                 </a:solidFill>
                 <a:latin typeface="Nunito Sans"/>
               </a:rPr>
-              <a:t>metadata placeholder sin diligenciar ({{name}}) se descarta en la ingesta; el catálogo no acumula ruido.</a:t>
-            </a:r>
-          </a:p>
-          <a:p>
-            <a:pPr algn="l">
-              <a:spcAft>
-                <a:spcPts val="200"/>
-              </a:spcAft>
-            </a:pPr>
-            <a:r>
-              <a:rPr sz="1700" b="1">
-                <a:solidFill>
-                  <a:srgbClr val="004884"/>
-                </a:solidFill>
-                <a:latin typeface="Nunito Sans"/>
-              </a:rPr>
-              <a:t>Atribución por origen</a:t>
-            </a:r>
-          </a:p>
-          <a:p>
-            <a:pPr algn="l">
-              <a:spcAft>
-                <a:spcPts val="1000"/>
-              </a:spcAft>
-            </a:pPr>
-            <a:r>
-              <a:rPr sz="1500" b="0">
-                <a:solidFill>
-                  <a:srgbClr val="202124"/>
-                </a:solidFill>
-                <a:latin typeface="Nunito Sans"/>
-              </a:rPr>
-              <a:t>cada dataset se atribuye al portal donde su entidad publica originalmente — incluso las copias federadas del solapamiento cross-portal.</a:t>
+              <a:t>panorama web, tablero Power BI y CSVs públicos leen LA MISMA vista — imposible que se desalineen.</a:t>
             </a:r>
           </a:p>
         </p:txBody>
@@ -5331,7 +5364,7 @@
                 </a:solidFill>
                 <a:latin typeface="IBM Plex Mono"/>
               </a:rPr>
-              <a:t>RESPALDO TÉCNICO · B5</a:t>
+              <a:t>RESPALDO TÉCNICO · B4</a:t>
             </a:r>
           </a:p>
           <a:p/>
@@ -5348,7 +5381,7 @@
                 </a:solidFill>
                 <a:latin typeface="Nunito Sans"/>
               </a:rPr>
-              <a:t>Evaluación y trazabilidad</a:t>
+              <a:t>Calidad de datos: medida, no declarada</a:t>
             </a:r>
           </a:p>
         </p:txBody>
@@ -5387,7 +5420,7 @@
                 </a:solidFill>
                 <a:latin typeface="Nunito Sans"/>
               </a:rPr>
-              <a:t>Golden sets versionados</a:t>
+              <a:t>Auditoría columna a columna</a:t>
             </a:r>
           </a:p>
           <a:p/>
@@ -5404,7 +5437,7 @@
                 </a:solidFill>
                 <a:latin typeface="Nunito Sans"/>
               </a:rPr>
-              <a:t>eval/golden_queries.yaml y golden_chips.yaml — corridas reproducibles con reportes históricos (16 en eval/reports/).</a:t>
+              <a:t>17/18 columnas al 100 % de fidelidad contra la fuente Socrata (reportes versionados en eval/reports/).</a:t>
             </a:r>
           </a:p>
           <a:p>
@@ -5420,7 +5453,7 @@
                 </a:solidFill>
                 <a:latin typeface="Nunito Sans"/>
               </a:rPr>
-              <a:t>35 archivos de pruebas</a:t>
+              <a:t>Clasificación continua</a:t>
             </a:r>
           </a:p>
           <a:p>
@@ -5436,7 +5469,7 @@
                 </a:solidFill>
                 <a:latin typeface="Nunito Sans"/>
               </a:rPr>
-              <a:t>verificador SoQL, validador anti-alucinación, reparación, geo/DIVIPOLA, cosecha, MCP (stdio/SSE), rutas de API.</a:t>
+              <a:t>los 2.996 reportes administrativos (Ley 1712) se separan de los datos temáticos automáticamente, en cada corrida del ETL.</a:t>
             </a:r>
           </a:p>
           <a:p>
@@ -5452,7 +5485,7 @@
                 </a:solidFill>
                 <a:latin typeface="Nunito Sans"/>
               </a:rPr>
-              <a:t>Evaluación embebida</a:t>
+              <a:t>Inferencia territorial</a:t>
             </a:r>
           </a:p>
           <a:p>
@@ -5468,7 +5501,7 @@
                 </a:solidFill>
                 <a:latin typeface="Nunito Sans"/>
               </a:rPr>
-              <a:t>el verificador corre en producción en cada consulta — la garantía no es una métrica de laboratorio.</a:t>
+              <a:t>códigos DIVIPOLA asignados por IA con confianza registrada (~89 % de cobertura del catálogo).</a:t>
             </a:r>
           </a:p>
           <a:p>
@@ -5484,7 +5517,7 @@
                 </a:solidFill>
                 <a:latin typeface="Nunito Sans"/>
               </a:rPr>
-              <a:t>Decisiones documentadas</a:t>
+              <a:t>Guardas anti-basura</a:t>
             </a:r>
           </a:p>
           <a:p>
@@ -5500,7 +5533,7 @@
                 </a:solidFill>
                 <a:latin typeface="Nunito Sans"/>
               </a:rPr>
-              <a:t>ADRs públicos (017-023): del principio 'la IA razona, el motor verifica' al pivote panorama-decisor.</a:t>
+              <a:t>metadata placeholder sin diligenciar ({{name}}) se descarta en la ingesta; el catálogo no acumula ruido.</a:t>
             </a:r>
           </a:p>
           <a:p>
@@ -5516,7 +5549,7 @@
                 </a:solidFill>
                 <a:latin typeface="Nunito Sans"/>
               </a:rPr>
-              <a:t>Telemetría anónima</a:t>
+              <a:t>Atribución por origen</a:t>
             </a:r>
           </a:p>
           <a:p>
@@ -5532,7 +5565,7 @@
                 </a:solidFill>
                 <a:latin typeface="Nunito Sans"/>
               </a:rPr>
-              <a:t>lo más consultado alimenta la mejora sin datos personales.</a:t>
+              <a:t>cada dataset se atribuye al portal donde su entidad publica originalmente — incluso las copias federadas del solapamiento cross-portal.</a:t>
             </a:r>
           </a:p>
         </p:txBody>
@@ -5636,7 +5669,7 @@
                 </a:solidFill>
                 <a:latin typeface="IBM Plex Mono"/>
               </a:rPr>
-              <a:t>RESPALDO TÉCNICO · B6</a:t>
+              <a:t>RESPALDO TÉCNICO · B5</a:t>
             </a:r>
           </a:p>
           <a:p/>
@@ -5653,7 +5686,7 @@
                 </a:solidFill>
                 <a:latin typeface="Nunito Sans"/>
               </a:rPr>
-              <a:t>Soberanía, seguridad y cumplimiento</a:t>
+              <a:t>Evaluación y trazabilidad</a:t>
             </a:r>
           </a:p>
         </p:txBody>
@@ -5692,7 +5725,7 @@
                 </a:solidFill>
                 <a:latin typeface="Nunito Sans"/>
               </a:rPr>
-              <a:t>Infraestructura del Estado</a:t>
+              <a:t>Golden sets versionados</a:t>
             </a:r>
           </a:p>
           <a:p/>
@@ -5709,7 +5742,7 @@
                 </a:solidFill>
                 <a:latin typeface="Nunito Sans"/>
               </a:rPr>
-              <a:t>el servicio corre en infraestructura pública; los datos consultados son públicos por definición.</a:t>
+              <a:t>eval/golden_queries.yaml y golden_chips.yaml — corridas reproducibles con reportes históricos (16 en eval/reports/).</a:t>
             </a:r>
           </a:p>
           <a:p>
@@ -5725,7 +5758,7 @@
                 </a:solidFill>
                 <a:latin typeface="Nunito Sans"/>
               </a:rPr>
-              <a:t>Sin datos personales</a:t>
+              <a:t>35 archivos de pruebas</a:t>
             </a:r>
           </a:p>
           <a:p>
@@ -5741,7 +5774,7 @@
                 </a:solidFill>
                 <a:latin typeface="Nunito Sans"/>
               </a:rPr>
-              <a:t>cero registro, cero rastreadores; telemetría agregada y anónima.</a:t>
+              <a:t>verificador SoQL, validador anti-alucinación, reparación, geo/DIVIPOLA, cosecha, MCP (stdio/SSE), rutas de API.</a:t>
             </a:r>
           </a:p>
           <a:p>
@@ -5757,7 +5790,7 @@
                 </a:solidFill>
                 <a:latin typeface="Nunito Sans"/>
               </a:rPr>
-              <a:t>Solo lectura</a:t>
+              <a:t>Evaluación embebida</a:t>
             </a:r>
           </a:p>
           <a:p>
@@ -5773,7 +5806,7 @@
                 </a:solidFill>
                 <a:latin typeface="Nunito Sans"/>
               </a:rPr>
-              <a:t>el motor no puede escribir en ninguna fuente; verificación de solo-lectura en la capa 2.</a:t>
+              <a:t>el verificador corre en producción en cada consulta — la garantía no es una métrica de laboratorio.</a:t>
             </a:r>
           </a:p>
           <a:p>
@@ -5789,7 +5822,7 @@
                 </a:solidFill>
                 <a:latin typeface="Nunito Sans"/>
               </a:rPr>
-              <a:t>Repo abierto y auditable</a:t>
+              <a:t>Decisiones documentadas</a:t>
             </a:r>
           </a:p>
           <a:p>
@@ -5805,7 +5838,7 @@
                 </a:solidFill>
                 <a:latin typeface="Nunito Sans"/>
               </a:rPr>
-              <a:t>código, documentación, pruebas y evaluación públicos — replicable con Docker en cualquier máquina (guía de validación para el jurado).</a:t>
+              <a:t>ADRs públicos (017-023): del principio 'la IA razona, el motor verifica' al pivote panorama-decisor.</a:t>
             </a:r>
           </a:p>
           <a:p>
@@ -5821,7 +5854,7 @@
                 </a:solidFill>
                 <a:latin typeface="Nunito Sans"/>
               </a:rPr>
-              <a:t>Accesibilidad</a:t>
+              <a:t>Telemetría anónima</a:t>
             </a:r>
           </a:p>
           <a:p>
@@ -5837,7 +5870,7 @@
                 </a:solidFill>
                 <a:latin typeface="Nunito Sans"/>
               </a:rPr>
-              <a:t>Ley 1618 de 2013 y WCAG 2.1 AA: voz, narración, contraste, escala tipográfica.</a:t>
+              <a:t>lo más consultado alimenta la mejora sin datos personales.</a:t>
             </a:r>
           </a:p>
         </p:txBody>
@@ -5877,6 +5910,311 @@
                 <a:latin typeface="IBM Plex Mono"/>
               </a:rPr>
               <a:t>DatosVivos · datosvivos.co  —  Datos al Ecosistema 2026 · Equipo 93 · Reto 7 (id 102) · Nivel Avanzado        18</a:t>
+            </a:r>
+          </a:p>
+        </p:txBody>
+      </p:sp>
+    </p:spTree>
+  </p:cSld>
+  <p:clrMapOvr>
+    <a:masterClrMapping/>
+  </p:clrMapOvr>
+</p:sld>
+</file>
+
+<file path=ppt/slides/slide19.xml><?xml version="1.0" encoding="utf-8"?>
+<p:sld xmlns:a="http://schemas.openxmlformats.org/drawingml/2006/main" xmlns:p="http://schemas.openxmlformats.org/presentationml/2006/main" xmlns:r="http://schemas.openxmlformats.org/officeDocument/2006/relationships">
+  <p:cSld>
+    <p:bg>
+      <p:bgPr>
+        <a:solidFill>
+          <a:srgbClr val="FFFFFF"/>
+        </a:solidFill>
+        <a:effectLst/>
+      </p:bgPr>
+    </p:bg>
+    <p:spTree>
+      <p:nvGrpSpPr>
+        <p:cNvPr id="1" name=""/>
+        <p:cNvGrpSpPr/>
+        <p:nvPr/>
+      </p:nvGrpSpPr>
+      <p:grpSpPr/>
+      <p:sp>
+        <p:nvSpPr>
+          <p:cNvPr id="2" name="TextBox 1"/>
+          <p:cNvSpPr txBox="1"/>
+          <p:nvPr/>
+        </p:nvSpPr>
+        <p:spPr>
+          <a:xfrm>
+            <a:off x="548640" y="411480"/>
+            <a:ext cx="11064240" cy="1554480"/>
+          </a:xfrm>
+          <a:prstGeom prst="rect">
+            <a:avLst/>
+          </a:prstGeom>
+          <a:noFill/>
+        </p:spPr>
+        <p:txBody>
+          <a:bodyPr wrap="square">
+            <a:spAutoFit/>
+          </a:bodyPr>
+          <a:lstStyle/>
+          <a:p>
+            <a:pPr algn="l">
+              <a:spcAft>
+                <a:spcPts val="600"/>
+              </a:spcAft>
+            </a:pPr>
+            <a:r>
+              <a:rPr sz="1200" b="1">
+                <a:solidFill>
+                  <a:srgbClr val="3366CC"/>
+                </a:solidFill>
+                <a:latin typeface="IBM Plex Mono"/>
+              </a:rPr>
+              <a:t>RESPALDO TÉCNICO · B6</a:t>
+            </a:r>
+          </a:p>
+          <a:p/>
+          <a:p>
+            <a:pPr algn="l">
+              <a:spcAft>
+                <a:spcPts val="0"/>
+              </a:spcAft>
+            </a:pPr>
+            <a:r>
+              <a:rPr sz="2800" b="1">
+                <a:solidFill>
+                  <a:srgbClr val="202124"/>
+                </a:solidFill>
+                <a:latin typeface="Nunito Sans"/>
+              </a:rPr>
+              <a:t>Soberanía, seguridad y cumplimiento</a:t>
+            </a:r>
+          </a:p>
+        </p:txBody>
+      </p:sp>
+      <p:sp>
+        <p:nvSpPr>
+          <p:cNvPr id="3" name="TextBox 2"/>
+          <p:cNvSpPr txBox="1"/>
+          <p:nvPr/>
+        </p:nvSpPr>
+        <p:spPr>
+          <a:xfrm>
+            <a:off x="594360" y="1828800"/>
+            <a:ext cx="10972800" cy="4297680"/>
+          </a:xfrm>
+          <a:prstGeom prst="rect">
+            <a:avLst/>
+          </a:prstGeom>
+          <a:noFill/>
+        </p:spPr>
+        <p:txBody>
+          <a:bodyPr wrap="square">
+            <a:spAutoFit/>
+          </a:bodyPr>
+          <a:lstStyle/>
+          <a:p>
+            <a:pPr algn="l">
+              <a:spcAft>
+                <a:spcPts val="200"/>
+              </a:spcAft>
+            </a:pPr>
+            <a:r>
+              <a:rPr sz="1700" b="1">
+                <a:solidFill>
+                  <a:srgbClr val="004884"/>
+                </a:solidFill>
+                <a:latin typeface="Nunito Sans"/>
+              </a:rPr>
+              <a:t>Infraestructura del Estado</a:t>
+            </a:r>
+          </a:p>
+          <a:p/>
+          <a:p>
+            <a:pPr algn="l">
+              <a:spcAft>
+                <a:spcPts val="1000"/>
+              </a:spcAft>
+            </a:pPr>
+            <a:r>
+              <a:rPr sz="1500" b="0">
+                <a:solidFill>
+                  <a:srgbClr val="202124"/>
+                </a:solidFill>
+                <a:latin typeface="Nunito Sans"/>
+              </a:rPr>
+              <a:t>el servicio corre en infraestructura pública; los datos consultados son públicos por definición.</a:t>
+            </a:r>
+          </a:p>
+          <a:p>
+            <a:pPr algn="l">
+              <a:spcAft>
+                <a:spcPts val="200"/>
+              </a:spcAft>
+            </a:pPr>
+            <a:r>
+              <a:rPr sz="1700" b="1">
+                <a:solidFill>
+                  <a:srgbClr val="004884"/>
+                </a:solidFill>
+                <a:latin typeface="Nunito Sans"/>
+              </a:rPr>
+              <a:t>Sin datos personales</a:t>
+            </a:r>
+          </a:p>
+          <a:p>
+            <a:pPr algn="l">
+              <a:spcAft>
+                <a:spcPts val="1000"/>
+              </a:spcAft>
+            </a:pPr>
+            <a:r>
+              <a:rPr sz="1500" b="0">
+                <a:solidFill>
+                  <a:srgbClr val="202124"/>
+                </a:solidFill>
+                <a:latin typeface="Nunito Sans"/>
+              </a:rPr>
+              <a:t>cero registro, cero rastreadores; telemetría agregada y anónima.</a:t>
+            </a:r>
+          </a:p>
+          <a:p>
+            <a:pPr algn="l">
+              <a:spcAft>
+                <a:spcPts val="200"/>
+              </a:spcAft>
+            </a:pPr>
+            <a:r>
+              <a:rPr sz="1700" b="1">
+                <a:solidFill>
+                  <a:srgbClr val="004884"/>
+                </a:solidFill>
+                <a:latin typeface="Nunito Sans"/>
+              </a:rPr>
+              <a:t>Solo lectura</a:t>
+            </a:r>
+          </a:p>
+          <a:p>
+            <a:pPr algn="l">
+              <a:spcAft>
+                <a:spcPts val="1000"/>
+              </a:spcAft>
+            </a:pPr>
+            <a:r>
+              <a:rPr sz="1500" b="0">
+                <a:solidFill>
+                  <a:srgbClr val="202124"/>
+                </a:solidFill>
+                <a:latin typeface="Nunito Sans"/>
+              </a:rPr>
+              <a:t>el motor no puede escribir en ninguna fuente; verificación de solo-lectura en la capa 2.</a:t>
+            </a:r>
+          </a:p>
+          <a:p>
+            <a:pPr algn="l">
+              <a:spcAft>
+                <a:spcPts val="200"/>
+              </a:spcAft>
+            </a:pPr>
+            <a:r>
+              <a:rPr sz="1700" b="1">
+                <a:solidFill>
+                  <a:srgbClr val="004884"/>
+                </a:solidFill>
+                <a:latin typeface="Nunito Sans"/>
+              </a:rPr>
+              <a:t>Repo abierto y auditable</a:t>
+            </a:r>
+          </a:p>
+          <a:p>
+            <a:pPr algn="l">
+              <a:spcAft>
+                <a:spcPts val="1000"/>
+              </a:spcAft>
+            </a:pPr>
+            <a:r>
+              <a:rPr sz="1500" b="0">
+                <a:solidFill>
+                  <a:srgbClr val="202124"/>
+                </a:solidFill>
+                <a:latin typeface="Nunito Sans"/>
+              </a:rPr>
+              <a:t>código, documentación, pruebas y evaluación públicos — replicable con Docker en cualquier máquina (guía de validación para el jurado).</a:t>
+            </a:r>
+          </a:p>
+          <a:p>
+            <a:pPr algn="l">
+              <a:spcAft>
+                <a:spcPts val="200"/>
+              </a:spcAft>
+            </a:pPr>
+            <a:r>
+              <a:rPr sz="1700" b="1">
+                <a:solidFill>
+                  <a:srgbClr val="004884"/>
+                </a:solidFill>
+                <a:latin typeface="Nunito Sans"/>
+              </a:rPr>
+              <a:t>Accesibilidad</a:t>
+            </a:r>
+          </a:p>
+          <a:p>
+            <a:pPr algn="l">
+              <a:spcAft>
+                <a:spcPts val="1000"/>
+              </a:spcAft>
+            </a:pPr>
+            <a:r>
+              <a:rPr sz="1500" b="0">
+                <a:solidFill>
+                  <a:srgbClr val="202124"/>
+                </a:solidFill>
+                <a:latin typeface="Nunito Sans"/>
+              </a:rPr>
+              <a:t>Ley 1618 de 2013 y WCAG 2.1 AA: voz, narración, contraste, escala tipográfica.</a:t>
+            </a:r>
+          </a:p>
+        </p:txBody>
+      </p:sp>
+      <p:sp>
+        <p:nvSpPr>
+          <p:cNvPr id="4" name="TextBox 3"/>
+          <p:cNvSpPr txBox="1"/>
+          <p:nvPr/>
+        </p:nvSpPr>
+        <p:spPr>
+          <a:xfrm>
+            <a:off x="457200" y="6446520"/>
+            <a:ext cx="11247120" cy="320040"/>
+          </a:xfrm>
+          <a:prstGeom prst="rect">
+            <a:avLst/>
+          </a:prstGeom>
+          <a:noFill/>
+        </p:spPr>
+        <p:txBody>
+          <a:bodyPr wrap="square">
+            <a:spAutoFit/>
+          </a:bodyPr>
+          <a:lstStyle/>
+          <a:p>
+            <a:pPr algn="l">
+              <a:spcAft>
+                <a:spcPts val="600"/>
+              </a:spcAft>
+            </a:pPr>
+            <a:r>
+              <a:rPr sz="900" b="0">
+                <a:solidFill>
+                  <a:srgbClr val="5F6368"/>
+                </a:solidFill>
+                <a:latin typeface="IBM Plex Mono"/>
+              </a:rPr>
+              <a:t>DatosVivos · datosvivos.co  —  Datos al Ecosistema 2026 · Equipo 93 · Reto 7 (id 102) · Nivel Avanzado        19</a:t>
             </a:r>
           </a:p>
         </p:txBody>
@@ -6813,7 +7151,7 @@
         <p:spPr>
           <a:xfrm>
             <a:off x="548640" y="1920240"/>
-            <a:ext cx="2602153" cy="1737360"/>
+            <a:ext cx="2036003" cy="1737360"/>
           </a:xfrm>
           <a:prstGeom prst="rect">
             <a:avLst/>
@@ -6886,8 +7224,8 @@
         </p:nvSpPr>
         <p:spPr>
           <a:xfrm>
-            <a:off x="3379393" y="1920240"/>
-            <a:ext cx="2602153" cy="1737360"/>
+            <a:off x="2813243" y="1920240"/>
+            <a:ext cx="2036003" cy="1737360"/>
           </a:xfrm>
           <a:prstGeom prst="rect">
             <a:avLst/>
@@ -6960,8 +7298,8 @@
         </p:nvSpPr>
         <p:spPr>
           <a:xfrm>
-            <a:off x="6210146" y="1920240"/>
-            <a:ext cx="2602153" cy="1737360"/>
+            <a:off x="5077846" y="1920240"/>
+            <a:ext cx="2036003" cy="1737360"/>
           </a:xfrm>
           <a:prstGeom prst="rect">
             <a:avLst/>
@@ -7034,8 +7372,8 @@
         </p:nvSpPr>
         <p:spPr>
           <a:xfrm>
-            <a:off x="9040899" y="1920240"/>
-            <a:ext cx="2602153" cy="1737360"/>
+            <a:off x="7342449" y="1920240"/>
+            <a:ext cx="2036003" cy="1737360"/>
           </a:xfrm>
           <a:prstGeom prst="rect">
             <a:avLst/>
@@ -7074,6 +7412,80 @@
             <a:r>
               <a:rPr sz="3000" b="1">
                 <a:solidFill>
+                  <a:srgbClr val="004884"/>
+                </a:solidFill>
+                <a:latin typeface="IBM Plex Mono"/>
+              </a:rPr>
+              <a:t>29</a:t>
+            </a:r>
+          </a:p>
+          <a:p/>
+          <a:p>
+            <a:pPr algn="ctr">
+              <a:spcAft>
+                <a:spcPts val="0"/>
+              </a:spcAft>
+            </a:pPr>
+            <a:r>
+              <a:rPr sz="1200" b="0">
+                <a:solidFill>
+                  <a:srgbClr val="5F6368"/>
+                </a:solidFill>
+                <a:latin typeface="Nunito Sans"/>
+              </a:rPr>
+              <a:t>variables curadas por dataset</a:t>
+            </a:r>
+          </a:p>
+        </p:txBody>
+      </p:sp>
+      <p:sp>
+        <p:nvSpPr>
+          <p:cNvPr id="7" name="Rectangle 6"/>
+          <p:cNvSpPr/>
+          <p:nvPr/>
+        </p:nvSpPr>
+        <p:spPr>
+          <a:xfrm>
+            <a:off x="9607052" y="1920240"/>
+            <a:ext cx="2036003" cy="1737360"/>
+          </a:xfrm>
+          <a:prstGeom prst="rect">
+            <a:avLst/>
+          </a:prstGeom>
+          <a:solidFill>
+            <a:srgbClr val="F4F6F9"/>
+          </a:solidFill>
+          <a:ln>
+            <a:noFill/>
+          </a:ln>
+          <a:effectLst/>
+        </p:spPr>
+        <p:style>
+          <a:lnRef idx="1">
+            <a:schemeClr val="accent1"/>
+          </a:lnRef>
+          <a:fillRef idx="3">
+            <a:schemeClr val="accent1"/>
+          </a:fillRef>
+          <a:effectRef idx="2">
+            <a:schemeClr val="accent1"/>
+          </a:effectRef>
+          <a:fontRef idx="minor">
+            <a:schemeClr val="lt1"/>
+          </a:fontRef>
+        </p:style>
+        <p:txBody>
+          <a:bodyPr rtlCol="0" anchor="ctr" wrap="square"/>
+          <a:lstStyle/>
+          <a:p>
+            <a:pPr algn="ctr">
+              <a:spcAft>
+                <a:spcPts val="200"/>
+              </a:spcAft>
+            </a:pPr>
+            <a:r>
+              <a:rPr sz="3000" b="1">
+                <a:solidFill>
                   <a:srgbClr val="C32D4B"/>
                 </a:solidFill>
                 <a:latin typeface="IBM Plex Mono"/>
@@ -7102,7 +7514,7 @@
       </p:sp>
       <p:sp>
         <p:nvSpPr>
-          <p:cNvPr id="7" name="TextBox 6"/>
+          <p:cNvPr id="8" name="TextBox 7"/>
           <p:cNvSpPr txBox="1"/>
           <p:nvPr/>
         </p:nvSpPr>
@@ -7222,7 +7634,7 @@
       </p:sp>
       <p:sp>
         <p:nvSpPr>
-          <p:cNvPr id="8" name="TextBox 7"/>
+          <p:cNvPr id="9" name="TextBox 8"/>
           <p:cNvSpPr txBox="1"/>
           <p:nvPr/>
         </p:nvSpPr>
@@ -7897,7 +8309,7 @@
                 </a:solidFill>
                 <a:latin typeface="IBM Plex Mono"/>
               </a:rPr>
-              <a:t>TECNOLOGÍAS EMERGENTES</a:t>
+              <a:t>TECNOLOGÍAS EMERGENTES · IA</a:t>
             </a:r>
           </a:p>
           <a:p/>
@@ -7914,21 +8326,61 @@
                 </a:solidFill>
                 <a:latin typeface="Nunito Sans"/>
               </a:rPr>
-              <a:t>Dónde vive la IA en DatosVivos</a:t>
-            </a:r>
-          </a:p>
-        </p:txBody>
-      </p:sp>
-      <p:sp>
-        <p:nvSpPr>
-          <p:cNvPr id="3" name="Rectangle 2"/>
+              <a:t>Un agente de IA para servicios públicos</a:t>
+            </a:r>
+          </a:p>
+        </p:txBody>
+      </p:sp>
+      <p:sp>
+        <p:nvSpPr>
+          <p:cNvPr id="3" name="TextBox 2"/>
+          <p:cNvSpPr txBox="1"/>
+          <p:nvPr/>
+        </p:nvSpPr>
+        <p:spPr>
+          <a:xfrm>
+            <a:off x="594360" y="1417320"/>
+            <a:ext cx="10972800" cy="457200"/>
+          </a:xfrm>
+          <a:prstGeom prst="rect">
+            <a:avLst/>
+          </a:prstGeom>
+          <a:noFill/>
+        </p:spPr>
+        <p:txBody>
+          <a:bodyPr wrap="square">
+            <a:spAutoFit/>
+          </a:bodyPr>
+          <a:lstStyle/>
+          <a:p>
+            <a:pPr algn="l">
+              <a:spcAft>
+                <a:spcPts val="600"/>
+              </a:spcAft>
+            </a:pPr>
+            <a:r>
+              <a:rPr sz="1300" b="0">
+                <a:solidFill>
+                  <a:srgbClr val="5F6368"/>
+                </a:solidFill>
+                <a:latin typeface="Nunito Sans"/>
+              </a:rPr>
+              <a:t>IA generativa + arquitectura híbrida: modelos de lenguaje que razonan, motor determinista que verifica. Pertinente, aplicable e interpretable — nunca superficial.</a:t>
+            </a:r>
+          </a:p>
+          <a:p/>
+        </p:txBody>
+      </p:sp>
+      <p:sp>
+        <p:nvSpPr>
+          <p:cNvPr id="4" name="Rectangle 3"/>
           <p:cNvSpPr/>
           <p:nvPr/>
         </p:nvSpPr>
         <p:spPr>
           <a:xfrm>
-            <a:off x="548640" y="1828800"/>
-            <a:ext cx="5486400" cy="4023360"/>
+            <a:off x="548640" y="2057400"/>
+            <a:ext cx="5486400" cy="3794760"/>
           </a:xfrm>
           <a:prstGeom prst="rect">
             <a:avLst/>
@@ -8059,14 +8511,14 @@
       </p:sp>
       <p:sp>
         <p:nvSpPr>
-          <p:cNvPr id="4" name="Rectangle 3"/>
+          <p:cNvPr id="5" name="Rectangle 4"/>
           <p:cNvSpPr/>
           <p:nvPr/>
         </p:nvSpPr>
         <p:spPr>
           <a:xfrm>
-            <a:off x="6263640" y="1828800"/>
-            <a:ext cx="5486400" cy="4023360"/>
+            <a:off x="6263640" y="2057400"/>
+            <a:ext cx="5486400" cy="3794760"/>
           </a:xfrm>
           <a:prstGeom prst="rect">
             <a:avLst/>
@@ -8197,7 +8649,7 @@
       </p:sp>
       <p:sp>
         <p:nvSpPr>
-          <p:cNvPr id="5" name="TextBox 4"/>
+          <p:cNvPr id="6" name="TextBox 5"/>
           <p:cNvSpPr txBox="1"/>
           <p:nvPr/>
         </p:nvSpPr>

--- a/recursos/presentacion.pptx
+++ b/recursos/presentacion.pptx
@@ -6763,7 +6763,7 @@
                 </a:solidFill>
                 <a:latin typeface="IBM Plex Mono"/>
               </a:rPr>
-              <a:t>1 · PANORAMA</a:t>
+              <a:t>1 · INICIO</a:t>
             </a:r>
           </a:p>
           <a:p/>
@@ -6780,7 +6780,7 @@
                 </a:solidFill>
                 <a:latin typeface="Nunito Sans"/>
               </a:rPr>
-              <a:t>datosvivos.co</a:t>
+              <a:t>Panorama nacional — datosvivos.co</a:t>
             </a:r>
           </a:p>
           <a:p>
@@ -6853,7 +6853,7 @@
                 </a:solidFill>
                 <a:latin typeface="IBM Plex Mono"/>
               </a:rPr>
-              <a:t>2 · TABLERO</a:t>
+              <a:t>2 · DETALLE POR ENTIDAD</a:t>
             </a:r>
           </a:p>
           <a:p/>
@@ -6943,7 +6943,7 @@
                 </a:solidFill>
                 <a:latin typeface="IBM Plex Mono"/>
               </a:rPr>
-              <a:t>3 · BUSCADOR</a:t>
+              <a:t>3 · BUSCAR</a:t>
             </a:r>
           </a:p>
           <a:p/>
@@ -7120,7 +7120,7 @@
                 </a:solidFill>
                 <a:latin typeface="IBM Plex Mono"/>
               </a:rPr>
-              <a:t>EN PRODUCCIÓN · CORTE 2026-07-10</a:t>
+              <a:t>DEMO 1/3 · INICIO · CORTE 2026-07-10</a:t>
             </a:r>
           </a:p>
           <a:p/>
@@ -7731,7 +7731,7 @@
                 </a:solidFill>
                 <a:latin typeface="IBM Plex Mono"/>
               </a:rPr>
-              <a:t>NIVEL 2 · POWER BI</a:t>
+              <a:t>DEMO 2/3 · DETALLE POR ENTIDAD (POWER BI)</a:t>
             </a:r>
           </a:p>
           <a:p/>
@@ -8036,7 +8036,7 @@
                 </a:solidFill>
                 <a:latin typeface="IBM Plex Mono"/>
               </a:rPr>
-              <a:t>NIVEL 3 · BUSCADOR</a:t>
+              <a:t>DEMO 3/3 · BUSCAR (LENGUAJE NATURAL)</a:t>
             </a:r>
           </a:p>
           <a:p/>

--- a/recursos/presentacion.pptx
+++ b/recursos/presentacion.pptx
@@ -4361,7 +4361,7 @@
                 </a:solidFill>
                 <a:latin typeface="Nunito Sans"/>
               </a:rPr>
-              <a:t>1 · Migración del motor de lenguaje a la API de Claude — el backend ya es intercambiable.</a:t>
+              <a:t>1 · Cosecha y catalogación previa de datasets — casos de consulta verificados para una búsqueda aún más precisa (6.2 GB ya liberados para la bodega).</a:t>
             </a:r>
           </a:p>
           <a:p>
@@ -4377,7 +4377,7 @@
                 </a:solidFill>
                 <a:latin typeface="Nunito Sans"/>
               </a:rPr>
-              <a:t>2 · Cosecha y catalogación previa de datasets — casos de consulta verificados para una búsqueda aún más precisa.</a:t>
+              <a:t>2 · Motor de lenguaje ya migrado a la API de Claude: interpretación en ~1.5 s (antes 31-45 s) con verificación determinista intacta.</a:t>
             </a:r>
           </a:p>
           <a:p>
@@ -4618,7 +4618,7 @@
                 </a:solidFill>
                 <a:latin typeface="Nunito Sans"/>
               </a:rPr>
-              <a:t>FastAPI + PostgreSQL (catálogo curado, vistas _decisor) + ChromaDB (retrieval) + DuckDB (federados con CSV externo) + backend LLM intercambiable (LLM_BACKEND = ollama | anthropic).</a:t>
+              <a:t>FastAPI + PostgreSQL (catálogo curado, vistas _decisor) + ChromaDB (retrieval) + DuckDB (federados con CSV externo) + backend LLM conectable — producción: API de Claude (Haiku); opción local: Ollama.</a:t>
             </a:r>
           </a:p>
           <a:p>

--- a/recursos/presentacion.pptx
+++ b/recursos/presentacion.pptx
@@ -4355,13 +4355,13 @@
               </a:spcAft>
             </a:pPr>
             <a:r>
-              <a:rPr sz="1700" b="0">
+              <a:rPr sz="1500" b="0">
                 <a:solidFill>
                   <a:srgbClr val="FFFFFF"/>
                 </a:solidFill>
                 <a:latin typeface="Nunito Sans"/>
               </a:rPr>
-              <a:t>1 · Cosecha y catalogación previa de datasets — casos de consulta verificados para una búsqueda aún más precisa (6.2 GB ya liberados para la bodega).</a:t>
+              <a:t>Ya ejecutado (julio 2026): motor de lenguaje migrado a la API de Claude (interpretación en ~1.5 s) · bodega local Parquet en producción con regla diaria de cola (el buscador responde en milisegundos desde la copia local) · catalogación temática al 100 % del catálogo.</a:t>
             </a:r>
           </a:p>
           <a:p>
@@ -4371,13 +4371,13 @@
               </a:spcAft>
             </a:pPr>
             <a:r>
-              <a:rPr sz="1700" b="0">
+              <a:rPr sz="1500" b="0">
                 <a:solidFill>
                   <a:srgbClr val="FFFFFF"/>
                 </a:solidFill>
                 <a:latin typeface="Nunito Sans"/>
               </a:rPr>
-              <a:t>2 · Motor de lenguaje ya migrado a la API de Claude: interpretación en ~1.5 s (antes 31-45 s) con verificación determinista intacta.</a:t>
+              <a:t>Lo que falta: casos de consulta generados y verificados por el motor sobre la bodega — retrieval aún más preciso.</a:t>
             </a:r>
           </a:p>
           <a:p>
@@ -4618,7 +4618,7 @@
                 </a:solidFill>
                 <a:latin typeface="Nunito Sans"/>
               </a:rPr>
-              <a:t>FastAPI + PostgreSQL (catálogo curado, vistas _decisor) + ChromaDB (retrieval) + DuckDB (federados con CSV externo) + backend LLM conectable — producción: API de Claude (Haiku); opción local: Ollama.</a:t>
+              <a:t>FastAPI + PostgreSQL (catálogo curado, vistas _decisor) + ChromaDB (retrieval) + DuckDB (federados con CSV externo) + backend LLM intercambiable (producción: API de Claude · réplicas sin key: Ollama).</a:t>
             </a:r>
           </a:p>
           <a:p>
@@ -4682,7 +4682,7 @@
                 </a:solidFill>
                 <a:latin typeface="Nunito Sans"/>
               </a:rPr>
-              <a:t>Docker Compose con imagen reproducible, túnel seguro de salida, cron de actualización diaria.</a:t>
+              <a:t>Docker Compose con imagen reproducible, túnel seguro de salida, cron diario: ETL + regla de cola de la bodega Parquet (snapshot fresco → respuesta local en milisegundos; fuente cambió → dato vivo).</a:t>
             </a:r>
           </a:p>
         </p:txBody>
@@ -6853,7 +6853,7 @@
                 </a:solidFill>
                 <a:latin typeface="IBM Plex Mono"/>
               </a:rPr>
-              <a:t>2 · DETALLE POR ENTIDAD</a:t>
+              <a:t>2 · DETALLE ENTIDAD</a:t>
             </a:r>
           </a:p>
           <a:p/>
@@ -7731,7 +7731,7 @@
                 </a:solidFill>
                 <a:latin typeface="IBM Plex Mono"/>
               </a:rPr>
-              <a:t>DEMO 2/3 · DETALLE POR ENTIDAD (POWER BI)</a:t>
+              <a:t>DEMO 2/3 · DETALLE ENTIDAD (POWER BI)</a:t>
             </a:r>
           </a:p>
           <a:p/>

--- a/recursos/presentacion.pptx
+++ b/recursos/presentacion.pptx
@@ -4355,13 +4355,13 @@
               </a:spcAft>
             </a:pPr>
             <a:r>
-              <a:rPr sz="1500" b="0">
+              <a:rPr sz="1400" b="0">
                 <a:solidFill>
                   <a:srgbClr val="FFFFFF"/>
                 </a:solidFill>
                 <a:latin typeface="Nunito Sans"/>
               </a:rPr>
-              <a:t>Ya ejecutado (julio 2026): motor de lenguaje migrado a la API de Claude (interpretación en ~1.5 s) · bodega local Parquet en producción con regla diaria de cola (el buscador responde en milisegundos desde la copia local) · catalogación temática al 100 % del catálogo.</a:t>
+              <a:t>Ya ejecutado (julio 2026): motor de lenguaje en la API de Claude (~1.5 s) · bodega local Parquet COMPLETA (10.279 datasets, el buscador responde en milisegundos desde la copia local) · catalogación temática al 100 % · evaluación ciudadana de 50 preguntas convertida en mejoras estructurales del buscador.</a:t>
             </a:r>
           </a:p>
           <a:p>
@@ -4371,13 +4371,13 @@
               </a:spcAft>
             </a:pPr>
             <a:r>
-              <a:rPr sz="1500" b="0">
+              <a:rPr sz="1400" b="0">
                 <a:solidFill>
                   <a:srgbClr val="FFFFFF"/>
                 </a:solidFill>
                 <a:latin typeface="Nunito Sans"/>
               </a:rPr>
-              <a:t>Lo que falta: casos de consulta generados y verificados por el motor sobre la bodega — retrieval aún más preciso.</a:t>
+              <a:t>Lo que sigue: filtros de año/municipio dentro del dataset elegido y respuestas compuestas (KPI + tendencia + per cápita).</a:t>
             </a:r>
           </a:p>
           <a:p>
@@ -4618,7 +4618,7 @@
                 </a:solidFill>
                 <a:latin typeface="Nunito Sans"/>
               </a:rPr>
-              <a:t>FastAPI + PostgreSQL (catálogo curado, vistas _decisor) + ChromaDB (retrieval) + DuckDB (federados con CSV externo) + backend LLM intercambiable (producción: API de Claude · réplicas sin key: Ollama).</a:t>
+              <a:t>FastAPI + PostgreSQL (catálogo curado, vistas _decisor) + ChromaDB (retrieval semántico en ambos caminos) + DuckDB (bodega Parquet local de 10.279 datasets + CSVs federados) + backend LLM intercambiable (producción: API de Claude).</a:t>
             </a:r>
           </a:p>
           <a:p>

--- a/recursos/presentacion.pptx
+++ b/recursos/presentacion.pptx
@@ -3208,7 +3208,7 @@
                 </a:solidFill>
                 <a:latin typeface="IBM Plex Mono"/>
               </a:rPr>
-              <a:t>── el panorama de los datos abiertos de Colombia</a:t>
+              <a:t>── datosvivos.co</a:t>
             </a:r>
           </a:p>
           <a:p>
@@ -3224,7 +3224,7 @@
                 </a:solidFill>
                 <a:latin typeface="Nunito Sans"/>
               </a:rPr>
-              <a:t>Datos del Estado, en tus palabras.</a:t>
+              <a:t>El panorama de los datos abiertos de Colombia.</a:t>
             </a:r>
           </a:p>
         </p:txBody>

--- a/recursos/presentacion.pptx
+++ b/recursos/presentacion.pptx
@@ -9160,7 +9160,7 @@
                 </a:solidFill>
                 <a:latin typeface="Nunito Sans"/>
               </a:rPr>
-              <a:t>Tres niveles, una sola fuente de verdad</a:t>
+              <a:t>Cuatro puertas, una por audiencia</a:t>
             </a:r>
           </a:p>
         </p:txBody>
@@ -9173,8 +9173,8 @@
         </p:nvSpPr>
         <p:spPr>
           <a:xfrm>
-            <a:off x="1924812" y="1783080"/>
-            <a:ext cx="768096" cy="768096"/>
+            <a:off x="1458468" y="1691640"/>
+            <a:ext cx="694944" cy="694944"/>
           </a:xfrm>
           <a:prstGeom prst="ellipse">
             <a:avLst/>
@@ -9211,7 +9211,7 @@
               </a:spcAft>
             </a:pPr>
             <a:r>
-              <a:rPr sz="3000" b="1">
+              <a:rPr sz="2600" b="1">
                 <a:solidFill>
                   <a:srgbClr val="FFFFFF"/>
                 </a:solidFill>
@@ -9231,8 +9231,8 @@
         </p:nvSpPr>
         <p:spPr>
           <a:xfrm>
-            <a:off x="548640" y="2331720"/>
-            <a:ext cx="3520440" cy="2651760"/>
+            <a:off x="457200" y="2194560"/>
+            <a:ext cx="2697480" cy="2880360"/>
           </a:xfrm>
           <a:prstGeom prst="rect">
             <a:avLst/>
@@ -9286,23 +9286,23 @@
               </a:spcAft>
             </a:pPr>
             <a:r>
-              <a:rPr sz="1700" b="1">
+              <a:rPr sz="1600" b="1">
                 <a:solidFill>
                   <a:srgbClr val="004884"/>
                 </a:solidFill>
                 <a:latin typeface="Nunito Sans"/>
               </a:rPr>
-              <a:t>INICIO</a:t>
+              <a:t>PANORAMA</a:t>
             </a:r>
           </a:p>
           <a:p>
             <a:pPr algn="ctr">
               <a:spcAft>
-                <a:spcPts val="800"/>
-              </a:spcAft>
-            </a:pPr>
-            <a:r>
-              <a:rPr sz="1300" b="0">
+                <a:spcPts val="600"/>
+              </a:spcAft>
+            </a:pPr>
+            <a:r>
+              <a:rPr sz="1100" b="0">
                 <a:solidFill>
                   <a:srgbClr val="3366CC"/>
                 </a:solidFill>
@@ -9314,17 +9314,33 @@
           <a:p>
             <a:pPr algn="ctr">
               <a:spcAft>
+                <a:spcPts val="600"/>
+              </a:spcAft>
+            </a:pPr>
+            <a:r>
+              <a:rPr sz="1100" b="0">
+                <a:solidFill>
+                  <a:srgbClr val="5F6368"/>
+                </a:solidFill>
+                <a:latin typeface="IBM Plex Mono"/>
+              </a:rPr>
+              <a:t>DECISORES Y PRENSA</a:t>
+            </a:r>
+          </a:p>
+          <a:p>
+            <a:pPr algn="ctr">
+              <a:spcAft>
                 <a:spcPts val="100"/>
               </a:spcAft>
             </a:pPr>
             <a:r>
-              <a:rPr sz="1300" b="0">
+              <a:rPr sz="1200" b="0">
                 <a:solidFill>
                   <a:srgbClr val="202124"/>
                 </a:solidFill>
                 <a:latin typeface="Nunito Sans"/>
               </a:rPr>
-              <a:t>El panorama nacional en vivo.</a:t>
+              <a:t>El estado nacional en vivo.</a:t>
             </a:r>
           </a:p>
           <a:p>
@@ -9334,7 +9350,7 @@
               </a:spcAft>
             </a:pPr>
             <a:r>
-              <a:rPr sz="1300" b="0">
+              <a:rPr sz="1200" b="0">
                 <a:solidFill>
                   <a:srgbClr val="202124"/>
                 </a:solidFill>
@@ -9353,8 +9369,8 @@
         </p:nvSpPr>
         <p:spPr>
           <a:xfrm>
-            <a:off x="548640" y="2331720"/>
-            <a:ext cx="3520440" cy="82296"/>
+            <a:off x="457200" y="2194560"/>
+            <a:ext cx="2697480" cy="82296"/>
           </a:xfrm>
           <a:prstGeom prst="rect">
             <a:avLst/>
@@ -9397,8 +9413,8 @@
         </p:nvSpPr>
         <p:spPr>
           <a:xfrm>
-            <a:off x="5765292" y="1783080"/>
-            <a:ext cx="768096" cy="768096"/>
+            <a:off x="4357116" y="1691640"/>
+            <a:ext cx="694944" cy="694944"/>
           </a:xfrm>
           <a:prstGeom prst="ellipse">
             <a:avLst/>
@@ -9435,7 +9451,7 @@
               </a:spcAft>
             </a:pPr>
             <a:r>
-              <a:rPr sz="3000" b="1">
+              <a:rPr sz="2600" b="1">
                 <a:solidFill>
                   <a:srgbClr val="FFFFFF"/>
                 </a:solidFill>
@@ -9455,8 +9471,8 @@
         </p:nvSpPr>
         <p:spPr>
           <a:xfrm>
-            <a:off x="4389120" y="2331720"/>
-            <a:ext cx="3520440" cy="2651760"/>
+            <a:off x="3355848" y="2194560"/>
+            <a:ext cx="2697480" cy="2880360"/>
           </a:xfrm>
           <a:prstGeom prst="rect">
             <a:avLst/>
@@ -9510,23 +9526,23 @@
               </a:spcAft>
             </a:pPr>
             <a:r>
-              <a:rPr sz="1700" b="1">
+              <a:rPr sz="1600" b="1">
                 <a:solidFill>
                   <a:srgbClr val="004884"/>
                 </a:solidFill>
                 <a:latin typeface="Nunito Sans"/>
               </a:rPr>
-              <a:t>DETALLE ENTIDAD</a:t>
+              <a:t>TABLERO</a:t>
             </a:r>
           </a:p>
           <a:p>
             <a:pPr algn="ctr">
               <a:spcAft>
-                <a:spcPts val="800"/>
-              </a:spcAft>
-            </a:pPr>
-            <a:r>
-              <a:rPr sz="1300" b="0">
+                <a:spcPts val="600"/>
+              </a:spcAft>
+            </a:pPr>
+            <a:r>
+              <a:rPr sz="1100" b="0">
                 <a:solidFill>
                   <a:srgbClr val="3366CC"/>
                 </a:solidFill>
@@ -9538,17 +9554,33 @@
           <a:p>
             <a:pPr algn="ctr">
               <a:spcAft>
+                <a:spcPts val="600"/>
+              </a:spcAft>
+            </a:pPr>
+            <a:r>
+              <a:rPr sz="1100" b="0">
+                <a:solidFill>
+                  <a:srgbClr val="5F6368"/>
+                </a:solidFill>
+                <a:latin typeface="IBM Plex Mono"/>
+              </a:rPr>
+              <a:t>GERENTES Y ENTIDADES</a:t>
+            </a:r>
+          </a:p>
+          <a:p>
+            <a:pPr algn="ctr">
+              <a:spcAft>
                 <a:spcPts val="100"/>
               </a:spcAft>
             </a:pPr>
             <a:r>
-              <a:rPr sz="1300" b="0">
+              <a:rPr sz="1200" b="0">
                 <a:solidFill>
                   <a:srgbClr val="202124"/>
                 </a:solidFill>
                 <a:latin typeface="Nunito Sans"/>
               </a:rPr>
-              <a:t>Filtros por sector, entidad</a:t>
+              <a:t>Detalle por sector, entidad</a:t>
             </a:r>
           </a:p>
           <a:p>
@@ -9558,7 +9590,7 @@
               </a:spcAft>
             </a:pPr>
             <a:r>
-              <a:rPr sz="1300" b="0">
+              <a:rPr sz="1200" b="0">
                 <a:solidFill>
                   <a:srgbClr val="202124"/>
                 </a:solidFill>
@@ -9577,8 +9609,8 @@
         </p:nvSpPr>
         <p:spPr>
           <a:xfrm>
-            <a:off x="4389120" y="2331720"/>
-            <a:ext cx="3520440" cy="82296"/>
+            <a:off x="3355848" y="2194560"/>
+            <a:ext cx="2697480" cy="82296"/>
           </a:xfrm>
           <a:prstGeom prst="rect">
             <a:avLst/>
@@ -9621,8 +9653,8 @@
         </p:nvSpPr>
         <p:spPr>
           <a:xfrm>
-            <a:off x="9605772" y="1783080"/>
-            <a:ext cx="768096" cy="768096"/>
+            <a:off x="7255764" y="1691640"/>
+            <a:ext cx="694944" cy="694944"/>
           </a:xfrm>
           <a:prstGeom prst="ellipse">
             <a:avLst/>
@@ -9659,7 +9691,7 @@
               </a:spcAft>
             </a:pPr>
             <a:r>
-              <a:rPr sz="3000" b="1">
+              <a:rPr sz="2600" b="1">
                 <a:solidFill>
                   <a:srgbClr val="FFFFFF"/>
                 </a:solidFill>
@@ -9679,8 +9711,8 @@
         </p:nvSpPr>
         <p:spPr>
           <a:xfrm>
-            <a:off x="8229600" y="2331720"/>
-            <a:ext cx="3520440" cy="2651760"/>
+            <a:off x="6254496" y="2194560"/>
+            <a:ext cx="2697480" cy="2880360"/>
           </a:xfrm>
           <a:prstGeom prst="rect">
             <a:avLst/>
@@ -9734,23 +9766,23 @@
               </a:spcAft>
             </a:pPr>
             <a:r>
-              <a:rPr sz="1700" b="1">
+              <a:rPr sz="1600" b="1">
                 <a:solidFill>
                   <a:srgbClr val="004884"/>
                 </a:solidFill>
                 <a:latin typeface="Nunito Sans"/>
               </a:rPr>
-              <a:t>BUSCAR</a:t>
+              <a:t>BUSCADOR</a:t>
             </a:r>
           </a:p>
           <a:p>
             <a:pPr algn="ctr">
               <a:spcAft>
-                <a:spcPts val="800"/>
-              </a:spcAft>
-            </a:pPr>
-            <a:r>
-              <a:rPr sz="1300" b="0">
+                <a:spcPts val="600"/>
+              </a:spcAft>
+            </a:pPr>
+            <a:r>
+              <a:rPr sz="1100" b="0">
                 <a:solidFill>
                   <a:srgbClr val="3366CC"/>
                 </a:solidFill>
@@ -9762,11 +9794,27 @@
           <a:p>
             <a:pPr algn="ctr">
               <a:spcAft>
+                <a:spcPts val="600"/>
+              </a:spcAft>
+            </a:pPr>
+            <a:r>
+              <a:rPr sz="1100" b="0">
+                <a:solidFill>
+                  <a:srgbClr val="5F6368"/>
+                </a:solidFill>
+                <a:latin typeface="IBM Plex Mono"/>
+              </a:rPr>
+              <a:t>CIUDADANÍA</a:t>
+            </a:r>
+          </a:p>
+          <a:p>
+            <a:pPr algn="ctr">
+              <a:spcAft>
                 <a:spcPts val="100"/>
               </a:spcAft>
             </a:pPr>
             <a:r>
-              <a:rPr sz="1300" b="0">
+              <a:rPr sz="1200" b="0">
                 <a:solidFill>
                   <a:srgbClr val="202124"/>
                 </a:solidFill>
@@ -9782,7 +9830,7 @@
               </a:spcAft>
             </a:pPr>
             <a:r>
-              <a:rPr sz="1300" b="0">
+              <a:rPr sz="1200" b="0">
                 <a:solidFill>
                   <a:srgbClr val="202124"/>
                 </a:solidFill>
@@ -9801,8 +9849,8 @@
         </p:nvSpPr>
         <p:spPr>
           <a:xfrm>
-            <a:off x="8229600" y="2331720"/>
-            <a:ext cx="3520440" cy="82296"/>
+            <a:off x="6254496" y="2194560"/>
+            <a:ext cx="2697480" cy="82296"/>
           </a:xfrm>
           <a:prstGeom prst="rect">
             <a:avLst/>
@@ -9839,13 +9887,253 @@
       </p:sp>
       <p:sp>
         <p:nvSpPr>
-          <p:cNvPr id="12" name="TextBox 11"/>
+          <p:cNvPr id="12" name="Oval 11"/>
+          <p:cNvSpPr/>
+          <p:nvPr/>
+        </p:nvSpPr>
+        <p:spPr>
+          <a:xfrm>
+            <a:off x="10154412" y="1691640"/>
+            <a:ext cx="694944" cy="694944"/>
+          </a:xfrm>
+          <a:prstGeom prst="ellipse">
+            <a:avLst/>
+          </a:prstGeom>
+          <a:solidFill>
+            <a:srgbClr val="004884"/>
+          </a:solidFill>
+          <a:ln>
+            <a:noFill/>
+          </a:ln>
+          <a:effectLst/>
+        </p:spPr>
+        <p:style>
+          <a:lnRef idx="1">
+            <a:schemeClr val="accent1"/>
+          </a:lnRef>
+          <a:fillRef idx="3">
+            <a:schemeClr val="accent1"/>
+          </a:fillRef>
+          <a:effectRef idx="2">
+            <a:schemeClr val="accent1"/>
+          </a:effectRef>
+          <a:fontRef idx="minor">
+            <a:schemeClr val="lt1"/>
+          </a:fontRef>
+        </p:style>
+        <p:txBody>
+          <a:bodyPr rtlCol="0" anchor="ctr"/>
+          <a:lstStyle/>
+          <a:p>
+            <a:pPr algn="ctr">
+              <a:spcAft>
+                <a:spcPts val="0"/>
+              </a:spcAft>
+            </a:pPr>
+            <a:r>
+              <a:rPr sz="2600" b="1">
+                <a:solidFill>
+                  <a:srgbClr val="FFFFFF"/>
+                </a:solidFill>
+                <a:latin typeface="IBM Plex Mono"/>
+              </a:rPr>
+              <a:t>4</a:t>
+            </a:r>
+          </a:p>
+          <a:p/>
+        </p:txBody>
+      </p:sp>
+      <p:sp>
+        <p:nvSpPr>
+          <p:cNvPr id="13" name="Rectangle 12"/>
+          <p:cNvSpPr/>
+          <p:nvPr/>
+        </p:nvSpPr>
+        <p:spPr>
+          <a:xfrm>
+            <a:off x="9153144" y="2194560"/>
+            <a:ext cx="2697480" cy="2880360"/>
+          </a:xfrm>
+          <a:prstGeom prst="rect">
+            <a:avLst/>
+          </a:prstGeom>
+          <a:solidFill>
+            <a:srgbClr val="F4F6F9"/>
+          </a:solidFill>
+          <a:ln>
+            <a:noFill/>
+          </a:ln>
+          <a:effectLst/>
+        </p:spPr>
+        <p:style>
+          <a:lnRef idx="1">
+            <a:schemeClr val="accent1"/>
+          </a:lnRef>
+          <a:fillRef idx="3">
+            <a:schemeClr val="accent1"/>
+          </a:fillRef>
+          <a:effectRef idx="2">
+            <a:schemeClr val="accent1"/>
+          </a:effectRef>
+          <a:fontRef idx="minor">
+            <a:schemeClr val="lt1"/>
+          </a:fontRef>
+        </p:style>
+        <p:txBody>
+          <a:bodyPr rtlCol="0" anchor="ctr" wrap="square" lIns="182880" rIns="182880" tIns="164592"/>
+          <a:lstStyle/>
+          <a:p>
+            <a:pPr algn="l">
+              <a:spcAft>
+                <a:spcPts val="800"/>
+              </a:spcAft>
+            </a:pPr>
+            <a:r>
+              <a:rPr sz="600" b="0">
+                <a:solidFill>
+                  <a:srgbClr val="202124"/>
+                </a:solidFill>
+                <a:latin typeface="Nunito Sans"/>
+              </a:rPr>
+              <a:t/>
+            </a:r>
+          </a:p>
+          <a:p/>
+          <a:p>
+            <a:pPr algn="ctr">
+              <a:spcAft>
+                <a:spcPts val="200"/>
+              </a:spcAft>
+            </a:pPr>
+            <a:r>
+              <a:rPr sz="1600" b="1">
+                <a:solidFill>
+                  <a:srgbClr val="004884"/>
+                </a:solidFill>
+                <a:latin typeface="Nunito Sans"/>
+              </a:rPr>
+              <a:t>MCP</a:t>
+            </a:r>
+          </a:p>
+          <a:p>
+            <a:pPr algn="ctr">
+              <a:spcAft>
+                <a:spcPts val="600"/>
+              </a:spcAft>
+            </a:pPr>
+            <a:r>
+              <a:rPr sz="1100" b="0">
+                <a:solidFill>
+                  <a:srgbClr val="3366CC"/>
+                </a:solidFill>
+                <a:latin typeface="IBM Plex Mono"/>
+              </a:rPr>
+              <a:t>/mcp · agentes de IA</a:t>
+            </a:r>
+          </a:p>
+          <a:p>
+            <a:pPr algn="ctr">
+              <a:spcAft>
+                <a:spcPts val="600"/>
+              </a:spcAft>
+            </a:pPr>
+            <a:r>
+              <a:rPr sz="1100" b="0">
+                <a:solidFill>
+                  <a:srgbClr val="5F6368"/>
+                </a:solidFill>
+                <a:latin typeface="IBM Plex Mono"/>
+              </a:rPr>
+              <a:t>DESARROLLADORES</a:t>
+            </a:r>
+          </a:p>
+          <a:p>
+            <a:pPr algn="ctr">
+              <a:spcAft>
+                <a:spcPts val="100"/>
+              </a:spcAft>
+            </a:pPr>
+            <a:r>
+              <a:rPr sz="1200" b="0">
+                <a:solidFill>
+                  <a:srgbClr val="202124"/>
+                </a:solidFill>
+                <a:latin typeface="Nunito Sans"/>
+              </a:rPr>
+              <a:t>El motor como herramientas</a:t>
+            </a:r>
+          </a:p>
+          <a:p>
+            <a:pPr algn="ctr">
+              <a:spcAft>
+                <a:spcPts val="100"/>
+              </a:spcAft>
+            </a:pPr>
+            <a:r>
+              <a:rPr sz="1200" b="0">
+                <a:solidFill>
+                  <a:srgbClr val="202124"/>
+                </a:solidFill>
+                <a:latin typeface="Nunito Sans"/>
+              </a:rPr>
+              <a:t>para Claude, OpenAI y más.</a:t>
+            </a:r>
+          </a:p>
+        </p:txBody>
+      </p:sp>
+      <p:sp>
+        <p:nvSpPr>
+          <p:cNvPr id="14" name="Rectangle 13"/>
+          <p:cNvSpPr/>
+          <p:nvPr/>
+        </p:nvSpPr>
+        <p:spPr>
+          <a:xfrm>
+            <a:off x="9153144" y="2194560"/>
+            <a:ext cx="2697480" cy="82296"/>
+          </a:xfrm>
+          <a:prstGeom prst="rect">
+            <a:avLst/>
+          </a:prstGeom>
+          <a:solidFill>
+            <a:srgbClr val="3366CC"/>
+          </a:solidFill>
+          <a:ln>
+            <a:noFill/>
+          </a:ln>
+          <a:effectLst/>
+        </p:spPr>
+        <p:style>
+          <a:lnRef idx="1">
+            <a:schemeClr val="accent1"/>
+          </a:lnRef>
+          <a:fillRef idx="3">
+            <a:schemeClr val="accent1"/>
+          </a:fillRef>
+          <a:effectRef idx="2">
+            <a:schemeClr val="accent1"/>
+          </a:effectRef>
+          <a:fontRef idx="minor">
+            <a:schemeClr val="lt1"/>
+          </a:fontRef>
+        </p:style>
+        <p:txBody>
+          <a:bodyPr rtlCol="0" anchor="ctr"/>
+          <a:lstStyle/>
+          <a:p>
+            <a:pPr algn="ctr"/>
+          </a:p>
+        </p:txBody>
+      </p:sp>
+      <p:sp>
+        <p:nvSpPr>
+          <p:cNvPr id="15" name="TextBox 14"/>
           <p:cNvSpPr txBox="1"/>
           <p:nvPr/>
         </p:nvSpPr>
         <p:spPr>
           <a:xfrm>
-            <a:off x="594360" y="5303520"/>
+            <a:off x="594360" y="5349240"/>
             <a:ext cx="10972800" cy="548640"/>
           </a:xfrm>
           <a:prstGeom prst="rect">
@@ -9871,7 +10159,7 @@
                 </a:solidFill>
                 <a:latin typeface="Nunito Sans"/>
               </a:rPr>
-              <a:t>De lo general a lo puntual: panorama → detalle → dato exacto. Cada nivel dirige al siguiente.</a:t>
+              <a:t>Con accesibilidad en toda la página: voz, narración y alto contraste (Ley 1618 de 2013).</a:t>
             </a:r>
           </a:p>
           <a:p/>
@@ -9879,7 +10167,7 @@
       </p:sp>
       <p:sp>
         <p:nvSpPr>
-          <p:cNvPr id="13" name="TextBox 12"/>
+          <p:cNvPr id="16" name="TextBox 15"/>
           <p:cNvSpPr txBox="1"/>
           <p:nvPr/>
         </p:nvSpPr>

--- a/recursos/presentacion.pptx
+++ b/recursos/presentacion.pptx
@@ -5,7 +5,7 @@
     <p:sldMasterId id="2147483648" r:id="rId1"/>
   </p:sldMasterIdLst>
   <p:notesMasterIdLst>
-    <p:notesMasterId r:id="rId21"/>
+    <p:notesMasterId r:id="rId22"/>
   </p:notesMasterIdLst>
   <p:sldIdLst>
     <p:sldId id="256" r:id="rId2"/>
@@ -15,18 +15,19 @@
     <p:sldId id="260" r:id="rId6"/>
     <p:sldId id="261" r:id="rId7"/>
     <p:sldId id="262" r:id="rId8"/>
-    <p:sldId id="263" r:id="rId9"/>
-    <p:sldId id="264" r:id="rId10"/>
-    <p:sldId id="265" r:id="rId11"/>
-    <p:sldId id="266" r:id="rId12"/>
-    <p:sldId id="267" r:id="rId13"/>
-    <p:sldId id="268" r:id="rId14"/>
-    <p:sldId id="269" r:id="rId15"/>
-    <p:sldId id="270" r:id="rId16"/>
-    <p:sldId id="271" r:id="rId17"/>
-    <p:sldId id="272" r:id="rId18"/>
-    <p:sldId id="273" r:id="rId19"/>
-    <p:sldId id="274" r:id="rId20"/>
+    <p:sldId id="275" r:id="rId9"/>
+    <p:sldId id="263" r:id="rId10"/>
+    <p:sldId id="264" r:id="rId11"/>
+    <p:sldId id="265" r:id="rId12"/>
+    <p:sldId id="266" r:id="rId13"/>
+    <p:sldId id="267" r:id="rId14"/>
+    <p:sldId id="268" r:id="rId15"/>
+    <p:sldId id="269" r:id="rId16"/>
+    <p:sldId id="270" r:id="rId17"/>
+    <p:sldId id="271" r:id="rId18"/>
+    <p:sldId id="272" r:id="rId19"/>
+    <p:sldId id="273" r:id="rId20"/>
+    <p:sldId id="274" r:id="rId21"/>
   </p:sldIdLst>
   <p:sldSz cx="9144000" cy="5143500" type="screen16x9"/>
   <p:notesSz cx="5143500" cy="9144000"/>
@@ -1263,6 +1264,90 @@
 </p:notes>
 </file>
 
+<file path=ppt/notesSlides/notesSlide20.xml><?xml version="1.0" encoding="utf-8"?>
+<p:notes xmlns:a="http://schemas.openxmlformats.org/drawingml/2006/main" xmlns:r="http://schemas.openxmlformats.org/officeDocument/2006/relationships" xmlns:p="http://schemas.openxmlformats.org/presentationml/2006/main">
+  <p:cSld>
+    <p:spTree>
+      <p:nvGrpSpPr>
+        <p:cNvPr id="1" name=""/>
+        <p:cNvGrpSpPr/>
+        <p:nvPr/>
+      </p:nvGrpSpPr>
+      <p:grpSpPr>
+        <a:xfrm>
+          <a:off x="0" y="0"/>
+          <a:ext cx="0" cy="0"/>
+          <a:chOff x="0" y="0"/>
+          <a:chExt cx="0" cy="0"/>
+        </a:xfrm>
+      </p:grpSpPr>
+      <p:sp>
+        <p:nvSpPr>
+          <p:cNvPr id="2" name="Slide Image Placeholder 1"/>
+          <p:cNvSpPr>
+            <a:spLocks noGrp="1" noRot="1" noChangeAspect="1"/>
+          </p:cNvSpPr>
+          <p:nvPr>
+            <p:ph type="sldImg"/>
+          </p:nvPr>
+        </p:nvSpPr>
+        <p:spPr/>
+      </p:sp>
+      <p:sp>
+        <p:nvSpPr>
+          <p:cNvPr id="3" name="Notes Placeholder 2"/>
+          <p:cNvSpPr>
+            <a:spLocks noGrp="1"/>
+          </p:cNvSpPr>
+          <p:nvPr>
+            <p:ph type="body" idx="1"/>
+          </p:nvPr>
+        </p:nvSpPr>
+        <p:spPr/>
+        <p:txBody>
+          <a:bodyPr/>
+          <a:lstStyle/>
+          <a:p>
+            <a:endParaRPr lang="en-US" dirty="0"/>
+          </a:p>
+        </p:txBody>
+      </p:sp>
+      <p:sp>
+        <p:nvSpPr>
+          <p:cNvPr id="4" name="Slide Number Placeholder 3"/>
+          <p:cNvSpPr>
+            <a:spLocks noGrp="1"/>
+          </p:cNvSpPr>
+          <p:nvPr>
+            <p:ph type="sldNum" sz="quarter" idx="10"/>
+          </p:nvPr>
+        </p:nvSpPr>
+        <p:spPr/>
+        <p:txBody>
+          <a:bodyPr/>
+          <a:lstStyle/>
+          <a:p>
+            <a:fld id="{F7021451-1387-4CA6-816F-3879F97B5CBC}" type="slidenum">
+              <a:rPr lang="en-US"/>
+              <a:t>20</a:t>
+            </a:fld>
+            <a:endParaRPr lang="en-US"/>
+          </a:p>
+        </p:txBody>
+      </p:sp>
+    </p:spTree>
+    <p:extLst>
+      <p:ext uri="{BB962C8B-B14F-4D97-AF65-F5344CB8AC3E}">
+        <p14:creationId xmlns:p14="http://schemas.microsoft.com/office/powerpoint/2010/main" val="1024086991"/>
+      </p:ext>
+    </p:extLst>
+  </p:cSld>
+  <p:clrMapOvr>
+    <a:masterClrMapping/>
+  </p:clrMapOvr>
+</p:notes>
+</file>
+
 <file path=ppt/notesSlides/notesSlide3.xml><?xml version="1.0" encoding="utf-8"?>
 <p:notes xmlns:a="http://schemas.openxmlformats.org/drawingml/2006/main" xmlns:r="http://schemas.openxmlformats.org/officeDocument/2006/relationships" xmlns:p="http://schemas.openxmlformats.org/presentationml/2006/main">
   <p:cSld>
@@ -1746,11 +1831,71 @@
           <a:bodyPr/>
           <a:lstStyle/>
           <a:p>
+            <a:pPr marL="0" marR="0" lvl="0" indent="0" algn="l" defTabSz="914400" rtl="0" eaLnBrk="1" fontAlgn="auto" latinLnBrk="0" hangingPunct="1">
+              <a:lnSpc>
+                <a:spcPct val="100000"/>
+              </a:lnSpc>
+              <a:spcBef>
+                <a:spcPts val="0"/>
+              </a:spcBef>
+              <a:spcAft>
+                <a:spcPts val="0"/>
+              </a:spcAft>
+              <a:buClrTx/>
+              <a:buSzTx/>
+              <a:buFontTx/>
+              <a:buNone/>
+              <a:tabLst/>
+              <a:defRPr/>
+            </a:pPr>
             <a:fld id="{F7021451-1387-4CA6-816F-3879F97B5CBC}" type="slidenum">
-              <a:rPr lang="en-US"/>
+              <a:rPr kumimoji="0" lang="en-US" sz="1800" b="0" i="0" u="none" strike="noStrike" kern="1200" cap="none" spc="0" normalizeH="0" baseline="0" noProof="0">
+                <a:ln>
+                  <a:noFill/>
+                </a:ln>
+                <a:solidFill>
+                  <a:prstClr val="black"/>
+                </a:solidFill>
+                <a:effectLst/>
+                <a:uLnTx/>
+                <a:uFillTx/>
+                <a:latin typeface="Aptos" panose="02110004020202020204"/>
+                <a:ea typeface="+mn-ea"/>
+                <a:cs typeface="+mn-cs"/>
+              </a:rPr>
+              <a:pPr marL="0" marR="0" lvl="0" indent="0" algn="l" defTabSz="914400" rtl="0" eaLnBrk="1" fontAlgn="auto" latinLnBrk="0" hangingPunct="1">
+                <a:lnSpc>
+                  <a:spcPct val="100000"/>
+                </a:lnSpc>
+                <a:spcBef>
+                  <a:spcPts val="0"/>
+                </a:spcBef>
+                <a:spcAft>
+                  <a:spcPts val="0"/>
+                </a:spcAft>
+                <a:buClrTx/>
+                <a:buSzTx/>
+                <a:buFontTx/>
+                <a:buNone/>
+                <a:tabLst/>
+                <a:defRPr/>
+              </a:pPr>
               <a:t>8</a:t>
             </a:fld>
-            <a:endParaRPr lang="en-US"/>
+            <a:endParaRPr kumimoji="0" lang="en-US" sz="1800" b="0" i="0" u="none" strike="noStrike" kern="1200" cap="none" spc="0" normalizeH="0" baseline="0" noProof="0">
+              <a:ln>
+                <a:noFill/>
+              </a:ln>
+              <a:solidFill>
+                <a:prstClr val="black"/>
+              </a:solidFill>
+              <a:effectLst/>
+              <a:uLnTx/>
+              <a:uFillTx/>
+              <a:latin typeface="Aptos" panose="02110004020202020204"/>
+              <a:ea typeface="+mn-ea"/>
+              <a:cs typeface="+mn-cs"/>
+            </a:endParaRPr>
           </a:p>
         </p:txBody>
       </p:sp>
@@ -2579,8 +2724,8 @@
         </p:blipFill>
         <p:spPr>
           <a:xfrm>
-            <a:off x="6484801" y="1428470"/>
-            <a:ext cx="2026555" cy="2026555"/>
+            <a:off x="6484800" y="1523883"/>
+            <a:ext cx="2026556" cy="2026556"/>
           </a:xfrm>
           <a:prstGeom prst="rect">
             <a:avLst/>
@@ -2595,7 +2740,7 @@
         </p:nvSpPr>
         <p:spPr>
           <a:xfrm>
-            <a:off x="6409743" y="1367625"/>
+            <a:off x="6409743" y="1463039"/>
             <a:ext cx="2176670" cy="2148244"/>
           </a:xfrm>
           <a:prstGeom prst="rect">
@@ -2617,8 +2762,8 @@
         </p:nvSpPr>
         <p:spPr>
           <a:xfrm>
-            <a:off x="6015160" y="3558722"/>
-            <a:ext cx="2965837" cy="380635"/>
+            <a:off x="6015160" y="3654135"/>
+            <a:ext cx="2965837" cy="380636"/>
           </a:xfrm>
           <a:prstGeom prst="rect">
             <a:avLst/>
@@ -2768,6 +2913,1313 @@
 </file>
 
 <file path=ppt/slides/slide10.xml><?xml version="1.0" encoding="utf-8"?>
+<p:sld xmlns:a="http://schemas.openxmlformats.org/drawingml/2006/main" xmlns:r="http://schemas.openxmlformats.org/officeDocument/2006/relationships" xmlns:p="http://schemas.openxmlformats.org/presentationml/2006/main">
+  <p:cSld name="Slide 9">
+    <p:bg>
+      <p:bgPr>
+        <a:solidFill>
+          <a:srgbClr val="F5F7FA"/>
+        </a:solidFill>
+        <a:effectLst/>
+      </p:bgPr>
+    </p:bg>
+    <p:spTree>
+      <p:nvGrpSpPr>
+        <p:cNvPr id="1" name=""/>
+        <p:cNvGrpSpPr/>
+        <p:nvPr/>
+      </p:nvGrpSpPr>
+      <p:grpSpPr>
+        <a:xfrm>
+          <a:off x="0" y="0"/>
+          <a:ext cx="0" cy="0"/>
+          <a:chOff x="0" y="0"/>
+          <a:chExt cx="0" cy="0"/>
+        </a:xfrm>
+      </p:grpSpPr>
+      <p:sp>
+        <p:nvSpPr>
+          <p:cNvPr id="2" name="Text 0"/>
+          <p:cNvSpPr/>
+          <p:nvPr/>
+        </p:nvSpPr>
+        <p:spPr>
+          <a:xfrm>
+            <a:off x="502920" y="292608"/>
+            <a:ext cx="8138160" cy="256032"/>
+          </a:xfrm>
+          <a:prstGeom prst="rect">
+            <a:avLst/>
+          </a:prstGeom>
+          <a:noFill/>
+          <a:ln/>
+        </p:spPr>
+        <p:txBody>
+          <a:bodyPr wrap="square" lIns="0" tIns="0" rIns="0" bIns="0" rtlCol="0" anchor="ctr"/>
+          <a:lstStyle/>
+          <a:p>
+            <a:pPr marL="0" indent="0">
+              <a:buNone/>
+            </a:pPr>
+            <a:r>
+              <a:rPr lang="en-US" sz="1100" b="1" kern="0" spc="200" dirty="0">
+                <a:solidFill>
+                  <a:srgbClr val="1ABC9C"/>
+                </a:solidFill>
+                <a:latin typeface="Trebuchet MS" pitchFamily="34" charset="0"/>
+                <a:ea typeface="Trebuchet MS" pitchFamily="34" charset="-122"/>
+                <a:cs typeface="Trebuchet MS" pitchFamily="34" charset="-120"/>
+              </a:rPr>
+              <a:t>RIGOR TÉCNICO</a:t>
+            </a:r>
+            <a:endParaRPr lang="en-US" sz="1100" dirty="0"/>
+          </a:p>
+        </p:txBody>
+      </p:sp>
+      <p:sp>
+        <p:nvSpPr>
+          <p:cNvPr id="3" name="Text 1"/>
+          <p:cNvSpPr/>
+          <p:nvPr/>
+        </p:nvSpPr>
+        <p:spPr>
+          <a:xfrm>
+            <a:off x="502920" y="548640"/>
+            <a:ext cx="8138160" cy="502920"/>
+          </a:xfrm>
+          <a:prstGeom prst="rect">
+            <a:avLst/>
+          </a:prstGeom>
+          <a:noFill/>
+          <a:ln/>
+        </p:spPr>
+        <p:txBody>
+          <a:bodyPr wrap="square" lIns="0" tIns="0" rIns="0" bIns="0" rtlCol="0" anchor="ctr"/>
+          <a:lstStyle/>
+          <a:p>
+            <a:pPr marL="0" indent="0">
+              <a:buNone/>
+            </a:pPr>
+            <a:r>
+              <a:rPr lang="en-US" sz="2700" b="1" dirty="0">
+                <a:solidFill>
+                  <a:srgbClr val="0B3C5D"/>
+                </a:solidFill>
+                <a:latin typeface="Trebuchet MS" pitchFamily="34" charset="0"/>
+                <a:ea typeface="Trebuchet MS" pitchFamily="34" charset="-122"/>
+                <a:cs typeface="Trebuchet MS" pitchFamily="34" charset="-120"/>
+              </a:rPr>
+              <a:t>CRISP-ML(Q): qué se hizo en cada fase</a:t>
+            </a:r>
+            <a:endParaRPr lang="en-US" sz="2700" dirty="0"/>
+          </a:p>
+        </p:txBody>
+      </p:sp>
+      <p:sp>
+        <p:nvSpPr>
+          <p:cNvPr id="4" name="Shape 2"/>
+          <p:cNvSpPr/>
+          <p:nvPr/>
+        </p:nvSpPr>
+        <p:spPr>
+          <a:xfrm>
+            <a:off x="502920" y="1371600"/>
+            <a:ext cx="2560320" cy="1417320"/>
+          </a:xfrm>
+          <a:prstGeom prst="roundRect">
+            <a:avLst>
+              <a:gd name="adj" fmla="val 3871"/>
+            </a:avLst>
+          </a:prstGeom>
+          <a:solidFill>
+            <a:srgbClr val="FFFFFF"/>
+          </a:solidFill>
+          <a:ln/>
+          <a:effectLst>
+            <a:outerShdw algn="bl" rotWithShape="0">
+              <a:srgbClr val="1A2530">
+                <a:alpha val="0"/>
+              </a:srgbClr>
+            </a:outerShdw>
+          </a:effectLst>
+        </p:spPr>
+      </p:sp>
+      <p:sp>
+        <p:nvSpPr>
+          <p:cNvPr id="5" name="Shape 3"/>
+          <p:cNvSpPr/>
+          <p:nvPr/>
+        </p:nvSpPr>
+        <p:spPr>
+          <a:xfrm>
+            <a:off x="649224" y="1508760"/>
+            <a:ext cx="292608" cy="292608"/>
+          </a:xfrm>
+          <a:prstGeom prst="ellipse">
+            <a:avLst/>
+          </a:prstGeom>
+          <a:solidFill>
+            <a:srgbClr val="0B3C5D"/>
+          </a:solidFill>
+          <a:ln/>
+        </p:spPr>
+      </p:sp>
+      <p:sp>
+        <p:nvSpPr>
+          <p:cNvPr id="6" name="Text 4"/>
+          <p:cNvSpPr/>
+          <p:nvPr/>
+        </p:nvSpPr>
+        <p:spPr>
+          <a:xfrm>
+            <a:off x="649224" y="1508760"/>
+            <a:ext cx="292608" cy="292608"/>
+          </a:xfrm>
+          <a:prstGeom prst="rect">
+            <a:avLst/>
+          </a:prstGeom>
+          <a:noFill/>
+          <a:ln/>
+        </p:spPr>
+        <p:txBody>
+          <a:bodyPr wrap="square" lIns="0" tIns="0" rIns="0" bIns="0" rtlCol="0" anchor="ctr"/>
+          <a:lstStyle/>
+          <a:p>
+            <a:pPr marL="0" indent="0" algn="ctr">
+              <a:buNone/>
+            </a:pPr>
+            <a:r>
+              <a:rPr lang="en-US" sz="1300" b="1" dirty="0">
+                <a:solidFill>
+                  <a:srgbClr val="FFFFFF"/>
+                </a:solidFill>
+                <a:latin typeface="Trebuchet MS" pitchFamily="34" charset="0"/>
+                <a:ea typeface="Trebuchet MS" pitchFamily="34" charset="-122"/>
+                <a:cs typeface="Trebuchet MS" pitchFamily="34" charset="-120"/>
+              </a:rPr>
+              <a:t>1</a:t>
+            </a:r>
+            <a:endParaRPr lang="en-US" sz="1300" dirty="0"/>
+          </a:p>
+        </p:txBody>
+      </p:sp>
+      <p:sp>
+        <p:nvSpPr>
+          <p:cNvPr id="7" name="Text 5"/>
+          <p:cNvSpPr/>
+          <p:nvPr/>
+        </p:nvSpPr>
+        <p:spPr>
+          <a:xfrm>
+            <a:off x="1033272" y="1508760"/>
+            <a:ext cx="1874520" cy="292608"/>
+          </a:xfrm>
+          <a:prstGeom prst="rect">
+            <a:avLst/>
+          </a:prstGeom>
+          <a:noFill/>
+          <a:ln/>
+        </p:spPr>
+        <p:txBody>
+          <a:bodyPr wrap="square" lIns="0" tIns="0" rIns="0" bIns="0" rtlCol="0" anchor="ctr"/>
+          <a:lstStyle/>
+          <a:p>
+            <a:pPr marL="0" indent="0">
+              <a:buNone/>
+            </a:pPr>
+            <a:r>
+              <a:rPr lang="en-US" sz="1300" b="1" dirty="0">
+                <a:solidFill>
+                  <a:srgbClr val="0B3C5D"/>
+                </a:solidFill>
+                <a:latin typeface="Trebuchet MS" pitchFamily="34" charset="0"/>
+                <a:ea typeface="Trebuchet MS" pitchFamily="34" charset="-122"/>
+                <a:cs typeface="Trebuchet MS" pitchFamily="34" charset="-120"/>
+              </a:rPr>
+              <a:t>Entender</a:t>
+            </a:r>
+            <a:endParaRPr lang="en-US" sz="1300" dirty="0"/>
+          </a:p>
+        </p:txBody>
+      </p:sp>
+      <p:sp>
+        <p:nvSpPr>
+          <p:cNvPr id="8" name="Text 6"/>
+          <p:cNvSpPr/>
+          <p:nvPr/>
+        </p:nvSpPr>
+        <p:spPr>
+          <a:xfrm>
+            <a:off x="667512" y="1847088"/>
+            <a:ext cx="2231136" cy="896112"/>
+          </a:xfrm>
+          <a:prstGeom prst="rect">
+            <a:avLst/>
+          </a:prstGeom>
+          <a:noFill/>
+          <a:ln/>
+        </p:spPr>
+        <p:txBody>
+          <a:bodyPr wrap="square" lIns="0" tIns="0" rIns="0" bIns="0" rtlCol="0" anchor="ctr"/>
+          <a:lstStyle/>
+          <a:p>
+            <a:pPr marL="0" indent="0">
+              <a:buNone/>
+            </a:pPr>
+            <a:r>
+              <a:rPr lang="en-US" sz="900" dirty="0">
+                <a:solidFill>
+                  <a:srgbClr val="2C3E50"/>
+                </a:solidFill>
+                <a:latin typeface="Calibri" pitchFamily="34" charset="0"/>
+                <a:ea typeface="Calibri" pitchFamily="34" charset="-122"/>
+                <a:cs typeface="Calibri" pitchFamily="34" charset="-120"/>
+              </a:rPr>
+              <a:t>El dolor del decisor sin panorama; 6 portales y 3 protocolos (Socrata, CKAN, DCAT) mapeados como fuentes.</a:t>
+            </a:r>
+            <a:endParaRPr lang="en-US" sz="900" dirty="0"/>
+          </a:p>
+        </p:txBody>
+      </p:sp>
+      <p:sp>
+        <p:nvSpPr>
+          <p:cNvPr id="9" name="Shape 7"/>
+          <p:cNvSpPr/>
+          <p:nvPr/>
+        </p:nvSpPr>
+        <p:spPr>
+          <a:xfrm>
+            <a:off x="3291840" y="1371600"/>
+            <a:ext cx="2560320" cy="1417320"/>
+          </a:xfrm>
+          <a:prstGeom prst="roundRect">
+            <a:avLst>
+              <a:gd name="adj" fmla="val 3871"/>
+            </a:avLst>
+          </a:prstGeom>
+          <a:solidFill>
+            <a:srgbClr val="FFFFFF"/>
+          </a:solidFill>
+          <a:ln/>
+          <a:effectLst>
+            <a:outerShdw algn="bl" rotWithShape="0">
+              <a:srgbClr val="1A2530">
+                <a:alpha val="0"/>
+              </a:srgbClr>
+            </a:outerShdw>
+          </a:effectLst>
+        </p:spPr>
+      </p:sp>
+      <p:sp>
+        <p:nvSpPr>
+          <p:cNvPr id="10" name="Shape 8"/>
+          <p:cNvSpPr/>
+          <p:nvPr/>
+        </p:nvSpPr>
+        <p:spPr>
+          <a:xfrm>
+            <a:off x="3438144" y="1508760"/>
+            <a:ext cx="292608" cy="292608"/>
+          </a:xfrm>
+          <a:prstGeom prst="ellipse">
+            <a:avLst/>
+          </a:prstGeom>
+          <a:solidFill>
+            <a:srgbClr val="0B3C5D"/>
+          </a:solidFill>
+          <a:ln/>
+        </p:spPr>
+      </p:sp>
+      <p:sp>
+        <p:nvSpPr>
+          <p:cNvPr id="11" name="Text 9"/>
+          <p:cNvSpPr/>
+          <p:nvPr/>
+        </p:nvSpPr>
+        <p:spPr>
+          <a:xfrm>
+            <a:off x="3438144" y="1508760"/>
+            <a:ext cx="292608" cy="292608"/>
+          </a:xfrm>
+          <a:prstGeom prst="rect">
+            <a:avLst/>
+          </a:prstGeom>
+          <a:noFill/>
+          <a:ln/>
+        </p:spPr>
+        <p:txBody>
+          <a:bodyPr wrap="square" lIns="0" tIns="0" rIns="0" bIns="0" rtlCol="0" anchor="ctr"/>
+          <a:lstStyle/>
+          <a:p>
+            <a:pPr marL="0" indent="0" algn="ctr">
+              <a:buNone/>
+            </a:pPr>
+            <a:r>
+              <a:rPr lang="en-US" sz="1300" b="1" dirty="0">
+                <a:solidFill>
+                  <a:srgbClr val="FFFFFF"/>
+                </a:solidFill>
+                <a:latin typeface="Trebuchet MS" pitchFamily="34" charset="0"/>
+                <a:ea typeface="Trebuchet MS" pitchFamily="34" charset="-122"/>
+                <a:cs typeface="Trebuchet MS" pitchFamily="34" charset="-120"/>
+              </a:rPr>
+              <a:t>2</a:t>
+            </a:r>
+            <a:endParaRPr lang="en-US" sz="1300" dirty="0"/>
+          </a:p>
+        </p:txBody>
+      </p:sp>
+      <p:sp>
+        <p:nvSpPr>
+          <p:cNvPr id="12" name="Text 10"/>
+          <p:cNvSpPr/>
+          <p:nvPr/>
+        </p:nvSpPr>
+        <p:spPr>
+          <a:xfrm>
+            <a:off x="3822192" y="1508760"/>
+            <a:ext cx="1874520" cy="292608"/>
+          </a:xfrm>
+          <a:prstGeom prst="rect">
+            <a:avLst/>
+          </a:prstGeom>
+          <a:noFill/>
+          <a:ln/>
+        </p:spPr>
+        <p:txBody>
+          <a:bodyPr wrap="square" lIns="0" tIns="0" rIns="0" bIns="0" rtlCol="0" anchor="ctr"/>
+          <a:lstStyle/>
+          <a:p>
+            <a:pPr marL="0" indent="0">
+              <a:buNone/>
+            </a:pPr>
+            <a:r>
+              <a:rPr lang="en-US" sz="1300" b="1" dirty="0">
+                <a:solidFill>
+                  <a:srgbClr val="0B3C5D"/>
+                </a:solidFill>
+                <a:latin typeface="Trebuchet MS" pitchFamily="34" charset="0"/>
+                <a:ea typeface="Trebuchet MS" pitchFamily="34" charset="-122"/>
+                <a:cs typeface="Trebuchet MS" pitchFamily="34" charset="-120"/>
+              </a:rPr>
+              <a:t>Preparar</a:t>
+            </a:r>
+            <a:endParaRPr lang="en-US" sz="1300" dirty="0"/>
+          </a:p>
+        </p:txBody>
+      </p:sp>
+      <p:sp>
+        <p:nvSpPr>
+          <p:cNvPr id="13" name="Text 11"/>
+          <p:cNvSpPr/>
+          <p:nvPr/>
+        </p:nvSpPr>
+        <p:spPr>
+          <a:xfrm>
+            <a:off x="3456432" y="1847088"/>
+            <a:ext cx="2231136" cy="896112"/>
+          </a:xfrm>
+          <a:prstGeom prst="rect">
+            <a:avLst/>
+          </a:prstGeom>
+          <a:noFill/>
+          <a:ln/>
+        </p:spPr>
+        <p:txBody>
+          <a:bodyPr wrap="square" lIns="0" tIns="0" rIns="0" bIns="0" rtlCol="0" anchor="ctr"/>
+          <a:lstStyle/>
+          <a:p>
+            <a:pPr marL="0" indent="0">
+              <a:buNone/>
+            </a:pPr>
+            <a:r>
+              <a:rPr lang="en-US" sz="900" dirty="0">
+                <a:solidFill>
+                  <a:srgbClr val="2C3E50"/>
+                </a:solidFill>
+                <a:latin typeface="Calibri" pitchFamily="34" charset="0"/>
+                <a:ea typeface="Calibri" pitchFamily="34" charset="-122"/>
+                <a:cs typeface="Calibri" pitchFamily="34" charset="-120"/>
+              </a:rPr>
+              <a:t>ETL diario con upsert idempotente (0 duplicados), clasificación Ley 1712, curación de columnas e inferencia DIVIPOLA.</a:t>
+            </a:r>
+            <a:endParaRPr lang="en-US" sz="900" dirty="0"/>
+          </a:p>
+        </p:txBody>
+      </p:sp>
+      <p:sp>
+        <p:nvSpPr>
+          <p:cNvPr id="14" name="Shape 12"/>
+          <p:cNvSpPr/>
+          <p:nvPr/>
+        </p:nvSpPr>
+        <p:spPr>
+          <a:xfrm>
+            <a:off x="6080760" y="1371600"/>
+            <a:ext cx="2560320" cy="1417320"/>
+          </a:xfrm>
+          <a:prstGeom prst="roundRect">
+            <a:avLst>
+              <a:gd name="adj" fmla="val 3871"/>
+            </a:avLst>
+          </a:prstGeom>
+          <a:solidFill>
+            <a:srgbClr val="FFFFFF"/>
+          </a:solidFill>
+          <a:ln/>
+          <a:effectLst>
+            <a:outerShdw algn="bl" rotWithShape="0">
+              <a:srgbClr val="1A2530">
+                <a:alpha val="0"/>
+              </a:srgbClr>
+            </a:outerShdw>
+          </a:effectLst>
+        </p:spPr>
+      </p:sp>
+      <p:sp>
+        <p:nvSpPr>
+          <p:cNvPr id="15" name="Shape 13"/>
+          <p:cNvSpPr/>
+          <p:nvPr/>
+        </p:nvSpPr>
+        <p:spPr>
+          <a:xfrm>
+            <a:off x="6227064" y="1508760"/>
+            <a:ext cx="292608" cy="292608"/>
+          </a:xfrm>
+          <a:prstGeom prst="ellipse">
+            <a:avLst/>
+          </a:prstGeom>
+          <a:solidFill>
+            <a:srgbClr val="0B3C5D"/>
+          </a:solidFill>
+          <a:ln/>
+        </p:spPr>
+      </p:sp>
+      <p:sp>
+        <p:nvSpPr>
+          <p:cNvPr id="16" name="Text 14"/>
+          <p:cNvSpPr/>
+          <p:nvPr/>
+        </p:nvSpPr>
+        <p:spPr>
+          <a:xfrm>
+            <a:off x="6227064" y="1508760"/>
+            <a:ext cx="292608" cy="292608"/>
+          </a:xfrm>
+          <a:prstGeom prst="rect">
+            <a:avLst/>
+          </a:prstGeom>
+          <a:noFill/>
+          <a:ln/>
+        </p:spPr>
+        <p:txBody>
+          <a:bodyPr wrap="square" lIns="0" tIns="0" rIns="0" bIns="0" rtlCol="0" anchor="ctr"/>
+          <a:lstStyle/>
+          <a:p>
+            <a:pPr marL="0" indent="0" algn="ctr">
+              <a:buNone/>
+            </a:pPr>
+            <a:r>
+              <a:rPr lang="en-US" sz="1300" b="1" dirty="0">
+                <a:solidFill>
+                  <a:srgbClr val="FFFFFF"/>
+                </a:solidFill>
+                <a:latin typeface="Trebuchet MS" pitchFamily="34" charset="0"/>
+                <a:ea typeface="Trebuchet MS" pitchFamily="34" charset="-122"/>
+                <a:cs typeface="Trebuchet MS" pitchFamily="34" charset="-120"/>
+              </a:rPr>
+              <a:t>3</a:t>
+            </a:r>
+            <a:endParaRPr lang="en-US" sz="1300" dirty="0"/>
+          </a:p>
+        </p:txBody>
+      </p:sp>
+      <p:sp>
+        <p:nvSpPr>
+          <p:cNvPr id="17" name="Text 15"/>
+          <p:cNvSpPr/>
+          <p:nvPr/>
+        </p:nvSpPr>
+        <p:spPr>
+          <a:xfrm>
+            <a:off x="6611112" y="1508760"/>
+            <a:ext cx="1874520" cy="292608"/>
+          </a:xfrm>
+          <a:prstGeom prst="rect">
+            <a:avLst/>
+          </a:prstGeom>
+          <a:noFill/>
+          <a:ln/>
+        </p:spPr>
+        <p:txBody>
+          <a:bodyPr wrap="square" lIns="0" tIns="0" rIns="0" bIns="0" rtlCol="0" anchor="ctr"/>
+          <a:lstStyle/>
+          <a:p>
+            <a:pPr marL="0" indent="0">
+              <a:buNone/>
+            </a:pPr>
+            <a:r>
+              <a:rPr lang="en-US" sz="1300" b="1" dirty="0">
+                <a:solidFill>
+                  <a:srgbClr val="0B3C5D"/>
+                </a:solidFill>
+                <a:latin typeface="Trebuchet MS" pitchFamily="34" charset="0"/>
+                <a:ea typeface="Trebuchet MS" pitchFamily="34" charset="-122"/>
+                <a:cs typeface="Trebuchet MS" pitchFamily="34" charset="-120"/>
+              </a:rPr>
+              <a:t>Modelar</a:t>
+            </a:r>
+            <a:endParaRPr lang="en-US" sz="1300" dirty="0"/>
+          </a:p>
+        </p:txBody>
+      </p:sp>
+      <p:sp>
+        <p:nvSpPr>
+          <p:cNvPr id="18" name="Text 16"/>
+          <p:cNvSpPr/>
+          <p:nvPr/>
+        </p:nvSpPr>
+        <p:spPr>
+          <a:xfrm>
+            <a:off x="6245352" y="1847088"/>
+            <a:ext cx="2231136" cy="896112"/>
+          </a:xfrm>
+          <a:prstGeom prst="rect">
+            <a:avLst/>
+          </a:prstGeom>
+          <a:noFill/>
+          <a:ln/>
+        </p:spPr>
+        <p:txBody>
+          <a:bodyPr wrap="square" lIns="0" tIns="0" rIns="0" bIns="0" rtlCol="0" anchor="ctr"/>
+          <a:lstStyle/>
+          <a:p>
+            <a:pPr marL="0" indent="0">
+              <a:buNone/>
+            </a:pPr>
+            <a:r>
+              <a:rPr lang="en-US" sz="900" dirty="0">
+                <a:solidFill>
+                  <a:srgbClr val="2C3E50"/>
+                </a:solidFill>
+                <a:latin typeface="Calibri" pitchFamily="34" charset="0"/>
+                <a:ea typeface="Calibri" pitchFamily="34" charset="-122"/>
+                <a:cs typeface="Calibri" pitchFamily="34" charset="-120"/>
+              </a:rPr>
+              <a:t>NL2SQL generativo + verificación de 3 capas; embeddings e5 + ChromaDB; clasificador de intención con 6 tipos de respuesta.</a:t>
+            </a:r>
+            <a:endParaRPr lang="en-US" sz="900" dirty="0"/>
+          </a:p>
+        </p:txBody>
+      </p:sp>
+      <p:sp>
+        <p:nvSpPr>
+          <p:cNvPr id="19" name="Shape 17"/>
+          <p:cNvSpPr/>
+          <p:nvPr/>
+        </p:nvSpPr>
+        <p:spPr>
+          <a:xfrm>
+            <a:off x="502920" y="2944368"/>
+            <a:ext cx="2560320" cy="1417320"/>
+          </a:xfrm>
+          <a:prstGeom prst="roundRect">
+            <a:avLst>
+              <a:gd name="adj" fmla="val 3871"/>
+            </a:avLst>
+          </a:prstGeom>
+          <a:solidFill>
+            <a:srgbClr val="FFFFFF"/>
+          </a:solidFill>
+          <a:ln/>
+          <a:effectLst>
+            <a:outerShdw algn="bl" rotWithShape="0">
+              <a:srgbClr val="1A2530">
+                <a:alpha val="0"/>
+              </a:srgbClr>
+            </a:outerShdw>
+          </a:effectLst>
+        </p:spPr>
+      </p:sp>
+      <p:sp>
+        <p:nvSpPr>
+          <p:cNvPr id="20" name="Shape 18"/>
+          <p:cNvSpPr/>
+          <p:nvPr/>
+        </p:nvSpPr>
+        <p:spPr>
+          <a:xfrm>
+            <a:off x="649224" y="3081528"/>
+            <a:ext cx="292608" cy="292608"/>
+          </a:xfrm>
+          <a:prstGeom prst="ellipse">
+            <a:avLst/>
+          </a:prstGeom>
+          <a:solidFill>
+            <a:srgbClr val="0B3C5D"/>
+          </a:solidFill>
+          <a:ln/>
+        </p:spPr>
+      </p:sp>
+      <p:sp>
+        <p:nvSpPr>
+          <p:cNvPr id="21" name="Text 19"/>
+          <p:cNvSpPr/>
+          <p:nvPr/>
+        </p:nvSpPr>
+        <p:spPr>
+          <a:xfrm>
+            <a:off x="649224" y="3081528"/>
+            <a:ext cx="292608" cy="292608"/>
+          </a:xfrm>
+          <a:prstGeom prst="rect">
+            <a:avLst/>
+          </a:prstGeom>
+          <a:noFill/>
+          <a:ln/>
+        </p:spPr>
+        <p:txBody>
+          <a:bodyPr wrap="square" lIns="0" tIns="0" rIns="0" bIns="0" rtlCol="0" anchor="ctr"/>
+          <a:lstStyle/>
+          <a:p>
+            <a:pPr marL="0" indent="0" algn="ctr">
+              <a:buNone/>
+            </a:pPr>
+            <a:r>
+              <a:rPr lang="en-US" sz="1300" b="1" dirty="0">
+                <a:solidFill>
+                  <a:srgbClr val="FFFFFF"/>
+                </a:solidFill>
+                <a:latin typeface="Trebuchet MS" pitchFamily="34" charset="0"/>
+                <a:ea typeface="Trebuchet MS" pitchFamily="34" charset="-122"/>
+                <a:cs typeface="Trebuchet MS" pitchFamily="34" charset="-120"/>
+              </a:rPr>
+              <a:t>4</a:t>
+            </a:r>
+            <a:endParaRPr lang="en-US" sz="1300" dirty="0"/>
+          </a:p>
+        </p:txBody>
+      </p:sp>
+      <p:sp>
+        <p:nvSpPr>
+          <p:cNvPr id="22" name="Text 20"/>
+          <p:cNvSpPr/>
+          <p:nvPr/>
+        </p:nvSpPr>
+        <p:spPr>
+          <a:xfrm>
+            <a:off x="1033272" y="3081528"/>
+            <a:ext cx="1874520" cy="292608"/>
+          </a:xfrm>
+          <a:prstGeom prst="rect">
+            <a:avLst/>
+          </a:prstGeom>
+          <a:noFill/>
+          <a:ln/>
+        </p:spPr>
+        <p:txBody>
+          <a:bodyPr wrap="square" lIns="0" tIns="0" rIns="0" bIns="0" rtlCol="0" anchor="ctr"/>
+          <a:lstStyle/>
+          <a:p>
+            <a:pPr marL="0" indent="0">
+              <a:buNone/>
+            </a:pPr>
+            <a:r>
+              <a:rPr lang="en-US" sz="1300" b="1" dirty="0">
+                <a:solidFill>
+                  <a:srgbClr val="0B3C5D"/>
+                </a:solidFill>
+                <a:latin typeface="Trebuchet MS" pitchFamily="34" charset="0"/>
+                <a:ea typeface="Trebuchet MS" pitchFamily="34" charset="-122"/>
+                <a:cs typeface="Trebuchet MS" pitchFamily="34" charset="-120"/>
+              </a:rPr>
+              <a:t>Evaluar</a:t>
+            </a:r>
+            <a:endParaRPr lang="en-US" sz="1300" dirty="0"/>
+          </a:p>
+        </p:txBody>
+      </p:sp>
+      <p:sp>
+        <p:nvSpPr>
+          <p:cNvPr id="23" name="Text 21"/>
+          <p:cNvSpPr/>
+          <p:nvPr/>
+        </p:nvSpPr>
+        <p:spPr>
+          <a:xfrm>
+            <a:off x="667512" y="3419856"/>
+            <a:ext cx="2231136" cy="896112"/>
+          </a:xfrm>
+          <a:prstGeom prst="rect">
+            <a:avLst/>
+          </a:prstGeom>
+          <a:noFill/>
+          <a:ln/>
+        </p:spPr>
+        <p:txBody>
+          <a:bodyPr wrap="square" lIns="0" tIns="0" rIns="0" bIns="0" rtlCol="0" anchor="ctr"/>
+          <a:lstStyle/>
+          <a:p>
+            <a:pPr marL="0" indent="0">
+              <a:buNone/>
+            </a:pPr>
+            <a:r>
+              <a:rPr lang="en-US" sz="900" dirty="0">
+                <a:solidFill>
+                  <a:srgbClr val="2C3E50"/>
+                </a:solidFill>
+                <a:latin typeface="Calibri" pitchFamily="34" charset="0"/>
+                <a:ea typeface="Calibri" pitchFamily="34" charset="-122"/>
+                <a:cs typeface="Calibri" pitchFamily="34" charset="-120"/>
+              </a:rPr>
+              <a:t>Golden sets versionados (18/18 y 38/38, 0 falsos) + ciclo ciudadano: 50 preguntas pre-registradas; 39/50 mejoraron de dataset.</a:t>
+            </a:r>
+            <a:endParaRPr lang="en-US" sz="900" dirty="0"/>
+          </a:p>
+        </p:txBody>
+      </p:sp>
+      <p:sp>
+        <p:nvSpPr>
+          <p:cNvPr id="24" name="Shape 22"/>
+          <p:cNvSpPr/>
+          <p:nvPr/>
+        </p:nvSpPr>
+        <p:spPr>
+          <a:xfrm>
+            <a:off x="3291840" y="2944368"/>
+            <a:ext cx="2560320" cy="1417320"/>
+          </a:xfrm>
+          <a:prstGeom prst="roundRect">
+            <a:avLst>
+              <a:gd name="adj" fmla="val 3871"/>
+            </a:avLst>
+          </a:prstGeom>
+          <a:solidFill>
+            <a:srgbClr val="FFFFFF"/>
+          </a:solidFill>
+          <a:ln/>
+          <a:effectLst>
+            <a:outerShdw algn="bl" rotWithShape="0">
+              <a:srgbClr val="1A2530">
+                <a:alpha val="0"/>
+              </a:srgbClr>
+            </a:outerShdw>
+          </a:effectLst>
+        </p:spPr>
+      </p:sp>
+      <p:sp>
+        <p:nvSpPr>
+          <p:cNvPr id="25" name="Shape 23"/>
+          <p:cNvSpPr/>
+          <p:nvPr/>
+        </p:nvSpPr>
+        <p:spPr>
+          <a:xfrm>
+            <a:off x="3438144" y="3081528"/>
+            <a:ext cx="292608" cy="292608"/>
+          </a:xfrm>
+          <a:prstGeom prst="ellipse">
+            <a:avLst/>
+          </a:prstGeom>
+          <a:solidFill>
+            <a:srgbClr val="0B3C5D"/>
+          </a:solidFill>
+          <a:ln/>
+        </p:spPr>
+      </p:sp>
+      <p:sp>
+        <p:nvSpPr>
+          <p:cNvPr id="26" name="Text 24"/>
+          <p:cNvSpPr/>
+          <p:nvPr/>
+        </p:nvSpPr>
+        <p:spPr>
+          <a:xfrm>
+            <a:off x="3438144" y="3081528"/>
+            <a:ext cx="292608" cy="292608"/>
+          </a:xfrm>
+          <a:prstGeom prst="rect">
+            <a:avLst/>
+          </a:prstGeom>
+          <a:noFill/>
+          <a:ln/>
+        </p:spPr>
+        <p:txBody>
+          <a:bodyPr wrap="square" lIns="0" tIns="0" rIns="0" bIns="0" rtlCol="0" anchor="ctr"/>
+          <a:lstStyle/>
+          <a:p>
+            <a:pPr marL="0" indent="0" algn="ctr">
+              <a:buNone/>
+            </a:pPr>
+            <a:r>
+              <a:rPr lang="en-US" sz="1300" b="1" dirty="0">
+                <a:solidFill>
+                  <a:srgbClr val="FFFFFF"/>
+                </a:solidFill>
+                <a:latin typeface="Trebuchet MS" pitchFamily="34" charset="0"/>
+                <a:ea typeface="Trebuchet MS" pitchFamily="34" charset="-122"/>
+                <a:cs typeface="Trebuchet MS" pitchFamily="34" charset="-120"/>
+              </a:rPr>
+              <a:t>5</a:t>
+            </a:r>
+            <a:endParaRPr lang="en-US" sz="1300" dirty="0"/>
+          </a:p>
+        </p:txBody>
+      </p:sp>
+      <p:sp>
+        <p:nvSpPr>
+          <p:cNvPr id="27" name="Text 25"/>
+          <p:cNvSpPr/>
+          <p:nvPr/>
+        </p:nvSpPr>
+        <p:spPr>
+          <a:xfrm>
+            <a:off x="3822192" y="3081528"/>
+            <a:ext cx="1874520" cy="292608"/>
+          </a:xfrm>
+          <a:prstGeom prst="rect">
+            <a:avLst/>
+          </a:prstGeom>
+          <a:noFill/>
+          <a:ln/>
+        </p:spPr>
+        <p:txBody>
+          <a:bodyPr wrap="square" lIns="0" tIns="0" rIns="0" bIns="0" rtlCol="0" anchor="ctr"/>
+          <a:lstStyle/>
+          <a:p>
+            <a:pPr marL="0" indent="0">
+              <a:buNone/>
+            </a:pPr>
+            <a:r>
+              <a:rPr lang="en-US" sz="1300" b="1" dirty="0">
+                <a:solidFill>
+                  <a:srgbClr val="0B3C5D"/>
+                </a:solidFill>
+                <a:latin typeface="Trebuchet MS" pitchFamily="34" charset="0"/>
+                <a:ea typeface="Trebuchet MS" pitchFamily="34" charset="-122"/>
+                <a:cs typeface="Trebuchet MS" pitchFamily="34" charset="-120"/>
+              </a:rPr>
+              <a:t>Desplegar</a:t>
+            </a:r>
+            <a:endParaRPr lang="en-US" sz="1300" dirty="0"/>
+          </a:p>
+        </p:txBody>
+      </p:sp>
+      <p:sp>
+        <p:nvSpPr>
+          <p:cNvPr id="28" name="Text 26"/>
+          <p:cNvSpPr/>
+          <p:nvPr/>
+        </p:nvSpPr>
+        <p:spPr>
+          <a:xfrm>
+            <a:off x="3456432" y="3419856"/>
+            <a:ext cx="2231136" cy="896112"/>
+          </a:xfrm>
+          <a:prstGeom prst="rect">
+            <a:avLst/>
+          </a:prstGeom>
+          <a:noFill/>
+          <a:ln/>
+        </p:spPr>
+        <p:txBody>
+          <a:bodyPr wrap="square" lIns="0" tIns="0" rIns="0" bIns="0" rtlCol="0" anchor="ctr"/>
+          <a:lstStyle/>
+          <a:p>
+            <a:pPr marL="0" indent="0">
+              <a:buNone/>
+            </a:pPr>
+            <a:r>
+              <a:rPr lang="en-US" sz="900" dirty="0">
+                <a:solidFill>
+                  <a:srgbClr val="2C3E50"/>
+                </a:solidFill>
+                <a:latin typeface="Calibri" pitchFamily="34" charset="0"/>
+                <a:ea typeface="Calibri" pitchFamily="34" charset="-122"/>
+                <a:cs typeface="Calibri" pitchFamily="34" charset="-120"/>
+              </a:rPr>
+              <a:t>Producción en datosvivos.co con Docker Compose reproducible; imagen horneada; guía de validación para el jurado.</a:t>
+            </a:r>
+            <a:endParaRPr lang="en-US" sz="900" dirty="0"/>
+          </a:p>
+        </p:txBody>
+      </p:sp>
+      <p:sp>
+        <p:nvSpPr>
+          <p:cNvPr id="29" name="Shape 27"/>
+          <p:cNvSpPr/>
+          <p:nvPr/>
+        </p:nvSpPr>
+        <p:spPr>
+          <a:xfrm>
+            <a:off x="6080760" y="2944368"/>
+            <a:ext cx="2560320" cy="1417320"/>
+          </a:xfrm>
+          <a:prstGeom prst="roundRect">
+            <a:avLst>
+              <a:gd name="adj" fmla="val 3871"/>
+            </a:avLst>
+          </a:prstGeom>
+          <a:solidFill>
+            <a:srgbClr val="FFFFFF"/>
+          </a:solidFill>
+          <a:ln/>
+          <a:effectLst>
+            <a:outerShdw algn="bl" rotWithShape="0">
+              <a:srgbClr val="1A2530">
+                <a:alpha val="0"/>
+              </a:srgbClr>
+            </a:outerShdw>
+          </a:effectLst>
+        </p:spPr>
+      </p:sp>
+      <p:sp>
+        <p:nvSpPr>
+          <p:cNvPr id="30" name="Shape 28"/>
+          <p:cNvSpPr/>
+          <p:nvPr/>
+        </p:nvSpPr>
+        <p:spPr>
+          <a:xfrm>
+            <a:off x="6227064" y="3081528"/>
+            <a:ext cx="292608" cy="292608"/>
+          </a:xfrm>
+          <a:prstGeom prst="ellipse">
+            <a:avLst/>
+          </a:prstGeom>
+          <a:solidFill>
+            <a:srgbClr val="0B3C5D"/>
+          </a:solidFill>
+          <a:ln/>
+        </p:spPr>
+      </p:sp>
+      <p:sp>
+        <p:nvSpPr>
+          <p:cNvPr id="31" name="Text 29"/>
+          <p:cNvSpPr/>
+          <p:nvPr/>
+        </p:nvSpPr>
+        <p:spPr>
+          <a:xfrm>
+            <a:off x="6227064" y="3081528"/>
+            <a:ext cx="292608" cy="292608"/>
+          </a:xfrm>
+          <a:prstGeom prst="rect">
+            <a:avLst/>
+          </a:prstGeom>
+          <a:noFill/>
+          <a:ln/>
+        </p:spPr>
+        <p:txBody>
+          <a:bodyPr wrap="square" lIns="0" tIns="0" rIns="0" bIns="0" rtlCol="0" anchor="ctr"/>
+          <a:lstStyle/>
+          <a:p>
+            <a:pPr marL="0" indent="0" algn="ctr">
+              <a:buNone/>
+            </a:pPr>
+            <a:r>
+              <a:rPr lang="en-US" sz="1300" b="1" dirty="0">
+                <a:solidFill>
+                  <a:srgbClr val="FFFFFF"/>
+                </a:solidFill>
+                <a:latin typeface="Trebuchet MS" pitchFamily="34" charset="0"/>
+                <a:ea typeface="Trebuchet MS" pitchFamily="34" charset="-122"/>
+                <a:cs typeface="Trebuchet MS" pitchFamily="34" charset="-120"/>
+              </a:rPr>
+              <a:t>6</a:t>
+            </a:r>
+            <a:endParaRPr lang="en-US" sz="1300" dirty="0"/>
+          </a:p>
+        </p:txBody>
+      </p:sp>
+      <p:sp>
+        <p:nvSpPr>
+          <p:cNvPr id="32" name="Text 30"/>
+          <p:cNvSpPr/>
+          <p:nvPr/>
+        </p:nvSpPr>
+        <p:spPr>
+          <a:xfrm>
+            <a:off x="6611112" y="3081528"/>
+            <a:ext cx="1874520" cy="292608"/>
+          </a:xfrm>
+          <a:prstGeom prst="rect">
+            <a:avLst/>
+          </a:prstGeom>
+          <a:noFill/>
+          <a:ln/>
+        </p:spPr>
+        <p:txBody>
+          <a:bodyPr wrap="square" lIns="0" tIns="0" rIns="0" bIns="0" rtlCol="0" anchor="ctr"/>
+          <a:lstStyle/>
+          <a:p>
+            <a:pPr marL="0" indent="0">
+              <a:buNone/>
+            </a:pPr>
+            <a:r>
+              <a:rPr lang="en-US" sz="1300" b="1" dirty="0">
+                <a:solidFill>
+                  <a:srgbClr val="0B3C5D"/>
+                </a:solidFill>
+                <a:latin typeface="Trebuchet MS" pitchFamily="34" charset="0"/>
+                <a:ea typeface="Trebuchet MS" pitchFamily="34" charset="-122"/>
+                <a:cs typeface="Trebuchet MS" pitchFamily="34" charset="-120"/>
+              </a:rPr>
+              <a:t>Monitorear (Q)</a:t>
+            </a:r>
+            <a:endParaRPr lang="en-US" sz="1300" dirty="0"/>
+          </a:p>
+        </p:txBody>
+      </p:sp>
+      <p:sp>
+        <p:nvSpPr>
+          <p:cNvPr id="33" name="Text 31"/>
+          <p:cNvSpPr/>
+          <p:nvPr/>
+        </p:nvSpPr>
+        <p:spPr>
+          <a:xfrm>
+            <a:off x="6245352" y="3419856"/>
+            <a:ext cx="2231136" cy="896112"/>
+          </a:xfrm>
+          <a:prstGeom prst="rect">
+            <a:avLst/>
+          </a:prstGeom>
+          <a:noFill/>
+          <a:ln/>
+        </p:spPr>
+        <p:txBody>
+          <a:bodyPr wrap="square" lIns="0" tIns="0" rIns="0" bIns="0" rtlCol="0" anchor="ctr"/>
+          <a:lstStyle/>
+          <a:p>
+            <a:pPr marL="0" indent="0">
+              <a:buNone/>
+            </a:pPr>
+            <a:r>
+              <a:rPr lang="en-US" sz="900" dirty="0">
+                <a:solidFill>
+                  <a:srgbClr val="2C3E50"/>
+                </a:solidFill>
+                <a:latin typeface="Calibri" pitchFamily="34" charset="0"/>
+                <a:ea typeface="Calibri" pitchFamily="34" charset="-122"/>
+                <a:cs typeface="Calibri" pitchFamily="34" charset="-120"/>
+              </a:rPr>
+              <a:t>La calidad deriva del catálogo vivo: reindex nocturno, re-clasificación continua y telemetría anónima de lo consultado.</a:t>
+            </a:r>
+            <a:endParaRPr lang="en-US" sz="900" dirty="0"/>
+          </a:p>
+        </p:txBody>
+      </p:sp>
+      <p:sp>
+        <p:nvSpPr>
+          <p:cNvPr id="34" name="Text 32"/>
+          <p:cNvSpPr/>
+          <p:nvPr/>
+        </p:nvSpPr>
+        <p:spPr>
+          <a:xfrm>
+            <a:off x="502920" y="4553712"/>
+            <a:ext cx="8138160" cy="274320"/>
+          </a:xfrm>
+          <a:prstGeom prst="rect">
+            <a:avLst/>
+          </a:prstGeom>
+          <a:noFill/>
+          <a:ln/>
+        </p:spPr>
+        <p:txBody>
+          <a:bodyPr wrap="square" lIns="0" tIns="0" rIns="0" bIns="0" rtlCol="0" anchor="ctr"/>
+          <a:lstStyle/>
+          <a:p>
+            <a:pPr marL="0" indent="0" algn="ctr">
+              <a:buNone/>
+            </a:pPr>
+            <a:r>
+              <a:rPr lang="en-US" sz="1050" b="1" dirty="0">
+                <a:solidFill>
+                  <a:srgbClr val="1ABC9C"/>
+                </a:solidFill>
+                <a:latin typeface="Trebuchet MS" pitchFamily="34" charset="0"/>
+                <a:ea typeface="Trebuchet MS" pitchFamily="34" charset="-122"/>
+                <a:cs typeface="Trebuchet MS" pitchFamily="34" charset="-120"/>
+              </a:rPr>
+              <a:t>La adaptación central: en vez de entrenar y congelar un modelo, cada consulta vive su propio ciclo — generación (LLM), verificación (código), ejecución.</a:t>
+            </a:r>
+            <a:endParaRPr lang="en-US" sz="1050" dirty="0"/>
+          </a:p>
+        </p:txBody>
+      </p:sp>
+      <p:sp>
+        <p:nvSpPr>
+          <p:cNvPr id="35" name="Text 33"/>
+          <p:cNvSpPr/>
+          <p:nvPr/>
+        </p:nvSpPr>
+        <p:spPr>
+          <a:xfrm>
+            <a:off x="502920" y="4832604"/>
+            <a:ext cx="7680960" cy="228600"/>
+          </a:xfrm>
+          <a:prstGeom prst="rect">
+            <a:avLst/>
+          </a:prstGeom>
+          <a:noFill/>
+          <a:ln/>
+        </p:spPr>
+        <p:txBody>
+          <a:bodyPr wrap="square" lIns="0" tIns="0" rIns="0" bIns="0" rtlCol="0" anchor="ctr"/>
+          <a:lstStyle/>
+          <a:p>
+            <a:pPr marL="0" indent="0">
+              <a:buNone/>
+            </a:pPr>
+            <a:r>
+              <a:rPr lang="en-US" sz="850" b="1" dirty="0">
+                <a:solidFill>
+                  <a:srgbClr val="0B3C5D"/>
+                </a:solidFill>
+                <a:latin typeface="Calibri" pitchFamily="34" charset="0"/>
+                <a:ea typeface="Calibri" pitchFamily="34" charset="-122"/>
+                <a:cs typeface="Calibri" pitchFamily="34" charset="-120"/>
+              </a:rPr>
+              <a:t>DatosVivos · datosvivos.co</a:t>
+            </a:r>
+            <a:r>
+              <a:rPr lang="en-US" sz="850" dirty="0">
+                <a:solidFill>
+                  <a:srgbClr val="7F8C8D"/>
+                </a:solidFill>
+                <a:latin typeface="Calibri" pitchFamily="34" charset="0"/>
+                <a:ea typeface="Calibri" pitchFamily="34" charset="-122"/>
+                <a:cs typeface="Calibri" pitchFamily="34" charset="-120"/>
+              </a:rPr>
+              <a:t>   |   Datos al Ecosistema 2026 · Equipo 93 · Reto 7 · Nivel Avanzado</a:t>
+            </a:r>
+            <a:endParaRPr lang="en-US" sz="850" dirty="0"/>
+          </a:p>
+        </p:txBody>
+      </p:sp>
+      <p:sp>
+        <p:nvSpPr>
+          <p:cNvPr id="36" name="Text 34"/>
+          <p:cNvSpPr/>
+          <p:nvPr/>
+        </p:nvSpPr>
+        <p:spPr>
+          <a:xfrm>
+            <a:off x="8275320" y="4832604"/>
+            <a:ext cx="365760" cy="228600"/>
+          </a:xfrm>
+          <a:prstGeom prst="rect">
+            <a:avLst/>
+          </a:prstGeom>
+          <a:noFill/>
+          <a:ln/>
+        </p:spPr>
+        <p:txBody>
+          <a:bodyPr wrap="square" lIns="0" tIns="0" rIns="0" bIns="0" rtlCol="0" anchor="ctr"/>
+          <a:lstStyle/>
+          <a:p>
+            <a:pPr marL="0" indent="0" algn="r">
+              <a:buNone/>
+            </a:pPr>
+            <a:r>
+              <a:rPr lang="en-US" sz="850" dirty="0">
+                <a:solidFill>
+                  <a:srgbClr val="7F8C8D"/>
+                </a:solidFill>
+                <a:latin typeface="Calibri" pitchFamily="34" charset="0"/>
+                <a:ea typeface="Calibri" pitchFamily="34" charset="-122"/>
+                <a:cs typeface="Calibri" pitchFamily="34" charset="-120"/>
+              </a:rPr>
+              <a:t>09</a:t>
+            </a:r>
+            <a:endParaRPr lang="en-US" sz="850" dirty="0"/>
+          </a:p>
+        </p:txBody>
+      </p:sp>
+      <p:pic>
+        <p:nvPicPr>
+          <p:cNvPr id="37" name="Graphic 36" descr="Logotipo de la Agencia Nacional de Infraestructura">
+            <a:extLst>
+              <a:ext uri="{FF2B5EF4-FFF2-40B4-BE49-F238E27FC236}">
+                <a16:creationId xmlns:a16="http://schemas.microsoft.com/office/drawing/2014/main" id="{F565F3C4-3574-18E0-8951-540E8328D8E3}"/>
+              </a:ext>
+            </a:extLst>
+          </p:cNvPr>
+          <p:cNvPicPr>
+            <a:picLocks noChangeAspect="1"/>
+          </p:cNvPicPr>
+          <p:nvPr/>
+        </p:nvPicPr>
+        <p:blipFill>
+          <a:blip>
+            <a:extLst>
+              <a:ext uri="{96DAC541-7B7A-43D3-8B79-37D633B846F1}">
+                <asvg:svgBlip xmlns:asvg="http://schemas.microsoft.com/office/drawing/2016/SVG/main" r:embed="rId3"/>
+              </a:ext>
+            </a:extLst>
+          </a:blip>
+          <a:stretch>
+            <a:fillRect/>
+          </a:stretch>
+        </p:blipFill>
+        <p:spPr>
+          <a:xfrm>
+            <a:off x="8298180" y="82296"/>
+            <a:ext cx="685800" cy="927100"/>
+          </a:xfrm>
+          <a:prstGeom prst="rect">
+            <a:avLst/>
+          </a:prstGeom>
+        </p:spPr>
+      </p:pic>
+      <p:pic>
+        <p:nvPicPr>
+          <p:cNvPr id="38" name="Graphic 37" descr="Imagen logo mintic">
+            <a:extLst>
+              <a:ext uri="{FF2B5EF4-FFF2-40B4-BE49-F238E27FC236}">
+                <a16:creationId xmlns:a16="http://schemas.microsoft.com/office/drawing/2014/main" id="{BC8FB032-1B8C-0567-5E64-47E977005B64}"/>
+              </a:ext>
+            </a:extLst>
+          </p:cNvPr>
+          <p:cNvPicPr>
+            <a:picLocks noChangeAspect="1"/>
+          </p:cNvPicPr>
+          <p:nvPr/>
+        </p:nvPicPr>
+        <p:blipFill>
+          <a:blip>
+            <a:extLst>
+              <a:ext uri="{96DAC541-7B7A-43D3-8B79-37D633B846F1}">
+                <asvg:svgBlip xmlns:asvg="http://schemas.microsoft.com/office/drawing/2016/SVG/main" r:embed="rId4"/>
+              </a:ext>
+            </a:extLst>
+          </a:blip>
+          <a:stretch>
+            <a:fillRect/>
+          </a:stretch>
+        </p:blipFill>
+        <p:spPr>
+          <a:xfrm>
+            <a:off x="7777480" y="146867"/>
+            <a:ext cx="436217" cy="797958"/>
+          </a:xfrm>
+          <a:prstGeom prst="rect">
+            <a:avLst/>
+          </a:prstGeom>
+        </p:spPr>
+      </p:pic>
+    </p:spTree>
+  </p:cSld>
+  <p:clrMapOvr>
+    <a:masterClrMapping/>
+  </p:clrMapOvr>
+</p:sld>
+</file>
+
+<file path=ppt/slides/slide11.xml><?xml version="1.0" encoding="utf-8"?>
 <p:sld xmlns:a="http://schemas.openxmlformats.org/drawingml/2006/main" xmlns:r="http://schemas.openxmlformats.org/officeDocument/2006/relationships" xmlns:p="http://schemas.openxmlformats.org/presentationml/2006/main">
   <p:cSld name="Slide 10">
     <p:bg>
@@ -3586,7 +5038,7 @@
 </p:sld>
 </file>
 
-<file path=ppt/slides/slide11.xml><?xml version="1.0" encoding="utf-8"?>
+<file path=ppt/slides/slide12.xml><?xml version="1.0" encoding="utf-8"?>
 <p:sld xmlns:a="http://schemas.openxmlformats.org/drawingml/2006/main" xmlns:r="http://schemas.openxmlformats.org/officeDocument/2006/relationships" xmlns:p="http://schemas.openxmlformats.org/presentationml/2006/main">
   <p:cSld name="Slide 11">
     <p:bg>
@@ -4529,7 +5981,7 @@
 </p:sld>
 </file>
 
-<file path=ppt/slides/slide12.xml><?xml version="1.0" encoding="utf-8"?>
+<file path=ppt/slides/slide13.xml><?xml version="1.0" encoding="utf-8"?>
 <p:sld xmlns:a="http://schemas.openxmlformats.org/drawingml/2006/main" xmlns:r="http://schemas.openxmlformats.org/officeDocument/2006/relationships" xmlns:p="http://schemas.openxmlformats.org/presentationml/2006/main">
   <p:cSld name="Slide 12">
     <p:bg>
@@ -5301,7 +6753,7 @@
 </p:sld>
 </file>
 
-<file path=ppt/slides/slide13.xml><?xml version="1.0" encoding="utf-8"?>
+<file path=ppt/slides/slide14.xml><?xml version="1.0" encoding="utf-8"?>
 <p:sld xmlns:a="http://schemas.openxmlformats.org/drawingml/2006/main" xmlns:r="http://schemas.openxmlformats.org/officeDocument/2006/relationships" xmlns:p="http://schemas.openxmlformats.org/presentationml/2006/main">
   <p:cSld name="Slide 13">
     <p:bg>
@@ -5486,9 +6938,6 @@
           <a:bodyPr wrap="square" lIns="0" tIns="0" rIns="0" bIns="0" rtlCol="0" anchor="ctr"/>
           <a:lstStyle/>
           <a:p>
-            <a:pPr marL="0" indent="0">
-              <a:buNone/>
-            </a:pPr>
             <a:r>
               <a:rPr lang="en-US" sz="1250" b="1" dirty="0">
                 <a:solidFill>
@@ -5498,7 +6947,7 @@
                 <a:ea typeface="Calibri" pitchFamily="34" charset="-122"/>
                 <a:cs typeface="Calibri" pitchFamily="34" charset="-120"/>
               </a:rPr>
-              <a:t>Jhonatan Rico   </a:t>
+              <a:t>Jhonatan Rico </a:t>
             </a:r>
             <a:r>
               <a:rPr lang="en-US" sz="1250" dirty="0">
@@ -5509,7 +6958,40 @@
                 <a:ea typeface="Calibri" pitchFamily="34" charset="-122"/>
                 <a:cs typeface="Calibri" pitchFamily="34" charset="-120"/>
               </a:rPr>
-              <a:t>jrico@ani.gov.co   · 310 419 6100</a:t>
+              <a:t>·</a:t>
+            </a:r>
+            <a:r>
+              <a:rPr lang="en-US" sz="1250" b="1" dirty="0">
+                <a:solidFill>
+                  <a:srgbClr val="FFFFFF"/>
+                </a:solidFill>
+                <a:latin typeface="Calibri" pitchFamily="34" charset="0"/>
+                <a:ea typeface="Calibri" pitchFamily="34" charset="-122"/>
+                <a:cs typeface="Calibri" pitchFamily="34" charset="-120"/>
+              </a:rPr>
+              <a:t> </a:t>
+            </a:r>
+            <a:r>
+              <a:rPr lang="en-US" sz="1250" dirty="0" err="1">
+                <a:solidFill>
+                  <a:srgbClr val="9FB3C8"/>
+                </a:solidFill>
+                <a:latin typeface="Calibri" pitchFamily="34" charset="0"/>
+                <a:ea typeface="Calibri" pitchFamily="34" charset="-122"/>
+                <a:cs typeface="Calibri" pitchFamily="34" charset="-120"/>
+              </a:rPr>
+              <a:t>jrico@ani.gov.co</a:t>
+            </a:r>
+            <a:r>
+              <a:rPr lang="en-US" sz="1250" dirty="0">
+                <a:solidFill>
+                  <a:srgbClr val="9FB3C8"/>
+                </a:solidFill>
+                <a:latin typeface="Calibri" pitchFamily="34" charset="0"/>
+                <a:ea typeface="Calibri" pitchFamily="34" charset="-122"/>
+                <a:cs typeface="Calibri" pitchFamily="34" charset="-120"/>
+              </a:rPr>
+              <a:t>  · 310 419 6100</a:t>
             </a:r>
             <a:endParaRPr lang="en-US" sz="1250" dirty="0"/>
           </a:p>
@@ -5560,9 +7042,6 @@
           <a:bodyPr wrap="square" lIns="0" tIns="0" rIns="0" bIns="0" rtlCol="0" anchor="ctr"/>
           <a:lstStyle/>
           <a:p>
-            <a:pPr marL="0" indent="0">
-              <a:buNone/>
-            </a:pPr>
             <a:r>
               <a:rPr lang="en-US" sz="1250" b="1" dirty="0">
                 <a:solidFill>
@@ -5572,7 +7051,29 @@
                 <a:ea typeface="Calibri" pitchFamily="34" charset="-122"/>
                 <a:cs typeface="Calibri" pitchFamily="34" charset="-120"/>
               </a:rPr>
-              <a:t>Andrea Navarro   </a:t>
+              <a:t>Andrea Navarro </a:t>
+            </a:r>
+            <a:r>
+              <a:rPr lang="en-US" sz="1250" dirty="0">
+                <a:solidFill>
+                  <a:srgbClr val="9FB3C8"/>
+                </a:solidFill>
+                <a:latin typeface="Calibri" pitchFamily="34" charset="0"/>
+                <a:ea typeface="Calibri" pitchFamily="34" charset="-122"/>
+                <a:cs typeface="Calibri" pitchFamily="34" charset="-120"/>
+              </a:rPr>
+              <a:t>·</a:t>
+            </a:r>
+            <a:r>
+              <a:rPr lang="en-US" sz="1250" b="1" dirty="0">
+                <a:solidFill>
+                  <a:srgbClr val="FFFFFF"/>
+                </a:solidFill>
+                <a:latin typeface="Calibri" pitchFamily="34" charset="0"/>
+                <a:ea typeface="Calibri" pitchFamily="34" charset="-122"/>
+                <a:cs typeface="Calibri" pitchFamily="34" charset="-120"/>
+              </a:rPr>
+              <a:t> </a:t>
             </a:r>
             <a:r>
               <a:rPr lang="en-US" sz="1250" dirty="0">
@@ -5634,9 +7135,6 @@
           <a:bodyPr wrap="square" lIns="0" tIns="0" rIns="0" bIns="0" rtlCol="0" anchor="ctr"/>
           <a:lstStyle/>
           <a:p>
-            <a:pPr marL="0" indent="0">
-              <a:buNone/>
-            </a:pPr>
             <a:r>
               <a:rPr lang="en-US" sz="1250" b="1" dirty="0">
                 <a:solidFill>
@@ -5646,7 +7144,29 @@
                 <a:ea typeface="Calibri" pitchFamily="34" charset="-122"/>
                 <a:cs typeface="Calibri" pitchFamily="34" charset="-120"/>
               </a:rPr>
-              <a:t>Hernán Gutiérrez   </a:t>
+              <a:t>Hernán Gutiérrez  </a:t>
+            </a:r>
+            <a:r>
+              <a:rPr lang="en-US" sz="1250" dirty="0">
+                <a:solidFill>
+                  <a:srgbClr val="9FB3C8"/>
+                </a:solidFill>
+                <a:latin typeface="Calibri" pitchFamily="34" charset="0"/>
+                <a:ea typeface="Calibri" pitchFamily="34" charset="-122"/>
+                <a:cs typeface="Calibri" pitchFamily="34" charset="-120"/>
+              </a:rPr>
+              <a:t>·</a:t>
+            </a:r>
+            <a:r>
+              <a:rPr lang="en-US" sz="1250" b="1" dirty="0">
+                <a:solidFill>
+                  <a:srgbClr val="FFFFFF"/>
+                </a:solidFill>
+                <a:latin typeface="Calibri" pitchFamily="34" charset="0"/>
+                <a:ea typeface="Calibri" pitchFamily="34" charset="-122"/>
+                <a:cs typeface="Calibri" pitchFamily="34" charset="-120"/>
+              </a:rPr>
+              <a:t> </a:t>
             </a:r>
             <a:r>
               <a:rPr lang="en-US" sz="1250" dirty="0">
@@ -5710,7 +7230,7 @@
         </p:nvSpPr>
         <p:spPr>
           <a:xfrm>
-            <a:off x="6172200" y="1051560"/>
+            <a:off x="5806440" y="1329889"/>
             <a:ext cx="2377440" cy="292608"/>
           </a:xfrm>
           <a:prstGeom prst="rect">
@@ -5749,7 +7269,7 @@
         </p:nvSpPr>
         <p:spPr>
           <a:xfrm>
-            <a:off x="6172200" y="1417320"/>
+            <a:off x="5806440" y="1695649"/>
             <a:ext cx="2377440" cy="2377440"/>
           </a:xfrm>
           <a:prstGeom prst="roundRect">
@@ -5779,7 +7299,7 @@
         </p:blipFill>
         <p:spPr>
           <a:xfrm>
-            <a:off x="6327648" y="1572768"/>
+            <a:off x="5961888" y="1851097"/>
             <a:ext cx="2066544" cy="2066544"/>
           </a:xfrm>
           <a:prstGeom prst="rect">
@@ -5795,7 +7315,7 @@
         </p:nvSpPr>
         <p:spPr>
           <a:xfrm>
-            <a:off x="6172200" y="3886200"/>
+            <a:off x="5806440" y="4164529"/>
             <a:ext cx="2377440" cy="274320"/>
           </a:xfrm>
           <a:prstGeom prst="rect">
@@ -5995,7 +7515,7 @@
 </p:sld>
 </file>
 
-<file path=ppt/slides/slide14.xml><?xml version="1.0" encoding="utf-8"?>
+<file path=ppt/slides/slide15.xml><?xml version="1.0" encoding="utf-8"?>
 <p:sld xmlns:a="http://schemas.openxmlformats.org/drawingml/2006/main" xmlns:r="http://schemas.openxmlformats.org/officeDocument/2006/relationships" xmlns:p="http://schemas.openxmlformats.org/presentationml/2006/main">
   <p:cSld name="Slide 14">
     <p:bg>
@@ -6219,7 +7739,7 @@
 </p:sld>
 </file>
 
-<file path=ppt/slides/slide15.xml><?xml version="1.0" encoding="utf-8"?>
+<file path=ppt/slides/slide16.xml><?xml version="1.0" encoding="utf-8"?>
 <p:sld xmlns:a="http://schemas.openxmlformats.org/drawingml/2006/main" xmlns:r="http://schemas.openxmlformats.org/officeDocument/2006/relationships" xmlns:p="http://schemas.openxmlformats.org/presentationml/2006/main">
   <p:cSld name="Slide 15">
     <p:bg>
@@ -6443,7 +7963,7 @@
 </p:sld>
 </file>
 
-<file path=ppt/slides/slide16.xml><?xml version="1.0" encoding="utf-8"?>
+<file path=ppt/slides/slide17.xml><?xml version="1.0" encoding="utf-8"?>
 <p:sld xmlns:a="http://schemas.openxmlformats.org/drawingml/2006/main" xmlns:r="http://schemas.openxmlformats.org/officeDocument/2006/relationships" xmlns:p="http://schemas.openxmlformats.org/presentationml/2006/main">
   <p:cSld name="Slide 16">
     <p:bg>
@@ -7206,7 +8726,7 @@
 </p:sld>
 </file>
 
-<file path=ppt/slides/slide17.xml><?xml version="1.0" encoding="utf-8"?>
+<file path=ppt/slides/slide18.xml><?xml version="1.0" encoding="utf-8"?>
 <p:sld xmlns:a="http://schemas.openxmlformats.org/drawingml/2006/main" xmlns:r="http://schemas.openxmlformats.org/officeDocument/2006/relationships" xmlns:p="http://schemas.openxmlformats.org/presentationml/2006/main">
   <p:cSld name="Slide 17">
     <p:bg>
@@ -8231,7 +9751,7 @@
 </p:sld>
 </file>
 
-<file path=ppt/slides/slide18.xml><?xml version="1.0" encoding="utf-8"?>
+<file path=ppt/slides/slide19.xml><?xml version="1.0" encoding="utf-8"?>
 <p:sld xmlns:a="http://schemas.openxmlformats.org/drawingml/2006/main" xmlns:r="http://schemas.openxmlformats.org/officeDocument/2006/relationships" xmlns:p="http://schemas.openxmlformats.org/presentationml/2006/main">
   <p:cSld name="Slide 18">
     <p:bg>
@@ -8981,1031 +10501,6 @@
                 <a:cs typeface="Calibri" pitchFamily="34" charset="-120"/>
               </a:rPr>
               <a:t>18</a:t>
-            </a:r>
-            <a:endParaRPr lang="en-US" sz="850" dirty="0"/>
-          </a:p>
-        </p:txBody>
-      </p:sp>
-    </p:spTree>
-  </p:cSld>
-  <p:clrMapOvr>
-    <a:masterClrMapping/>
-  </p:clrMapOvr>
-</p:sld>
-</file>
-
-<file path=ppt/slides/slide19.xml><?xml version="1.0" encoding="utf-8"?>
-<p:sld xmlns:a="http://schemas.openxmlformats.org/drawingml/2006/main" xmlns:r="http://schemas.openxmlformats.org/officeDocument/2006/relationships" xmlns:p="http://schemas.openxmlformats.org/presentationml/2006/main">
-  <p:cSld name="Slide 19">
-    <p:bg>
-      <p:bgPr>
-        <a:solidFill>
-          <a:srgbClr val="F5F7FA"/>
-        </a:solidFill>
-        <a:effectLst/>
-      </p:bgPr>
-    </p:bg>
-    <p:spTree>
-      <p:nvGrpSpPr>
-        <p:cNvPr id="1" name=""/>
-        <p:cNvGrpSpPr/>
-        <p:nvPr/>
-      </p:nvGrpSpPr>
-      <p:grpSpPr>
-        <a:xfrm>
-          <a:off x="0" y="0"/>
-          <a:ext cx="0" cy="0"/>
-          <a:chOff x="0" y="0"/>
-          <a:chExt cx="0" cy="0"/>
-        </a:xfrm>
-      </p:grpSpPr>
-      <p:sp>
-        <p:nvSpPr>
-          <p:cNvPr id="2" name="Text 0"/>
-          <p:cNvSpPr/>
-          <p:nvPr/>
-        </p:nvSpPr>
-        <p:spPr>
-          <a:xfrm>
-            <a:off x="502920" y="292608"/>
-            <a:ext cx="8138160" cy="256032"/>
-          </a:xfrm>
-          <a:prstGeom prst="rect">
-            <a:avLst/>
-          </a:prstGeom>
-          <a:noFill/>
-          <a:ln/>
-        </p:spPr>
-        <p:txBody>
-          <a:bodyPr wrap="square" lIns="0" tIns="0" rIns="0" bIns="0" rtlCol="0" anchor="ctr"/>
-          <a:lstStyle/>
-          <a:p>
-            <a:pPr marL="0" indent="0">
-              <a:buNone/>
-            </a:pPr>
-            <a:r>
-              <a:rPr lang="en-US" sz="1100" b="1" kern="0" spc="200" dirty="0">
-                <a:solidFill>
-                  <a:srgbClr val="1ABC9C"/>
-                </a:solidFill>
-                <a:latin typeface="Trebuchet MS" pitchFamily="34" charset="0"/>
-                <a:ea typeface="Trebuchet MS" pitchFamily="34" charset="-122"/>
-                <a:cs typeface="Trebuchet MS" pitchFamily="34" charset="-120"/>
-              </a:rPr>
-              <a:t>RESPALDO TÉCNICO · B6</a:t>
-            </a:r>
-            <a:endParaRPr lang="en-US" sz="1100" dirty="0"/>
-          </a:p>
-        </p:txBody>
-      </p:sp>
-      <p:sp>
-        <p:nvSpPr>
-          <p:cNvPr id="3" name="Text 1"/>
-          <p:cNvSpPr/>
-          <p:nvPr/>
-        </p:nvSpPr>
-        <p:spPr>
-          <a:xfrm>
-            <a:off x="502920" y="548640"/>
-            <a:ext cx="8138160" cy="502920"/>
-          </a:xfrm>
-          <a:prstGeom prst="rect">
-            <a:avLst/>
-          </a:prstGeom>
-          <a:noFill/>
-          <a:ln/>
-        </p:spPr>
-        <p:txBody>
-          <a:bodyPr wrap="square" lIns="0" tIns="0" rIns="0" bIns="0" rtlCol="0" anchor="ctr"/>
-          <a:lstStyle/>
-          <a:p>
-            <a:pPr marL="0" indent="0">
-              <a:buNone/>
-            </a:pPr>
-            <a:r>
-              <a:rPr lang="en-US" sz="2700" b="1" dirty="0">
-                <a:solidFill>
-                  <a:srgbClr val="0B3C5D"/>
-                </a:solidFill>
-                <a:latin typeface="Trebuchet MS" pitchFamily="34" charset="0"/>
-                <a:ea typeface="Trebuchet MS" pitchFamily="34" charset="-122"/>
-                <a:cs typeface="Trebuchet MS" pitchFamily="34" charset="-120"/>
-              </a:rPr>
-              <a:t>Soberanía, seguridad y cumplimiento</a:t>
-            </a:r>
-            <a:endParaRPr lang="en-US" sz="2700" dirty="0"/>
-          </a:p>
-        </p:txBody>
-      </p:sp>
-      <p:sp>
-        <p:nvSpPr>
-          <p:cNvPr id="4" name="Text 2"/>
-          <p:cNvSpPr/>
-          <p:nvPr/>
-        </p:nvSpPr>
-        <p:spPr>
-          <a:xfrm>
-            <a:off x="502920" y="1298448"/>
-            <a:ext cx="8138160" cy="502920"/>
-          </a:xfrm>
-          <a:prstGeom prst="rect">
-            <a:avLst/>
-          </a:prstGeom>
-          <a:noFill/>
-          <a:ln/>
-        </p:spPr>
-        <p:txBody>
-          <a:bodyPr wrap="square" lIns="0" tIns="0" rIns="0" bIns="0" rtlCol="0" anchor="ctr"/>
-          <a:lstStyle/>
-          <a:p>
-            <a:pPr marL="0" indent="0">
-              <a:buNone/>
-            </a:pPr>
-            <a:r>
-              <a:rPr lang="en-US" sz="1200" dirty="0">
-                <a:solidFill>
-                  <a:srgbClr val="2C3E50"/>
-                </a:solidFill>
-                <a:latin typeface="Calibri" pitchFamily="34" charset="0"/>
-                <a:ea typeface="Calibri" pitchFamily="34" charset="-122"/>
-                <a:cs typeface="Calibri" pitchFamily="34" charset="-120"/>
-              </a:rPr>
-              <a:t>DatosVivos corre en infraestructura del Estado y solo toca datos que ya son públicos. El diseño protege a las personas y hace el sistema auditable de punta a punta.</a:t>
-            </a:r>
-            <a:endParaRPr lang="en-US" sz="1200" dirty="0"/>
-          </a:p>
-        </p:txBody>
-      </p:sp>
-      <p:sp>
-        <p:nvSpPr>
-          <p:cNvPr id="5" name="Shape 3"/>
-          <p:cNvSpPr/>
-          <p:nvPr/>
-        </p:nvSpPr>
-        <p:spPr>
-          <a:xfrm>
-            <a:off x="502920" y="1920240"/>
-            <a:ext cx="2560320" cy="1170432"/>
-          </a:xfrm>
-          <a:prstGeom prst="roundRect">
-            <a:avLst>
-              <a:gd name="adj" fmla="val 4688"/>
-            </a:avLst>
-          </a:prstGeom>
-          <a:solidFill>
-            <a:srgbClr val="FFFFFF"/>
-          </a:solidFill>
-          <a:ln/>
-          <a:effectLst>
-            <a:outerShdw algn="bl" rotWithShape="0">
-              <a:srgbClr val="1A2530">
-                <a:alpha val="0"/>
-              </a:srgbClr>
-            </a:outerShdw>
-          </a:effectLst>
-        </p:spPr>
-      </p:sp>
-      <p:pic>
-        <p:nvPicPr>
-          <p:cNvPr id="6" name="Image 0" descr="preencoded.png"/>
-          <p:cNvPicPr>
-            <a:picLocks noChangeAspect="1"/>
-          </p:cNvPicPr>
-          <p:nvPr/>
-        </p:nvPicPr>
-        <p:blipFill>
-          <a:blip r:embed="rId3"/>
-          <a:stretch>
-            <a:fillRect/>
-          </a:stretch>
-        </p:blipFill>
-        <p:spPr>
-          <a:xfrm>
-            <a:off x="649224" y="2066544"/>
-            <a:ext cx="274320" cy="274320"/>
-          </a:xfrm>
-          <a:prstGeom prst="rect">
-            <a:avLst/>
-          </a:prstGeom>
-        </p:spPr>
-      </p:pic>
-      <p:sp>
-        <p:nvSpPr>
-          <p:cNvPr id="7" name="Text 4"/>
-          <p:cNvSpPr/>
-          <p:nvPr/>
-        </p:nvSpPr>
-        <p:spPr>
-          <a:xfrm>
-            <a:off x="1005840" y="2011680"/>
-            <a:ext cx="1938528" cy="411480"/>
-          </a:xfrm>
-          <a:prstGeom prst="rect">
-            <a:avLst/>
-          </a:prstGeom>
-          <a:noFill/>
-          <a:ln/>
-        </p:spPr>
-        <p:txBody>
-          <a:bodyPr wrap="square" lIns="0" tIns="0" rIns="0" bIns="0" rtlCol="0" anchor="ctr"/>
-          <a:lstStyle/>
-          <a:p>
-            <a:pPr marL="0" indent="0">
-              <a:buNone/>
-            </a:pPr>
-            <a:r>
-              <a:rPr lang="en-US" sz="1050" b="1" dirty="0">
-                <a:solidFill>
-                  <a:srgbClr val="0B3C5D"/>
-                </a:solidFill>
-                <a:latin typeface="Trebuchet MS" pitchFamily="34" charset="0"/>
-                <a:ea typeface="Trebuchet MS" pitchFamily="34" charset="-122"/>
-                <a:cs typeface="Trebuchet MS" pitchFamily="34" charset="-120"/>
-              </a:rPr>
-              <a:t>Infraestructura del Estado</a:t>
-            </a:r>
-            <a:endParaRPr lang="en-US" sz="1050" dirty="0"/>
-          </a:p>
-        </p:txBody>
-      </p:sp>
-      <p:sp>
-        <p:nvSpPr>
-          <p:cNvPr id="8" name="Text 5"/>
-          <p:cNvSpPr/>
-          <p:nvPr/>
-        </p:nvSpPr>
-        <p:spPr>
-          <a:xfrm>
-            <a:off x="649224" y="2423160"/>
-            <a:ext cx="2267712" cy="640080"/>
-          </a:xfrm>
-          <a:prstGeom prst="rect">
-            <a:avLst/>
-          </a:prstGeom>
-          <a:noFill/>
-          <a:ln/>
-        </p:spPr>
-        <p:txBody>
-          <a:bodyPr wrap="square" lIns="0" tIns="0" rIns="0" bIns="0" rtlCol="0" anchor="ctr"/>
-          <a:lstStyle/>
-          <a:p>
-            <a:pPr marL="0" indent="0">
-              <a:buNone/>
-            </a:pPr>
-            <a:r>
-              <a:rPr lang="en-US" sz="850" dirty="0">
-                <a:solidFill>
-                  <a:srgbClr val="2C3E50"/>
-                </a:solidFill>
-                <a:latin typeface="Calibri" pitchFamily="34" charset="0"/>
-                <a:ea typeface="Calibri" pitchFamily="34" charset="-122"/>
-                <a:cs typeface="Calibri" pitchFamily="34" charset="-120"/>
-              </a:rPr>
-              <a:t>El servicio corre en una VM pública bajo VPN estatal; los datos consultados son públicos por definición.</a:t>
-            </a:r>
-            <a:endParaRPr lang="en-US" sz="850" dirty="0"/>
-          </a:p>
-        </p:txBody>
-      </p:sp>
-      <p:sp>
-        <p:nvSpPr>
-          <p:cNvPr id="9" name="Shape 6"/>
-          <p:cNvSpPr/>
-          <p:nvPr/>
-        </p:nvSpPr>
-        <p:spPr>
-          <a:xfrm>
-            <a:off x="3291840" y="1920240"/>
-            <a:ext cx="2560320" cy="1170432"/>
-          </a:xfrm>
-          <a:prstGeom prst="roundRect">
-            <a:avLst>
-              <a:gd name="adj" fmla="val 4688"/>
-            </a:avLst>
-          </a:prstGeom>
-          <a:solidFill>
-            <a:srgbClr val="FFFFFF"/>
-          </a:solidFill>
-          <a:ln/>
-          <a:effectLst>
-            <a:outerShdw algn="bl" rotWithShape="0">
-              <a:srgbClr val="1A2530">
-                <a:alpha val="0"/>
-              </a:srgbClr>
-            </a:outerShdw>
-          </a:effectLst>
-        </p:spPr>
-      </p:sp>
-      <p:pic>
-        <p:nvPicPr>
-          <p:cNvPr id="10" name="Image 1" descr="preencoded.png"/>
-          <p:cNvPicPr>
-            <a:picLocks noChangeAspect="1"/>
-          </p:cNvPicPr>
-          <p:nvPr/>
-        </p:nvPicPr>
-        <p:blipFill>
-          <a:blip r:embed="rId4"/>
-          <a:stretch>
-            <a:fillRect/>
-          </a:stretch>
-        </p:blipFill>
-        <p:spPr>
-          <a:xfrm>
-            <a:off x="3438144" y="2066544"/>
-            <a:ext cx="274320" cy="274320"/>
-          </a:xfrm>
-          <a:prstGeom prst="rect">
-            <a:avLst/>
-          </a:prstGeom>
-        </p:spPr>
-      </p:pic>
-      <p:sp>
-        <p:nvSpPr>
-          <p:cNvPr id="11" name="Text 7"/>
-          <p:cNvSpPr/>
-          <p:nvPr/>
-        </p:nvSpPr>
-        <p:spPr>
-          <a:xfrm>
-            <a:off x="3794760" y="2011680"/>
-            <a:ext cx="1938528" cy="411480"/>
-          </a:xfrm>
-          <a:prstGeom prst="rect">
-            <a:avLst/>
-          </a:prstGeom>
-          <a:noFill/>
-          <a:ln/>
-        </p:spPr>
-        <p:txBody>
-          <a:bodyPr wrap="square" lIns="0" tIns="0" rIns="0" bIns="0" rtlCol="0" anchor="ctr"/>
-          <a:lstStyle/>
-          <a:p>
-            <a:pPr marL="0" indent="0">
-              <a:buNone/>
-            </a:pPr>
-            <a:r>
-              <a:rPr lang="en-US" sz="1050" b="1" dirty="0">
-                <a:solidFill>
-                  <a:srgbClr val="0B3C5D"/>
-                </a:solidFill>
-                <a:latin typeface="Trebuchet MS" pitchFamily="34" charset="0"/>
-                <a:ea typeface="Trebuchet MS" pitchFamily="34" charset="-122"/>
-                <a:cs typeface="Trebuchet MS" pitchFamily="34" charset="-120"/>
-              </a:rPr>
-              <a:t>Sin datos personales</a:t>
-            </a:r>
-            <a:endParaRPr lang="en-US" sz="1050" dirty="0"/>
-          </a:p>
-        </p:txBody>
-      </p:sp>
-      <p:sp>
-        <p:nvSpPr>
-          <p:cNvPr id="12" name="Text 8"/>
-          <p:cNvSpPr/>
-          <p:nvPr/>
-        </p:nvSpPr>
-        <p:spPr>
-          <a:xfrm>
-            <a:off x="3438144" y="2423160"/>
-            <a:ext cx="2267712" cy="640080"/>
-          </a:xfrm>
-          <a:prstGeom prst="rect">
-            <a:avLst/>
-          </a:prstGeom>
-          <a:noFill/>
-          <a:ln/>
-        </p:spPr>
-        <p:txBody>
-          <a:bodyPr wrap="square" lIns="0" tIns="0" rIns="0" bIns="0" rtlCol="0" anchor="ctr"/>
-          <a:lstStyle/>
-          <a:p>
-            <a:pPr marL="0" indent="0">
-              <a:buNone/>
-            </a:pPr>
-            <a:r>
-              <a:rPr lang="en-US" sz="850" dirty="0">
-                <a:solidFill>
-                  <a:srgbClr val="2C3E50"/>
-                </a:solidFill>
-                <a:latin typeface="Calibri" pitchFamily="34" charset="0"/>
-                <a:ea typeface="Calibri" pitchFamily="34" charset="-122"/>
-                <a:cs typeface="Calibri" pitchFamily="34" charset="-120"/>
-              </a:rPr>
-              <a:t>Cero registro y cero rastreadores. La telemetría es agregada y anónima: mide qué se consulta, nunca quién.</a:t>
-            </a:r>
-            <a:endParaRPr lang="en-US" sz="850" dirty="0"/>
-          </a:p>
-        </p:txBody>
-      </p:sp>
-      <p:sp>
-        <p:nvSpPr>
-          <p:cNvPr id="13" name="Shape 9"/>
-          <p:cNvSpPr/>
-          <p:nvPr/>
-        </p:nvSpPr>
-        <p:spPr>
-          <a:xfrm>
-            <a:off x="6080760" y="1920240"/>
-            <a:ext cx="2560320" cy="1170432"/>
-          </a:xfrm>
-          <a:prstGeom prst="roundRect">
-            <a:avLst>
-              <a:gd name="adj" fmla="val 4688"/>
-            </a:avLst>
-          </a:prstGeom>
-          <a:solidFill>
-            <a:srgbClr val="FFFFFF"/>
-          </a:solidFill>
-          <a:ln/>
-          <a:effectLst>
-            <a:outerShdw algn="bl" rotWithShape="0">
-              <a:srgbClr val="1A2530">
-                <a:alpha val="0"/>
-              </a:srgbClr>
-            </a:outerShdw>
-          </a:effectLst>
-        </p:spPr>
-      </p:sp>
-      <p:pic>
-        <p:nvPicPr>
-          <p:cNvPr id="14" name="Image 2" descr="preencoded.png"/>
-          <p:cNvPicPr>
-            <a:picLocks noChangeAspect="1"/>
-          </p:cNvPicPr>
-          <p:nvPr/>
-        </p:nvPicPr>
-        <p:blipFill>
-          <a:blip r:embed="rId5"/>
-          <a:stretch>
-            <a:fillRect/>
-          </a:stretch>
-        </p:blipFill>
-        <p:spPr>
-          <a:xfrm>
-            <a:off x="6227064" y="2066544"/>
-            <a:ext cx="274320" cy="274320"/>
-          </a:xfrm>
-          <a:prstGeom prst="rect">
-            <a:avLst/>
-          </a:prstGeom>
-        </p:spPr>
-      </p:pic>
-      <p:sp>
-        <p:nvSpPr>
-          <p:cNvPr id="15" name="Text 10"/>
-          <p:cNvSpPr/>
-          <p:nvPr/>
-        </p:nvSpPr>
-        <p:spPr>
-          <a:xfrm>
-            <a:off x="6583680" y="2011680"/>
-            <a:ext cx="1938528" cy="411480"/>
-          </a:xfrm>
-          <a:prstGeom prst="rect">
-            <a:avLst/>
-          </a:prstGeom>
-          <a:noFill/>
-          <a:ln/>
-        </p:spPr>
-        <p:txBody>
-          <a:bodyPr wrap="square" lIns="0" tIns="0" rIns="0" bIns="0" rtlCol="0" anchor="ctr"/>
-          <a:lstStyle/>
-          <a:p>
-            <a:pPr marL="0" indent="0">
-              <a:buNone/>
-            </a:pPr>
-            <a:r>
-              <a:rPr lang="en-US" sz="1050" b="1" dirty="0">
-                <a:solidFill>
-                  <a:srgbClr val="0B3C5D"/>
-                </a:solidFill>
-                <a:latin typeface="Trebuchet MS" pitchFamily="34" charset="0"/>
-                <a:ea typeface="Trebuchet MS" pitchFamily="34" charset="-122"/>
-                <a:cs typeface="Trebuchet MS" pitchFamily="34" charset="-120"/>
-              </a:rPr>
-              <a:t>Solo lectura</a:t>
-            </a:r>
-            <a:endParaRPr lang="en-US" sz="1050" dirty="0"/>
-          </a:p>
-        </p:txBody>
-      </p:sp>
-      <p:sp>
-        <p:nvSpPr>
-          <p:cNvPr id="16" name="Text 11"/>
-          <p:cNvSpPr/>
-          <p:nvPr/>
-        </p:nvSpPr>
-        <p:spPr>
-          <a:xfrm>
-            <a:off x="6227064" y="2423160"/>
-            <a:ext cx="2267712" cy="640080"/>
-          </a:xfrm>
-          <a:prstGeom prst="rect">
-            <a:avLst/>
-          </a:prstGeom>
-          <a:noFill/>
-          <a:ln/>
-        </p:spPr>
-        <p:txBody>
-          <a:bodyPr wrap="square" lIns="0" tIns="0" rIns="0" bIns="0" rtlCol="0" anchor="ctr"/>
-          <a:lstStyle/>
-          <a:p>
-            <a:pPr marL="0" indent="0">
-              <a:buNone/>
-            </a:pPr>
-            <a:r>
-              <a:rPr lang="en-US" sz="850" dirty="0">
-                <a:solidFill>
-                  <a:srgbClr val="2C3E50"/>
-                </a:solidFill>
-                <a:latin typeface="Calibri" pitchFamily="34" charset="0"/>
-                <a:ea typeface="Calibri" pitchFamily="34" charset="-122"/>
-                <a:cs typeface="Calibri" pitchFamily="34" charset="-120"/>
-              </a:rPr>
-              <a:t>El motor no puede escribir en ninguna fuente; la verificación de solo-lectura es una de las tres capas del pipeline.</a:t>
-            </a:r>
-            <a:endParaRPr lang="en-US" sz="850" dirty="0"/>
-          </a:p>
-        </p:txBody>
-      </p:sp>
-      <p:sp>
-        <p:nvSpPr>
-          <p:cNvPr id="17" name="Shape 12"/>
-          <p:cNvSpPr/>
-          <p:nvPr/>
-        </p:nvSpPr>
-        <p:spPr>
-          <a:xfrm>
-            <a:off x="502920" y="3218688"/>
-            <a:ext cx="2560320" cy="1170432"/>
-          </a:xfrm>
-          <a:prstGeom prst="roundRect">
-            <a:avLst>
-              <a:gd name="adj" fmla="val 4688"/>
-            </a:avLst>
-          </a:prstGeom>
-          <a:solidFill>
-            <a:srgbClr val="FFFFFF"/>
-          </a:solidFill>
-          <a:ln/>
-          <a:effectLst>
-            <a:outerShdw algn="bl" rotWithShape="0">
-              <a:srgbClr val="1A2530">
-                <a:alpha val="0"/>
-              </a:srgbClr>
-            </a:outerShdw>
-          </a:effectLst>
-        </p:spPr>
-      </p:sp>
-      <p:pic>
-        <p:nvPicPr>
-          <p:cNvPr id="18" name="Image 3" descr="preencoded.png"/>
-          <p:cNvPicPr>
-            <a:picLocks noChangeAspect="1"/>
-          </p:cNvPicPr>
-          <p:nvPr/>
-        </p:nvPicPr>
-        <p:blipFill>
-          <a:blip r:embed="rId6"/>
-          <a:stretch>
-            <a:fillRect/>
-          </a:stretch>
-        </p:blipFill>
-        <p:spPr>
-          <a:xfrm>
-            <a:off x="649224" y="3364992"/>
-            <a:ext cx="274320" cy="274320"/>
-          </a:xfrm>
-          <a:prstGeom prst="rect">
-            <a:avLst/>
-          </a:prstGeom>
-        </p:spPr>
-      </p:pic>
-      <p:sp>
-        <p:nvSpPr>
-          <p:cNvPr id="19" name="Text 13"/>
-          <p:cNvSpPr/>
-          <p:nvPr/>
-        </p:nvSpPr>
-        <p:spPr>
-          <a:xfrm>
-            <a:off x="1005840" y="3310128"/>
-            <a:ext cx="1938528" cy="411480"/>
-          </a:xfrm>
-          <a:prstGeom prst="rect">
-            <a:avLst/>
-          </a:prstGeom>
-          <a:noFill/>
-          <a:ln/>
-        </p:spPr>
-        <p:txBody>
-          <a:bodyPr wrap="square" lIns="0" tIns="0" rIns="0" bIns="0" rtlCol="0" anchor="ctr"/>
-          <a:lstStyle/>
-          <a:p>
-            <a:pPr marL="0" indent="0">
-              <a:buNone/>
-            </a:pPr>
-            <a:r>
-              <a:rPr lang="en-US" sz="1050" b="1" dirty="0">
-                <a:solidFill>
-                  <a:srgbClr val="0B3C5D"/>
-                </a:solidFill>
-                <a:latin typeface="Trebuchet MS" pitchFamily="34" charset="0"/>
-                <a:ea typeface="Trebuchet MS" pitchFamily="34" charset="-122"/>
-                <a:cs typeface="Trebuchet MS" pitchFamily="34" charset="-120"/>
-              </a:rPr>
-              <a:t>Repositorio abierto y auditable</a:t>
-            </a:r>
-            <a:endParaRPr lang="en-US" sz="1050" dirty="0"/>
-          </a:p>
-        </p:txBody>
-      </p:sp>
-      <p:sp>
-        <p:nvSpPr>
-          <p:cNvPr id="20" name="Text 14"/>
-          <p:cNvSpPr/>
-          <p:nvPr/>
-        </p:nvSpPr>
-        <p:spPr>
-          <a:xfrm>
-            <a:off x="649224" y="3721608"/>
-            <a:ext cx="2267712" cy="640080"/>
-          </a:xfrm>
-          <a:prstGeom prst="rect">
-            <a:avLst/>
-          </a:prstGeom>
-          <a:noFill/>
-          <a:ln/>
-        </p:spPr>
-        <p:txBody>
-          <a:bodyPr wrap="square" lIns="0" tIns="0" rIns="0" bIns="0" rtlCol="0" anchor="ctr"/>
-          <a:lstStyle/>
-          <a:p>
-            <a:pPr marL="0" indent="0">
-              <a:buNone/>
-            </a:pPr>
-            <a:r>
-              <a:rPr lang="en-US" sz="850" dirty="0">
-                <a:solidFill>
-                  <a:srgbClr val="2C3E50"/>
-                </a:solidFill>
-                <a:latin typeface="Calibri" pitchFamily="34" charset="0"/>
-                <a:ea typeface="Calibri" pitchFamily="34" charset="-122"/>
-                <a:cs typeface="Calibri" pitchFamily="34" charset="-120"/>
-              </a:rPr>
-              <a:t>Código, documentación, pruebas y evaluación son públicos, replicables con Docker, con guía de validación para el jurado.</a:t>
-            </a:r>
-            <a:endParaRPr lang="en-US" sz="850" dirty="0"/>
-          </a:p>
-        </p:txBody>
-      </p:sp>
-      <p:sp>
-        <p:nvSpPr>
-          <p:cNvPr id="21" name="Shape 15"/>
-          <p:cNvSpPr/>
-          <p:nvPr/>
-        </p:nvSpPr>
-        <p:spPr>
-          <a:xfrm>
-            <a:off x="3291840" y="3218688"/>
-            <a:ext cx="2560320" cy="1170432"/>
-          </a:xfrm>
-          <a:prstGeom prst="roundRect">
-            <a:avLst>
-              <a:gd name="adj" fmla="val 4688"/>
-            </a:avLst>
-          </a:prstGeom>
-          <a:solidFill>
-            <a:srgbClr val="FFFFFF"/>
-          </a:solidFill>
-          <a:ln/>
-          <a:effectLst>
-            <a:outerShdw algn="bl" rotWithShape="0">
-              <a:srgbClr val="1A2530">
-                <a:alpha val="0"/>
-              </a:srgbClr>
-            </a:outerShdw>
-          </a:effectLst>
-        </p:spPr>
-      </p:sp>
-      <p:pic>
-        <p:nvPicPr>
-          <p:cNvPr id="22" name="Image 4" descr="preencoded.png"/>
-          <p:cNvPicPr>
-            <a:picLocks noChangeAspect="1"/>
-          </p:cNvPicPr>
-          <p:nvPr/>
-        </p:nvPicPr>
-        <p:blipFill>
-          <a:blip r:embed="rId7"/>
-          <a:stretch>
-            <a:fillRect/>
-          </a:stretch>
-        </p:blipFill>
-        <p:spPr>
-          <a:xfrm>
-            <a:off x="3438144" y="3364992"/>
-            <a:ext cx="274320" cy="274320"/>
-          </a:xfrm>
-          <a:prstGeom prst="rect">
-            <a:avLst/>
-          </a:prstGeom>
-        </p:spPr>
-      </p:pic>
-      <p:sp>
-        <p:nvSpPr>
-          <p:cNvPr id="23" name="Text 16"/>
-          <p:cNvSpPr/>
-          <p:nvPr/>
-        </p:nvSpPr>
-        <p:spPr>
-          <a:xfrm>
-            <a:off x="3794760" y="3310128"/>
-            <a:ext cx="1938528" cy="411480"/>
-          </a:xfrm>
-          <a:prstGeom prst="rect">
-            <a:avLst/>
-          </a:prstGeom>
-          <a:noFill/>
-          <a:ln/>
-        </p:spPr>
-        <p:txBody>
-          <a:bodyPr wrap="square" lIns="0" tIns="0" rIns="0" bIns="0" rtlCol="0" anchor="ctr"/>
-          <a:lstStyle/>
-          <a:p>
-            <a:pPr marL="0" indent="0">
-              <a:buNone/>
-            </a:pPr>
-            <a:r>
-              <a:rPr lang="en-US" sz="1050" b="1" dirty="0">
-                <a:solidFill>
-                  <a:srgbClr val="0B3C5D"/>
-                </a:solidFill>
-                <a:latin typeface="Trebuchet MS" pitchFamily="34" charset="0"/>
-                <a:ea typeface="Trebuchet MS" pitchFamily="34" charset="-122"/>
-                <a:cs typeface="Trebuchet MS" pitchFamily="34" charset="-120"/>
-              </a:rPr>
-              <a:t>Accesibilidad</a:t>
-            </a:r>
-            <a:endParaRPr lang="en-US" sz="1050" dirty="0"/>
-          </a:p>
-        </p:txBody>
-      </p:sp>
-      <p:sp>
-        <p:nvSpPr>
-          <p:cNvPr id="24" name="Text 17"/>
-          <p:cNvSpPr/>
-          <p:nvPr/>
-        </p:nvSpPr>
-        <p:spPr>
-          <a:xfrm>
-            <a:off x="3438144" y="3721608"/>
-            <a:ext cx="2267712" cy="640080"/>
-          </a:xfrm>
-          <a:prstGeom prst="rect">
-            <a:avLst/>
-          </a:prstGeom>
-          <a:noFill/>
-          <a:ln/>
-        </p:spPr>
-        <p:txBody>
-          <a:bodyPr wrap="square" lIns="0" tIns="0" rIns="0" bIns="0" rtlCol="0" anchor="ctr"/>
-          <a:lstStyle/>
-          <a:p>
-            <a:pPr marL="0" indent="0">
-              <a:buNone/>
-            </a:pPr>
-            <a:r>
-              <a:rPr lang="en-US" sz="850" dirty="0">
-                <a:solidFill>
-                  <a:srgbClr val="2C3E50"/>
-                </a:solidFill>
-                <a:latin typeface="Calibri" pitchFamily="34" charset="0"/>
-                <a:ea typeface="Calibri" pitchFamily="34" charset="-122"/>
-                <a:cs typeface="Calibri" pitchFamily="34" charset="-120"/>
-              </a:rPr>
-              <a:t>Ley 1618 de 2013 y WCAG 2.1 AA: entrada por voz, narración de resultados, alto contraste y escala tipográfica.</a:t>
-            </a:r>
-            <a:endParaRPr lang="en-US" sz="850" dirty="0"/>
-          </a:p>
-        </p:txBody>
-      </p:sp>
-      <p:sp>
-        <p:nvSpPr>
-          <p:cNvPr id="25" name="Shape 18"/>
-          <p:cNvSpPr/>
-          <p:nvPr/>
-        </p:nvSpPr>
-        <p:spPr>
-          <a:xfrm>
-            <a:off x="6080760" y="3218688"/>
-            <a:ext cx="2560320" cy="1170432"/>
-          </a:xfrm>
-          <a:prstGeom prst="roundRect">
-            <a:avLst>
-              <a:gd name="adj" fmla="val 4688"/>
-            </a:avLst>
-          </a:prstGeom>
-          <a:solidFill>
-            <a:srgbClr val="FFFFFF"/>
-          </a:solidFill>
-          <a:ln/>
-          <a:effectLst>
-            <a:outerShdw algn="bl" rotWithShape="0">
-              <a:srgbClr val="1A2530">
-                <a:alpha val="0"/>
-              </a:srgbClr>
-            </a:outerShdw>
-          </a:effectLst>
-        </p:spPr>
-      </p:sp>
-      <p:pic>
-        <p:nvPicPr>
-          <p:cNvPr id="26" name="Image 5" descr="preencoded.png"/>
-          <p:cNvPicPr>
-            <a:picLocks noChangeAspect="1"/>
-          </p:cNvPicPr>
-          <p:nvPr/>
-        </p:nvPicPr>
-        <p:blipFill>
-          <a:blip r:embed="rId8"/>
-          <a:stretch>
-            <a:fillRect/>
-          </a:stretch>
-        </p:blipFill>
-        <p:spPr>
-          <a:xfrm>
-            <a:off x="6227064" y="3364992"/>
-            <a:ext cx="274320" cy="274320"/>
-          </a:xfrm>
-          <a:prstGeom prst="rect">
-            <a:avLst/>
-          </a:prstGeom>
-        </p:spPr>
-      </p:pic>
-      <p:sp>
-        <p:nvSpPr>
-          <p:cNvPr id="27" name="Text 19"/>
-          <p:cNvSpPr/>
-          <p:nvPr/>
-        </p:nvSpPr>
-        <p:spPr>
-          <a:xfrm>
-            <a:off x="6583680" y="3310128"/>
-            <a:ext cx="1938528" cy="411480"/>
-          </a:xfrm>
-          <a:prstGeom prst="rect">
-            <a:avLst/>
-          </a:prstGeom>
-          <a:noFill/>
-          <a:ln/>
-        </p:spPr>
-        <p:txBody>
-          <a:bodyPr wrap="square" lIns="0" tIns="0" rIns="0" bIns="0" rtlCol="0" anchor="ctr"/>
-          <a:lstStyle/>
-          <a:p>
-            <a:pPr marL="0" indent="0">
-              <a:buNone/>
-            </a:pPr>
-            <a:r>
-              <a:rPr lang="en-US" sz="1050" b="1" dirty="0">
-                <a:solidFill>
-                  <a:srgbClr val="0B3C5D"/>
-                </a:solidFill>
-                <a:latin typeface="Trebuchet MS" pitchFamily="34" charset="0"/>
-                <a:ea typeface="Trebuchet MS" pitchFamily="34" charset="-122"/>
-                <a:cs typeface="Trebuchet MS" pitchFamily="34" charset="-120"/>
-              </a:rPr>
-              <a:t>Registro oficial</a:t>
-            </a:r>
-            <a:endParaRPr lang="en-US" sz="1050" dirty="0"/>
-          </a:p>
-        </p:txBody>
-      </p:sp>
-      <p:sp>
-        <p:nvSpPr>
-          <p:cNvPr id="28" name="Text 20"/>
-          <p:cNvSpPr/>
-          <p:nvPr/>
-        </p:nvSpPr>
-        <p:spPr>
-          <a:xfrm>
-            <a:off x="6227064" y="3721608"/>
-            <a:ext cx="2267712" cy="640080"/>
-          </a:xfrm>
-          <a:prstGeom prst="rect">
-            <a:avLst/>
-          </a:prstGeom>
-          <a:noFill/>
-          <a:ln/>
-        </p:spPr>
-        <p:txBody>
-          <a:bodyPr wrap="square" lIns="0" tIns="0" rIns="0" bIns="0" rtlCol="0" anchor="ctr"/>
-          <a:lstStyle/>
-          <a:p>
-            <a:pPr marL="0" indent="0">
-              <a:buNone/>
-            </a:pPr>
-            <a:r>
-              <a:rPr lang="en-US" sz="850" dirty="0">
-                <a:solidFill>
-                  <a:srgbClr val="2C3E50"/>
-                </a:solidFill>
-                <a:latin typeface="Calibri" pitchFamily="34" charset="0"/>
-                <a:ea typeface="Calibri" pitchFamily="34" charset="-122"/>
-                <a:cs typeface="Calibri" pitchFamily="34" charset="-120"/>
-              </a:rPr>
-              <a:t>Uso n.º 1074 registrado en herramientas.datos.gov.co (2026-07-13) como aporte formal al ecosistema.</a:t>
-            </a:r>
-            <a:endParaRPr lang="en-US" sz="850" dirty="0"/>
-          </a:p>
-        </p:txBody>
-      </p:sp>
-      <p:sp>
-        <p:nvSpPr>
-          <p:cNvPr id="29" name="Text 21"/>
-          <p:cNvSpPr/>
-          <p:nvPr/>
-        </p:nvSpPr>
-        <p:spPr>
-          <a:xfrm>
-            <a:off x="502920" y="4832604"/>
-            <a:ext cx="7680960" cy="228600"/>
-          </a:xfrm>
-          <a:prstGeom prst="rect">
-            <a:avLst/>
-          </a:prstGeom>
-          <a:noFill/>
-          <a:ln/>
-        </p:spPr>
-        <p:txBody>
-          <a:bodyPr wrap="square" lIns="0" tIns="0" rIns="0" bIns="0" rtlCol="0" anchor="ctr"/>
-          <a:lstStyle/>
-          <a:p>
-            <a:pPr marL="0" indent="0">
-              <a:buNone/>
-            </a:pPr>
-            <a:r>
-              <a:rPr lang="en-US" sz="850" b="1" dirty="0">
-                <a:solidFill>
-                  <a:srgbClr val="0B3C5D"/>
-                </a:solidFill>
-                <a:latin typeface="Calibri" pitchFamily="34" charset="0"/>
-                <a:ea typeface="Calibri" pitchFamily="34" charset="-122"/>
-                <a:cs typeface="Calibri" pitchFamily="34" charset="-120"/>
-              </a:rPr>
-              <a:t>DatosVivos · datosvivos.co</a:t>
-            </a:r>
-            <a:r>
-              <a:rPr lang="en-US" sz="850" dirty="0">
-                <a:solidFill>
-                  <a:srgbClr val="7F8C8D"/>
-                </a:solidFill>
-                <a:latin typeface="Calibri" pitchFamily="34" charset="0"/>
-                <a:ea typeface="Calibri" pitchFamily="34" charset="-122"/>
-                <a:cs typeface="Calibri" pitchFamily="34" charset="-120"/>
-              </a:rPr>
-              <a:t>   |   Datos al Ecosistema 2026 · Equipo 93 · Reto 7 · Nivel Avanzado</a:t>
-            </a:r>
-            <a:endParaRPr lang="en-US" sz="850" dirty="0"/>
-          </a:p>
-        </p:txBody>
-      </p:sp>
-      <p:sp>
-        <p:nvSpPr>
-          <p:cNvPr id="30" name="Text 22"/>
-          <p:cNvSpPr/>
-          <p:nvPr/>
-        </p:nvSpPr>
-        <p:spPr>
-          <a:xfrm>
-            <a:off x="8275320" y="4832604"/>
-            <a:ext cx="365760" cy="228600"/>
-          </a:xfrm>
-          <a:prstGeom prst="rect">
-            <a:avLst/>
-          </a:prstGeom>
-          <a:noFill/>
-          <a:ln/>
-        </p:spPr>
-        <p:txBody>
-          <a:bodyPr wrap="square" lIns="0" tIns="0" rIns="0" bIns="0" rtlCol="0" anchor="ctr"/>
-          <a:lstStyle/>
-          <a:p>
-            <a:pPr marL="0" indent="0" algn="r">
-              <a:buNone/>
-            </a:pPr>
-            <a:r>
-              <a:rPr lang="en-US" sz="850" dirty="0">
-                <a:solidFill>
-                  <a:srgbClr val="7F8C8D"/>
-                </a:solidFill>
-                <a:latin typeface="Calibri" pitchFamily="34" charset="0"/>
-                <a:ea typeface="Calibri" pitchFamily="34" charset="-122"/>
-                <a:cs typeface="Calibri" pitchFamily="34" charset="-120"/>
-              </a:rPr>
-              <a:t>19</a:t>
             </a:r>
             <a:endParaRPr lang="en-US" sz="850" dirty="0"/>
           </a:p>
@@ -10427,7 +10922,18 @@
                 <a:ea typeface="Trebuchet MS" pitchFamily="34" charset="-122"/>
                 <a:cs typeface="Trebuchet MS" pitchFamily="34" charset="-120"/>
               </a:rPr>
-              <a:t>El MinTIC</a:t>
+              <a:t>El </a:t>
+            </a:r>
+            <a:r>
+              <a:rPr lang="en-US" sz="1450" b="1" dirty="0" err="1">
+                <a:solidFill>
+                  <a:srgbClr val="0B3C5D"/>
+                </a:solidFill>
+                <a:latin typeface="Trebuchet MS" pitchFamily="34" charset="0"/>
+                <a:ea typeface="Trebuchet MS" pitchFamily="34" charset="-122"/>
+                <a:cs typeface="Trebuchet MS" pitchFamily="34" charset="-120"/>
+              </a:rPr>
+              <a:t>Gobierno</a:t>
             </a:r>
             <a:endParaRPr lang="en-US" sz="1450" dirty="0"/>
           </a:p>
@@ -10466,7 +10972,73 @@
                 <a:ea typeface="Calibri" pitchFamily="34" charset="-122"/>
                 <a:cs typeface="Calibri" pitchFamily="34" charset="-120"/>
               </a:rPr>
-              <a:t>Los portales federados viven separados: no existe el agregado nacional.</a:t>
+              <a:t>Los portales </a:t>
+            </a:r>
+            <a:r>
+              <a:rPr lang="en-US" sz="1050" dirty="0" err="1">
+                <a:solidFill>
+                  <a:srgbClr val="2C3E50"/>
+                </a:solidFill>
+                <a:latin typeface="Calibri" pitchFamily="34" charset="0"/>
+                <a:ea typeface="Calibri" pitchFamily="34" charset="-122"/>
+                <a:cs typeface="Calibri" pitchFamily="34" charset="-120"/>
+              </a:rPr>
+              <a:t>federados</a:t>
+            </a:r>
+            <a:r>
+              <a:rPr lang="en-US" sz="1050" dirty="0">
+                <a:solidFill>
+                  <a:srgbClr val="2C3E50"/>
+                </a:solidFill>
+                <a:latin typeface="Calibri" pitchFamily="34" charset="0"/>
+                <a:ea typeface="Calibri" pitchFamily="34" charset="-122"/>
+                <a:cs typeface="Calibri" pitchFamily="34" charset="-120"/>
+              </a:rPr>
+              <a:t> y el </a:t>
+            </a:r>
+            <a:r>
+              <a:rPr lang="en-US" sz="1050" dirty="0" err="1">
+                <a:solidFill>
+                  <a:srgbClr val="2C3E50"/>
+                </a:solidFill>
+                <a:latin typeface="Calibri" pitchFamily="34" charset="0"/>
+                <a:ea typeface="Calibri" pitchFamily="34" charset="-122"/>
+                <a:cs typeface="Calibri" pitchFamily="34" charset="-120"/>
+              </a:rPr>
+              <a:t>centralizado</a:t>
+            </a:r>
+            <a:r>
+              <a:rPr lang="en-US" sz="1050" dirty="0">
+                <a:solidFill>
+                  <a:srgbClr val="2C3E50"/>
+                </a:solidFill>
+                <a:latin typeface="Calibri" pitchFamily="34" charset="0"/>
+                <a:ea typeface="Calibri" pitchFamily="34" charset="-122"/>
+                <a:cs typeface="Calibri" pitchFamily="34" charset="-120"/>
+              </a:rPr>
+              <a:t> </a:t>
+            </a:r>
+            <a:r>
+              <a:rPr lang="en-US" sz="1050" dirty="0" err="1">
+                <a:solidFill>
+                  <a:srgbClr val="2C3E50"/>
+                </a:solidFill>
+                <a:latin typeface="Calibri" pitchFamily="34" charset="0"/>
+                <a:ea typeface="Calibri" pitchFamily="34" charset="-122"/>
+                <a:cs typeface="Calibri" pitchFamily="34" charset="-120"/>
+              </a:rPr>
+              <a:t>viven</a:t>
+            </a:r>
+            <a:r>
+              <a:rPr lang="en-US" sz="1050" dirty="0">
+                <a:solidFill>
+                  <a:srgbClr val="2C3E50"/>
+                </a:solidFill>
+                <a:latin typeface="Calibri" pitchFamily="34" charset="0"/>
+                <a:ea typeface="Calibri" pitchFamily="34" charset="-122"/>
+                <a:cs typeface="Calibri" pitchFamily="34" charset="-120"/>
+              </a:rPr>
+              <a:t> separados: no existe el agregado nacional.</a:t>
             </a:r>
             <a:endParaRPr lang="en-US" sz="1050" dirty="0"/>
           </a:p>
@@ -10597,7 +11169,95 @@
                 <a:ea typeface="Calibri" pitchFamily="34" charset="-122"/>
                 <a:cs typeface="Calibri" pitchFamily="34" charset="-120"/>
               </a:rPr>
-              <a:t>Necesita saber de APIs y SQL para obtener una simple cifra.</a:t>
+              <a:t>Necesita saber de </a:t>
+            </a:r>
+            <a:r>
+              <a:rPr lang="en-US" sz="1050" dirty="0" err="1">
+                <a:solidFill>
+                  <a:srgbClr val="2C3E50"/>
+                </a:solidFill>
+                <a:latin typeface="Calibri" pitchFamily="34" charset="0"/>
+                <a:ea typeface="Calibri" pitchFamily="34" charset="-122"/>
+                <a:cs typeface="Calibri" pitchFamily="34" charset="-120"/>
+              </a:rPr>
+              <a:t>búsqueda</a:t>
+            </a:r>
+            <a:r>
+              <a:rPr lang="en-US" sz="1050" dirty="0">
+                <a:solidFill>
+                  <a:srgbClr val="2C3E50"/>
+                </a:solidFill>
+                <a:latin typeface="Calibri" pitchFamily="34" charset="0"/>
+                <a:ea typeface="Calibri" pitchFamily="34" charset="-122"/>
+                <a:cs typeface="Calibri" pitchFamily="34" charset="-120"/>
+              </a:rPr>
+              <a:t> </a:t>
+            </a:r>
+            <a:r>
+              <a:rPr lang="en-US" sz="1050" dirty="0" err="1">
+                <a:solidFill>
+                  <a:srgbClr val="2C3E50"/>
+                </a:solidFill>
+                <a:latin typeface="Calibri" pitchFamily="34" charset="0"/>
+                <a:ea typeface="Calibri" pitchFamily="34" charset="-122"/>
+                <a:cs typeface="Calibri" pitchFamily="34" charset="-120"/>
+              </a:rPr>
+              <a:t>avanzada</a:t>
+            </a:r>
+            <a:r>
+              <a:rPr lang="en-US" sz="1050" dirty="0">
+                <a:solidFill>
+                  <a:srgbClr val="2C3E50"/>
+                </a:solidFill>
+                <a:latin typeface="Calibri" pitchFamily="34" charset="0"/>
+                <a:ea typeface="Calibri" pitchFamily="34" charset="-122"/>
+                <a:cs typeface="Calibri" pitchFamily="34" charset="-120"/>
+              </a:rPr>
+              <a:t> de </a:t>
+            </a:r>
+            <a:r>
+              <a:rPr lang="en-US" sz="1050" dirty="0" err="1">
+                <a:solidFill>
+                  <a:srgbClr val="2C3E50"/>
+                </a:solidFill>
+                <a:latin typeface="Calibri" pitchFamily="34" charset="0"/>
+                <a:ea typeface="Calibri" pitchFamily="34" charset="-122"/>
+                <a:cs typeface="Calibri" pitchFamily="34" charset="-120"/>
+              </a:rPr>
+              <a:t>datos</a:t>
+            </a:r>
+            <a:r>
+              <a:rPr lang="en-US" sz="1050" dirty="0">
+                <a:solidFill>
+                  <a:srgbClr val="2C3E50"/>
+                </a:solidFill>
+                <a:latin typeface="Calibri" pitchFamily="34" charset="0"/>
+                <a:ea typeface="Calibri" pitchFamily="34" charset="-122"/>
+                <a:cs typeface="Calibri" pitchFamily="34" charset="-120"/>
+              </a:rPr>
+              <a:t> o </a:t>
+            </a:r>
+            <a:r>
+              <a:rPr lang="en-US" sz="1050" dirty="0" err="1">
+                <a:solidFill>
+                  <a:srgbClr val="2C3E50"/>
+                </a:solidFill>
+                <a:latin typeface="Calibri" pitchFamily="34" charset="0"/>
+                <a:ea typeface="Calibri" pitchFamily="34" charset="-122"/>
+                <a:cs typeface="Calibri" pitchFamily="34" charset="-120"/>
+              </a:rPr>
+              <a:t>manejo</a:t>
+            </a:r>
+            <a:r>
+              <a:rPr lang="en-US" sz="1050" dirty="0">
+                <a:solidFill>
+                  <a:srgbClr val="2C3E50"/>
+                </a:solidFill>
+                <a:latin typeface="Calibri" pitchFamily="34" charset="0"/>
+                <a:ea typeface="Calibri" pitchFamily="34" charset="-122"/>
+                <a:cs typeface="Calibri" pitchFamily="34" charset="-120"/>
+              </a:rPr>
+              <a:t> de APIs y SQL para obtener una simple cifra.</a:t>
             </a:r>
             <a:endParaRPr lang="en-US" sz="1050" dirty="0"/>
           </a:p>
@@ -10884,6 +11544,1031 @@
               <a:t>La entidad</a:t>
             </a:r>
             <a:endParaRPr lang="en-US" sz="1450" dirty="0"/>
+          </a:p>
+        </p:txBody>
+      </p:sp>
+    </p:spTree>
+  </p:cSld>
+  <p:clrMapOvr>
+    <a:masterClrMapping/>
+  </p:clrMapOvr>
+</p:sld>
+</file>
+
+<file path=ppt/slides/slide20.xml><?xml version="1.0" encoding="utf-8"?>
+<p:sld xmlns:a="http://schemas.openxmlformats.org/drawingml/2006/main" xmlns:r="http://schemas.openxmlformats.org/officeDocument/2006/relationships" xmlns:p="http://schemas.openxmlformats.org/presentationml/2006/main">
+  <p:cSld name="Slide 19">
+    <p:bg>
+      <p:bgPr>
+        <a:solidFill>
+          <a:srgbClr val="F5F7FA"/>
+        </a:solidFill>
+        <a:effectLst/>
+      </p:bgPr>
+    </p:bg>
+    <p:spTree>
+      <p:nvGrpSpPr>
+        <p:cNvPr id="1" name=""/>
+        <p:cNvGrpSpPr/>
+        <p:nvPr/>
+      </p:nvGrpSpPr>
+      <p:grpSpPr>
+        <a:xfrm>
+          <a:off x="0" y="0"/>
+          <a:ext cx="0" cy="0"/>
+          <a:chOff x="0" y="0"/>
+          <a:chExt cx="0" cy="0"/>
+        </a:xfrm>
+      </p:grpSpPr>
+      <p:sp>
+        <p:nvSpPr>
+          <p:cNvPr id="2" name="Text 0"/>
+          <p:cNvSpPr/>
+          <p:nvPr/>
+        </p:nvSpPr>
+        <p:spPr>
+          <a:xfrm>
+            <a:off x="502920" y="292608"/>
+            <a:ext cx="8138160" cy="256032"/>
+          </a:xfrm>
+          <a:prstGeom prst="rect">
+            <a:avLst/>
+          </a:prstGeom>
+          <a:noFill/>
+          <a:ln/>
+        </p:spPr>
+        <p:txBody>
+          <a:bodyPr wrap="square" lIns="0" tIns="0" rIns="0" bIns="0" rtlCol="0" anchor="ctr"/>
+          <a:lstStyle/>
+          <a:p>
+            <a:pPr marL="0" indent="0">
+              <a:buNone/>
+            </a:pPr>
+            <a:r>
+              <a:rPr lang="en-US" sz="1100" b="1" kern="0" spc="200" dirty="0">
+                <a:solidFill>
+                  <a:srgbClr val="1ABC9C"/>
+                </a:solidFill>
+                <a:latin typeface="Trebuchet MS" pitchFamily="34" charset="0"/>
+                <a:ea typeface="Trebuchet MS" pitchFamily="34" charset="-122"/>
+                <a:cs typeface="Trebuchet MS" pitchFamily="34" charset="-120"/>
+              </a:rPr>
+              <a:t>RESPALDO TÉCNICO · B6</a:t>
+            </a:r>
+            <a:endParaRPr lang="en-US" sz="1100" dirty="0"/>
+          </a:p>
+        </p:txBody>
+      </p:sp>
+      <p:sp>
+        <p:nvSpPr>
+          <p:cNvPr id="3" name="Text 1"/>
+          <p:cNvSpPr/>
+          <p:nvPr/>
+        </p:nvSpPr>
+        <p:spPr>
+          <a:xfrm>
+            <a:off x="502920" y="548640"/>
+            <a:ext cx="8138160" cy="502920"/>
+          </a:xfrm>
+          <a:prstGeom prst="rect">
+            <a:avLst/>
+          </a:prstGeom>
+          <a:noFill/>
+          <a:ln/>
+        </p:spPr>
+        <p:txBody>
+          <a:bodyPr wrap="square" lIns="0" tIns="0" rIns="0" bIns="0" rtlCol="0" anchor="ctr"/>
+          <a:lstStyle/>
+          <a:p>
+            <a:pPr marL="0" indent="0">
+              <a:buNone/>
+            </a:pPr>
+            <a:r>
+              <a:rPr lang="en-US" sz="2700" b="1" dirty="0">
+                <a:solidFill>
+                  <a:srgbClr val="0B3C5D"/>
+                </a:solidFill>
+                <a:latin typeface="Trebuchet MS" pitchFamily="34" charset="0"/>
+                <a:ea typeface="Trebuchet MS" pitchFamily="34" charset="-122"/>
+                <a:cs typeface="Trebuchet MS" pitchFamily="34" charset="-120"/>
+              </a:rPr>
+              <a:t>Soberanía, seguridad y cumplimiento</a:t>
+            </a:r>
+            <a:endParaRPr lang="en-US" sz="2700" dirty="0"/>
+          </a:p>
+        </p:txBody>
+      </p:sp>
+      <p:sp>
+        <p:nvSpPr>
+          <p:cNvPr id="4" name="Text 2"/>
+          <p:cNvSpPr/>
+          <p:nvPr/>
+        </p:nvSpPr>
+        <p:spPr>
+          <a:xfrm>
+            <a:off x="502920" y="1298448"/>
+            <a:ext cx="8138160" cy="502920"/>
+          </a:xfrm>
+          <a:prstGeom prst="rect">
+            <a:avLst/>
+          </a:prstGeom>
+          <a:noFill/>
+          <a:ln/>
+        </p:spPr>
+        <p:txBody>
+          <a:bodyPr wrap="square" lIns="0" tIns="0" rIns="0" bIns="0" rtlCol="0" anchor="ctr"/>
+          <a:lstStyle/>
+          <a:p>
+            <a:pPr marL="0" indent="0">
+              <a:buNone/>
+            </a:pPr>
+            <a:r>
+              <a:rPr lang="en-US" sz="1200" dirty="0">
+                <a:solidFill>
+                  <a:srgbClr val="2C3E50"/>
+                </a:solidFill>
+                <a:latin typeface="Calibri" pitchFamily="34" charset="0"/>
+                <a:ea typeface="Calibri" pitchFamily="34" charset="-122"/>
+                <a:cs typeface="Calibri" pitchFamily="34" charset="-120"/>
+              </a:rPr>
+              <a:t>DatosVivos corre en infraestructura del Estado y solo toca datos que ya son públicos. El diseño protege a las personas y hace el sistema auditable de punta a punta.</a:t>
+            </a:r>
+            <a:endParaRPr lang="en-US" sz="1200" dirty="0"/>
+          </a:p>
+        </p:txBody>
+      </p:sp>
+      <p:sp>
+        <p:nvSpPr>
+          <p:cNvPr id="5" name="Shape 3"/>
+          <p:cNvSpPr/>
+          <p:nvPr/>
+        </p:nvSpPr>
+        <p:spPr>
+          <a:xfrm>
+            <a:off x="502920" y="1920240"/>
+            <a:ext cx="2560320" cy="1170432"/>
+          </a:xfrm>
+          <a:prstGeom prst="roundRect">
+            <a:avLst>
+              <a:gd name="adj" fmla="val 4688"/>
+            </a:avLst>
+          </a:prstGeom>
+          <a:solidFill>
+            <a:srgbClr val="FFFFFF"/>
+          </a:solidFill>
+          <a:ln/>
+          <a:effectLst>
+            <a:outerShdw algn="bl" rotWithShape="0">
+              <a:srgbClr val="1A2530">
+                <a:alpha val="0"/>
+              </a:srgbClr>
+            </a:outerShdw>
+          </a:effectLst>
+        </p:spPr>
+      </p:sp>
+      <p:pic>
+        <p:nvPicPr>
+          <p:cNvPr id="6" name="Image 0" descr="preencoded.png"/>
+          <p:cNvPicPr>
+            <a:picLocks noChangeAspect="1"/>
+          </p:cNvPicPr>
+          <p:nvPr/>
+        </p:nvPicPr>
+        <p:blipFill>
+          <a:blip r:embed="rId3"/>
+          <a:stretch>
+            <a:fillRect/>
+          </a:stretch>
+        </p:blipFill>
+        <p:spPr>
+          <a:xfrm>
+            <a:off x="649224" y="2066544"/>
+            <a:ext cx="274320" cy="274320"/>
+          </a:xfrm>
+          <a:prstGeom prst="rect">
+            <a:avLst/>
+          </a:prstGeom>
+        </p:spPr>
+      </p:pic>
+      <p:sp>
+        <p:nvSpPr>
+          <p:cNvPr id="7" name="Text 4"/>
+          <p:cNvSpPr/>
+          <p:nvPr/>
+        </p:nvSpPr>
+        <p:spPr>
+          <a:xfrm>
+            <a:off x="1005840" y="2011680"/>
+            <a:ext cx="1938528" cy="411480"/>
+          </a:xfrm>
+          <a:prstGeom prst="rect">
+            <a:avLst/>
+          </a:prstGeom>
+          <a:noFill/>
+          <a:ln/>
+        </p:spPr>
+        <p:txBody>
+          <a:bodyPr wrap="square" lIns="0" tIns="0" rIns="0" bIns="0" rtlCol="0" anchor="ctr"/>
+          <a:lstStyle/>
+          <a:p>
+            <a:pPr marL="0" indent="0">
+              <a:buNone/>
+            </a:pPr>
+            <a:r>
+              <a:rPr lang="en-US" sz="1050" b="1" dirty="0">
+                <a:solidFill>
+                  <a:srgbClr val="0B3C5D"/>
+                </a:solidFill>
+                <a:latin typeface="Trebuchet MS" pitchFamily="34" charset="0"/>
+                <a:ea typeface="Trebuchet MS" pitchFamily="34" charset="-122"/>
+                <a:cs typeface="Trebuchet MS" pitchFamily="34" charset="-120"/>
+              </a:rPr>
+              <a:t>Infraestructura del Estado</a:t>
+            </a:r>
+            <a:endParaRPr lang="en-US" sz="1050" dirty="0"/>
+          </a:p>
+        </p:txBody>
+      </p:sp>
+      <p:sp>
+        <p:nvSpPr>
+          <p:cNvPr id="8" name="Text 5"/>
+          <p:cNvSpPr/>
+          <p:nvPr/>
+        </p:nvSpPr>
+        <p:spPr>
+          <a:xfrm>
+            <a:off x="649224" y="2423160"/>
+            <a:ext cx="2267712" cy="640080"/>
+          </a:xfrm>
+          <a:prstGeom prst="rect">
+            <a:avLst/>
+          </a:prstGeom>
+          <a:noFill/>
+          <a:ln/>
+        </p:spPr>
+        <p:txBody>
+          <a:bodyPr wrap="square" lIns="0" tIns="0" rIns="0" bIns="0" rtlCol="0" anchor="ctr"/>
+          <a:lstStyle/>
+          <a:p>
+            <a:pPr marL="0" indent="0">
+              <a:buNone/>
+            </a:pPr>
+            <a:r>
+              <a:rPr lang="en-US" sz="850" dirty="0">
+                <a:solidFill>
+                  <a:srgbClr val="2C3E50"/>
+                </a:solidFill>
+                <a:latin typeface="Calibri" pitchFamily="34" charset="0"/>
+                <a:ea typeface="Calibri" pitchFamily="34" charset="-122"/>
+                <a:cs typeface="Calibri" pitchFamily="34" charset="-120"/>
+              </a:rPr>
+              <a:t>El servicio corre en una VM pública bajo VPN estatal; los datos consultados son públicos por definición.</a:t>
+            </a:r>
+            <a:endParaRPr lang="en-US" sz="850" dirty="0"/>
+          </a:p>
+        </p:txBody>
+      </p:sp>
+      <p:sp>
+        <p:nvSpPr>
+          <p:cNvPr id="9" name="Shape 6"/>
+          <p:cNvSpPr/>
+          <p:nvPr/>
+        </p:nvSpPr>
+        <p:spPr>
+          <a:xfrm>
+            <a:off x="3291840" y="1920240"/>
+            <a:ext cx="2560320" cy="1170432"/>
+          </a:xfrm>
+          <a:prstGeom prst="roundRect">
+            <a:avLst>
+              <a:gd name="adj" fmla="val 4688"/>
+            </a:avLst>
+          </a:prstGeom>
+          <a:solidFill>
+            <a:srgbClr val="FFFFFF"/>
+          </a:solidFill>
+          <a:ln/>
+          <a:effectLst>
+            <a:outerShdw algn="bl" rotWithShape="0">
+              <a:srgbClr val="1A2530">
+                <a:alpha val="0"/>
+              </a:srgbClr>
+            </a:outerShdw>
+          </a:effectLst>
+        </p:spPr>
+      </p:sp>
+      <p:pic>
+        <p:nvPicPr>
+          <p:cNvPr id="10" name="Image 1" descr="preencoded.png"/>
+          <p:cNvPicPr>
+            <a:picLocks noChangeAspect="1"/>
+          </p:cNvPicPr>
+          <p:nvPr/>
+        </p:nvPicPr>
+        <p:blipFill>
+          <a:blip r:embed="rId4"/>
+          <a:stretch>
+            <a:fillRect/>
+          </a:stretch>
+        </p:blipFill>
+        <p:spPr>
+          <a:xfrm>
+            <a:off x="3438144" y="2066544"/>
+            <a:ext cx="274320" cy="274320"/>
+          </a:xfrm>
+          <a:prstGeom prst="rect">
+            <a:avLst/>
+          </a:prstGeom>
+        </p:spPr>
+      </p:pic>
+      <p:sp>
+        <p:nvSpPr>
+          <p:cNvPr id="11" name="Text 7"/>
+          <p:cNvSpPr/>
+          <p:nvPr/>
+        </p:nvSpPr>
+        <p:spPr>
+          <a:xfrm>
+            <a:off x="3794760" y="2011680"/>
+            <a:ext cx="1938528" cy="411480"/>
+          </a:xfrm>
+          <a:prstGeom prst="rect">
+            <a:avLst/>
+          </a:prstGeom>
+          <a:noFill/>
+          <a:ln/>
+        </p:spPr>
+        <p:txBody>
+          <a:bodyPr wrap="square" lIns="0" tIns="0" rIns="0" bIns="0" rtlCol="0" anchor="ctr"/>
+          <a:lstStyle/>
+          <a:p>
+            <a:pPr marL="0" indent="0">
+              <a:buNone/>
+            </a:pPr>
+            <a:r>
+              <a:rPr lang="en-US" sz="1050" b="1" dirty="0">
+                <a:solidFill>
+                  <a:srgbClr val="0B3C5D"/>
+                </a:solidFill>
+                <a:latin typeface="Trebuchet MS" pitchFamily="34" charset="0"/>
+                <a:ea typeface="Trebuchet MS" pitchFamily="34" charset="-122"/>
+                <a:cs typeface="Trebuchet MS" pitchFamily="34" charset="-120"/>
+              </a:rPr>
+              <a:t>Sin datos personales</a:t>
+            </a:r>
+            <a:endParaRPr lang="en-US" sz="1050" dirty="0"/>
+          </a:p>
+        </p:txBody>
+      </p:sp>
+      <p:sp>
+        <p:nvSpPr>
+          <p:cNvPr id="12" name="Text 8"/>
+          <p:cNvSpPr/>
+          <p:nvPr/>
+        </p:nvSpPr>
+        <p:spPr>
+          <a:xfrm>
+            <a:off x="3438144" y="2423160"/>
+            <a:ext cx="2267712" cy="640080"/>
+          </a:xfrm>
+          <a:prstGeom prst="rect">
+            <a:avLst/>
+          </a:prstGeom>
+          <a:noFill/>
+          <a:ln/>
+        </p:spPr>
+        <p:txBody>
+          <a:bodyPr wrap="square" lIns="0" tIns="0" rIns="0" bIns="0" rtlCol="0" anchor="ctr"/>
+          <a:lstStyle/>
+          <a:p>
+            <a:pPr marL="0" indent="0">
+              <a:buNone/>
+            </a:pPr>
+            <a:r>
+              <a:rPr lang="en-US" sz="850" dirty="0">
+                <a:solidFill>
+                  <a:srgbClr val="2C3E50"/>
+                </a:solidFill>
+                <a:latin typeface="Calibri" pitchFamily="34" charset="0"/>
+                <a:ea typeface="Calibri" pitchFamily="34" charset="-122"/>
+                <a:cs typeface="Calibri" pitchFamily="34" charset="-120"/>
+              </a:rPr>
+              <a:t>Cero registro y cero rastreadores. La telemetría es agregada y anónima: mide qué se consulta, nunca quién.</a:t>
+            </a:r>
+            <a:endParaRPr lang="en-US" sz="850" dirty="0"/>
+          </a:p>
+        </p:txBody>
+      </p:sp>
+      <p:sp>
+        <p:nvSpPr>
+          <p:cNvPr id="13" name="Shape 9"/>
+          <p:cNvSpPr/>
+          <p:nvPr/>
+        </p:nvSpPr>
+        <p:spPr>
+          <a:xfrm>
+            <a:off x="6080760" y="1920240"/>
+            <a:ext cx="2560320" cy="1170432"/>
+          </a:xfrm>
+          <a:prstGeom prst="roundRect">
+            <a:avLst>
+              <a:gd name="adj" fmla="val 4688"/>
+            </a:avLst>
+          </a:prstGeom>
+          <a:solidFill>
+            <a:srgbClr val="FFFFFF"/>
+          </a:solidFill>
+          <a:ln/>
+          <a:effectLst>
+            <a:outerShdw algn="bl" rotWithShape="0">
+              <a:srgbClr val="1A2530">
+                <a:alpha val="0"/>
+              </a:srgbClr>
+            </a:outerShdw>
+          </a:effectLst>
+        </p:spPr>
+      </p:sp>
+      <p:pic>
+        <p:nvPicPr>
+          <p:cNvPr id="14" name="Image 2" descr="preencoded.png"/>
+          <p:cNvPicPr>
+            <a:picLocks noChangeAspect="1"/>
+          </p:cNvPicPr>
+          <p:nvPr/>
+        </p:nvPicPr>
+        <p:blipFill>
+          <a:blip r:embed="rId5"/>
+          <a:stretch>
+            <a:fillRect/>
+          </a:stretch>
+        </p:blipFill>
+        <p:spPr>
+          <a:xfrm>
+            <a:off x="6227064" y="2066544"/>
+            <a:ext cx="274320" cy="274320"/>
+          </a:xfrm>
+          <a:prstGeom prst="rect">
+            <a:avLst/>
+          </a:prstGeom>
+        </p:spPr>
+      </p:pic>
+      <p:sp>
+        <p:nvSpPr>
+          <p:cNvPr id="15" name="Text 10"/>
+          <p:cNvSpPr/>
+          <p:nvPr/>
+        </p:nvSpPr>
+        <p:spPr>
+          <a:xfrm>
+            <a:off x="6583680" y="2011680"/>
+            <a:ext cx="1938528" cy="411480"/>
+          </a:xfrm>
+          <a:prstGeom prst="rect">
+            <a:avLst/>
+          </a:prstGeom>
+          <a:noFill/>
+          <a:ln/>
+        </p:spPr>
+        <p:txBody>
+          <a:bodyPr wrap="square" lIns="0" tIns="0" rIns="0" bIns="0" rtlCol="0" anchor="ctr"/>
+          <a:lstStyle/>
+          <a:p>
+            <a:pPr marL="0" indent="0">
+              <a:buNone/>
+            </a:pPr>
+            <a:r>
+              <a:rPr lang="en-US" sz="1050" b="1" dirty="0">
+                <a:solidFill>
+                  <a:srgbClr val="0B3C5D"/>
+                </a:solidFill>
+                <a:latin typeface="Trebuchet MS" pitchFamily="34" charset="0"/>
+                <a:ea typeface="Trebuchet MS" pitchFamily="34" charset="-122"/>
+                <a:cs typeface="Trebuchet MS" pitchFamily="34" charset="-120"/>
+              </a:rPr>
+              <a:t>Solo lectura</a:t>
+            </a:r>
+            <a:endParaRPr lang="en-US" sz="1050" dirty="0"/>
+          </a:p>
+        </p:txBody>
+      </p:sp>
+      <p:sp>
+        <p:nvSpPr>
+          <p:cNvPr id="16" name="Text 11"/>
+          <p:cNvSpPr/>
+          <p:nvPr/>
+        </p:nvSpPr>
+        <p:spPr>
+          <a:xfrm>
+            <a:off x="6227064" y="2423160"/>
+            <a:ext cx="2267712" cy="640080"/>
+          </a:xfrm>
+          <a:prstGeom prst="rect">
+            <a:avLst/>
+          </a:prstGeom>
+          <a:noFill/>
+          <a:ln/>
+        </p:spPr>
+        <p:txBody>
+          <a:bodyPr wrap="square" lIns="0" tIns="0" rIns="0" bIns="0" rtlCol="0" anchor="ctr"/>
+          <a:lstStyle/>
+          <a:p>
+            <a:pPr marL="0" indent="0">
+              <a:buNone/>
+            </a:pPr>
+            <a:r>
+              <a:rPr lang="en-US" sz="850" dirty="0">
+                <a:solidFill>
+                  <a:srgbClr val="2C3E50"/>
+                </a:solidFill>
+                <a:latin typeface="Calibri" pitchFamily="34" charset="0"/>
+                <a:ea typeface="Calibri" pitchFamily="34" charset="-122"/>
+                <a:cs typeface="Calibri" pitchFamily="34" charset="-120"/>
+              </a:rPr>
+              <a:t>El motor no puede escribir en ninguna fuente; la verificación de solo-lectura es una de las tres capas del pipeline.</a:t>
+            </a:r>
+            <a:endParaRPr lang="en-US" sz="850" dirty="0"/>
+          </a:p>
+        </p:txBody>
+      </p:sp>
+      <p:sp>
+        <p:nvSpPr>
+          <p:cNvPr id="17" name="Shape 12"/>
+          <p:cNvSpPr/>
+          <p:nvPr/>
+        </p:nvSpPr>
+        <p:spPr>
+          <a:xfrm>
+            <a:off x="502920" y="3218688"/>
+            <a:ext cx="2560320" cy="1170432"/>
+          </a:xfrm>
+          <a:prstGeom prst="roundRect">
+            <a:avLst>
+              <a:gd name="adj" fmla="val 4688"/>
+            </a:avLst>
+          </a:prstGeom>
+          <a:solidFill>
+            <a:srgbClr val="FFFFFF"/>
+          </a:solidFill>
+          <a:ln/>
+          <a:effectLst>
+            <a:outerShdw algn="bl" rotWithShape="0">
+              <a:srgbClr val="1A2530">
+                <a:alpha val="0"/>
+              </a:srgbClr>
+            </a:outerShdw>
+          </a:effectLst>
+        </p:spPr>
+      </p:sp>
+      <p:pic>
+        <p:nvPicPr>
+          <p:cNvPr id="18" name="Image 3" descr="preencoded.png"/>
+          <p:cNvPicPr>
+            <a:picLocks noChangeAspect="1"/>
+          </p:cNvPicPr>
+          <p:nvPr/>
+        </p:nvPicPr>
+        <p:blipFill>
+          <a:blip r:embed="rId6"/>
+          <a:stretch>
+            <a:fillRect/>
+          </a:stretch>
+        </p:blipFill>
+        <p:spPr>
+          <a:xfrm>
+            <a:off x="649224" y="3364992"/>
+            <a:ext cx="274320" cy="274320"/>
+          </a:xfrm>
+          <a:prstGeom prst="rect">
+            <a:avLst/>
+          </a:prstGeom>
+        </p:spPr>
+      </p:pic>
+      <p:sp>
+        <p:nvSpPr>
+          <p:cNvPr id="19" name="Text 13"/>
+          <p:cNvSpPr/>
+          <p:nvPr/>
+        </p:nvSpPr>
+        <p:spPr>
+          <a:xfrm>
+            <a:off x="1005840" y="3310128"/>
+            <a:ext cx="1938528" cy="411480"/>
+          </a:xfrm>
+          <a:prstGeom prst="rect">
+            <a:avLst/>
+          </a:prstGeom>
+          <a:noFill/>
+          <a:ln/>
+        </p:spPr>
+        <p:txBody>
+          <a:bodyPr wrap="square" lIns="0" tIns="0" rIns="0" bIns="0" rtlCol="0" anchor="ctr"/>
+          <a:lstStyle/>
+          <a:p>
+            <a:pPr marL="0" indent="0">
+              <a:buNone/>
+            </a:pPr>
+            <a:r>
+              <a:rPr lang="en-US" sz="1050" b="1" dirty="0">
+                <a:solidFill>
+                  <a:srgbClr val="0B3C5D"/>
+                </a:solidFill>
+                <a:latin typeface="Trebuchet MS" pitchFamily="34" charset="0"/>
+                <a:ea typeface="Trebuchet MS" pitchFamily="34" charset="-122"/>
+                <a:cs typeface="Trebuchet MS" pitchFamily="34" charset="-120"/>
+              </a:rPr>
+              <a:t>Repositorio abierto y auditable</a:t>
+            </a:r>
+            <a:endParaRPr lang="en-US" sz="1050" dirty="0"/>
+          </a:p>
+        </p:txBody>
+      </p:sp>
+      <p:sp>
+        <p:nvSpPr>
+          <p:cNvPr id="20" name="Text 14"/>
+          <p:cNvSpPr/>
+          <p:nvPr/>
+        </p:nvSpPr>
+        <p:spPr>
+          <a:xfrm>
+            <a:off x="649224" y="3721608"/>
+            <a:ext cx="2267712" cy="640080"/>
+          </a:xfrm>
+          <a:prstGeom prst="rect">
+            <a:avLst/>
+          </a:prstGeom>
+          <a:noFill/>
+          <a:ln/>
+        </p:spPr>
+        <p:txBody>
+          <a:bodyPr wrap="square" lIns="0" tIns="0" rIns="0" bIns="0" rtlCol="0" anchor="ctr"/>
+          <a:lstStyle/>
+          <a:p>
+            <a:pPr marL="0" indent="0">
+              <a:buNone/>
+            </a:pPr>
+            <a:r>
+              <a:rPr lang="en-US" sz="850" dirty="0">
+                <a:solidFill>
+                  <a:srgbClr val="2C3E50"/>
+                </a:solidFill>
+                <a:latin typeface="Calibri" pitchFamily="34" charset="0"/>
+                <a:ea typeface="Calibri" pitchFamily="34" charset="-122"/>
+                <a:cs typeface="Calibri" pitchFamily="34" charset="-120"/>
+              </a:rPr>
+              <a:t>Código, documentación, pruebas y evaluación son públicos, replicables con Docker, con guía de validación para el jurado.</a:t>
+            </a:r>
+            <a:endParaRPr lang="en-US" sz="850" dirty="0"/>
+          </a:p>
+        </p:txBody>
+      </p:sp>
+      <p:sp>
+        <p:nvSpPr>
+          <p:cNvPr id="21" name="Shape 15"/>
+          <p:cNvSpPr/>
+          <p:nvPr/>
+        </p:nvSpPr>
+        <p:spPr>
+          <a:xfrm>
+            <a:off x="3291840" y="3218688"/>
+            <a:ext cx="2560320" cy="1170432"/>
+          </a:xfrm>
+          <a:prstGeom prst="roundRect">
+            <a:avLst>
+              <a:gd name="adj" fmla="val 4688"/>
+            </a:avLst>
+          </a:prstGeom>
+          <a:solidFill>
+            <a:srgbClr val="FFFFFF"/>
+          </a:solidFill>
+          <a:ln/>
+          <a:effectLst>
+            <a:outerShdw algn="bl" rotWithShape="0">
+              <a:srgbClr val="1A2530">
+                <a:alpha val="0"/>
+              </a:srgbClr>
+            </a:outerShdw>
+          </a:effectLst>
+        </p:spPr>
+      </p:sp>
+      <p:pic>
+        <p:nvPicPr>
+          <p:cNvPr id="22" name="Image 4" descr="preencoded.png"/>
+          <p:cNvPicPr>
+            <a:picLocks noChangeAspect="1"/>
+          </p:cNvPicPr>
+          <p:nvPr/>
+        </p:nvPicPr>
+        <p:blipFill>
+          <a:blip r:embed="rId7"/>
+          <a:stretch>
+            <a:fillRect/>
+          </a:stretch>
+        </p:blipFill>
+        <p:spPr>
+          <a:xfrm>
+            <a:off x="3438144" y="3364992"/>
+            <a:ext cx="274320" cy="274320"/>
+          </a:xfrm>
+          <a:prstGeom prst="rect">
+            <a:avLst/>
+          </a:prstGeom>
+        </p:spPr>
+      </p:pic>
+      <p:sp>
+        <p:nvSpPr>
+          <p:cNvPr id="23" name="Text 16"/>
+          <p:cNvSpPr/>
+          <p:nvPr/>
+        </p:nvSpPr>
+        <p:spPr>
+          <a:xfrm>
+            <a:off x="3794760" y="3310128"/>
+            <a:ext cx="1938528" cy="411480"/>
+          </a:xfrm>
+          <a:prstGeom prst="rect">
+            <a:avLst/>
+          </a:prstGeom>
+          <a:noFill/>
+          <a:ln/>
+        </p:spPr>
+        <p:txBody>
+          <a:bodyPr wrap="square" lIns="0" tIns="0" rIns="0" bIns="0" rtlCol="0" anchor="ctr"/>
+          <a:lstStyle/>
+          <a:p>
+            <a:pPr marL="0" indent="0">
+              <a:buNone/>
+            </a:pPr>
+            <a:r>
+              <a:rPr lang="en-US" sz="1050" b="1" dirty="0">
+                <a:solidFill>
+                  <a:srgbClr val="0B3C5D"/>
+                </a:solidFill>
+                <a:latin typeface="Trebuchet MS" pitchFamily="34" charset="0"/>
+                <a:ea typeface="Trebuchet MS" pitchFamily="34" charset="-122"/>
+                <a:cs typeface="Trebuchet MS" pitchFamily="34" charset="-120"/>
+              </a:rPr>
+              <a:t>Accesibilidad</a:t>
+            </a:r>
+            <a:endParaRPr lang="en-US" sz="1050" dirty="0"/>
+          </a:p>
+        </p:txBody>
+      </p:sp>
+      <p:sp>
+        <p:nvSpPr>
+          <p:cNvPr id="24" name="Text 17"/>
+          <p:cNvSpPr/>
+          <p:nvPr/>
+        </p:nvSpPr>
+        <p:spPr>
+          <a:xfrm>
+            <a:off x="3438144" y="3721608"/>
+            <a:ext cx="2267712" cy="640080"/>
+          </a:xfrm>
+          <a:prstGeom prst="rect">
+            <a:avLst/>
+          </a:prstGeom>
+          <a:noFill/>
+          <a:ln/>
+        </p:spPr>
+        <p:txBody>
+          <a:bodyPr wrap="square" lIns="0" tIns="0" rIns="0" bIns="0" rtlCol="0" anchor="ctr"/>
+          <a:lstStyle/>
+          <a:p>
+            <a:pPr marL="0" indent="0">
+              <a:buNone/>
+            </a:pPr>
+            <a:r>
+              <a:rPr lang="en-US" sz="850" dirty="0">
+                <a:solidFill>
+                  <a:srgbClr val="2C3E50"/>
+                </a:solidFill>
+                <a:latin typeface="Calibri" pitchFamily="34" charset="0"/>
+                <a:ea typeface="Calibri" pitchFamily="34" charset="-122"/>
+                <a:cs typeface="Calibri" pitchFamily="34" charset="-120"/>
+              </a:rPr>
+              <a:t>Ley 1618 de 2013 y WCAG 2.1 AA: entrada por voz, narración de resultados, alto contraste y escala tipográfica.</a:t>
+            </a:r>
+            <a:endParaRPr lang="en-US" sz="850" dirty="0"/>
+          </a:p>
+        </p:txBody>
+      </p:sp>
+      <p:sp>
+        <p:nvSpPr>
+          <p:cNvPr id="25" name="Shape 18"/>
+          <p:cNvSpPr/>
+          <p:nvPr/>
+        </p:nvSpPr>
+        <p:spPr>
+          <a:xfrm>
+            <a:off x="6080760" y="3218688"/>
+            <a:ext cx="2560320" cy="1170432"/>
+          </a:xfrm>
+          <a:prstGeom prst="roundRect">
+            <a:avLst>
+              <a:gd name="adj" fmla="val 4688"/>
+            </a:avLst>
+          </a:prstGeom>
+          <a:solidFill>
+            <a:srgbClr val="FFFFFF"/>
+          </a:solidFill>
+          <a:ln/>
+          <a:effectLst>
+            <a:outerShdw algn="bl" rotWithShape="0">
+              <a:srgbClr val="1A2530">
+                <a:alpha val="0"/>
+              </a:srgbClr>
+            </a:outerShdw>
+          </a:effectLst>
+        </p:spPr>
+      </p:sp>
+      <p:pic>
+        <p:nvPicPr>
+          <p:cNvPr id="26" name="Image 5" descr="preencoded.png"/>
+          <p:cNvPicPr>
+            <a:picLocks noChangeAspect="1"/>
+          </p:cNvPicPr>
+          <p:nvPr/>
+        </p:nvPicPr>
+        <p:blipFill>
+          <a:blip r:embed="rId8"/>
+          <a:stretch>
+            <a:fillRect/>
+          </a:stretch>
+        </p:blipFill>
+        <p:spPr>
+          <a:xfrm>
+            <a:off x="6227064" y="3364992"/>
+            <a:ext cx="274320" cy="274320"/>
+          </a:xfrm>
+          <a:prstGeom prst="rect">
+            <a:avLst/>
+          </a:prstGeom>
+        </p:spPr>
+      </p:pic>
+      <p:sp>
+        <p:nvSpPr>
+          <p:cNvPr id="27" name="Text 19"/>
+          <p:cNvSpPr/>
+          <p:nvPr/>
+        </p:nvSpPr>
+        <p:spPr>
+          <a:xfrm>
+            <a:off x="6583680" y="3310128"/>
+            <a:ext cx="1938528" cy="411480"/>
+          </a:xfrm>
+          <a:prstGeom prst="rect">
+            <a:avLst/>
+          </a:prstGeom>
+          <a:noFill/>
+          <a:ln/>
+        </p:spPr>
+        <p:txBody>
+          <a:bodyPr wrap="square" lIns="0" tIns="0" rIns="0" bIns="0" rtlCol="0" anchor="ctr"/>
+          <a:lstStyle/>
+          <a:p>
+            <a:pPr marL="0" indent="0">
+              <a:buNone/>
+            </a:pPr>
+            <a:r>
+              <a:rPr lang="en-US" sz="1050" b="1" dirty="0">
+                <a:solidFill>
+                  <a:srgbClr val="0B3C5D"/>
+                </a:solidFill>
+                <a:latin typeface="Trebuchet MS" pitchFamily="34" charset="0"/>
+                <a:ea typeface="Trebuchet MS" pitchFamily="34" charset="-122"/>
+                <a:cs typeface="Trebuchet MS" pitchFamily="34" charset="-120"/>
+              </a:rPr>
+              <a:t>Registro oficial</a:t>
+            </a:r>
+            <a:endParaRPr lang="en-US" sz="1050" dirty="0"/>
+          </a:p>
+        </p:txBody>
+      </p:sp>
+      <p:sp>
+        <p:nvSpPr>
+          <p:cNvPr id="28" name="Text 20"/>
+          <p:cNvSpPr/>
+          <p:nvPr/>
+        </p:nvSpPr>
+        <p:spPr>
+          <a:xfrm>
+            <a:off x="6227064" y="3721608"/>
+            <a:ext cx="2267712" cy="640080"/>
+          </a:xfrm>
+          <a:prstGeom prst="rect">
+            <a:avLst/>
+          </a:prstGeom>
+          <a:noFill/>
+          <a:ln/>
+        </p:spPr>
+        <p:txBody>
+          <a:bodyPr wrap="square" lIns="0" tIns="0" rIns="0" bIns="0" rtlCol="0" anchor="ctr"/>
+          <a:lstStyle/>
+          <a:p>
+            <a:pPr marL="0" indent="0">
+              <a:buNone/>
+            </a:pPr>
+            <a:r>
+              <a:rPr lang="en-US" sz="850" dirty="0">
+                <a:solidFill>
+                  <a:srgbClr val="2C3E50"/>
+                </a:solidFill>
+                <a:latin typeface="Calibri" pitchFamily="34" charset="0"/>
+                <a:ea typeface="Calibri" pitchFamily="34" charset="-122"/>
+                <a:cs typeface="Calibri" pitchFamily="34" charset="-120"/>
+              </a:rPr>
+              <a:t>Uso n.º 1074 registrado en herramientas.datos.gov.co (2026-07-13) como aporte formal al ecosistema.</a:t>
+            </a:r>
+            <a:endParaRPr lang="en-US" sz="850" dirty="0"/>
+          </a:p>
+        </p:txBody>
+      </p:sp>
+      <p:sp>
+        <p:nvSpPr>
+          <p:cNvPr id="29" name="Text 21"/>
+          <p:cNvSpPr/>
+          <p:nvPr/>
+        </p:nvSpPr>
+        <p:spPr>
+          <a:xfrm>
+            <a:off x="502920" y="4832604"/>
+            <a:ext cx="7680960" cy="228600"/>
+          </a:xfrm>
+          <a:prstGeom prst="rect">
+            <a:avLst/>
+          </a:prstGeom>
+          <a:noFill/>
+          <a:ln/>
+        </p:spPr>
+        <p:txBody>
+          <a:bodyPr wrap="square" lIns="0" tIns="0" rIns="0" bIns="0" rtlCol="0" anchor="ctr"/>
+          <a:lstStyle/>
+          <a:p>
+            <a:pPr marL="0" indent="0">
+              <a:buNone/>
+            </a:pPr>
+            <a:r>
+              <a:rPr lang="en-US" sz="850" b="1" dirty="0">
+                <a:solidFill>
+                  <a:srgbClr val="0B3C5D"/>
+                </a:solidFill>
+                <a:latin typeface="Calibri" pitchFamily="34" charset="0"/>
+                <a:ea typeface="Calibri" pitchFamily="34" charset="-122"/>
+                <a:cs typeface="Calibri" pitchFamily="34" charset="-120"/>
+              </a:rPr>
+              <a:t>DatosVivos · datosvivos.co</a:t>
+            </a:r>
+            <a:r>
+              <a:rPr lang="en-US" sz="850" dirty="0">
+                <a:solidFill>
+                  <a:srgbClr val="7F8C8D"/>
+                </a:solidFill>
+                <a:latin typeface="Calibri" pitchFamily="34" charset="0"/>
+                <a:ea typeface="Calibri" pitchFamily="34" charset="-122"/>
+                <a:cs typeface="Calibri" pitchFamily="34" charset="-120"/>
+              </a:rPr>
+              <a:t>   |   Datos al Ecosistema 2026 · Equipo 93 · Reto 7 · Nivel Avanzado</a:t>
+            </a:r>
+            <a:endParaRPr lang="en-US" sz="850" dirty="0"/>
+          </a:p>
+        </p:txBody>
+      </p:sp>
+      <p:sp>
+        <p:nvSpPr>
+          <p:cNvPr id="30" name="Text 22"/>
+          <p:cNvSpPr/>
+          <p:nvPr/>
+        </p:nvSpPr>
+        <p:spPr>
+          <a:xfrm>
+            <a:off x="8275320" y="4832604"/>
+            <a:ext cx="365760" cy="228600"/>
+          </a:xfrm>
+          <a:prstGeom prst="rect">
+            <a:avLst/>
+          </a:prstGeom>
+          <a:noFill/>
+          <a:ln/>
+        </p:spPr>
+        <p:txBody>
+          <a:bodyPr wrap="square" lIns="0" tIns="0" rIns="0" bIns="0" rtlCol="0" anchor="ctr"/>
+          <a:lstStyle/>
+          <a:p>
+            <a:pPr marL="0" indent="0" algn="r">
+              <a:buNone/>
+            </a:pPr>
+            <a:r>
+              <a:rPr lang="en-US" sz="850" dirty="0">
+                <a:solidFill>
+                  <a:srgbClr val="7F8C8D"/>
+                </a:solidFill>
+                <a:latin typeface="Calibri" pitchFamily="34" charset="0"/>
+                <a:ea typeface="Calibri" pitchFamily="34" charset="-122"/>
+                <a:cs typeface="Calibri" pitchFamily="34" charset="-120"/>
+              </a:rPr>
+              <a:t>19</a:t>
+            </a:r>
+            <a:endParaRPr lang="en-US" sz="850" dirty="0"/>
           </a:p>
         </p:txBody>
       </p:sp>
@@ -11394,8 +13079,8 @@
         </p:blipFill>
         <p:spPr>
           <a:xfrm>
-            <a:off x="667512" y="1481328"/>
-            <a:ext cx="347472" cy="347472"/>
+            <a:off x="611855" y="1481328"/>
+            <a:ext cx="301752" cy="301752"/>
           </a:xfrm>
           <a:prstGeom prst="rect">
             <a:avLst/>
@@ -11513,7 +13198,7 @@
                 <a:ea typeface="Trebuchet MS" pitchFamily="34" charset="-122"/>
                 <a:cs typeface="Trebuchet MS" pitchFamily="34" charset="-120"/>
               </a:rPr>
-              <a:t>DECISORES Y PRENSA</a:t>
+              <a:t>DECISORES NACIONALES</a:t>
             </a:r>
             <a:endParaRPr lang="en-US" sz="900" dirty="0"/>
           </a:p>
@@ -11552,7 +13237,51 @@
                 <a:ea typeface="Calibri" pitchFamily="34" charset="-122"/>
                 <a:cs typeface="Calibri" pitchFamily="34" charset="-120"/>
               </a:rPr>
-              <a:t>El estado nacional en vivo. Para decidir en segundos.</a:t>
+              <a:t>El estado nacional en vivo. Para </a:t>
+            </a:r>
+            <a:r>
+              <a:rPr lang="en-US" sz="1100" dirty="0" err="1">
+                <a:solidFill>
+                  <a:srgbClr val="2C3E50"/>
+                </a:solidFill>
+                <a:latin typeface="Calibri" pitchFamily="34" charset="0"/>
+                <a:ea typeface="Calibri" pitchFamily="34" charset="-122"/>
+                <a:cs typeface="Calibri" pitchFamily="34" charset="-120"/>
+              </a:rPr>
+              <a:t>ver</a:t>
+            </a:r>
+            <a:r>
+              <a:rPr lang="en-US" sz="1100" dirty="0">
+                <a:solidFill>
+                  <a:srgbClr val="2C3E50"/>
+                </a:solidFill>
+                <a:latin typeface="Calibri" pitchFamily="34" charset="0"/>
+                <a:ea typeface="Calibri" pitchFamily="34" charset="-122"/>
+                <a:cs typeface="Calibri" pitchFamily="34" charset="-120"/>
+              </a:rPr>
+              <a:t> el </a:t>
+            </a:r>
+            <a:r>
+              <a:rPr lang="en-US" sz="1100" dirty="0" err="1">
+                <a:solidFill>
+                  <a:srgbClr val="2C3E50"/>
+                </a:solidFill>
+                <a:latin typeface="Calibri" pitchFamily="34" charset="0"/>
+                <a:ea typeface="Calibri" pitchFamily="34" charset="-122"/>
+                <a:cs typeface="Calibri" pitchFamily="34" charset="-120"/>
+              </a:rPr>
+              <a:t>estado</a:t>
+            </a:r>
+            <a:r>
+              <a:rPr lang="en-US" sz="1100" dirty="0">
+                <a:solidFill>
+                  <a:srgbClr val="2C3E50"/>
+                </a:solidFill>
+                <a:latin typeface="Calibri" pitchFamily="34" charset="0"/>
+                <a:ea typeface="Calibri" pitchFamily="34" charset="-122"/>
+                <a:cs typeface="Calibri" pitchFamily="34" charset="-120"/>
+              </a:rPr>
+              <a:t> global en segundos.</a:t>
             </a:r>
             <a:endParaRPr lang="en-US" sz="1100" dirty="0"/>
           </a:p>
@@ -11645,8 +13374,8 @@
         </p:blipFill>
         <p:spPr>
           <a:xfrm>
-            <a:off x="2759202" y="1481328"/>
-            <a:ext cx="347472" cy="347472"/>
+            <a:off x="2703545" y="1481328"/>
+            <a:ext cx="301752" cy="301752"/>
           </a:xfrm>
           <a:prstGeom prst="rect">
             <a:avLst/>
@@ -11764,7 +13493,7 @@
                 <a:ea typeface="Trebuchet MS" pitchFamily="34" charset="-122"/>
                 <a:cs typeface="Trebuchet MS" pitchFamily="34" charset="-120"/>
               </a:rPr>
-              <a:t>GERENTES Y ENTIDADES</a:t>
+              <a:t>CABEZAS DE SECTOR Y ENTIDADES</a:t>
             </a:r>
             <a:endParaRPr lang="en-US" sz="900" dirty="0"/>
           </a:p>
@@ -11803,7 +13532,139 @@
                 <a:ea typeface="Calibri" pitchFamily="34" charset="-122"/>
                 <a:cs typeface="Calibri" pitchFamily="34" charset="-120"/>
               </a:rPr>
-              <a:t>Detalle por sector, entidad y territorio. Para gestionar.</a:t>
+              <a:t>Detalle por sector, entidad y territorio. Para </a:t>
+            </a:r>
+            <a:r>
+              <a:rPr lang="en-US" sz="1100" dirty="0" err="1">
+                <a:solidFill>
+                  <a:srgbClr val="2C3E50"/>
+                </a:solidFill>
+                <a:latin typeface="Calibri" pitchFamily="34" charset="0"/>
+                <a:ea typeface="Calibri" pitchFamily="34" charset="-122"/>
+                <a:cs typeface="Calibri" pitchFamily="34" charset="-120"/>
+              </a:rPr>
+              <a:t>gestionar</a:t>
+            </a:r>
+            <a:r>
+              <a:rPr lang="en-US" sz="1100" dirty="0">
+                <a:solidFill>
+                  <a:srgbClr val="2C3E50"/>
+                </a:solidFill>
+                <a:latin typeface="Calibri" pitchFamily="34" charset="0"/>
+                <a:ea typeface="Calibri" pitchFamily="34" charset="-122"/>
+                <a:cs typeface="Calibri" pitchFamily="34" charset="-120"/>
+              </a:rPr>
+              <a:t> </a:t>
+            </a:r>
+            <a:r>
+              <a:rPr lang="en-US" sz="1100" dirty="0" err="1">
+                <a:solidFill>
+                  <a:srgbClr val="2C3E50"/>
+                </a:solidFill>
+                <a:latin typeface="Calibri" pitchFamily="34" charset="0"/>
+                <a:ea typeface="Calibri" pitchFamily="34" charset="-122"/>
+                <a:cs typeface="Calibri" pitchFamily="34" charset="-120"/>
+              </a:rPr>
+              <a:t>que</a:t>
+            </a:r>
+            <a:r>
+              <a:rPr lang="en-US" sz="1100" dirty="0">
+                <a:solidFill>
+                  <a:srgbClr val="2C3E50"/>
+                </a:solidFill>
+                <a:latin typeface="Calibri" pitchFamily="34" charset="0"/>
+                <a:ea typeface="Calibri" pitchFamily="34" charset="-122"/>
+                <a:cs typeface="Calibri" pitchFamily="34" charset="-120"/>
+              </a:rPr>
+              <a:t> </a:t>
+            </a:r>
+            <a:r>
+              <a:rPr lang="en-US" sz="1100" dirty="0" err="1">
+                <a:solidFill>
+                  <a:srgbClr val="2C3E50"/>
+                </a:solidFill>
+                <a:latin typeface="Calibri" pitchFamily="34" charset="0"/>
+                <a:ea typeface="Calibri" pitchFamily="34" charset="-122"/>
+                <a:cs typeface="Calibri" pitchFamily="34" charset="-120"/>
+              </a:rPr>
+              <a:t>los</a:t>
+            </a:r>
+            <a:r>
+              <a:rPr lang="en-US" sz="1100" dirty="0">
+                <a:solidFill>
+                  <a:srgbClr val="2C3E50"/>
+                </a:solidFill>
+                <a:latin typeface="Calibri" pitchFamily="34" charset="0"/>
+                <a:ea typeface="Calibri" pitchFamily="34" charset="-122"/>
+                <a:cs typeface="Calibri" pitchFamily="34" charset="-120"/>
+              </a:rPr>
+              <a:t> </a:t>
+            </a:r>
+            <a:r>
+              <a:rPr lang="en-US" sz="1100" dirty="0" err="1">
+                <a:solidFill>
+                  <a:srgbClr val="2C3E50"/>
+                </a:solidFill>
+                <a:latin typeface="Calibri" pitchFamily="34" charset="0"/>
+                <a:ea typeface="Calibri" pitchFamily="34" charset="-122"/>
+                <a:cs typeface="Calibri" pitchFamily="34" charset="-120"/>
+              </a:rPr>
+              <a:t>datos</a:t>
+            </a:r>
+            <a:r>
+              <a:rPr lang="en-US" sz="1100" dirty="0">
+                <a:solidFill>
+                  <a:srgbClr val="2C3E50"/>
+                </a:solidFill>
+                <a:latin typeface="Calibri" pitchFamily="34" charset="0"/>
+                <a:ea typeface="Calibri" pitchFamily="34" charset="-122"/>
+                <a:cs typeface="Calibri" pitchFamily="34" charset="-120"/>
+              </a:rPr>
+              <a:t> </a:t>
+            </a:r>
+            <a:r>
+              <a:rPr lang="en-US" sz="1100" dirty="0" err="1">
+                <a:solidFill>
+                  <a:srgbClr val="2C3E50"/>
+                </a:solidFill>
+                <a:latin typeface="Calibri" pitchFamily="34" charset="0"/>
+                <a:ea typeface="Calibri" pitchFamily="34" charset="-122"/>
+                <a:cs typeface="Calibri" pitchFamily="34" charset="-120"/>
+              </a:rPr>
+              <a:t>tengan</a:t>
+            </a:r>
+            <a:r>
+              <a:rPr lang="en-US" sz="1100" dirty="0">
+                <a:solidFill>
+                  <a:srgbClr val="2C3E50"/>
+                </a:solidFill>
+                <a:latin typeface="Calibri" pitchFamily="34" charset="0"/>
+                <a:ea typeface="Calibri" pitchFamily="34" charset="-122"/>
+                <a:cs typeface="Calibri" pitchFamily="34" charset="-120"/>
+              </a:rPr>
+              <a:t> </a:t>
+            </a:r>
+            <a:r>
+              <a:rPr lang="en-US" sz="1100" dirty="0" err="1">
+                <a:solidFill>
+                  <a:srgbClr val="2C3E50"/>
+                </a:solidFill>
+                <a:latin typeface="Calibri" pitchFamily="34" charset="0"/>
+                <a:ea typeface="Calibri" pitchFamily="34" charset="-122"/>
+                <a:cs typeface="Calibri" pitchFamily="34" charset="-120"/>
+              </a:rPr>
+              <a:t>calidad</a:t>
+            </a:r>
+            <a:r>
+              <a:rPr lang="en-US" sz="1100" dirty="0">
+                <a:solidFill>
+                  <a:srgbClr val="2C3E50"/>
+                </a:solidFill>
+                <a:latin typeface="Calibri" pitchFamily="34" charset="0"/>
+                <a:ea typeface="Calibri" pitchFamily="34" charset="-122"/>
+                <a:cs typeface="Calibri" pitchFamily="34" charset="-120"/>
+              </a:rPr>
+              <a:t>.</a:t>
             </a:r>
             <a:endParaRPr lang="en-US" sz="1100" dirty="0"/>
           </a:p>
@@ -11896,8 +13757,8 @@
         </p:blipFill>
         <p:spPr>
           <a:xfrm>
-            <a:off x="4850892" y="1481328"/>
-            <a:ext cx="347472" cy="347472"/>
+            <a:off x="4795235" y="1481328"/>
+            <a:ext cx="301752" cy="301752"/>
           </a:xfrm>
           <a:prstGeom prst="rect">
             <a:avLst/>
@@ -12046,6 +13907,17 @@
               <a:buNone/>
             </a:pPr>
             <a:r>
+              <a:rPr lang="en-US" sz="1100" dirty="0" err="1">
+                <a:solidFill>
+                  <a:srgbClr val="2C3E50"/>
+                </a:solidFill>
+                <a:latin typeface="Calibri" pitchFamily="34" charset="0"/>
+                <a:ea typeface="Calibri" pitchFamily="34" charset="-122"/>
+                <a:cs typeface="Calibri" pitchFamily="34" charset="-120"/>
+              </a:rPr>
+              <a:t>Preguntas</a:t>
+            </a:r>
+            <a:r>
               <a:rPr lang="en-US" sz="1100" dirty="0">
                 <a:solidFill>
                   <a:srgbClr val="2C3E50"/>
@@ -12054,7 +13926,150 @@
                 <a:ea typeface="Calibri" pitchFamily="34" charset="-122"/>
                 <a:cs typeface="Calibri" pitchFamily="34" charset="-120"/>
               </a:rPr>
-              <a:t>Pregunta en tus palabras; cifra verificada con fuente.</a:t>
+              <a:t> </a:t>
+            </a:r>
+            <a:r>
+              <a:rPr lang="en-US" sz="1100" dirty="0" err="1">
+                <a:solidFill>
+                  <a:srgbClr val="2C3E50"/>
+                </a:solidFill>
+                <a:latin typeface="Calibri" pitchFamily="34" charset="0"/>
+                <a:ea typeface="Calibri" pitchFamily="34" charset="-122"/>
+                <a:cs typeface="Calibri" pitchFamily="34" charset="-120"/>
+              </a:rPr>
+              <a:t>en</a:t>
+            </a:r>
+            <a:r>
+              <a:rPr lang="en-US" sz="1100" dirty="0">
+                <a:solidFill>
+                  <a:srgbClr val="2C3E50"/>
+                </a:solidFill>
+                <a:latin typeface="Calibri" pitchFamily="34" charset="0"/>
+                <a:ea typeface="Calibri" pitchFamily="34" charset="-122"/>
+                <a:cs typeface="Calibri" pitchFamily="34" charset="-120"/>
+              </a:rPr>
+              <a:t> </a:t>
+            </a:r>
+            <a:r>
+              <a:rPr lang="en-US" sz="1100" dirty="0" err="1">
+                <a:solidFill>
+                  <a:srgbClr val="2C3E50"/>
+                </a:solidFill>
+                <a:latin typeface="Calibri" pitchFamily="34" charset="0"/>
+                <a:ea typeface="Calibri" pitchFamily="34" charset="-122"/>
+                <a:cs typeface="Calibri" pitchFamily="34" charset="-120"/>
+              </a:rPr>
+              <a:t>lenguaje</a:t>
+            </a:r>
+            <a:r>
+              <a:rPr lang="en-US" sz="1100" dirty="0">
+                <a:solidFill>
+                  <a:srgbClr val="2C3E50"/>
+                </a:solidFill>
+                <a:latin typeface="Calibri" pitchFamily="34" charset="0"/>
+                <a:ea typeface="Calibri" pitchFamily="34" charset="-122"/>
+                <a:cs typeface="Calibri" pitchFamily="34" charset="-120"/>
+              </a:rPr>
+              <a:t> natural. Con </a:t>
+            </a:r>
+            <a:r>
+              <a:rPr lang="en-US" sz="1100" dirty="0" err="1">
+                <a:solidFill>
+                  <a:srgbClr val="2C3E50"/>
+                </a:solidFill>
+                <a:latin typeface="Calibri" pitchFamily="34" charset="0"/>
+                <a:ea typeface="Calibri" pitchFamily="34" charset="-122"/>
+                <a:cs typeface="Calibri" pitchFamily="34" charset="-120"/>
+              </a:rPr>
+              <a:t>cifras</a:t>
+            </a:r>
+            <a:r>
+              <a:rPr lang="en-US" sz="1100" dirty="0">
+                <a:solidFill>
+                  <a:srgbClr val="2C3E50"/>
+                </a:solidFill>
+                <a:latin typeface="Calibri" pitchFamily="34" charset="0"/>
+                <a:ea typeface="Calibri" pitchFamily="34" charset="-122"/>
+                <a:cs typeface="Calibri" pitchFamily="34" charset="-120"/>
+              </a:rPr>
+              <a:t> </a:t>
+            </a:r>
+            <a:r>
+              <a:rPr lang="en-US" sz="1100" dirty="0" err="1">
+                <a:solidFill>
+                  <a:srgbClr val="2C3E50"/>
+                </a:solidFill>
+                <a:latin typeface="Calibri" pitchFamily="34" charset="0"/>
+                <a:ea typeface="Calibri" pitchFamily="34" charset="-122"/>
+                <a:cs typeface="Calibri" pitchFamily="34" charset="-120"/>
+              </a:rPr>
+              <a:t>verificadas</a:t>
+            </a:r>
+            <a:r>
+              <a:rPr lang="en-US" sz="1100" dirty="0">
+                <a:solidFill>
+                  <a:srgbClr val="2C3E50"/>
+                </a:solidFill>
+                <a:latin typeface="Calibri" pitchFamily="34" charset="0"/>
+                <a:ea typeface="Calibri" pitchFamily="34" charset="-122"/>
+                <a:cs typeface="Calibri" pitchFamily="34" charset="-120"/>
+              </a:rPr>
+              <a:t> con la </a:t>
+            </a:r>
+            <a:r>
+              <a:rPr lang="en-US" sz="1100" dirty="0" err="1">
+                <a:solidFill>
+                  <a:srgbClr val="2C3E50"/>
+                </a:solidFill>
+                <a:latin typeface="Calibri" pitchFamily="34" charset="0"/>
+                <a:ea typeface="Calibri" pitchFamily="34" charset="-122"/>
+                <a:cs typeface="Calibri" pitchFamily="34" charset="-120"/>
+              </a:rPr>
+              <a:t>fuente</a:t>
+            </a:r>
+            <a:r>
+              <a:rPr lang="en-US" sz="1100" dirty="0">
+                <a:solidFill>
+                  <a:srgbClr val="2C3E50"/>
+                </a:solidFill>
+                <a:latin typeface="Calibri" pitchFamily="34" charset="0"/>
+                <a:ea typeface="Calibri" pitchFamily="34" charset="-122"/>
+                <a:cs typeface="Calibri" pitchFamily="34" charset="-120"/>
+              </a:rPr>
+              <a:t>. Cero </a:t>
+            </a:r>
+            <a:r>
+              <a:rPr lang="en-US" sz="1100" dirty="0" err="1">
+                <a:solidFill>
+                  <a:srgbClr val="2C3E50"/>
+                </a:solidFill>
+                <a:latin typeface="Calibri" pitchFamily="34" charset="0"/>
+                <a:ea typeface="Calibri" pitchFamily="34" charset="-122"/>
+                <a:cs typeface="Calibri" pitchFamily="34" charset="-120"/>
+              </a:rPr>
+              <a:t>datos</a:t>
+            </a:r>
+            <a:r>
+              <a:rPr lang="en-US" sz="1100" dirty="0">
+                <a:solidFill>
+                  <a:srgbClr val="2C3E50"/>
+                </a:solidFill>
+                <a:latin typeface="Calibri" pitchFamily="34" charset="0"/>
+                <a:ea typeface="Calibri" pitchFamily="34" charset="-122"/>
+                <a:cs typeface="Calibri" pitchFamily="34" charset="-120"/>
+              </a:rPr>
+              <a:t> </a:t>
+            </a:r>
+            <a:r>
+              <a:rPr lang="en-US" sz="1100" dirty="0" err="1">
+                <a:solidFill>
+                  <a:srgbClr val="2C3E50"/>
+                </a:solidFill>
+                <a:latin typeface="Calibri" pitchFamily="34" charset="0"/>
+                <a:ea typeface="Calibri" pitchFamily="34" charset="-122"/>
+                <a:cs typeface="Calibri" pitchFamily="34" charset="-120"/>
+              </a:rPr>
+              <a:t>inventados</a:t>
             </a:r>
             <a:endParaRPr lang="en-US" sz="1100" dirty="0"/>
           </a:p>
@@ -12147,8 +14162,8 @@
         </p:blipFill>
         <p:spPr>
           <a:xfrm>
-            <a:off x="6942582" y="1481328"/>
-            <a:ext cx="347472" cy="347472"/>
+            <a:off x="6886925" y="1481328"/>
+            <a:ext cx="301752" cy="301752"/>
           </a:xfrm>
           <a:prstGeom prst="rect">
             <a:avLst/>
@@ -12627,7 +14642,18 @@
                 <a:ea typeface="Trebuchet MS" pitchFamily="34" charset="-122"/>
                 <a:cs typeface="Trebuchet MS" pitchFamily="34" charset="-120"/>
               </a:rPr>
-              <a:t>El panorama en vivo — se actualiza solo, cada día</a:t>
+              <a:t>El panorama en vivo y </a:t>
+            </a:r>
+            <a:r>
+              <a:rPr lang="en-US" sz="2700" b="1" dirty="0" err="1">
+                <a:solidFill>
+                  <a:srgbClr val="0B3C5D"/>
+                </a:solidFill>
+                <a:latin typeface="Trebuchet MS" pitchFamily="34" charset="0"/>
+                <a:ea typeface="Trebuchet MS" pitchFamily="34" charset="-122"/>
+                <a:cs typeface="Trebuchet MS" pitchFamily="34" charset="-120"/>
+              </a:rPr>
+              <a:t>actualizado</a:t>
             </a:r>
             <a:endParaRPr lang="en-US" sz="2700" dirty="0"/>
           </a:p>
@@ -13587,7 +15613,40 @@
                 <a:ea typeface="Calibri" pitchFamily="34" charset="-122"/>
                 <a:cs typeface="Calibri" pitchFamily="34" charset="-120"/>
               </a:rPr>
-              <a:t>Cifras en vivo, verificables: datosvivos.co/api/v1/stats/panorama</a:t>
+              <a:t>Cifras </a:t>
+            </a:r>
+            <a:r>
+              <a:rPr lang="en-US" sz="950" i="1" dirty="0" err="1">
+                <a:solidFill>
+                  <a:srgbClr val="7F8C8D"/>
+                </a:solidFill>
+                <a:latin typeface="Calibri" pitchFamily="34" charset="0"/>
+                <a:ea typeface="Calibri" pitchFamily="34" charset="-122"/>
+                <a:cs typeface="Calibri" pitchFamily="34" charset="-120"/>
+              </a:rPr>
+              <a:t>en</a:t>
+            </a:r>
+            <a:r>
+              <a:rPr lang="en-US" sz="950" i="1" dirty="0">
+                <a:solidFill>
+                  <a:srgbClr val="7F8C8D"/>
+                </a:solidFill>
+                <a:latin typeface="Calibri" pitchFamily="34" charset="0"/>
+                <a:ea typeface="Calibri" pitchFamily="34" charset="-122"/>
+                <a:cs typeface="Calibri" pitchFamily="34" charset="-120"/>
+              </a:rPr>
+              <a:t> vivo y </a:t>
+            </a:r>
+            <a:r>
+              <a:rPr lang="en-US" sz="950" i="1" dirty="0" err="1">
+                <a:solidFill>
+                  <a:srgbClr val="7F8C8D"/>
+                </a:solidFill>
+                <a:latin typeface="Calibri" pitchFamily="34" charset="0"/>
+                <a:ea typeface="Calibri" pitchFamily="34" charset="-122"/>
+                <a:cs typeface="Calibri" pitchFamily="34" charset="-120"/>
+              </a:rPr>
+              <a:t>verificables</a:t>
             </a:r>
             <a:endParaRPr lang="en-US" sz="950" dirty="0"/>
           </a:p>
@@ -14686,7 +16745,7 @@
               <a:buNone/>
             </a:pPr>
             <a:r>
-              <a:rPr lang="en-US" sz="2700" b="1" dirty="0">
+              <a:rPr lang="en-US" sz="2400" b="1" dirty="0">
                 <a:solidFill>
                   <a:srgbClr val="FFFFFF"/>
                 </a:solidFill>
@@ -14694,9 +16753,75 @@
                 <a:ea typeface="Trebuchet MS" pitchFamily="34" charset="-122"/>
                 <a:cs typeface="Trebuchet MS" pitchFamily="34" charset="-120"/>
               </a:rPr>
-              <a:t>“¿Cuántos colegios públicos hay en Boyacá?” — qué pasa por dentro</a:t>
-            </a:r>
-            <a:endParaRPr lang="en-US" sz="2700" dirty="0"/>
+              <a:t>“¿</a:t>
+            </a:r>
+            <a:r>
+              <a:rPr lang="en-US" sz="2400" b="1" dirty="0" err="1">
+                <a:solidFill>
+                  <a:srgbClr val="FFFFFF"/>
+                </a:solidFill>
+                <a:latin typeface="Trebuchet MS" pitchFamily="34" charset="0"/>
+                <a:ea typeface="Trebuchet MS" pitchFamily="34" charset="-122"/>
+                <a:cs typeface="Trebuchet MS" pitchFamily="34" charset="-120"/>
+              </a:rPr>
+              <a:t>Cuántos</a:t>
+            </a:r>
+            <a:r>
+              <a:rPr lang="en-US" sz="2400" b="1" dirty="0">
+                <a:solidFill>
+                  <a:srgbClr val="FFFFFF"/>
+                </a:solidFill>
+                <a:latin typeface="Trebuchet MS" pitchFamily="34" charset="0"/>
+                <a:ea typeface="Trebuchet MS" pitchFamily="34" charset="-122"/>
+                <a:cs typeface="Trebuchet MS" pitchFamily="34" charset="-120"/>
+              </a:rPr>
+              <a:t> colegios </a:t>
+            </a:r>
+            <a:r>
+              <a:rPr lang="en-US" sz="2400" b="1" dirty="0" err="1">
+                <a:solidFill>
+                  <a:srgbClr val="FFFFFF"/>
+                </a:solidFill>
+                <a:latin typeface="Trebuchet MS" pitchFamily="34" charset="0"/>
+                <a:ea typeface="Trebuchet MS" pitchFamily="34" charset="-122"/>
+                <a:cs typeface="Trebuchet MS" pitchFamily="34" charset="-120"/>
+              </a:rPr>
+              <a:t>públicos</a:t>
+            </a:r>
+            <a:r>
+              <a:rPr lang="en-US" sz="2400" b="1" dirty="0">
+                <a:solidFill>
+                  <a:srgbClr val="FFFFFF"/>
+                </a:solidFill>
+                <a:latin typeface="Trebuchet MS" pitchFamily="34" charset="0"/>
+                <a:ea typeface="Trebuchet MS" pitchFamily="34" charset="-122"/>
+                <a:cs typeface="Trebuchet MS" pitchFamily="34" charset="-120"/>
+              </a:rPr>
+              <a:t> hay </a:t>
+            </a:r>
+            <a:r>
+              <a:rPr lang="en-US" sz="2400" b="1" dirty="0" err="1">
+                <a:solidFill>
+                  <a:srgbClr val="FFFFFF"/>
+                </a:solidFill>
+                <a:latin typeface="Trebuchet MS" pitchFamily="34" charset="0"/>
+                <a:ea typeface="Trebuchet MS" pitchFamily="34" charset="-122"/>
+                <a:cs typeface="Trebuchet MS" pitchFamily="34" charset="-120"/>
+              </a:rPr>
+              <a:t>en</a:t>
+            </a:r>
+            <a:r>
+              <a:rPr lang="en-US" sz="2400" b="1" dirty="0">
+                <a:solidFill>
+                  <a:srgbClr val="FFFFFF"/>
+                </a:solidFill>
+                <a:latin typeface="Trebuchet MS" pitchFamily="34" charset="0"/>
+                <a:ea typeface="Trebuchet MS" pitchFamily="34" charset="-122"/>
+                <a:cs typeface="Trebuchet MS" pitchFamily="34" charset="-120"/>
+              </a:rPr>
+              <a:t> Boyacá?”</a:t>
+            </a:r>
+            <a:endParaRPr lang="en-US" sz="2400" dirty="0"/>
           </a:p>
         </p:txBody>
       </p:sp>
@@ -15929,6 +18054,1736 @@
 </file>
 
 <file path=ppt/slides/slide8.xml><?xml version="1.0" encoding="utf-8"?>
+<p:sld xmlns:a="http://schemas.openxmlformats.org/drawingml/2006/main" xmlns:r="http://schemas.openxmlformats.org/officeDocument/2006/relationships" xmlns:p="http://schemas.openxmlformats.org/presentationml/2006/main">
+  <p:cSld>
+    <p:bg>
+      <p:bgPr>
+        <a:solidFill>
+          <a:srgbClr val="072A42"/>
+        </a:solidFill>
+        <a:effectLst/>
+      </p:bgPr>
+    </p:bg>
+    <p:spTree>
+      <p:nvGrpSpPr>
+        <p:cNvPr id="1" name=""/>
+        <p:cNvGrpSpPr/>
+        <p:nvPr/>
+      </p:nvGrpSpPr>
+      <p:grpSpPr>
+        <a:xfrm>
+          <a:off x="0" y="0"/>
+          <a:ext cx="0" cy="0"/>
+          <a:chOff x="0" y="0"/>
+          <a:chExt cx="0" cy="0"/>
+        </a:xfrm>
+      </p:grpSpPr>
+      <p:sp>
+        <p:nvSpPr>
+          <p:cNvPr id="2" name="Text 0"/>
+          <p:cNvSpPr/>
+          <p:nvPr/>
+        </p:nvSpPr>
+        <p:spPr>
+          <a:xfrm>
+            <a:off x="502920" y="960120"/>
+            <a:ext cx="8138160" cy="320040"/>
+          </a:xfrm>
+          <a:prstGeom prst="rect">
+            <a:avLst/>
+          </a:prstGeom>
+          <a:noFill/>
+          <a:ln/>
+        </p:spPr>
+        <p:txBody>
+          <a:bodyPr wrap="square" lIns="0" tIns="0" rIns="0" bIns="0" rtlCol="0" anchor="ctr"/>
+          <a:lstStyle/>
+          <a:p>
+            <a:pPr marL="0" marR="0" lvl="0" indent="0" algn="ctr" defTabSz="914400" rtl="0" eaLnBrk="1" fontAlgn="auto" latinLnBrk="0" hangingPunct="1">
+              <a:lnSpc>
+                <a:spcPct val="100000"/>
+              </a:lnSpc>
+              <a:spcBef>
+                <a:spcPts val="0"/>
+              </a:spcBef>
+              <a:spcAft>
+                <a:spcPts val="0"/>
+              </a:spcAft>
+              <a:buClrTx/>
+              <a:buSzTx/>
+              <a:buFontTx/>
+              <a:buNone/>
+              <a:tabLst/>
+              <a:defRPr/>
+            </a:pPr>
+            <a:r>
+              <a:rPr kumimoji="0" lang="en-US" sz="1300" b="1" i="0" u="none" strike="noStrike" kern="0" cap="none" spc="300" normalizeH="0" baseline="0" noProof="0" dirty="0">
+                <a:ln>
+                  <a:noFill/>
+                </a:ln>
+                <a:solidFill>
+                  <a:srgbClr val="1ABC9C"/>
+                </a:solidFill>
+                <a:effectLst/>
+                <a:uLnTx/>
+                <a:uFillTx/>
+                <a:latin typeface="Trebuchet MS" pitchFamily="34" charset="0"/>
+                <a:ea typeface="Trebuchet MS" pitchFamily="34" charset="-122"/>
+                <a:cs typeface="Trebuchet MS" pitchFamily="34" charset="-120"/>
+              </a:rPr>
+              <a:t>DEMO EN VIVO</a:t>
+            </a:r>
+            <a:endParaRPr kumimoji="0" lang="en-US" sz="1300" b="0" i="0" u="none" strike="noStrike" kern="1200" cap="none" spc="0" normalizeH="0" baseline="0" noProof="0" dirty="0">
+              <a:ln>
+                <a:noFill/>
+              </a:ln>
+              <a:solidFill>
+                <a:prstClr val="black"/>
+              </a:solidFill>
+              <a:effectLst/>
+              <a:uLnTx/>
+              <a:uFillTx/>
+              <a:latin typeface="Calibri" panose="020F0502020204030204"/>
+              <a:ea typeface="+mn-ea"/>
+              <a:cs typeface="+mn-cs"/>
+            </a:endParaRPr>
+          </a:p>
+        </p:txBody>
+      </p:sp>
+      <p:sp>
+        <p:nvSpPr>
+          <p:cNvPr id="3" name="Text 1"/>
+          <p:cNvSpPr/>
+          <p:nvPr/>
+        </p:nvSpPr>
+        <p:spPr>
+          <a:xfrm>
+            <a:off x="502920" y="1298448"/>
+            <a:ext cx="8138160" cy="594360"/>
+          </a:xfrm>
+          <a:prstGeom prst="rect">
+            <a:avLst/>
+          </a:prstGeom>
+          <a:noFill/>
+          <a:ln/>
+        </p:spPr>
+        <p:txBody>
+          <a:bodyPr wrap="square" lIns="0" tIns="0" rIns="0" bIns="0" rtlCol="0" anchor="ctr"/>
+          <a:lstStyle/>
+          <a:p>
+            <a:pPr marL="0" marR="0" lvl="0" indent="0" algn="ctr" defTabSz="914400" rtl="0" eaLnBrk="1" fontAlgn="auto" latinLnBrk="0" hangingPunct="1">
+              <a:lnSpc>
+                <a:spcPct val="100000"/>
+              </a:lnSpc>
+              <a:spcBef>
+                <a:spcPts val="0"/>
+              </a:spcBef>
+              <a:spcAft>
+                <a:spcPts val="0"/>
+              </a:spcAft>
+              <a:buClrTx/>
+              <a:buSzTx/>
+              <a:buFontTx/>
+              <a:buNone/>
+              <a:tabLst/>
+              <a:defRPr/>
+            </a:pPr>
+            <a:r>
+              <a:rPr kumimoji="0" lang="en-US" sz="3400" b="1" i="0" u="none" strike="noStrike" kern="1200" cap="none" spc="0" normalizeH="0" baseline="0" noProof="0" dirty="0">
+                <a:ln>
+                  <a:noFill/>
+                </a:ln>
+                <a:solidFill>
+                  <a:srgbClr val="FFFFFF"/>
+                </a:solidFill>
+                <a:effectLst/>
+                <a:uLnTx/>
+                <a:uFillTx/>
+                <a:latin typeface="Trebuchet MS" pitchFamily="34" charset="0"/>
+                <a:ea typeface="Trebuchet MS" pitchFamily="34" charset="-122"/>
+                <a:cs typeface="Trebuchet MS" pitchFamily="34" charset="-120"/>
+              </a:rPr>
+              <a:t>Veámoslo funcionando</a:t>
+            </a:r>
+            <a:endParaRPr kumimoji="0" lang="en-US" sz="3400" b="0" i="0" u="none" strike="noStrike" kern="1200" cap="none" spc="0" normalizeH="0" baseline="0" noProof="0" dirty="0">
+              <a:ln>
+                <a:noFill/>
+              </a:ln>
+              <a:solidFill>
+                <a:prstClr val="black"/>
+              </a:solidFill>
+              <a:effectLst/>
+              <a:uLnTx/>
+              <a:uFillTx/>
+              <a:latin typeface="Calibri" panose="020F0502020204030204"/>
+              <a:ea typeface="+mn-ea"/>
+              <a:cs typeface="+mn-cs"/>
+            </a:endParaRPr>
+          </a:p>
+        </p:txBody>
+      </p:sp>
+      <p:sp>
+        <p:nvSpPr>
+          <p:cNvPr id="4" name="Text 2"/>
+          <p:cNvSpPr/>
+          <p:nvPr/>
+        </p:nvSpPr>
+        <p:spPr>
+          <a:xfrm>
+            <a:off x="502920" y="1938528"/>
+            <a:ext cx="8138160" cy="292608"/>
+          </a:xfrm>
+          <a:prstGeom prst="rect">
+            <a:avLst/>
+          </a:prstGeom>
+          <a:noFill/>
+          <a:ln/>
+        </p:spPr>
+        <p:txBody>
+          <a:bodyPr wrap="square" lIns="0" tIns="0" rIns="0" bIns="0" rtlCol="0" anchor="ctr"/>
+          <a:lstStyle/>
+          <a:p>
+            <a:pPr marL="0" marR="0" lvl="0" indent="0" algn="ctr" defTabSz="914400" rtl="0" eaLnBrk="1" fontAlgn="auto" latinLnBrk="0" hangingPunct="1">
+              <a:lnSpc>
+                <a:spcPct val="100000"/>
+              </a:lnSpc>
+              <a:spcBef>
+                <a:spcPts val="0"/>
+              </a:spcBef>
+              <a:spcAft>
+                <a:spcPts val="0"/>
+              </a:spcAft>
+              <a:buClrTx/>
+              <a:buSzTx/>
+              <a:buFontTx/>
+              <a:buNone/>
+              <a:tabLst/>
+              <a:defRPr/>
+            </a:pPr>
+            <a:r>
+              <a:rPr kumimoji="0" lang="en-US" sz="1300" b="0" i="1" u="none" strike="noStrike" kern="1200" cap="none" spc="0" normalizeH="0" baseline="0" noProof="0" dirty="0">
+                <a:ln>
+                  <a:noFill/>
+                </a:ln>
+                <a:solidFill>
+                  <a:srgbClr val="AEC6D8"/>
+                </a:solidFill>
+                <a:effectLst/>
+                <a:uLnTx/>
+                <a:uFillTx/>
+                <a:latin typeface="Calibri" pitchFamily="34" charset="0"/>
+                <a:ea typeface="Calibri" pitchFamily="34" charset="-122"/>
+                <a:cs typeface="Calibri" pitchFamily="34" charset="-120"/>
+              </a:rPr>
+              <a:t>datosvivos.co — producción, cifras en vivo</a:t>
+            </a:r>
+            <a:endParaRPr kumimoji="0" lang="en-US" sz="1300" b="0" i="0" u="none" strike="noStrike" kern="1200" cap="none" spc="0" normalizeH="0" baseline="0" noProof="0" dirty="0">
+              <a:ln>
+                <a:noFill/>
+              </a:ln>
+              <a:solidFill>
+                <a:prstClr val="black"/>
+              </a:solidFill>
+              <a:effectLst/>
+              <a:uLnTx/>
+              <a:uFillTx/>
+              <a:latin typeface="Calibri" panose="020F0502020204030204"/>
+              <a:ea typeface="+mn-ea"/>
+              <a:cs typeface="+mn-cs"/>
+            </a:endParaRPr>
+          </a:p>
+        </p:txBody>
+      </p:sp>
+      <p:sp>
+        <p:nvSpPr>
+          <p:cNvPr id="5" name="Shape 3"/>
+          <p:cNvSpPr/>
+          <p:nvPr/>
+        </p:nvSpPr>
+        <p:spPr>
+          <a:xfrm>
+            <a:off x="502920" y="2514600"/>
+            <a:ext cx="1863090" cy="1188720"/>
+          </a:xfrm>
+          <a:prstGeom prst="roundRect">
+            <a:avLst>
+              <a:gd name="adj" fmla="val 4615"/>
+            </a:avLst>
+          </a:prstGeom>
+          <a:solidFill>
+            <a:srgbClr val="12496E"/>
+          </a:solidFill>
+          <a:ln/>
+        </p:spPr>
+      </p:sp>
+      <p:sp>
+        <p:nvSpPr>
+          <p:cNvPr id="6" name="Shape 4"/>
+          <p:cNvSpPr/>
+          <p:nvPr/>
+        </p:nvSpPr>
+        <p:spPr>
+          <a:xfrm>
+            <a:off x="1279017" y="2359152"/>
+            <a:ext cx="310896" cy="310896"/>
+          </a:xfrm>
+          <a:prstGeom prst="ellipse">
+            <a:avLst/>
+          </a:prstGeom>
+          <a:solidFill>
+            <a:srgbClr val="1ABC9C"/>
+          </a:solidFill>
+          <a:ln/>
+        </p:spPr>
+      </p:sp>
+      <p:sp>
+        <p:nvSpPr>
+          <p:cNvPr id="7" name="Text 5"/>
+          <p:cNvSpPr/>
+          <p:nvPr/>
+        </p:nvSpPr>
+        <p:spPr>
+          <a:xfrm>
+            <a:off x="1279017" y="2359152"/>
+            <a:ext cx="310896" cy="310896"/>
+          </a:xfrm>
+          <a:prstGeom prst="rect">
+            <a:avLst/>
+          </a:prstGeom>
+          <a:noFill/>
+          <a:ln/>
+        </p:spPr>
+        <p:txBody>
+          <a:bodyPr wrap="square" lIns="0" tIns="0" rIns="0" bIns="0" rtlCol="0" anchor="ctr"/>
+          <a:lstStyle/>
+          <a:p>
+            <a:pPr marL="0" marR="0" lvl="0" indent="0" algn="ctr" defTabSz="914400" rtl="0" eaLnBrk="1" fontAlgn="auto" latinLnBrk="0" hangingPunct="1">
+              <a:lnSpc>
+                <a:spcPct val="100000"/>
+              </a:lnSpc>
+              <a:spcBef>
+                <a:spcPts val="0"/>
+              </a:spcBef>
+              <a:spcAft>
+                <a:spcPts val="0"/>
+              </a:spcAft>
+              <a:buClrTx/>
+              <a:buSzTx/>
+              <a:buFontTx/>
+              <a:buNone/>
+              <a:tabLst/>
+              <a:defRPr/>
+            </a:pPr>
+            <a:r>
+              <a:rPr kumimoji="0" lang="en-US" sz="1300" b="1" i="0" u="none" strike="noStrike" kern="1200" cap="none" spc="0" normalizeH="0" baseline="0" noProof="0" dirty="0">
+                <a:ln>
+                  <a:noFill/>
+                </a:ln>
+                <a:solidFill>
+                  <a:srgbClr val="072A42"/>
+                </a:solidFill>
+                <a:effectLst/>
+                <a:uLnTx/>
+                <a:uFillTx/>
+                <a:latin typeface="Trebuchet MS" pitchFamily="34" charset="0"/>
+                <a:ea typeface="Trebuchet MS" pitchFamily="34" charset="-122"/>
+                <a:cs typeface="Trebuchet MS" pitchFamily="34" charset="-120"/>
+              </a:rPr>
+              <a:t>1</a:t>
+            </a:r>
+            <a:endParaRPr kumimoji="0" lang="en-US" sz="1300" b="0" i="0" u="none" strike="noStrike" kern="1200" cap="none" spc="0" normalizeH="0" baseline="0" noProof="0" dirty="0">
+              <a:ln>
+                <a:noFill/>
+              </a:ln>
+              <a:solidFill>
+                <a:prstClr val="black"/>
+              </a:solidFill>
+              <a:effectLst/>
+              <a:uLnTx/>
+              <a:uFillTx/>
+              <a:latin typeface="Calibri" panose="020F0502020204030204"/>
+              <a:ea typeface="+mn-ea"/>
+              <a:cs typeface="+mn-cs"/>
+            </a:endParaRPr>
+          </a:p>
+        </p:txBody>
+      </p:sp>
+      <p:sp>
+        <p:nvSpPr>
+          <p:cNvPr id="8" name="Text 6"/>
+          <p:cNvSpPr/>
+          <p:nvPr/>
+        </p:nvSpPr>
+        <p:spPr>
+          <a:xfrm>
+            <a:off x="548640" y="2788920"/>
+            <a:ext cx="1771650" cy="274320"/>
+          </a:xfrm>
+          <a:prstGeom prst="rect">
+            <a:avLst/>
+          </a:prstGeom>
+          <a:noFill/>
+          <a:ln/>
+        </p:spPr>
+        <p:txBody>
+          <a:bodyPr wrap="square" lIns="0" tIns="0" rIns="0" bIns="0" rtlCol="0" anchor="ctr"/>
+          <a:lstStyle/>
+          <a:p>
+            <a:pPr marL="0" marR="0" lvl="0" indent="0" algn="ctr" defTabSz="914400" rtl="0" eaLnBrk="1" fontAlgn="auto" latinLnBrk="0" hangingPunct="1">
+              <a:lnSpc>
+                <a:spcPct val="100000"/>
+              </a:lnSpc>
+              <a:spcBef>
+                <a:spcPts val="0"/>
+              </a:spcBef>
+              <a:spcAft>
+                <a:spcPts val="0"/>
+              </a:spcAft>
+              <a:buClrTx/>
+              <a:buSzTx/>
+              <a:buFontTx/>
+              <a:buNone/>
+              <a:tabLst/>
+              <a:defRPr/>
+            </a:pPr>
+            <a:r>
+              <a:rPr kumimoji="0" lang="en-US" sz="1300" b="1" i="0" u="none" strike="noStrike" kern="1200" cap="none" spc="0" normalizeH="0" baseline="0" noProof="0" dirty="0">
+                <a:ln>
+                  <a:noFill/>
+                </a:ln>
+                <a:solidFill>
+                  <a:srgbClr val="FFFFFF"/>
+                </a:solidFill>
+                <a:effectLst/>
+                <a:uLnTx/>
+                <a:uFillTx/>
+                <a:latin typeface="Trebuchet MS" pitchFamily="34" charset="0"/>
+                <a:ea typeface="Trebuchet MS" pitchFamily="34" charset="-122"/>
+                <a:cs typeface="Trebuchet MS" pitchFamily="34" charset="-120"/>
+              </a:rPr>
+              <a:t>Panorama</a:t>
+            </a:r>
+            <a:endParaRPr kumimoji="0" lang="en-US" sz="1300" b="0" i="0" u="none" strike="noStrike" kern="1200" cap="none" spc="0" normalizeH="0" baseline="0" noProof="0" dirty="0">
+              <a:ln>
+                <a:noFill/>
+              </a:ln>
+              <a:solidFill>
+                <a:prstClr val="black"/>
+              </a:solidFill>
+              <a:effectLst/>
+              <a:uLnTx/>
+              <a:uFillTx/>
+              <a:latin typeface="Calibri" panose="020F0502020204030204"/>
+              <a:ea typeface="+mn-ea"/>
+              <a:cs typeface="+mn-cs"/>
+            </a:endParaRPr>
+          </a:p>
+        </p:txBody>
+      </p:sp>
+      <p:sp>
+        <p:nvSpPr>
+          <p:cNvPr id="9" name="Text 7"/>
+          <p:cNvSpPr/>
+          <p:nvPr/>
+        </p:nvSpPr>
+        <p:spPr>
+          <a:xfrm>
+            <a:off x="594360" y="3090672"/>
+            <a:ext cx="1680210" cy="548640"/>
+          </a:xfrm>
+          <a:prstGeom prst="rect">
+            <a:avLst/>
+          </a:prstGeom>
+          <a:noFill/>
+          <a:ln/>
+        </p:spPr>
+        <p:txBody>
+          <a:bodyPr wrap="square" lIns="0" tIns="0" rIns="0" bIns="0" rtlCol="0" anchor="ctr"/>
+          <a:lstStyle/>
+          <a:p>
+            <a:pPr marL="0" marR="0" lvl="0" indent="0" algn="ctr" defTabSz="914400" rtl="0" eaLnBrk="1" fontAlgn="auto" latinLnBrk="0" hangingPunct="1">
+              <a:lnSpc>
+                <a:spcPct val="100000"/>
+              </a:lnSpc>
+              <a:spcBef>
+                <a:spcPts val="0"/>
+              </a:spcBef>
+              <a:spcAft>
+                <a:spcPts val="0"/>
+              </a:spcAft>
+              <a:buClrTx/>
+              <a:buSzTx/>
+              <a:buFontTx/>
+              <a:buNone/>
+              <a:tabLst/>
+              <a:defRPr/>
+            </a:pPr>
+            <a:r>
+              <a:rPr kumimoji="0" lang="en-US" sz="950" b="0" i="0" u="none" strike="noStrike" kern="1200" cap="none" spc="0" normalizeH="0" baseline="0" noProof="0" dirty="0">
+                <a:ln>
+                  <a:noFill/>
+                </a:ln>
+                <a:solidFill>
+                  <a:srgbClr val="AEC6D8"/>
+                </a:solidFill>
+                <a:effectLst/>
+                <a:uLnTx/>
+                <a:uFillTx/>
+                <a:latin typeface="Calibri" pitchFamily="34" charset="0"/>
+                <a:ea typeface="Calibri" pitchFamily="34" charset="-122"/>
+                <a:cs typeface="Calibri" pitchFamily="34" charset="-120"/>
+              </a:rPr>
+              <a:t>Home: cifras en vivo del catálogo</a:t>
+            </a:r>
+            <a:endParaRPr kumimoji="0" lang="en-US" sz="950" b="0" i="0" u="none" strike="noStrike" kern="1200" cap="none" spc="0" normalizeH="0" baseline="0" noProof="0" dirty="0">
+              <a:ln>
+                <a:noFill/>
+              </a:ln>
+              <a:solidFill>
+                <a:prstClr val="black"/>
+              </a:solidFill>
+              <a:effectLst/>
+              <a:uLnTx/>
+              <a:uFillTx/>
+              <a:latin typeface="Calibri" panose="020F0502020204030204"/>
+              <a:ea typeface="+mn-ea"/>
+              <a:cs typeface="+mn-cs"/>
+            </a:endParaRPr>
+          </a:p>
+        </p:txBody>
+      </p:sp>
+      <p:sp>
+        <p:nvSpPr>
+          <p:cNvPr id="10" name="Text 8"/>
+          <p:cNvSpPr/>
+          <p:nvPr/>
+        </p:nvSpPr>
+        <p:spPr>
+          <a:xfrm>
+            <a:off x="2393442" y="2880360"/>
+            <a:ext cx="182880" cy="365760"/>
+          </a:xfrm>
+          <a:prstGeom prst="rect">
+            <a:avLst/>
+          </a:prstGeom>
+          <a:noFill/>
+          <a:ln/>
+        </p:spPr>
+        <p:txBody>
+          <a:bodyPr wrap="square" lIns="0" tIns="0" rIns="0" bIns="0" rtlCol="0" anchor="ctr"/>
+          <a:lstStyle/>
+          <a:p>
+            <a:pPr marL="0" marR="0" lvl="0" indent="0" algn="l" defTabSz="914400" rtl="0" eaLnBrk="1" fontAlgn="auto" latinLnBrk="0" hangingPunct="1">
+              <a:lnSpc>
+                <a:spcPct val="100000"/>
+              </a:lnSpc>
+              <a:spcBef>
+                <a:spcPts val="0"/>
+              </a:spcBef>
+              <a:spcAft>
+                <a:spcPts val="0"/>
+              </a:spcAft>
+              <a:buClrTx/>
+              <a:buSzTx/>
+              <a:buFontTx/>
+              <a:buNone/>
+              <a:tabLst/>
+              <a:defRPr/>
+            </a:pPr>
+            <a:r>
+              <a:rPr kumimoji="0" lang="en-US" sz="2000" b="1" i="0" u="none" strike="noStrike" kern="1200" cap="none" spc="0" normalizeH="0" baseline="0" noProof="0" dirty="0">
+                <a:ln>
+                  <a:noFill/>
+                </a:ln>
+                <a:solidFill>
+                  <a:srgbClr val="1ABC9C"/>
+                </a:solidFill>
+                <a:effectLst/>
+                <a:uLnTx/>
+                <a:uFillTx/>
+                <a:latin typeface="Trebuchet MS" pitchFamily="34" charset="0"/>
+                <a:ea typeface="Trebuchet MS" pitchFamily="34" charset="-122"/>
+                <a:cs typeface="Trebuchet MS" pitchFamily="34" charset="-120"/>
+              </a:rPr>
+              <a:t>›</a:t>
+            </a:r>
+            <a:endParaRPr kumimoji="0" lang="en-US" sz="2000" b="0" i="0" u="none" strike="noStrike" kern="1200" cap="none" spc="0" normalizeH="0" baseline="0" noProof="0" dirty="0">
+              <a:ln>
+                <a:noFill/>
+              </a:ln>
+              <a:solidFill>
+                <a:prstClr val="black"/>
+              </a:solidFill>
+              <a:effectLst/>
+              <a:uLnTx/>
+              <a:uFillTx/>
+              <a:latin typeface="Calibri" panose="020F0502020204030204"/>
+              <a:ea typeface="+mn-ea"/>
+              <a:cs typeface="+mn-cs"/>
+            </a:endParaRPr>
+          </a:p>
+        </p:txBody>
+      </p:sp>
+      <p:sp>
+        <p:nvSpPr>
+          <p:cNvPr id="11" name="Shape 9"/>
+          <p:cNvSpPr/>
+          <p:nvPr/>
+        </p:nvSpPr>
+        <p:spPr>
+          <a:xfrm>
+            <a:off x="2594610" y="2514600"/>
+            <a:ext cx="1863090" cy="1188720"/>
+          </a:xfrm>
+          <a:prstGeom prst="roundRect">
+            <a:avLst>
+              <a:gd name="adj" fmla="val 4615"/>
+            </a:avLst>
+          </a:prstGeom>
+          <a:solidFill>
+            <a:srgbClr val="12496E"/>
+          </a:solidFill>
+          <a:ln/>
+        </p:spPr>
+      </p:sp>
+      <p:sp>
+        <p:nvSpPr>
+          <p:cNvPr id="12" name="Shape 10"/>
+          <p:cNvSpPr/>
+          <p:nvPr/>
+        </p:nvSpPr>
+        <p:spPr>
+          <a:xfrm>
+            <a:off x="3370707" y="2359152"/>
+            <a:ext cx="310896" cy="310896"/>
+          </a:xfrm>
+          <a:prstGeom prst="ellipse">
+            <a:avLst/>
+          </a:prstGeom>
+          <a:solidFill>
+            <a:srgbClr val="1ABC9C"/>
+          </a:solidFill>
+          <a:ln/>
+        </p:spPr>
+      </p:sp>
+      <p:sp>
+        <p:nvSpPr>
+          <p:cNvPr id="13" name="Text 11"/>
+          <p:cNvSpPr/>
+          <p:nvPr/>
+        </p:nvSpPr>
+        <p:spPr>
+          <a:xfrm>
+            <a:off x="3370707" y="2359152"/>
+            <a:ext cx="310896" cy="310896"/>
+          </a:xfrm>
+          <a:prstGeom prst="rect">
+            <a:avLst/>
+          </a:prstGeom>
+          <a:noFill/>
+          <a:ln/>
+        </p:spPr>
+        <p:txBody>
+          <a:bodyPr wrap="square" lIns="0" tIns="0" rIns="0" bIns="0" rtlCol="0" anchor="ctr"/>
+          <a:lstStyle/>
+          <a:p>
+            <a:pPr marL="0" marR="0" lvl="0" indent="0" algn="ctr" defTabSz="914400" rtl="0" eaLnBrk="1" fontAlgn="auto" latinLnBrk="0" hangingPunct="1">
+              <a:lnSpc>
+                <a:spcPct val="100000"/>
+              </a:lnSpc>
+              <a:spcBef>
+                <a:spcPts val="0"/>
+              </a:spcBef>
+              <a:spcAft>
+                <a:spcPts val="0"/>
+              </a:spcAft>
+              <a:buClrTx/>
+              <a:buSzTx/>
+              <a:buFontTx/>
+              <a:buNone/>
+              <a:tabLst/>
+              <a:defRPr/>
+            </a:pPr>
+            <a:r>
+              <a:rPr kumimoji="0" lang="en-US" sz="1300" b="1" i="0" u="none" strike="noStrike" kern="1200" cap="none" spc="0" normalizeH="0" baseline="0" noProof="0" dirty="0">
+                <a:ln>
+                  <a:noFill/>
+                </a:ln>
+                <a:solidFill>
+                  <a:srgbClr val="072A42"/>
+                </a:solidFill>
+                <a:effectLst/>
+                <a:uLnTx/>
+                <a:uFillTx/>
+                <a:latin typeface="Trebuchet MS" pitchFamily="34" charset="0"/>
+                <a:ea typeface="Trebuchet MS" pitchFamily="34" charset="-122"/>
+                <a:cs typeface="Trebuchet MS" pitchFamily="34" charset="-120"/>
+              </a:rPr>
+              <a:t>2</a:t>
+            </a:r>
+            <a:endParaRPr kumimoji="0" lang="en-US" sz="1300" b="0" i="0" u="none" strike="noStrike" kern="1200" cap="none" spc="0" normalizeH="0" baseline="0" noProof="0" dirty="0">
+              <a:ln>
+                <a:noFill/>
+              </a:ln>
+              <a:solidFill>
+                <a:prstClr val="black"/>
+              </a:solidFill>
+              <a:effectLst/>
+              <a:uLnTx/>
+              <a:uFillTx/>
+              <a:latin typeface="Calibri" panose="020F0502020204030204"/>
+              <a:ea typeface="+mn-ea"/>
+              <a:cs typeface="+mn-cs"/>
+            </a:endParaRPr>
+          </a:p>
+        </p:txBody>
+      </p:sp>
+      <p:sp>
+        <p:nvSpPr>
+          <p:cNvPr id="14" name="Text 12"/>
+          <p:cNvSpPr/>
+          <p:nvPr/>
+        </p:nvSpPr>
+        <p:spPr>
+          <a:xfrm>
+            <a:off x="2640330" y="2788920"/>
+            <a:ext cx="1771650" cy="274320"/>
+          </a:xfrm>
+          <a:prstGeom prst="rect">
+            <a:avLst/>
+          </a:prstGeom>
+          <a:noFill/>
+          <a:ln/>
+        </p:spPr>
+        <p:txBody>
+          <a:bodyPr wrap="square" lIns="0" tIns="0" rIns="0" bIns="0" rtlCol="0" anchor="ctr"/>
+          <a:lstStyle/>
+          <a:p>
+            <a:pPr marL="0" marR="0" lvl="0" indent="0" algn="ctr" defTabSz="914400" rtl="0" eaLnBrk="1" fontAlgn="auto" latinLnBrk="0" hangingPunct="1">
+              <a:lnSpc>
+                <a:spcPct val="100000"/>
+              </a:lnSpc>
+              <a:spcBef>
+                <a:spcPts val="0"/>
+              </a:spcBef>
+              <a:spcAft>
+                <a:spcPts val="0"/>
+              </a:spcAft>
+              <a:buClrTx/>
+              <a:buSzTx/>
+              <a:buFontTx/>
+              <a:buNone/>
+              <a:tabLst/>
+              <a:defRPr/>
+            </a:pPr>
+            <a:r>
+              <a:rPr kumimoji="0" lang="en-US" sz="1300" b="1" i="0" u="none" strike="noStrike" kern="1200" cap="none" spc="0" normalizeH="0" baseline="0" noProof="0" dirty="0">
+                <a:ln>
+                  <a:noFill/>
+                </a:ln>
+                <a:solidFill>
+                  <a:srgbClr val="FFFFFF"/>
+                </a:solidFill>
+                <a:effectLst/>
+                <a:uLnTx/>
+                <a:uFillTx/>
+                <a:latin typeface="Trebuchet MS" pitchFamily="34" charset="0"/>
+                <a:ea typeface="Trebuchet MS" pitchFamily="34" charset="-122"/>
+                <a:cs typeface="Trebuchet MS" pitchFamily="34" charset="-120"/>
+              </a:rPr>
+              <a:t>Tablero</a:t>
+            </a:r>
+            <a:endParaRPr kumimoji="0" lang="en-US" sz="1300" b="0" i="0" u="none" strike="noStrike" kern="1200" cap="none" spc="0" normalizeH="0" baseline="0" noProof="0" dirty="0">
+              <a:ln>
+                <a:noFill/>
+              </a:ln>
+              <a:solidFill>
+                <a:prstClr val="black"/>
+              </a:solidFill>
+              <a:effectLst/>
+              <a:uLnTx/>
+              <a:uFillTx/>
+              <a:latin typeface="Calibri" panose="020F0502020204030204"/>
+              <a:ea typeface="+mn-ea"/>
+              <a:cs typeface="+mn-cs"/>
+            </a:endParaRPr>
+          </a:p>
+        </p:txBody>
+      </p:sp>
+      <p:sp>
+        <p:nvSpPr>
+          <p:cNvPr id="15" name="Text 13"/>
+          <p:cNvSpPr/>
+          <p:nvPr/>
+        </p:nvSpPr>
+        <p:spPr>
+          <a:xfrm>
+            <a:off x="2686050" y="3090672"/>
+            <a:ext cx="1680210" cy="548640"/>
+          </a:xfrm>
+          <a:prstGeom prst="rect">
+            <a:avLst/>
+          </a:prstGeom>
+          <a:noFill/>
+          <a:ln/>
+        </p:spPr>
+        <p:txBody>
+          <a:bodyPr wrap="square" lIns="0" tIns="0" rIns="0" bIns="0" rtlCol="0" anchor="ctr"/>
+          <a:lstStyle/>
+          <a:p>
+            <a:pPr marL="0" marR="0" lvl="0" indent="0" algn="ctr" defTabSz="914400" rtl="0" eaLnBrk="1" fontAlgn="auto" latinLnBrk="0" hangingPunct="1">
+              <a:lnSpc>
+                <a:spcPct val="100000"/>
+              </a:lnSpc>
+              <a:spcBef>
+                <a:spcPts val="0"/>
+              </a:spcBef>
+              <a:spcAft>
+                <a:spcPts val="0"/>
+              </a:spcAft>
+              <a:buClrTx/>
+              <a:buSzTx/>
+              <a:buFontTx/>
+              <a:buNone/>
+              <a:tabLst/>
+              <a:defRPr/>
+            </a:pPr>
+            <a:r>
+              <a:rPr kumimoji="0" lang="en-US" sz="950" b="0" i="0" u="none" strike="noStrike" kern="1200" cap="none" spc="0" normalizeH="0" baseline="0" noProof="0" dirty="0">
+                <a:ln>
+                  <a:noFill/>
+                </a:ln>
+                <a:solidFill>
+                  <a:srgbClr val="AEC6D8"/>
+                </a:solidFill>
+                <a:effectLst/>
+                <a:uLnTx/>
+                <a:uFillTx/>
+                <a:latin typeface="Calibri" pitchFamily="34" charset="0"/>
+                <a:ea typeface="Calibri" pitchFamily="34" charset="-122"/>
+                <a:cs typeface="Calibri" pitchFamily="34" charset="-120"/>
+              </a:rPr>
+              <a:t>/tablero: semáforo por entidad</a:t>
+            </a:r>
+            <a:endParaRPr kumimoji="0" lang="en-US" sz="950" b="0" i="0" u="none" strike="noStrike" kern="1200" cap="none" spc="0" normalizeH="0" baseline="0" noProof="0" dirty="0">
+              <a:ln>
+                <a:noFill/>
+              </a:ln>
+              <a:solidFill>
+                <a:prstClr val="black"/>
+              </a:solidFill>
+              <a:effectLst/>
+              <a:uLnTx/>
+              <a:uFillTx/>
+              <a:latin typeface="Calibri" panose="020F0502020204030204"/>
+              <a:ea typeface="+mn-ea"/>
+              <a:cs typeface="+mn-cs"/>
+            </a:endParaRPr>
+          </a:p>
+        </p:txBody>
+      </p:sp>
+      <p:sp>
+        <p:nvSpPr>
+          <p:cNvPr id="16" name="Text 14"/>
+          <p:cNvSpPr/>
+          <p:nvPr/>
+        </p:nvSpPr>
+        <p:spPr>
+          <a:xfrm>
+            <a:off x="4485132" y="2880360"/>
+            <a:ext cx="182880" cy="365760"/>
+          </a:xfrm>
+          <a:prstGeom prst="rect">
+            <a:avLst/>
+          </a:prstGeom>
+          <a:noFill/>
+          <a:ln/>
+        </p:spPr>
+        <p:txBody>
+          <a:bodyPr wrap="square" lIns="0" tIns="0" rIns="0" bIns="0" rtlCol="0" anchor="ctr"/>
+          <a:lstStyle/>
+          <a:p>
+            <a:pPr marL="0" marR="0" lvl="0" indent="0" algn="l" defTabSz="914400" rtl="0" eaLnBrk="1" fontAlgn="auto" latinLnBrk="0" hangingPunct="1">
+              <a:lnSpc>
+                <a:spcPct val="100000"/>
+              </a:lnSpc>
+              <a:spcBef>
+                <a:spcPts val="0"/>
+              </a:spcBef>
+              <a:spcAft>
+                <a:spcPts val="0"/>
+              </a:spcAft>
+              <a:buClrTx/>
+              <a:buSzTx/>
+              <a:buFontTx/>
+              <a:buNone/>
+              <a:tabLst/>
+              <a:defRPr/>
+            </a:pPr>
+            <a:r>
+              <a:rPr kumimoji="0" lang="en-US" sz="2000" b="1" i="0" u="none" strike="noStrike" kern="1200" cap="none" spc="0" normalizeH="0" baseline="0" noProof="0" dirty="0">
+                <a:ln>
+                  <a:noFill/>
+                </a:ln>
+                <a:solidFill>
+                  <a:srgbClr val="1ABC9C"/>
+                </a:solidFill>
+                <a:effectLst/>
+                <a:uLnTx/>
+                <a:uFillTx/>
+                <a:latin typeface="Trebuchet MS" pitchFamily="34" charset="0"/>
+                <a:ea typeface="Trebuchet MS" pitchFamily="34" charset="-122"/>
+                <a:cs typeface="Trebuchet MS" pitchFamily="34" charset="-120"/>
+              </a:rPr>
+              <a:t>›</a:t>
+            </a:r>
+            <a:endParaRPr kumimoji="0" lang="en-US" sz="2000" b="0" i="0" u="none" strike="noStrike" kern="1200" cap="none" spc="0" normalizeH="0" baseline="0" noProof="0" dirty="0">
+              <a:ln>
+                <a:noFill/>
+              </a:ln>
+              <a:solidFill>
+                <a:prstClr val="black"/>
+              </a:solidFill>
+              <a:effectLst/>
+              <a:uLnTx/>
+              <a:uFillTx/>
+              <a:latin typeface="Calibri" panose="020F0502020204030204"/>
+              <a:ea typeface="+mn-ea"/>
+              <a:cs typeface="+mn-cs"/>
+            </a:endParaRPr>
+          </a:p>
+        </p:txBody>
+      </p:sp>
+      <p:sp>
+        <p:nvSpPr>
+          <p:cNvPr id="17" name="Shape 15"/>
+          <p:cNvSpPr/>
+          <p:nvPr/>
+        </p:nvSpPr>
+        <p:spPr>
+          <a:xfrm>
+            <a:off x="4686300" y="2514600"/>
+            <a:ext cx="1863090" cy="1188720"/>
+          </a:xfrm>
+          <a:prstGeom prst="roundRect">
+            <a:avLst>
+              <a:gd name="adj" fmla="val 4615"/>
+            </a:avLst>
+          </a:prstGeom>
+          <a:solidFill>
+            <a:srgbClr val="12496E"/>
+          </a:solidFill>
+          <a:ln/>
+        </p:spPr>
+      </p:sp>
+      <p:sp>
+        <p:nvSpPr>
+          <p:cNvPr id="18" name="Shape 16"/>
+          <p:cNvSpPr/>
+          <p:nvPr/>
+        </p:nvSpPr>
+        <p:spPr>
+          <a:xfrm>
+            <a:off x="5462397" y="2359152"/>
+            <a:ext cx="310896" cy="310896"/>
+          </a:xfrm>
+          <a:prstGeom prst="ellipse">
+            <a:avLst/>
+          </a:prstGeom>
+          <a:solidFill>
+            <a:srgbClr val="1ABC9C"/>
+          </a:solidFill>
+          <a:ln/>
+        </p:spPr>
+      </p:sp>
+      <p:sp>
+        <p:nvSpPr>
+          <p:cNvPr id="19" name="Text 17"/>
+          <p:cNvSpPr/>
+          <p:nvPr/>
+        </p:nvSpPr>
+        <p:spPr>
+          <a:xfrm>
+            <a:off x="5462397" y="2359152"/>
+            <a:ext cx="310896" cy="310896"/>
+          </a:xfrm>
+          <a:prstGeom prst="rect">
+            <a:avLst/>
+          </a:prstGeom>
+          <a:noFill/>
+          <a:ln/>
+        </p:spPr>
+        <p:txBody>
+          <a:bodyPr wrap="square" lIns="0" tIns="0" rIns="0" bIns="0" rtlCol="0" anchor="ctr"/>
+          <a:lstStyle/>
+          <a:p>
+            <a:pPr marL="0" marR="0" lvl="0" indent="0" algn="ctr" defTabSz="914400" rtl="0" eaLnBrk="1" fontAlgn="auto" latinLnBrk="0" hangingPunct="1">
+              <a:lnSpc>
+                <a:spcPct val="100000"/>
+              </a:lnSpc>
+              <a:spcBef>
+                <a:spcPts val="0"/>
+              </a:spcBef>
+              <a:spcAft>
+                <a:spcPts val="0"/>
+              </a:spcAft>
+              <a:buClrTx/>
+              <a:buSzTx/>
+              <a:buFontTx/>
+              <a:buNone/>
+              <a:tabLst/>
+              <a:defRPr/>
+            </a:pPr>
+            <a:r>
+              <a:rPr kumimoji="0" lang="en-US" sz="1300" b="1" i="0" u="none" strike="noStrike" kern="1200" cap="none" spc="0" normalizeH="0" baseline="0" noProof="0" dirty="0">
+                <a:ln>
+                  <a:noFill/>
+                </a:ln>
+                <a:solidFill>
+                  <a:srgbClr val="072A42"/>
+                </a:solidFill>
+                <a:effectLst/>
+                <a:uLnTx/>
+                <a:uFillTx/>
+                <a:latin typeface="Trebuchet MS" pitchFamily="34" charset="0"/>
+                <a:ea typeface="Trebuchet MS" pitchFamily="34" charset="-122"/>
+                <a:cs typeface="Trebuchet MS" pitchFamily="34" charset="-120"/>
+              </a:rPr>
+              <a:t>3</a:t>
+            </a:r>
+            <a:endParaRPr kumimoji="0" lang="en-US" sz="1300" b="0" i="0" u="none" strike="noStrike" kern="1200" cap="none" spc="0" normalizeH="0" baseline="0" noProof="0" dirty="0">
+              <a:ln>
+                <a:noFill/>
+              </a:ln>
+              <a:solidFill>
+                <a:prstClr val="black"/>
+              </a:solidFill>
+              <a:effectLst/>
+              <a:uLnTx/>
+              <a:uFillTx/>
+              <a:latin typeface="Calibri" panose="020F0502020204030204"/>
+              <a:ea typeface="+mn-ea"/>
+              <a:cs typeface="+mn-cs"/>
+            </a:endParaRPr>
+          </a:p>
+        </p:txBody>
+      </p:sp>
+      <p:sp>
+        <p:nvSpPr>
+          <p:cNvPr id="20" name="Text 18"/>
+          <p:cNvSpPr/>
+          <p:nvPr/>
+        </p:nvSpPr>
+        <p:spPr>
+          <a:xfrm>
+            <a:off x="4732020" y="2788920"/>
+            <a:ext cx="1771650" cy="274320"/>
+          </a:xfrm>
+          <a:prstGeom prst="rect">
+            <a:avLst/>
+          </a:prstGeom>
+          <a:noFill/>
+          <a:ln/>
+        </p:spPr>
+        <p:txBody>
+          <a:bodyPr wrap="square" lIns="0" tIns="0" rIns="0" bIns="0" rtlCol="0" anchor="ctr"/>
+          <a:lstStyle/>
+          <a:p>
+            <a:pPr marL="0" marR="0" lvl="0" indent="0" algn="ctr" defTabSz="914400" rtl="0" eaLnBrk="1" fontAlgn="auto" latinLnBrk="0" hangingPunct="1">
+              <a:lnSpc>
+                <a:spcPct val="100000"/>
+              </a:lnSpc>
+              <a:spcBef>
+                <a:spcPts val="0"/>
+              </a:spcBef>
+              <a:spcAft>
+                <a:spcPts val="0"/>
+              </a:spcAft>
+              <a:buClrTx/>
+              <a:buSzTx/>
+              <a:buFontTx/>
+              <a:buNone/>
+              <a:tabLst/>
+              <a:defRPr/>
+            </a:pPr>
+            <a:r>
+              <a:rPr kumimoji="0" lang="en-US" sz="1300" b="1" i="0" u="none" strike="noStrike" kern="1200" cap="none" spc="0" normalizeH="0" baseline="0" noProof="0" dirty="0">
+                <a:ln>
+                  <a:noFill/>
+                </a:ln>
+                <a:solidFill>
+                  <a:srgbClr val="FFFFFF"/>
+                </a:solidFill>
+                <a:effectLst/>
+                <a:uLnTx/>
+                <a:uFillTx/>
+                <a:latin typeface="Trebuchet MS" pitchFamily="34" charset="0"/>
+                <a:ea typeface="Trebuchet MS" pitchFamily="34" charset="-122"/>
+                <a:cs typeface="Trebuchet MS" pitchFamily="34" charset="-120"/>
+              </a:rPr>
+              <a:t>Buscador</a:t>
+            </a:r>
+            <a:endParaRPr kumimoji="0" lang="en-US" sz="1300" b="0" i="0" u="none" strike="noStrike" kern="1200" cap="none" spc="0" normalizeH="0" baseline="0" noProof="0" dirty="0">
+              <a:ln>
+                <a:noFill/>
+              </a:ln>
+              <a:solidFill>
+                <a:prstClr val="black"/>
+              </a:solidFill>
+              <a:effectLst/>
+              <a:uLnTx/>
+              <a:uFillTx/>
+              <a:latin typeface="Calibri" panose="020F0502020204030204"/>
+              <a:ea typeface="+mn-ea"/>
+              <a:cs typeface="+mn-cs"/>
+            </a:endParaRPr>
+          </a:p>
+        </p:txBody>
+      </p:sp>
+      <p:sp>
+        <p:nvSpPr>
+          <p:cNvPr id="21" name="Text 19"/>
+          <p:cNvSpPr/>
+          <p:nvPr/>
+        </p:nvSpPr>
+        <p:spPr>
+          <a:xfrm>
+            <a:off x="4777740" y="3090672"/>
+            <a:ext cx="1680210" cy="548640"/>
+          </a:xfrm>
+          <a:prstGeom prst="rect">
+            <a:avLst/>
+          </a:prstGeom>
+          <a:noFill/>
+          <a:ln/>
+        </p:spPr>
+        <p:txBody>
+          <a:bodyPr wrap="square" lIns="0" tIns="0" rIns="0" bIns="0" rtlCol="0" anchor="ctr"/>
+          <a:lstStyle/>
+          <a:p>
+            <a:pPr marL="0" marR="0" lvl="0" indent="0" algn="ctr" defTabSz="914400" rtl="0" eaLnBrk="1" fontAlgn="auto" latinLnBrk="0" hangingPunct="1">
+              <a:lnSpc>
+                <a:spcPct val="100000"/>
+              </a:lnSpc>
+              <a:spcBef>
+                <a:spcPts val="0"/>
+              </a:spcBef>
+              <a:spcAft>
+                <a:spcPts val="0"/>
+              </a:spcAft>
+              <a:buClrTx/>
+              <a:buSzTx/>
+              <a:buFontTx/>
+              <a:buNone/>
+              <a:tabLst/>
+              <a:defRPr/>
+            </a:pPr>
+            <a:r>
+              <a:rPr kumimoji="0" lang="en-US" sz="950" b="0" i="0" u="none" strike="noStrike" kern="1200" cap="none" spc="0" normalizeH="0" baseline="0" noProof="0" dirty="0">
+                <a:ln>
+                  <a:noFill/>
+                </a:ln>
+                <a:solidFill>
+                  <a:srgbClr val="AEC6D8"/>
+                </a:solidFill>
+                <a:effectLst/>
+                <a:uLnTx/>
+                <a:uFillTx/>
+                <a:latin typeface="Calibri" pitchFamily="34" charset="0"/>
+                <a:ea typeface="Calibri" pitchFamily="34" charset="-122"/>
+                <a:cs typeface="Calibri" pitchFamily="34" charset="-120"/>
+              </a:rPr>
+              <a:t>“¿Cuántos colegios públicos hay en Boyacá?”</a:t>
+            </a:r>
+            <a:endParaRPr kumimoji="0" lang="en-US" sz="950" b="0" i="0" u="none" strike="noStrike" kern="1200" cap="none" spc="0" normalizeH="0" baseline="0" noProof="0" dirty="0">
+              <a:ln>
+                <a:noFill/>
+              </a:ln>
+              <a:solidFill>
+                <a:prstClr val="black"/>
+              </a:solidFill>
+              <a:effectLst/>
+              <a:uLnTx/>
+              <a:uFillTx/>
+              <a:latin typeface="Calibri" panose="020F0502020204030204"/>
+              <a:ea typeface="+mn-ea"/>
+              <a:cs typeface="+mn-cs"/>
+            </a:endParaRPr>
+          </a:p>
+        </p:txBody>
+      </p:sp>
+      <p:sp>
+        <p:nvSpPr>
+          <p:cNvPr id="22" name="Text 20"/>
+          <p:cNvSpPr/>
+          <p:nvPr/>
+        </p:nvSpPr>
+        <p:spPr>
+          <a:xfrm>
+            <a:off x="6576822" y="2880360"/>
+            <a:ext cx="182880" cy="365760"/>
+          </a:xfrm>
+          <a:prstGeom prst="rect">
+            <a:avLst/>
+          </a:prstGeom>
+          <a:noFill/>
+          <a:ln/>
+        </p:spPr>
+        <p:txBody>
+          <a:bodyPr wrap="square" lIns="0" tIns="0" rIns="0" bIns="0" rtlCol="0" anchor="ctr"/>
+          <a:lstStyle/>
+          <a:p>
+            <a:pPr marL="0" marR="0" lvl="0" indent="0" algn="l" defTabSz="914400" rtl="0" eaLnBrk="1" fontAlgn="auto" latinLnBrk="0" hangingPunct="1">
+              <a:lnSpc>
+                <a:spcPct val="100000"/>
+              </a:lnSpc>
+              <a:spcBef>
+                <a:spcPts val="0"/>
+              </a:spcBef>
+              <a:spcAft>
+                <a:spcPts val="0"/>
+              </a:spcAft>
+              <a:buClrTx/>
+              <a:buSzTx/>
+              <a:buFontTx/>
+              <a:buNone/>
+              <a:tabLst/>
+              <a:defRPr/>
+            </a:pPr>
+            <a:r>
+              <a:rPr kumimoji="0" lang="en-US" sz="2000" b="1" i="0" u="none" strike="noStrike" kern="1200" cap="none" spc="0" normalizeH="0" baseline="0" noProof="0" dirty="0">
+                <a:ln>
+                  <a:noFill/>
+                </a:ln>
+                <a:solidFill>
+                  <a:srgbClr val="1ABC9C"/>
+                </a:solidFill>
+                <a:effectLst/>
+                <a:uLnTx/>
+                <a:uFillTx/>
+                <a:latin typeface="Trebuchet MS" pitchFamily="34" charset="0"/>
+                <a:ea typeface="Trebuchet MS" pitchFamily="34" charset="-122"/>
+                <a:cs typeface="Trebuchet MS" pitchFamily="34" charset="-120"/>
+              </a:rPr>
+              <a:t>›</a:t>
+            </a:r>
+            <a:endParaRPr kumimoji="0" lang="en-US" sz="2000" b="0" i="0" u="none" strike="noStrike" kern="1200" cap="none" spc="0" normalizeH="0" baseline="0" noProof="0" dirty="0">
+              <a:ln>
+                <a:noFill/>
+              </a:ln>
+              <a:solidFill>
+                <a:prstClr val="black"/>
+              </a:solidFill>
+              <a:effectLst/>
+              <a:uLnTx/>
+              <a:uFillTx/>
+              <a:latin typeface="Calibri" panose="020F0502020204030204"/>
+              <a:ea typeface="+mn-ea"/>
+              <a:cs typeface="+mn-cs"/>
+            </a:endParaRPr>
+          </a:p>
+        </p:txBody>
+      </p:sp>
+      <p:sp>
+        <p:nvSpPr>
+          <p:cNvPr id="23" name="Shape 21"/>
+          <p:cNvSpPr/>
+          <p:nvPr/>
+        </p:nvSpPr>
+        <p:spPr>
+          <a:xfrm>
+            <a:off x="6777990" y="2514600"/>
+            <a:ext cx="1863090" cy="1188720"/>
+          </a:xfrm>
+          <a:prstGeom prst="roundRect">
+            <a:avLst>
+              <a:gd name="adj" fmla="val 4615"/>
+            </a:avLst>
+          </a:prstGeom>
+          <a:solidFill>
+            <a:srgbClr val="12496E"/>
+          </a:solidFill>
+          <a:ln/>
+        </p:spPr>
+      </p:sp>
+      <p:sp>
+        <p:nvSpPr>
+          <p:cNvPr id="24" name="Shape 22"/>
+          <p:cNvSpPr/>
+          <p:nvPr/>
+        </p:nvSpPr>
+        <p:spPr>
+          <a:xfrm>
+            <a:off x="7554087" y="2359152"/>
+            <a:ext cx="310896" cy="310896"/>
+          </a:xfrm>
+          <a:prstGeom prst="ellipse">
+            <a:avLst/>
+          </a:prstGeom>
+          <a:solidFill>
+            <a:srgbClr val="1ABC9C"/>
+          </a:solidFill>
+          <a:ln/>
+        </p:spPr>
+      </p:sp>
+      <p:sp>
+        <p:nvSpPr>
+          <p:cNvPr id="25" name="Text 23"/>
+          <p:cNvSpPr/>
+          <p:nvPr/>
+        </p:nvSpPr>
+        <p:spPr>
+          <a:xfrm>
+            <a:off x="7554087" y="2359152"/>
+            <a:ext cx="310896" cy="310896"/>
+          </a:xfrm>
+          <a:prstGeom prst="rect">
+            <a:avLst/>
+          </a:prstGeom>
+          <a:noFill/>
+          <a:ln/>
+        </p:spPr>
+        <p:txBody>
+          <a:bodyPr wrap="square" lIns="0" tIns="0" rIns="0" bIns="0" rtlCol="0" anchor="ctr"/>
+          <a:lstStyle/>
+          <a:p>
+            <a:pPr marL="0" marR="0" lvl="0" indent="0" algn="ctr" defTabSz="914400" rtl="0" eaLnBrk="1" fontAlgn="auto" latinLnBrk="0" hangingPunct="1">
+              <a:lnSpc>
+                <a:spcPct val="100000"/>
+              </a:lnSpc>
+              <a:spcBef>
+                <a:spcPts val="0"/>
+              </a:spcBef>
+              <a:spcAft>
+                <a:spcPts val="0"/>
+              </a:spcAft>
+              <a:buClrTx/>
+              <a:buSzTx/>
+              <a:buFontTx/>
+              <a:buNone/>
+              <a:tabLst/>
+              <a:defRPr/>
+            </a:pPr>
+            <a:r>
+              <a:rPr kumimoji="0" lang="en-US" sz="1300" b="1" i="0" u="none" strike="noStrike" kern="1200" cap="none" spc="0" normalizeH="0" baseline="0" noProof="0" dirty="0">
+                <a:ln>
+                  <a:noFill/>
+                </a:ln>
+                <a:solidFill>
+                  <a:srgbClr val="072A42"/>
+                </a:solidFill>
+                <a:effectLst/>
+                <a:uLnTx/>
+                <a:uFillTx/>
+                <a:latin typeface="Trebuchet MS" pitchFamily="34" charset="0"/>
+                <a:ea typeface="Trebuchet MS" pitchFamily="34" charset="-122"/>
+                <a:cs typeface="Trebuchet MS" pitchFamily="34" charset="-120"/>
+              </a:rPr>
+              <a:t>4</a:t>
+            </a:r>
+            <a:endParaRPr kumimoji="0" lang="en-US" sz="1300" b="0" i="0" u="none" strike="noStrike" kern="1200" cap="none" spc="0" normalizeH="0" baseline="0" noProof="0" dirty="0">
+              <a:ln>
+                <a:noFill/>
+              </a:ln>
+              <a:solidFill>
+                <a:prstClr val="black"/>
+              </a:solidFill>
+              <a:effectLst/>
+              <a:uLnTx/>
+              <a:uFillTx/>
+              <a:latin typeface="Calibri" panose="020F0502020204030204"/>
+              <a:ea typeface="+mn-ea"/>
+              <a:cs typeface="+mn-cs"/>
+            </a:endParaRPr>
+          </a:p>
+        </p:txBody>
+      </p:sp>
+      <p:sp>
+        <p:nvSpPr>
+          <p:cNvPr id="26" name="Text 24"/>
+          <p:cNvSpPr/>
+          <p:nvPr/>
+        </p:nvSpPr>
+        <p:spPr>
+          <a:xfrm>
+            <a:off x="6823710" y="2788920"/>
+            <a:ext cx="1771650" cy="274320"/>
+          </a:xfrm>
+          <a:prstGeom prst="rect">
+            <a:avLst/>
+          </a:prstGeom>
+          <a:noFill/>
+          <a:ln/>
+        </p:spPr>
+        <p:txBody>
+          <a:bodyPr wrap="square" lIns="0" tIns="0" rIns="0" bIns="0" rtlCol="0" anchor="ctr"/>
+          <a:lstStyle/>
+          <a:p>
+            <a:pPr marL="0" marR="0" lvl="0" indent="0" algn="ctr" defTabSz="914400" rtl="0" eaLnBrk="1" fontAlgn="auto" latinLnBrk="0" hangingPunct="1">
+              <a:lnSpc>
+                <a:spcPct val="100000"/>
+              </a:lnSpc>
+              <a:spcBef>
+                <a:spcPts val="0"/>
+              </a:spcBef>
+              <a:spcAft>
+                <a:spcPts val="0"/>
+              </a:spcAft>
+              <a:buClrTx/>
+              <a:buSzTx/>
+              <a:buFontTx/>
+              <a:buNone/>
+              <a:tabLst/>
+              <a:defRPr/>
+            </a:pPr>
+            <a:r>
+              <a:rPr kumimoji="0" lang="en-US" sz="1300" b="1" i="0" u="none" strike="noStrike" kern="1200" cap="none" spc="0" normalizeH="0" baseline="0" noProof="0" dirty="0">
+                <a:ln>
+                  <a:noFill/>
+                </a:ln>
+                <a:solidFill>
+                  <a:srgbClr val="FFFFFF"/>
+                </a:solidFill>
+                <a:effectLst/>
+                <a:uLnTx/>
+                <a:uFillTx/>
+                <a:latin typeface="Trebuchet MS" pitchFamily="34" charset="0"/>
+                <a:ea typeface="Trebuchet MS" pitchFamily="34" charset="-122"/>
+                <a:cs typeface="Trebuchet MS" pitchFamily="34" charset="-120"/>
+              </a:rPr>
+              <a:t>Accesible</a:t>
+            </a:r>
+            <a:endParaRPr kumimoji="0" lang="en-US" sz="1300" b="0" i="0" u="none" strike="noStrike" kern="1200" cap="none" spc="0" normalizeH="0" baseline="0" noProof="0" dirty="0">
+              <a:ln>
+                <a:noFill/>
+              </a:ln>
+              <a:solidFill>
+                <a:prstClr val="black"/>
+              </a:solidFill>
+              <a:effectLst/>
+              <a:uLnTx/>
+              <a:uFillTx/>
+              <a:latin typeface="Calibri" panose="020F0502020204030204"/>
+              <a:ea typeface="+mn-ea"/>
+              <a:cs typeface="+mn-cs"/>
+            </a:endParaRPr>
+          </a:p>
+        </p:txBody>
+      </p:sp>
+      <p:sp>
+        <p:nvSpPr>
+          <p:cNvPr id="27" name="Text 25"/>
+          <p:cNvSpPr/>
+          <p:nvPr/>
+        </p:nvSpPr>
+        <p:spPr>
+          <a:xfrm>
+            <a:off x="6869430" y="3090672"/>
+            <a:ext cx="1680210" cy="548640"/>
+          </a:xfrm>
+          <a:prstGeom prst="rect">
+            <a:avLst/>
+          </a:prstGeom>
+          <a:noFill/>
+          <a:ln/>
+        </p:spPr>
+        <p:txBody>
+          <a:bodyPr wrap="square" lIns="0" tIns="0" rIns="0" bIns="0" rtlCol="0" anchor="ctr"/>
+          <a:lstStyle/>
+          <a:p>
+            <a:pPr marL="0" marR="0" lvl="0" indent="0" algn="ctr" defTabSz="914400" rtl="0" eaLnBrk="1" fontAlgn="auto" latinLnBrk="0" hangingPunct="1">
+              <a:lnSpc>
+                <a:spcPct val="100000"/>
+              </a:lnSpc>
+              <a:spcBef>
+                <a:spcPts val="0"/>
+              </a:spcBef>
+              <a:spcAft>
+                <a:spcPts val="0"/>
+              </a:spcAft>
+              <a:buClrTx/>
+              <a:buSzTx/>
+              <a:buFontTx/>
+              <a:buNone/>
+              <a:tabLst/>
+              <a:defRPr/>
+            </a:pPr>
+            <a:r>
+              <a:rPr kumimoji="0" lang="en-US" sz="950" b="0" i="0" u="none" strike="noStrike" kern="1200" cap="none" spc="0" normalizeH="0" baseline="0" noProof="0" dirty="0">
+                <a:ln>
+                  <a:noFill/>
+                </a:ln>
+                <a:solidFill>
+                  <a:srgbClr val="AEC6D8"/>
+                </a:solidFill>
+                <a:effectLst/>
+                <a:uLnTx/>
+                <a:uFillTx/>
+                <a:latin typeface="Calibri" pitchFamily="34" charset="0"/>
+                <a:ea typeface="Calibri" pitchFamily="34" charset="-122"/>
+                <a:cs typeface="Calibri" pitchFamily="34" charset="-120"/>
+              </a:rPr>
+              <a:t>Modo voz + narración (Ley 1618)</a:t>
+            </a:r>
+            <a:endParaRPr kumimoji="0" lang="en-US" sz="950" b="0" i="0" u="none" strike="noStrike" kern="1200" cap="none" spc="0" normalizeH="0" baseline="0" noProof="0" dirty="0">
+              <a:ln>
+                <a:noFill/>
+              </a:ln>
+              <a:solidFill>
+                <a:prstClr val="black"/>
+              </a:solidFill>
+              <a:effectLst/>
+              <a:uLnTx/>
+              <a:uFillTx/>
+              <a:latin typeface="Calibri" panose="020F0502020204030204"/>
+              <a:ea typeface="+mn-ea"/>
+              <a:cs typeface="+mn-cs"/>
+            </a:endParaRPr>
+          </a:p>
+        </p:txBody>
+      </p:sp>
+      <p:sp>
+        <p:nvSpPr>
+          <p:cNvPr id="28" name="Text 26"/>
+          <p:cNvSpPr/>
+          <p:nvPr/>
+        </p:nvSpPr>
+        <p:spPr>
+          <a:xfrm>
+            <a:off x="502920" y="4069080"/>
+            <a:ext cx="8138160" cy="274320"/>
+          </a:xfrm>
+          <a:prstGeom prst="rect">
+            <a:avLst/>
+          </a:prstGeom>
+          <a:noFill/>
+          <a:ln/>
+        </p:spPr>
+        <p:txBody>
+          <a:bodyPr wrap="square" lIns="0" tIns="0" rIns="0" bIns="0" rtlCol="0" anchor="ctr"/>
+          <a:lstStyle/>
+          <a:p>
+            <a:pPr marL="0" marR="0" lvl="0" indent="0" algn="ctr" defTabSz="914400" rtl="0" eaLnBrk="1" fontAlgn="auto" latinLnBrk="0" hangingPunct="1">
+              <a:lnSpc>
+                <a:spcPct val="100000"/>
+              </a:lnSpc>
+              <a:spcBef>
+                <a:spcPts val="0"/>
+              </a:spcBef>
+              <a:spcAft>
+                <a:spcPts val="0"/>
+              </a:spcAft>
+              <a:buClrTx/>
+              <a:buSzTx/>
+              <a:buFontTx/>
+              <a:buNone/>
+              <a:tabLst/>
+              <a:defRPr/>
+            </a:pPr>
+            <a:r>
+              <a:rPr kumimoji="0" lang="en-US" sz="1050" b="0" i="1" u="none" strike="noStrike" kern="1200" cap="none" spc="0" normalizeH="0" baseline="0" noProof="0" dirty="0">
+                <a:ln>
+                  <a:noFill/>
+                </a:ln>
+                <a:solidFill>
+                  <a:srgbClr val="7F97AB"/>
+                </a:solidFill>
+                <a:effectLst/>
+                <a:uLnTx/>
+                <a:uFillTx/>
+                <a:latin typeface="Calibri" pitchFamily="34" charset="0"/>
+                <a:ea typeface="Calibri" pitchFamily="34" charset="-122"/>
+                <a:cs typeface="Calibri" pitchFamily="34" charset="-120"/>
+              </a:rPr>
+              <a:t>~4 minutos · Si la red falla: capturas de respaldo al final de este archivo.</a:t>
+            </a:r>
+            <a:endParaRPr kumimoji="0" lang="en-US" sz="1050" b="0" i="0" u="none" strike="noStrike" kern="1200" cap="none" spc="0" normalizeH="0" baseline="0" noProof="0" dirty="0">
+              <a:ln>
+                <a:noFill/>
+              </a:ln>
+              <a:solidFill>
+                <a:prstClr val="black"/>
+              </a:solidFill>
+              <a:effectLst/>
+              <a:uLnTx/>
+              <a:uFillTx/>
+              <a:latin typeface="Calibri" panose="020F0502020204030204"/>
+              <a:ea typeface="+mn-ea"/>
+              <a:cs typeface="+mn-cs"/>
+            </a:endParaRPr>
+          </a:p>
+        </p:txBody>
+      </p:sp>
+      <p:sp>
+        <p:nvSpPr>
+          <p:cNvPr id="29" name="Text 27"/>
+          <p:cNvSpPr/>
+          <p:nvPr/>
+        </p:nvSpPr>
+        <p:spPr>
+          <a:xfrm>
+            <a:off x="502920" y="4832604"/>
+            <a:ext cx="7680960" cy="228600"/>
+          </a:xfrm>
+          <a:prstGeom prst="rect">
+            <a:avLst/>
+          </a:prstGeom>
+          <a:noFill/>
+          <a:ln/>
+        </p:spPr>
+        <p:txBody>
+          <a:bodyPr wrap="square" lIns="0" tIns="0" rIns="0" bIns="0" rtlCol="0" anchor="ctr"/>
+          <a:lstStyle/>
+          <a:p>
+            <a:pPr marL="0" marR="0" lvl="0" indent="0" algn="l" defTabSz="914400" rtl="0" eaLnBrk="1" fontAlgn="auto" latinLnBrk="0" hangingPunct="1">
+              <a:lnSpc>
+                <a:spcPct val="100000"/>
+              </a:lnSpc>
+              <a:spcBef>
+                <a:spcPts val="0"/>
+              </a:spcBef>
+              <a:spcAft>
+                <a:spcPts val="0"/>
+              </a:spcAft>
+              <a:buClrTx/>
+              <a:buSzTx/>
+              <a:buFontTx/>
+              <a:buNone/>
+              <a:tabLst/>
+              <a:defRPr/>
+            </a:pPr>
+            <a:r>
+              <a:rPr kumimoji="0" lang="en-US" sz="850" b="1" i="0" u="none" strike="noStrike" kern="1200" cap="none" spc="0" normalizeH="0" baseline="0" noProof="0" dirty="0">
+                <a:ln>
+                  <a:noFill/>
+                </a:ln>
+                <a:solidFill>
+                  <a:srgbClr val="1ABC9C"/>
+                </a:solidFill>
+                <a:effectLst/>
+                <a:uLnTx/>
+                <a:uFillTx/>
+                <a:latin typeface="Calibri" pitchFamily="34" charset="0"/>
+                <a:ea typeface="Calibri" pitchFamily="34" charset="-122"/>
+                <a:cs typeface="Calibri" pitchFamily="34" charset="-120"/>
+              </a:rPr>
+              <a:t>DatosVivos · datosvivos.co</a:t>
+            </a:r>
+            <a:r>
+              <a:rPr kumimoji="0" lang="en-US" sz="850" b="0" i="0" u="none" strike="noStrike" kern="1200" cap="none" spc="0" normalizeH="0" baseline="0" noProof="0" dirty="0">
+                <a:ln>
+                  <a:noFill/>
+                </a:ln>
+                <a:solidFill>
+                  <a:srgbClr val="9FB3C8"/>
+                </a:solidFill>
+                <a:effectLst/>
+                <a:uLnTx/>
+                <a:uFillTx/>
+                <a:latin typeface="Calibri" pitchFamily="34" charset="0"/>
+                <a:ea typeface="Calibri" pitchFamily="34" charset="-122"/>
+                <a:cs typeface="Calibri" pitchFamily="34" charset="-120"/>
+              </a:rPr>
+              <a:t>   |   Datos al Ecosistema 2026 · Equipo 93 · Reto 7 · Nivel Avanzado</a:t>
+            </a:r>
+            <a:endParaRPr kumimoji="0" lang="en-US" sz="850" b="0" i="0" u="none" strike="noStrike" kern="1200" cap="none" spc="0" normalizeH="0" baseline="0" noProof="0" dirty="0">
+              <a:ln>
+                <a:noFill/>
+              </a:ln>
+              <a:solidFill>
+                <a:prstClr val="black"/>
+              </a:solidFill>
+              <a:effectLst/>
+              <a:uLnTx/>
+              <a:uFillTx/>
+              <a:latin typeface="Calibri" panose="020F0502020204030204"/>
+              <a:ea typeface="+mn-ea"/>
+              <a:cs typeface="+mn-cs"/>
+            </a:endParaRPr>
+          </a:p>
+        </p:txBody>
+      </p:sp>
+      <p:sp>
+        <p:nvSpPr>
+          <p:cNvPr id="30" name="Text 28"/>
+          <p:cNvSpPr/>
+          <p:nvPr/>
+        </p:nvSpPr>
+        <p:spPr>
+          <a:xfrm>
+            <a:off x="8275320" y="4832604"/>
+            <a:ext cx="365760" cy="228600"/>
+          </a:xfrm>
+          <a:prstGeom prst="rect">
+            <a:avLst/>
+          </a:prstGeom>
+          <a:noFill/>
+          <a:ln/>
+        </p:spPr>
+        <p:txBody>
+          <a:bodyPr wrap="square" lIns="0" tIns="0" rIns="0" bIns="0" rtlCol="0" anchor="ctr"/>
+          <a:lstStyle/>
+          <a:p>
+            <a:pPr marL="0" marR="0" lvl="0" indent="0" algn="r" defTabSz="914400" rtl="0" eaLnBrk="1" fontAlgn="auto" latinLnBrk="0" hangingPunct="1">
+              <a:lnSpc>
+                <a:spcPct val="100000"/>
+              </a:lnSpc>
+              <a:spcBef>
+                <a:spcPts val="0"/>
+              </a:spcBef>
+              <a:spcAft>
+                <a:spcPts val="0"/>
+              </a:spcAft>
+              <a:buClrTx/>
+              <a:buSzTx/>
+              <a:buFontTx/>
+              <a:buNone/>
+              <a:tabLst/>
+              <a:defRPr/>
+            </a:pPr>
+            <a:r>
+              <a:rPr kumimoji="0" lang="en-US" sz="850" b="0" i="0" u="none" strike="noStrike" kern="1200" cap="none" spc="0" normalizeH="0" baseline="0" noProof="0" dirty="0">
+                <a:ln>
+                  <a:noFill/>
+                </a:ln>
+                <a:solidFill>
+                  <a:srgbClr val="9FB3C8"/>
+                </a:solidFill>
+                <a:effectLst/>
+                <a:uLnTx/>
+                <a:uFillTx/>
+                <a:latin typeface="Calibri" pitchFamily="34" charset="0"/>
+                <a:ea typeface="Calibri" pitchFamily="34" charset="-122"/>
+                <a:cs typeface="Calibri" pitchFamily="34" charset="-120"/>
+              </a:rPr>
+              <a:t>08</a:t>
+            </a:r>
+            <a:endParaRPr kumimoji="0" lang="en-US" sz="850" b="0" i="0" u="none" strike="noStrike" kern="1200" cap="none" spc="0" normalizeH="0" baseline="0" noProof="0" dirty="0">
+              <a:ln>
+                <a:noFill/>
+              </a:ln>
+              <a:solidFill>
+                <a:prstClr val="black"/>
+              </a:solidFill>
+              <a:effectLst/>
+              <a:uLnTx/>
+              <a:uFillTx/>
+              <a:latin typeface="Calibri" panose="020F0502020204030204"/>
+              <a:ea typeface="+mn-ea"/>
+              <a:cs typeface="+mn-cs"/>
+            </a:endParaRPr>
+          </a:p>
+        </p:txBody>
+      </p:sp>
+    </p:spTree>
+  </p:cSld>
+  <p:clrMapOvr>
+    <a:masterClrMapping/>
+  </p:clrMapOvr>
+</p:sld>
+</file>
+
+<file path=ppt/slides/slide9.xml><?xml version="1.0" encoding="utf-8"?>
 <p:sld xmlns:a="http://schemas.openxmlformats.org/drawingml/2006/main" xmlns:r="http://schemas.openxmlformats.org/officeDocument/2006/relationships" xmlns:p="http://schemas.openxmlformats.org/presentationml/2006/main">
   <p:cSld name="Slide 8">
     <p:bg>
@@ -17385,1313 +21240,6 @@
             <a:extLst>
               <a:ext uri="{96DAC541-7B7A-43D3-8B79-37D633B846F1}">
                 <asvg:svgBlip xmlns:asvg="http://schemas.microsoft.com/office/drawing/2016/SVG/main" r:embed="rId5"/>
-              </a:ext>
-            </a:extLst>
-          </a:blip>
-          <a:stretch>
-            <a:fillRect/>
-          </a:stretch>
-        </p:blipFill>
-        <p:spPr>
-          <a:xfrm>
-            <a:off x="7777480" y="146867"/>
-            <a:ext cx="436217" cy="797958"/>
-          </a:xfrm>
-          <a:prstGeom prst="rect">
-            <a:avLst/>
-          </a:prstGeom>
-        </p:spPr>
-      </p:pic>
-    </p:spTree>
-  </p:cSld>
-  <p:clrMapOvr>
-    <a:masterClrMapping/>
-  </p:clrMapOvr>
-</p:sld>
-</file>
-
-<file path=ppt/slides/slide9.xml><?xml version="1.0" encoding="utf-8"?>
-<p:sld xmlns:a="http://schemas.openxmlformats.org/drawingml/2006/main" xmlns:r="http://schemas.openxmlformats.org/officeDocument/2006/relationships" xmlns:p="http://schemas.openxmlformats.org/presentationml/2006/main">
-  <p:cSld name="Slide 9">
-    <p:bg>
-      <p:bgPr>
-        <a:solidFill>
-          <a:srgbClr val="F5F7FA"/>
-        </a:solidFill>
-        <a:effectLst/>
-      </p:bgPr>
-    </p:bg>
-    <p:spTree>
-      <p:nvGrpSpPr>
-        <p:cNvPr id="1" name=""/>
-        <p:cNvGrpSpPr/>
-        <p:nvPr/>
-      </p:nvGrpSpPr>
-      <p:grpSpPr>
-        <a:xfrm>
-          <a:off x="0" y="0"/>
-          <a:ext cx="0" cy="0"/>
-          <a:chOff x="0" y="0"/>
-          <a:chExt cx="0" cy="0"/>
-        </a:xfrm>
-      </p:grpSpPr>
-      <p:sp>
-        <p:nvSpPr>
-          <p:cNvPr id="2" name="Text 0"/>
-          <p:cNvSpPr/>
-          <p:nvPr/>
-        </p:nvSpPr>
-        <p:spPr>
-          <a:xfrm>
-            <a:off x="502920" y="292608"/>
-            <a:ext cx="8138160" cy="256032"/>
-          </a:xfrm>
-          <a:prstGeom prst="rect">
-            <a:avLst/>
-          </a:prstGeom>
-          <a:noFill/>
-          <a:ln/>
-        </p:spPr>
-        <p:txBody>
-          <a:bodyPr wrap="square" lIns="0" tIns="0" rIns="0" bIns="0" rtlCol="0" anchor="ctr"/>
-          <a:lstStyle/>
-          <a:p>
-            <a:pPr marL="0" indent="0">
-              <a:buNone/>
-            </a:pPr>
-            <a:r>
-              <a:rPr lang="en-US" sz="1100" b="1" kern="0" spc="200" dirty="0">
-                <a:solidFill>
-                  <a:srgbClr val="1ABC9C"/>
-                </a:solidFill>
-                <a:latin typeface="Trebuchet MS" pitchFamily="34" charset="0"/>
-                <a:ea typeface="Trebuchet MS" pitchFamily="34" charset="-122"/>
-                <a:cs typeface="Trebuchet MS" pitchFamily="34" charset="-120"/>
-              </a:rPr>
-              <a:t>RIGOR TÉCNICO</a:t>
-            </a:r>
-            <a:endParaRPr lang="en-US" sz="1100" dirty="0"/>
-          </a:p>
-        </p:txBody>
-      </p:sp>
-      <p:sp>
-        <p:nvSpPr>
-          <p:cNvPr id="3" name="Text 1"/>
-          <p:cNvSpPr/>
-          <p:nvPr/>
-        </p:nvSpPr>
-        <p:spPr>
-          <a:xfrm>
-            <a:off x="502920" y="548640"/>
-            <a:ext cx="8138160" cy="502920"/>
-          </a:xfrm>
-          <a:prstGeom prst="rect">
-            <a:avLst/>
-          </a:prstGeom>
-          <a:noFill/>
-          <a:ln/>
-        </p:spPr>
-        <p:txBody>
-          <a:bodyPr wrap="square" lIns="0" tIns="0" rIns="0" bIns="0" rtlCol="0" anchor="ctr"/>
-          <a:lstStyle/>
-          <a:p>
-            <a:pPr marL="0" indent="0">
-              <a:buNone/>
-            </a:pPr>
-            <a:r>
-              <a:rPr lang="en-US" sz="2700" b="1" dirty="0">
-                <a:solidFill>
-                  <a:srgbClr val="0B3C5D"/>
-                </a:solidFill>
-                <a:latin typeface="Trebuchet MS" pitchFamily="34" charset="0"/>
-                <a:ea typeface="Trebuchet MS" pitchFamily="34" charset="-122"/>
-                <a:cs typeface="Trebuchet MS" pitchFamily="34" charset="-120"/>
-              </a:rPr>
-              <a:t>CRISP-ML(Q): qué se hizo en cada fase</a:t>
-            </a:r>
-            <a:endParaRPr lang="en-US" sz="2700" dirty="0"/>
-          </a:p>
-        </p:txBody>
-      </p:sp>
-      <p:sp>
-        <p:nvSpPr>
-          <p:cNvPr id="4" name="Shape 2"/>
-          <p:cNvSpPr/>
-          <p:nvPr/>
-        </p:nvSpPr>
-        <p:spPr>
-          <a:xfrm>
-            <a:off x="502920" y="1371600"/>
-            <a:ext cx="2560320" cy="1417320"/>
-          </a:xfrm>
-          <a:prstGeom prst="roundRect">
-            <a:avLst>
-              <a:gd name="adj" fmla="val 3871"/>
-            </a:avLst>
-          </a:prstGeom>
-          <a:solidFill>
-            <a:srgbClr val="FFFFFF"/>
-          </a:solidFill>
-          <a:ln/>
-          <a:effectLst>
-            <a:outerShdw algn="bl" rotWithShape="0">
-              <a:srgbClr val="1A2530">
-                <a:alpha val="0"/>
-              </a:srgbClr>
-            </a:outerShdw>
-          </a:effectLst>
-        </p:spPr>
-      </p:sp>
-      <p:sp>
-        <p:nvSpPr>
-          <p:cNvPr id="5" name="Shape 3"/>
-          <p:cNvSpPr/>
-          <p:nvPr/>
-        </p:nvSpPr>
-        <p:spPr>
-          <a:xfrm>
-            <a:off x="649224" y="1508760"/>
-            <a:ext cx="292608" cy="292608"/>
-          </a:xfrm>
-          <a:prstGeom prst="ellipse">
-            <a:avLst/>
-          </a:prstGeom>
-          <a:solidFill>
-            <a:srgbClr val="0B3C5D"/>
-          </a:solidFill>
-          <a:ln/>
-        </p:spPr>
-      </p:sp>
-      <p:sp>
-        <p:nvSpPr>
-          <p:cNvPr id="6" name="Text 4"/>
-          <p:cNvSpPr/>
-          <p:nvPr/>
-        </p:nvSpPr>
-        <p:spPr>
-          <a:xfrm>
-            <a:off x="649224" y="1508760"/>
-            <a:ext cx="292608" cy="292608"/>
-          </a:xfrm>
-          <a:prstGeom prst="rect">
-            <a:avLst/>
-          </a:prstGeom>
-          <a:noFill/>
-          <a:ln/>
-        </p:spPr>
-        <p:txBody>
-          <a:bodyPr wrap="square" lIns="0" tIns="0" rIns="0" bIns="0" rtlCol="0" anchor="ctr"/>
-          <a:lstStyle/>
-          <a:p>
-            <a:pPr marL="0" indent="0" algn="ctr">
-              <a:buNone/>
-            </a:pPr>
-            <a:r>
-              <a:rPr lang="en-US" sz="1300" b="1" dirty="0">
-                <a:solidFill>
-                  <a:srgbClr val="FFFFFF"/>
-                </a:solidFill>
-                <a:latin typeface="Trebuchet MS" pitchFamily="34" charset="0"/>
-                <a:ea typeface="Trebuchet MS" pitchFamily="34" charset="-122"/>
-                <a:cs typeface="Trebuchet MS" pitchFamily="34" charset="-120"/>
-              </a:rPr>
-              <a:t>1</a:t>
-            </a:r>
-            <a:endParaRPr lang="en-US" sz="1300" dirty="0"/>
-          </a:p>
-        </p:txBody>
-      </p:sp>
-      <p:sp>
-        <p:nvSpPr>
-          <p:cNvPr id="7" name="Text 5"/>
-          <p:cNvSpPr/>
-          <p:nvPr/>
-        </p:nvSpPr>
-        <p:spPr>
-          <a:xfrm>
-            <a:off x="1033272" y="1508760"/>
-            <a:ext cx="1874520" cy="292608"/>
-          </a:xfrm>
-          <a:prstGeom prst="rect">
-            <a:avLst/>
-          </a:prstGeom>
-          <a:noFill/>
-          <a:ln/>
-        </p:spPr>
-        <p:txBody>
-          <a:bodyPr wrap="square" lIns="0" tIns="0" rIns="0" bIns="0" rtlCol="0" anchor="ctr"/>
-          <a:lstStyle/>
-          <a:p>
-            <a:pPr marL="0" indent="0">
-              <a:buNone/>
-            </a:pPr>
-            <a:r>
-              <a:rPr lang="en-US" sz="1300" b="1" dirty="0">
-                <a:solidFill>
-                  <a:srgbClr val="0B3C5D"/>
-                </a:solidFill>
-                <a:latin typeface="Trebuchet MS" pitchFamily="34" charset="0"/>
-                <a:ea typeface="Trebuchet MS" pitchFamily="34" charset="-122"/>
-                <a:cs typeface="Trebuchet MS" pitchFamily="34" charset="-120"/>
-              </a:rPr>
-              <a:t>Entender</a:t>
-            </a:r>
-            <a:endParaRPr lang="en-US" sz="1300" dirty="0"/>
-          </a:p>
-        </p:txBody>
-      </p:sp>
-      <p:sp>
-        <p:nvSpPr>
-          <p:cNvPr id="8" name="Text 6"/>
-          <p:cNvSpPr/>
-          <p:nvPr/>
-        </p:nvSpPr>
-        <p:spPr>
-          <a:xfrm>
-            <a:off x="667512" y="1847088"/>
-            <a:ext cx="2231136" cy="896112"/>
-          </a:xfrm>
-          <a:prstGeom prst="rect">
-            <a:avLst/>
-          </a:prstGeom>
-          <a:noFill/>
-          <a:ln/>
-        </p:spPr>
-        <p:txBody>
-          <a:bodyPr wrap="square" lIns="0" tIns="0" rIns="0" bIns="0" rtlCol="0" anchor="ctr"/>
-          <a:lstStyle/>
-          <a:p>
-            <a:pPr marL="0" indent="0">
-              <a:buNone/>
-            </a:pPr>
-            <a:r>
-              <a:rPr lang="en-US" sz="900" dirty="0">
-                <a:solidFill>
-                  <a:srgbClr val="2C3E50"/>
-                </a:solidFill>
-                <a:latin typeface="Calibri" pitchFamily="34" charset="0"/>
-                <a:ea typeface="Calibri" pitchFamily="34" charset="-122"/>
-                <a:cs typeface="Calibri" pitchFamily="34" charset="-120"/>
-              </a:rPr>
-              <a:t>El dolor del decisor sin panorama; 6 portales y 3 protocolos (Socrata, CKAN, DCAT) mapeados como fuentes.</a:t>
-            </a:r>
-            <a:endParaRPr lang="en-US" sz="900" dirty="0"/>
-          </a:p>
-        </p:txBody>
-      </p:sp>
-      <p:sp>
-        <p:nvSpPr>
-          <p:cNvPr id="9" name="Shape 7"/>
-          <p:cNvSpPr/>
-          <p:nvPr/>
-        </p:nvSpPr>
-        <p:spPr>
-          <a:xfrm>
-            <a:off x="3291840" y="1371600"/>
-            <a:ext cx="2560320" cy="1417320"/>
-          </a:xfrm>
-          <a:prstGeom prst="roundRect">
-            <a:avLst>
-              <a:gd name="adj" fmla="val 3871"/>
-            </a:avLst>
-          </a:prstGeom>
-          <a:solidFill>
-            <a:srgbClr val="FFFFFF"/>
-          </a:solidFill>
-          <a:ln/>
-          <a:effectLst>
-            <a:outerShdw algn="bl" rotWithShape="0">
-              <a:srgbClr val="1A2530">
-                <a:alpha val="0"/>
-              </a:srgbClr>
-            </a:outerShdw>
-          </a:effectLst>
-        </p:spPr>
-      </p:sp>
-      <p:sp>
-        <p:nvSpPr>
-          <p:cNvPr id="10" name="Shape 8"/>
-          <p:cNvSpPr/>
-          <p:nvPr/>
-        </p:nvSpPr>
-        <p:spPr>
-          <a:xfrm>
-            <a:off x="3438144" y="1508760"/>
-            <a:ext cx="292608" cy="292608"/>
-          </a:xfrm>
-          <a:prstGeom prst="ellipse">
-            <a:avLst/>
-          </a:prstGeom>
-          <a:solidFill>
-            <a:srgbClr val="0B3C5D"/>
-          </a:solidFill>
-          <a:ln/>
-        </p:spPr>
-      </p:sp>
-      <p:sp>
-        <p:nvSpPr>
-          <p:cNvPr id="11" name="Text 9"/>
-          <p:cNvSpPr/>
-          <p:nvPr/>
-        </p:nvSpPr>
-        <p:spPr>
-          <a:xfrm>
-            <a:off x="3438144" y="1508760"/>
-            <a:ext cx="292608" cy="292608"/>
-          </a:xfrm>
-          <a:prstGeom prst="rect">
-            <a:avLst/>
-          </a:prstGeom>
-          <a:noFill/>
-          <a:ln/>
-        </p:spPr>
-        <p:txBody>
-          <a:bodyPr wrap="square" lIns="0" tIns="0" rIns="0" bIns="0" rtlCol="0" anchor="ctr"/>
-          <a:lstStyle/>
-          <a:p>
-            <a:pPr marL="0" indent="0" algn="ctr">
-              <a:buNone/>
-            </a:pPr>
-            <a:r>
-              <a:rPr lang="en-US" sz="1300" b="1" dirty="0">
-                <a:solidFill>
-                  <a:srgbClr val="FFFFFF"/>
-                </a:solidFill>
-                <a:latin typeface="Trebuchet MS" pitchFamily="34" charset="0"/>
-                <a:ea typeface="Trebuchet MS" pitchFamily="34" charset="-122"/>
-                <a:cs typeface="Trebuchet MS" pitchFamily="34" charset="-120"/>
-              </a:rPr>
-              <a:t>2</a:t>
-            </a:r>
-            <a:endParaRPr lang="en-US" sz="1300" dirty="0"/>
-          </a:p>
-        </p:txBody>
-      </p:sp>
-      <p:sp>
-        <p:nvSpPr>
-          <p:cNvPr id="12" name="Text 10"/>
-          <p:cNvSpPr/>
-          <p:nvPr/>
-        </p:nvSpPr>
-        <p:spPr>
-          <a:xfrm>
-            <a:off x="3822192" y="1508760"/>
-            <a:ext cx="1874520" cy="292608"/>
-          </a:xfrm>
-          <a:prstGeom prst="rect">
-            <a:avLst/>
-          </a:prstGeom>
-          <a:noFill/>
-          <a:ln/>
-        </p:spPr>
-        <p:txBody>
-          <a:bodyPr wrap="square" lIns="0" tIns="0" rIns="0" bIns="0" rtlCol="0" anchor="ctr"/>
-          <a:lstStyle/>
-          <a:p>
-            <a:pPr marL="0" indent="0">
-              <a:buNone/>
-            </a:pPr>
-            <a:r>
-              <a:rPr lang="en-US" sz="1300" b="1" dirty="0">
-                <a:solidFill>
-                  <a:srgbClr val="0B3C5D"/>
-                </a:solidFill>
-                <a:latin typeface="Trebuchet MS" pitchFamily="34" charset="0"/>
-                <a:ea typeface="Trebuchet MS" pitchFamily="34" charset="-122"/>
-                <a:cs typeface="Trebuchet MS" pitchFamily="34" charset="-120"/>
-              </a:rPr>
-              <a:t>Preparar</a:t>
-            </a:r>
-            <a:endParaRPr lang="en-US" sz="1300" dirty="0"/>
-          </a:p>
-        </p:txBody>
-      </p:sp>
-      <p:sp>
-        <p:nvSpPr>
-          <p:cNvPr id="13" name="Text 11"/>
-          <p:cNvSpPr/>
-          <p:nvPr/>
-        </p:nvSpPr>
-        <p:spPr>
-          <a:xfrm>
-            <a:off x="3456432" y="1847088"/>
-            <a:ext cx="2231136" cy="896112"/>
-          </a:xfrm>
-          <a:prstGeom prst="rect">
-            <a:avLst/>
-          </a:prstGeom>
-          <a:noFill/>
-          <a:ln/>
-        </p:spPr>
-        <p:txBody>
-          <a:bodyPr wrap="square" lIns="0" tIns="0" rIns="0" bIns="0" rtlCol="0" anchor="ctr"/>
-          <a:lstStyle/>
-          <a:p>
-            <a:pPr marL="0" indent="0">
-              <a:buNone/>
-            </a:pPr>
-            <a:r>
-              <a:rPr lang="en-US" sz="900" dirty="0">
-                <a:solidFill>
-                  <a:srgbClr val="2C3E50"/>
-                </a:solidFill>
-                <a:latin typeface="Calibri" pitchFamily="34" charset="0"/>
-                <a:ea typeface="Calibri" pitchFamily="34" charset="-122"/>
-                <a:cs typeface="Calibri" pitchFamily="34" charset="-120"/>
-              </a:rPr>
-              <a:t>ETL diario con upsert idempotente (0 duplicados), clasificación Ley 1712, curación de columnas e inferencia DIVIPOLA.</a:t>
-            </a:r>
-            <a:endParaRPr lang="en-US" sz="900" dirty="0"/>
-          </a:p>
-        </p:txBody>
-      </p:sp>
-      <p:sp>
-        <p:nvSpPr>
-          <p:cNvPr id="14" name="Shape 12"/>
-          <p:cNvSpPr/>
-          <p:nvPr/>
-        </p:nvSpPr>
-        <p:spPr>
-          <a:xfrm>
-            <a:off x="6080760" y="1371600"/>
-            <a:ext cx="2560320" cy="1417320"/>
-          </a:xfrm>
-          <a:prstGeom prst="roundRect">
-            <a:avLst>
-              <a:gd name="adj" fmla="val 3871"/>
-            </a:avLst>
-          </a:prstGeom>
-          <a:solidFill>
-            <a:srgbClr val="FFFFFF"/>
-          </a:solidFill>
-          <a:ln/>
-          <a:effectLst>
-            <a:outerShdw algn="bl" rotWithShape="0">
-              <a:srgbClr val="1A2530">
-                <a:alpha val="0"/>
-              </a:srgbClr>
-            </a:outerShdw>
-          </a:effectLst>
-        </p:spPr>
-      </p:sp>
-      <p:sp>
-        <p:nvSpPr>
-          <p:cNvPr id="15" name="Shape 13"/>
-          <p:cNvSpPr/>
-          <p:nvPr/>
-        </p:nvSpPr>
-        <p:spPr>
-          <a:xfrm>
-            <a:off x="6227064" y="1508760"/>
-            <a:ext cx="292608" cy="292608"/>
-          </a:xfrm>
-          <a:prstGeom prst="ellipse">
-            <a:avLst/>
-          </a:prstGeom>
-          <a:solidFill>
-            <a:srgbClr val="0B3C5D"/>
-          </a:solidFill>
-          <a:ln/>
-        </p:spPr>
-      </p:sp>
-      <p:sp>
-        <p:nvSpPr>
-          <p:cNvPr id="16" name="Text 14"/>
-          <p:cNvSpPr/>
-          <p:nvPr/>
-        </p:nvSpPr>
-        <p:spPr>
-          <a:xfrm>
-            <a:off x="6227064" y="1508760"/>
-            <a:ext cx="292608" cy="292608"/>
-          </a:xfrm>
-          <a:prstGeom prst="rect">
-            <a:avLst/>
-          </a:prstGeom>
-          <a:noFill/>
-          <a:ln/>
-        </p:spPr>
-        <p:txBody>
-          <a:bodyPr wrap="square" lIns="0" tIns="0" rIns="0" bIns="0" rtlCol="0" anchor="ctr"/>
-          <a:lstStyle/>
-          <a:p>
-            <a:pPr marL="0" indent="0" algn="ctr">
-              <a:buNone/>
-            </a:pPr>
-            <a:r>
-              <a:rPr lang="en-US" sz="1300" b="1" dirty="0">
-                <a:solidFill>
-                  <a:srgbClr val="FFFFFF"/>
-                </a:solidFill>
-                <a:latin typeface="Trebuchet MS" pitchFamily="34" charset="0"/>
-                <a:ea typeface="Trebuchet MS" pitchFamily="34" charset="-122"/>
-                <a:cs typeface="Trebuchet MS" pitchFamily="34" charset="-120"/>
-              </a:rPr>
-              <a:t>3</a:t>
-            </a:r>
-            <a:endParaRPr lang="en-US" sz="1300" dirty="0"/>
-          </a:p>
-        </p:txBody>
-      </p:sp>
-      <p:sp>
-        <p:nvSpPr>
-          <p:cNvPr id="17" name="Text 15"/>
-          <p:cNvSpPr/>
-          <p:nvPr/>
-        </p:nvSpPr>
-        <p:spPr>
-          <a:xfrm>
-            <a:off x="6611112" y="1508760"/>
-            <a:ext cx="1874520" cy="292608"/>
-          </a:xfrm>
-          <a:prstGeom prst="rect">
-            <a:avLst/>
-          </a:prstGeom>
-          <a:noFill/>
-          <a:ln/>
-        </p:spPr>
-        <p:txBody>
-          <a:bodyPr wrap="square" lIns="0" tIns="0" rIns="0" bIns="0" rtlCol="0" anchor="ctr"/>
-          <a:lstStyle/>
-          <a:p>
-            <a:pPr marL="0" indent="0">
-              <a:buNone/>
-            </a:pPr>
-            <a:r>
-              <a:rPr lang="en-US" sz="1300" b="1" dirty="0">
-                <a:solidFill>
-                  <a:srgbClr val="0B3C5D"/>
-                </a:solidFill>
-                <a:latin typeface="Trebuchet MS" pitchFamily="34" charset="0"/>
-                <a:ea typeface="Trebuchet MS" pitchFamily="34" charset="-122"/>
-                <a:cs typeface="Trebuchet MS" pitchFamily="34" charset="-120"/>
-              </a:rPr>
-              <a:t>Modelar</a:t>
-            </a:r>
-            <a:endParaRPr lang="en-US" sz="1300" dirty="0"/>
-          </a:p>
-        </p:txBody>
-      </p:sp>
-      <p:sp>
-        <p:nvSpPr>
-          <p:cNvPr id="18" name="Text 16"/>
-          <p:cNvSpPr/>
-          <p:nvPr/>
-        </p:nvSpPr>
-        <p:spPr>
-          <a:xfrm>
-            <a:off x="6245352" y="1847088"/>
-            <a:ext cx="2231136" cy="896112"/>
-          </a:xfrm>
-          <a:prstGeom prst="rect">
-            <a:avLst/>
-          </a:prstGeom>
-          <a:noFill/>
-          <a:ln/>
-        </p:spPr>
-        <p:txBody>
-          <a:bodyPr wrap="square" lIns="0" tIns="0" rIns="0" bIns="0" rtlCol="0" anchor="ctr"/>
-          <a:lstStyle/>
-          <a:p>
-            <a:pPr marL="0" indent="0">
-              <a:buNone/>
-            </a:pPr>
-            <a:r>
-              <a:rPr lang="en-US" sz="900" dirty="0">
-                <a:solidFill>
-                  <a:srgbClr val="2C3E50"/>
-                </a:solidFill>
-                <a:latin typeface="Calibri" pitchFamily="34" charset="0"/>
-                <a:ea typeface="Calibri" pitchFamily="34" charset="-122"/>
-                <a:cs typeface="Calibri" pitchFamily="34" charset="-120"/>
-              </a:rPr>
-              <a:t>NL2SQL generativo + verificación de 3 capas; embeddings e5 + ChromaDB; clasificador de intención con 6 tipos de respuesta.</a:t>
-            </a:r>
-            <a:endParaRPr lang="en-US" sz="900" dirty="0"/>
-          </a:p>
-        </p:txBody>
-      </p:sp>
-      <p:sp>
-        <p:nvSpPr>
-          <p:cNvPr id="19" name="Shape 17"/>
-          <p:cNvSpPr/>
-          <p:nvPr/>
-        </p:nvSpPr>
-        <p:spPr>
-          <a:xfrm>
-            <a:off x="502920" y="2944368"/>
-            <a:ext cx="2560320" cy="1417320"/>
-          </a:xfrm>
-          <a:prstGeom prst="roundRect">
-            <a:avLst>
-              <a:gd name="adj" fmla="val 3871"/>
-            </a:avLst>
-          </a:prstGeom>
-          <a:solidFill>
-            <a:srgbClr val="FFFFFF"/>
-          </a:solidFill>
-          <a:ln/>
-          <a:effectLst>
-            <a:outerShdw algn="bl" rotWithShape="0">
-              <a:srgbClr val="1A2530">
-                <a:alpha val="0"/>
-              </a:srgbClr>
-            </a:outerShdw>
-          </a:effectLst>
-        </p:spPr>
-      </p:sp>
-      <p:sp>
-        <p:nvSpPr>
-          <p:cNvPr id="20" name="Shape 18"/>
-          <p:cNvSpPr/>
-          <p:nvPr/>
-        </p:nvSpPr>
-        <p:spPr>
-          <a:xfrm>
-            <a:off x="649224" y="3081528"/>
-            <a:ext cx="292608" cy="292608"/>
-          </a:xfrm>
-          <a:prstGeom prst="ellipse">
-            <a:avLst/>
-          </a:prstGeom>
-          <a:solidFill>
-            <a:srgbClr val="0B3C5D"/>
-          </a:solidFill>
-          <a:ln/>
-        </p:spPr>
-      </p:sp>
-      <p:sp>
-        <p:nvSpPr>
-          <p:cNvPr id="21" name="Text 19"/>
-          <p:cNvSpPr/>
-          <p:nvPr/>
-        </p:nvSpPr>
-        <p:spPr>
-          <a:xfrm>
-            <a:off x="649224" y="3081528"/>
-            <a:ext cx="292608" cy="292608"/>
-          </a:xfrm>
-          <a:prstGeom prst="rect">
-            <a:avLst/>
-          </a:prstGeom>
-          <a:noFill/>
-          <a:ln/>
-        </p:spPr>
-        <p:txBody>
-          <a:bodyPr wrap="square" lIns="0" tIns="0" rIns="0" bIns="0" rtlCol="0" anchor="ctr"/>
-          <a:lstStyle/>
-          <a:p>
-            <a:pPr marL="0" indent="0" algn="ctr">
-              <a:buNone/>
-            </a:pPr>
-            <a:r>
-              <a:rPr lang="en-US" sz="1300" b="1" dirty="0">
-                <a:solidFill>
-                  <a:srgbClr val="FFFFFF"/>
-                </a:solidFill>
-                <a:latin typeface="Trebuchet MS" pitchFamily="34" charset="0"/>
-                <a:ea typeface="Trebuchet MS" pitchFamily="34" charset="-122"/>
-                <a:cs typeface="Trebuchet MS" pitchFamily="34" charset="-120"/>
-              </a:rPr>
-              <a:t>4</a:t>
-            </a:r>
-            <a:endParaRPr lang="en-US" sz="1300" dirty="0"/>
-          </a:p>
-        </p:txBody>
-      </p:sp>
-      <p:sp>
-        <p:nvSpPr>
-          <p:cNvPr id="22" name="Text 20"/>
-          <p:cNvSpPr/>
-          <p:nvPr/>
-        </p:nvSpPr>
-        <p:spPr>
-          <a:xfrm>
-            <a:off x="1033272" y="3081528"/>
-            <a:ext cx="1874520" cy="292608"/>
-          </a:xfrm>
-          <a:prstGeom prst="rect">
-            <a:avLst/>
-          </a:prstGeom>
-          <a:noFill/>
-          <a:ln/>
-        </p:spPr>
-        <p:txBody>
-          <a:bodyPr wrap="square" lIns="0" tIns="0" rIns="0" bIns="0" rtlCol="0" anchor="ctr"/>
-          <a:lstStyle/>
-          <a:p>
-            <a:pPr marL="0" indent="0">
-              <a:buNone/>
-            </a:pPr>
-            <a:r>
-              <a:rPr lang="en-US" sz="1300" b="1" dirty="0">
-                <a:solidFill>
-                  <a:srgbClr val="0B3C5D"/>
-                </a:solidFill>
-                <a:latin typeface="Trebuchet MS" pitchFamily="34" charset="0"/>
-                <a:ea typeface="Trebuchet MS" pitchFamily="34" charset="-122"/>
-                <a:cs typeface="Trebuchet MS" pitchFamily="34" charset="-120"/>
-              </a:rPr>
-              <a:t>Evaluar</a:t>
-            </a:r>
-            <a:endParaRPr lang="en-US" sz="1300" dirty="0"/>
-          </a:p>
-        </p:txBody>
-      </p:sp>
-      <p:sp>
-        <p:nvSpPr>
-          <p:cNvPr id="23" name="Text 21"/>
-          <p:cNvSpPr/>
-          <p:nvPr/>
-        </p:nvSpPr>
-        <p:spPr>
-          <a:xfrm>
-            <a:off x="667512" y="3419856"/>
-            <a:ext cx="2231136" cy="896112"/>
-          </a:xfrm>
-          <a:prstGeom prst="rect">
-            <a:avLst/>
-          </a:prstGeom>
-          <a:noFill/>
-          <a:ln/>
-        </p:spPr>
-        <p:txBody>
-          <a:bodyPr wrap="square" lIns="0" tIns="0" rIns="0" bIns="0" rtlCol="0" anchor="ctr"/>
-          <a:lstStyle/>
-          <a:p>
-            <a:pPr marL="0" indent="0">
-              <a:buNone/>
-            </a:pPr>
-            <a:r>
-              <a:rPr lang="en-US" sz="900" dirty="0">
-                <a:solidFill>
-                  <a:srgbClr val="2C3E50"/>
-                </a:solidFill>
-                <a:latin typeface="Calibri" pitchFamily="34" charset="0"/>
-                <a:ea typeface="Calibri" pitchFamily="34" charset="-122"/>
-                <a:cs typeface="Calibri" pitchFamily="34" charset="-120"/>
-              </a:rPr>
-              <a:t>Golden sets versionados (18/18 y 38/38, 0 falsos) + ciclo ciudadano: 50 preguntas pre-registradas; 39/50 mejoraron de dataset.</a:t>
-            </a:r>
-            <a:endParaRPr lang="en-US" sz="900" dirty="0"/>
-          </a:p>
-        </p:txBody>
-      </p:sp>
-      <p:sp>
-        <p:nvSpPr>
-          <p:cNvPr id="24" name="Shape 22"/>
-          <p:cNvSpPr/>
-          <p:nvPr/>
-        </p:nvSpPr>
-        <p:spPr>
-          <a:xfrm>
-            <a:off x="3291840" y="2944368"/>
-            <a:ext cx="2560320" cy="1417320"/>
-          </a:xfrm>
-          <a:prstGeom prst="roundRect">
-            <a:avLst>
-              <a:gd name="adj" fmla="val 3871"/>
-            </a:avLst>
-          </a:prstGeom>
-          <a:solidFill>
-            <a:srgbClr val="FFFFFF"/>
-          </a:solidFill>
-          <a:ln/>
-          <a:effectLst>
-            <a:outerShdw algn="bl" rotWithShape="0">
-              <a:srgbClr val="1A2530">
-                <a:alpha val="0"/>
-              </a:srgbClr>
-            </a:outerShdw>
-          </a:effectLst>
-        </p:spPr>
-      </p:sp>
-      <p:sp>
-        <p:nvSpPr>
-          <p:cNvPr id="25" name="Shape 23"/>
-          <p:cNvSpPr/>
-          <p:nvPr/>
-        </p:nvSpPr>
-        <p:spPr>
-          <a:xfrm>
-            <a:off x="3438144" y="3081528"/>
-            <a:ext cx="292608" cy="292608"/>
-          </a:xfrm>
-          <a:prstGeom prst="ellipse">
-            <a:avLst/>
-          </a:prstGeom>
-          <a:solidFill>
-            <a:srgbClr val="0B3C5D"/>
-          </a:solidFill>
-          <a:ln/>
-        </p:spPr>
-      </p:sp>
-      <p:sp>
-        <p:nvSpPr>
-          <p:cNvPr id="26" name="Text 24"/>
-          <p:cNvSpPr/>
-          <p:nvPr/>
-        </p:nvSpPr>
-        <p:spPr>
-          <a:xfrm>
-            <a:off x="3438144" y="3081528"/>
-            <a:ext cx="292608" cy="292608"/>
-          </a:xfrm>
-          <a:prstGeom prst="rect">
-            <a:avLst/>
-          </a:prstGeom>
-          <a:noFill/>
-          <a:ln/>
-        </p:spPr>
-        <p:txBody>
-          <a:bodyPr wrap="square" lIns="0" tIns="0" rIns="0" bIns="0" rtlCol="0" anchor="ctr"/>
-          <a:lstStyle/>
-          <a:p>
-            <a:pPr marL="0" indent="0" algn="ctr">
-              <a:buNone/>
-            </a:pPr>
-            <a:r>
-              <a:rPr lang="en-US" sz="1300" b="1" dirty="0">
-                <a:solidFill>
-                  <a:srgbClr val="FFFFFF"/>
-                </a:solidFill>
-                <a:latin typeface="Trebuchet MS" pitchFamily="34" charset="0"/>
-                <a:ea typeface="Trebuchet MS" pitchFamily="34" charset="-122"/>
-                <a:cs typeface="Trebuchet MS" pitchFamily="34" charset="-120"/>
-              </a:rPr>
-              <a:t>5</a:t>
-            </a:r>
-            <a:endParaRPr lang="en-US" sz="1300" dirty="0"/>
-          </a:p>
-        </p:txBody>
-      </p:sp>
-      <p:sp>
-        <p:nvSpPr>
-          <p:cNvPr id="27" name="Text 25"/>
-          <p:cNvSpPr/>
-          <p:nvPr/>
-        </p:nvSpPr>
-        <p:spPr>
-          <a:xfrm>
-            <a:off x="3822192" y="3081528"/>
-            <a:ext cx="1874520" cy="292608"/>
-          </a:xfrm>
-          <a:prstGeom prst="rect">
-            <a:avLst/>
-          </a:prstGeom>
-          <a:noFill/>
-          <a:ln/>
-        </p:spPr>
-        <p:txBody>
-          <a:bodyPr wrap="square" lIns="0" tIns="0" rIns="0" bIns="0" rtlCol="0" anchor="ctr"/>
-          <a:lstStyle/>
-          <a:p>
-            <a:pPr marL="0" indent="0">
-              <a:buNone/>
-            </a:pPr>
-            <a:r>
-              <a:rPr lang="en-US" sz="1300" b="1" dirty="0">
-                <a:solidFill>
-                  <a:srgbClr val="0B3C5D"/>
-                </a:solidFill>
-                <a:latin typeface="Trebuchet MS" pitchFamily="34" charset="0"/>
-                <a:ea typeface="Trebuchet MS" pitchFamily="34" charset="-122"/>
-                <a:cs typeface="Trebuchet MS" pitchFamily="34" charset="-120"/>
-              </a:rPr>
-              <a:t>Desplegar</a:t>
-            </a:r>
-            <a:endParaRPr lang="en-US" sz="1300" dirty="0"/>
-          </a:p>
-        </p:txBody>
-      </p:sp>
-      <p:sp>
-        <p:nvSpPr>
-          <p:cNvPr id="28" name="Text 26"/>
-          <p:cNvSpPr/>
-          <p:nvPr/>
-        </p:nvSpPr>
-        <p:spPr>
-          <a:xfrm>
-            <a:off x="3456432" y="3419856"/>
-            <a:ext cx="2231136" cy="896112"/>
-          </a:xfrm>
-          <a:prstGeom prst="rect">
-            <a:avLst/>
-          </a:prstGeom>
-          <a:noFill/>
-          <a:ln/>
-        </p:spPr>
-        <p:txBody>
-          <a:bodyPr wrap="square" lIns="0" tIns="0" rIns="0" bIns="0" rtlCol="0" anchor="ctr"/>
-          <a:lstStyle/>
-          <a:p>
-            <a:pPr marL="0" indent="0">
-              <a:buNone/>
-            </a:pPr>
-            <a:r>
-              <a:rPr lang="en-US" sz="900" dirty="0">
-                <a:solidFill>
-                  <a:srgbClr val="2C3E50"/>
-                </a:solidFill>
-                <a:latin typeface="Calibri" pitchFamily="34" charset="0"/>
-                <a:ea typeface="Calibri" pitchFamily="34" charset="-122"/>
-                <a:cs typeface="Calibri" pitchFamily="34" charset="-120"/>
-              </a:rPr>
-              <a:t>Producción en datosvivos.co con Docker Compose reproducible; imagen horneada; guía de validación para el jurado.</a:t>
-            </a:r>
-            <a:endParaRPr lang="en-US" sz="900" dirty="0"/>
-          </a:p>
-        </p:txBody>
-      </p:sp>
-      <p:sp>
-        <p:nvSpPr>
-          <p:cNvPr id="29" name="Shape 27"/>
-          <p:cNvSpPr/>
-          <p:nvPr/>
-        </p:nvSpPr>
-        <p:spPr>
-          <a:xfrm>
-            <a:off x="6080760" y="2944368"/>
-            <a:ext cx="2560320" cy="1417320"/>
-          </a:xfrm>
-          <a:prstGeom prst="roundRect">
-            <a:avLst>
-              <a:gd name="adj" fmla="val 3871"/>
-            </a:avLst>
-          </a:prstGeom>
-          <a:solidFill>
-            <a:srgbClr val="FFFFFF"/>
-          </a:solidFill>
-          <a:ln/>
-          <a:effectLst>
-            <a:outerShdw algn="bl" rotWithShape="0">
-              <a:srgbClr val="1A2530">
-                <a:alpha val="0"/>
-              </a:srgbClr>
-            </a:outerShdw>
-          </a:effectLst>
-        </p:spPr>
-      </p:sp>
-      <p:sp>
-        <p:nvSpPr>
-          <p:cNvPr id="30" name="Shape 28"/>
-          <p:cNvSpPr/>
-          <p:nvPr/>
-        </p:nvSpPr>
-        <p:spPr>
-          <a:xfrm>
-            <a:off x="6227064" y="3081528"/>
-            <a:ext cx="292608" cy="292608"/>
-          </a:xfrm>
-          <a:prstGeom prst="ellipse">
-            <a:avLst/>
-          </a:prstGeom>
-          <a:solidFill>
-            <a:srgbClr val="0B3C5D"/>
-          </a:solidFill>
-          <a:ln/>
-        </p:spPr>
-      </p:sp>
-      <p:sp>
-        <p:nvSpPr>
-          <p:cNvPr id="31" name="Text 29"/>
-          <p:cNvSpPr/>
-          <p:nvPr/>
-        </p:nvSpPr>
-        <p:spPr>
-          <a:xfrm>
-            <a:off x="6227064" y="3081528"/>
-            <a:ext cx="292608" cy="292608"/>
-          </a:xfrm>
-          <a:prstGeom prst="rect">
-            <a:avLst/>
-          </a:prstGeom>
-          <a:noFill/>
-          <a:ln/>
-        </p:spPr>
-        <p:txBody>
-          <a:bodyPr wrap="square" lIns="0" tIns="0" rIns="0" bIns="0" rtlCol="0" anchor="ctr"/>
-          <a:lstStyle/>
-          <a:p>
-            <a:pPr marL="0" indent="0" algn="ctr">
-              <a:buNone/>
-            </a:pPr>
-            <a:r>
-              <a:rPr lang="en-US" sz="1300" b="1" dirty="0">
-                <a:solidFill>
-                  <a:srgbClr val="FFFFFF"/>
-                </a:solidFill>
-                <a:latin typeface="Trebuchet MS" pitchFamily="34" charset="0"/>
-                <a:ea typeface="Trebuchet MS" pitchFamily="34" charset="-122"/>
-                <a:cs typeface="Trebuchet MS" pitchFamily="34" charset="-120"/>
-              </a:rPr>
-              <a:t>6</a:t>
-            </a:r>
-            <a:endParaRPr lang="en-US" sz="1300" dirty="0"/>
-          </a:p>
-        </p:txBody>
-      </p:sp>
-      <p:sp>
-        <p:nvSpPr>
-          <p:cNvPr id="32" name="Text 30"/>
-          <p:cNvSpPr/>
-          <p:nvPr/>
-        </p:nvSpPr>
-        <p:spPr>
-          <a:xfrm>
-            <a:off x="6611112" y="3081528"/>
-            <a:ext cx="1874520" cy="292608"/>
-          </a:xfrm>
-          <a:prstGeom prst="rect">
-            <a:avLst/>
-          </a:prstGeom>
-          <a:noFill/>
-          <a:ln/>
-        </p:spPr>
-        <p:txBody>
-          <a:bodyPr wrap="square" lIns="0" tIns="0" rIns="0" bIns="0" rtlCol="0" anchor="ctr"/>
-          <a:lstStyle/>
-          <a:p>
-            <a:pPr marL="0" indent="0">
-              <a:buNone/>
-            </a:pPr>
-            <a:r>
-              <a:rPr lang="en-US" sz="1300" b="1" dirty="0">
-                <a:solidFill>
-                  <a:srgbClr val="0B3C5D"/>
-                </a:solidFill>
-                <a:latin typeface="Trebuchet MS" pitchFamily="34" charset="0"/>
-                <a:ea typeface="Trebuchet MS" pitchFamily="34" charset="-122"/>
-                <a:cs typeface="Trebuchet MS" pitchFamily="34" charset="-120"/>
-              </a:rPr>
-              <a:t>Monitorear (Q)</a:t>
-            </a:r>
-            <a:endParaRPr lang="en-US" sz="1300" dirty="0"/>
-          </a:p>
-        </p:txBody>
-      </p:sp>
-      <p:sp>
-        <p:nvSpPr>
-          <p:cNvPr id="33" name="Text 31"/>
-          <p:cNvSpPr/>
-          <p:nvPr/>
-        </p:nvSpPr>
-        <p:spPr>
-          <a:xfrm>
-            <a:off x="6245352" y="3419856"/>
-            <a:ext cx="2231136" cy="896112"/>
-          </a:xfrm>
-          <a:prstGeom prst="rect">
-            <a:avLst/>
-          </a:prstGeom>
-          <a:noFill/>
-          <a:ln/>
-        </p:spPr>
-        <p:txBody>
-          <a:bodyPr wrap="square" lIns="0" tIns="0" rIns="0" bIns="0" rtlCol="0" anchor="ctr"/>
-          <a:lstStyle/>
-          <a:p>
-            <a:pPr marL="0" indent="0">
-              <a:buNone/>
-            </a:pPr>
-            <a:r>
-              <a:rPr lang="en-US" sz="900" dirty="0">
-                <a:solidFill>
-                  <a:srgbClr val="2C3E50"/>
-                </a:solidFill>
-                <a:latin typeface="Calibri" pitchFamily="34" charset="0"/>
-                <a:ea typeface="Calibri" pitchFamily="34" charset="-122"/>
-                <a:cs typeface="Calibri" pitchFamily="34" charset="-120"/>
-              </a:rPr>
-              <a:t>La calidad deriva del catálogo vivo: reindex nocturno, re-clasificación continua y telemetría anónima de lo consultado.</a:t>
-            </a:r>
-            <a:endParaRPr lang="en-US" sz="900" dirty="0"/>
-          </a:p>
-        </p:txBody>
-      </p:sp>
-      <p:sp>
-        <p:nvSpPr>
-          <p:cNvPr id="34" name="Text 32"/>
-          <p:cNvSpPr/>
-          <p:nvPr/>
-        </p:nvSpPr>
-        <p:spPr>
-          <a:xfrm>
-            <a:off x="502920" y="4553712"/>
-            <a:ext cx="8138160" cy="274320"/>
-          </a:xfrm>
-          <a:prstGeom prst="rect">
-            <a:avLst/>
-          </a:prstGeom>
-          <a:noFill/>
-          <a:ln/>
-        </p:spPr>
-        <p:txBody>
-          <a:bodyPr wrap="square" lIns="0" tIns="0" rIns="0" bIns="0" rtlCol="0" anchor="ctr"/>
-          <a:lstStyle/>
-          <a:p>
-            <a:pPr marL="0" indent="0" algn="ctr">
-              <a:buNone/>
-            </a:pPr>
-            <a:r>
-              <a:rPr lang="en-US" sz="1050" b="1" dirty="0">
-                <a:solidFill>
-                  <a:srgbClr val="1ABC9C"/>
-                </a:solidFill>
-                <a:latin typeface="Trebuchet MS" pitchFamily="34" charset="0"/>
-                <a:ea typeface="Trebuchet MS" pitchFamily="34" charset="-122"/>
-                <a:cs typeface="Trebuchet MS" pitchFamily="34" charset="-120"/>
-              </a:rPr>
-              <a:t>La adaptación central: en vez de entrenar y congelar un modelo, cada consulta vive su propio ciclo — generación (LLM), verificación (código), ejecución.</a:t>
-            </a:r>
-            <a:endParaRPr lang="en-US" sz="1050" dirty="0"/>
-          </a:p>
-        </p:txBody>
-      </p:sp>
-      <p:sp>
-        <p:nvSpPr>
-          <p:cNvPr id="35" name="Text 33"/>
-          <p:cNvSpPr/>
-          <p:nvPr/>
-        </p:nvSpPr>
-        <p:spPr>
-          <a:xfrm>
-            <a:off x="502920" y="4832604"/>
-            <a:ext cx="7680960" cy="228600"/>
-          </a:xfrm>
-          <a:prstGeom prst="rect">
-            <a:avLst/>
-          </a:prstGeom>
-          <a:noFill/>
-          <a:ln/>
-        </p:spPr>
-        <p:txBody>
-          <a:bodyPr wrap="square" lIns="0" tIns="0" rIns="0" bIns="0" rtlCol="0" anchor="ctr"/>
-          <a:lstStyle/>
-          <a:p>
-            <a:pPr marL="0" indent="0">
-              <a:buNone/>
-            </a:pPr>
-            <a:r>
-              <a:rPr lang="en-US" sz="850" b="1" dirty="0">
-                <a:solidFill>
-                  <a:srgbClr val="0B3C5D"/>
-                </a:solidFill>
-                <a:latin typeface="Calibri" pitchFamily="34" charset="0"/>
-                <a:ea typeface="Calibri" pitchFamily="34" charset="-122"/>
-                <a:cs typeface="Calibri" pitchFamily="34" charset="-120"/>
-              </a:rPr>
-              <a:t>DatosVivos · datosvivos.co</a:t>
-            </a:r>
-            <a:r>
-              <a:rPr lang="en-US" sz="850" dirty="0">
-                <a:solidFill>
-                  <a:srgbClr val="7F8C8D"/>
-                </a:solidFill>
-                <a:latin typeface="Calibri" pitchFamily="34" charset="0"/>
-                <a:ea typeface="Calibri" pitchFamily="34" charset="-122"/>
-                <a:cs typeface="Calibri" pitchFamily="34" charset="-120"/>
-              </a:rPr>
-              <a:t>   |   Datos al Ecosistema 2026 · Equipo 93 · Reto 7 · Nivel Avanzado</a:t>
-            </a:r>
-            <a:endParaRPr lang="en-US" sz="850" dirty="0"/>
-          </a:p>
-        </p:txBody>
-      </p:sp>
-      <p:sp>
-        <p:nvSpPr>
-          <p:cNvPr id="36" name="Text 34"/>
-          <p:cNvSpPr/>
-          <p:nvPr/>
-        </p:nvSpPr>
-        <p:spPr>
-          <a:xfrm>
-            <a:off x="8275320" y="4832604"/>
-            <a:ext cx="365760" cy="228600"/>
-          </a:xfrm>
-          <a:prstGeom prst="rect">
-            <a:avLst/>
-          </a:prstGeom>
-          <a:noFill/>
-          <a:ln/>
-        </p:spPr>
-        <p:txBody>
-          <a:bodyPr wrap="square" lIns="0" tIns="0" rIns="0" bIns="0" rtlCol="0" anchor="ctr"/>
-          <a:lstStyle/>
-          <a:p>
-            <a:pPr marL="0" indent="0" algn="r">
-              <a:buNone/>
-            </a:pPr>
-            <a:r>
-              <a:rPr lang="en-US" sz="850" dirty="0">
-                <a:solidFill>
-                  <a:srgbClr val="7F8C8D"/>
-                </a:solidFill>
-                <a:latin typeface="Calibri" pitchFamily="34" charset="0"/>
-                <a:ea typeface="Calibri" pitchFamily="34" charset="-122"/>
-                <a:cs typeface="Calibri" pitchFamily="34" charset="-120"/>
-              </a:rPr>
-              <a:t>09</a:t>
-            </a:r>
-            <a:endParaRPr lang="en-US" sz="850" dirty="0"/>
-          </a:p>
-        </p:txBody>
-      </p:sp>
-      <p:pic>
-        <p:nvPicPr>
-          <p:cNvPr id="37" name="Graphic 36" descr="Logotipo de la Agencia Nacional de Infraestructura">
-            <a:extLst>
-              <a:ext uri="{FF2B5EF4-FFF2-40B4-BE49-F238E27FC236}">
-                <a16:creationId xmlns:a16="http://schemas.microsoft.com/office/drawing/2014/main" id="{F565F3C4-3574-18E0-8951-540E8328D8E3}"/>
-              </a:ext>
-            </a:extLst>
-          </p:cNvPr>
-          <p:cNvPicPr>
-            <a:picLocks noChangeAspect="1"/>
-          </p:cNvPicPr>
-          <p:nvPr/>
-        </p:nvPicPr>
-        <p:blipFill>
-          <a:blip>
-            <a:extLst>
-              <a:ext uri="{96DAC541-7B7A-43D3-8B79-37D633B846F1}">
-                <asvg:svgBlip xmlns:asvg="http://schemas.microsoft.com/office/drawing/2016/SVG/main" r:embed="rId3"/>
-              </a:ext>
-            </a:extLst>
-          </a:blip>
-          <a:stretch>
-            <a:fillRect/>
-          </a:stretch>
-        </p:blipFill>
-        <p:spPr>
-          <a:xfrm>
-            <a:off x="8298180" y="82296"/>
-            <a:ext cx="685800" cy="927100"/>
-          </a:xfrm>
-          <a:prstGeom prst="rect">
-            <a:avLst/>
-          </a:prstGeom>
-        </p:spPr>
-      </p:pic>
-      <p:pic>
-        <p:nvPicPr>
-          <p:cNvPr id="38" name="Graphic 37" descr="Imagen logo mintic">
-            <a:extLst>
-              <a:ext uri="{FF2B5EF4-FFF2-40B4-BE49-F238E27FC236}">
-                <a16:creationId xmlns:a16="http://schemas.microsoft.com/office/drawing/2014/main" id="{BC8FB032-1B8C-0567-5E64-47E977005B64}"/>
-              </a:ext>
-            </a:extLst>
-          </p:cNvPr>
-          <p:cNvPicPr>
-            <a:picLocks noChangeAspect="1"/>
-          </p:cNvPicPr>
-          <p:nvPr/>
-        </p:nvPicPr>
-        <p:blipFill>
-          <a:blip>
-            <a:extLst>
-              <a:ext uri="{96DAC541-7B7A-43D3-8B79-37D633B846F1}">
-                <asvg:svgBlip xmlns:asvg="http://schemas.microsoft.com/office/drawing/2016/SVG/main" r:embed="rId4"/>
               </a:ext>
             </a:extLst>
           </a:blip>

--- a/recursos/presentacion.pptx
+++ b/recursos/presentacion.pptx
@@ -2447,7 +2447,40 @@
                 <a:ea typeface="Calibri" pitchFamily="34" charset="-122"/>
                 <a:cs typeface="Calibri" pitchFamily="34" charset="-120"/>
               </a:rPr>
-              <a:t>El panorama de los datos abiertos de Colombia</a:t>
+              <a:t>El panorama de los </a:t>
+            </a:r>
+            <a:r>
+              <a:rPr lang="en-US" sz="1900" dirty="0" err="1">
+                <a:solidFill>
+                  <a:srgbClr val="AEC6D8"/>
+                </a:solidFill>
+                <a:latin typeface="Calibri" pitchFamily="34" charset="0"/>
+                <a:ea typeface="Calibri" pitchFamily="34" charset="-122"/>
+                <a:cs typeface="Calibri" pitchFamily="34" charset="-120"/>
+              </a:rPr>
+              <a:t>datos</a:t>
+            </a:r>
+            <a:r>
+              <a:rPr lang="en-US" sz="1900" dirty="0">
+                <a:solidFill>
+                  <a:srgbClr val="AEC6D8"/>
+                </a:solidFill>
+                <a:latin typeface="Calibri" pitchFamily="34" charset="0"/>
+                <a:ea typeface="Calibri" pitchFamily="34" charset="-122"/>
+                <a:cs typeface="Calibri" pitchFamily="34" charset="-120"/>
+              </a:rPr>
+              <a:t> </a:t>
+            </a:r>
+            <a:r>
+              <a:rPr lang="en-US" sz="1900" dirty="0" err="1">
+                <a:solidFill>
+                  <a:srgbClr val="AEC6D8"/>
+                </a:solidFill>
+                <a:latin typeface="Calibri" pitchFamily="34" charset="0"/>
+                <a:ea typeface="Calibri" pitchFamily="34" charset="-122"/>
+                <a:cs typeface="Calibri" pitchFamily="34" charset="-120"/>
+              </a:rPr>
+              <a:t>abiertos</a:t>
             </a:r>
             <a:endParaRPr lang="en-US" sz="1900" dirty="0"/>
           </a:p>
@@ -2478,7 +2511,7 @@
               <a:buNone/>
             </a:pPr>
             <a:r>
-              <a:rPr lang="en-US" sz="2100" b="1" dirty="0">
+              <a:rPr lang="en-US" sz="2100" b="1" dirty="0" err="1">
                 <a:solidFill>
                   <a:srgbClr val="1ABC9C"/>
                 </a:solidFill>
@@ -2486,7 +2519,18 @@
                 <a:ea typeface="Trebuchet MS" pitchFamily="34" charset="-122"/>
                 <a:cs typeface="Trebuchet MS" pitchFamily="34" charset="-120"/>
               </a:rPr>
-              <a:t>Datos del Estado, en tus palabras.</a:t>
+              <a:t>en</a:t>
+            </a:r>
+            <a:r>
+              <a:rPr lang="en-US" sz="2100" b="1" dirty="0">
+                <a:solidFill>
+                  <a:srgbClr val="1ABC9C"/>
+                </a:solidFill>
+                <a:latin typeface="Trebuchet MS" pitchFamily="34" charset="0"/>
+                <a:ea typeface="Trebuchet MS" pitchFamily="34" charset="-122"/>
+                <a:cs typeface="Trebuchet MS" pitchFamily="34" charset="-120"/>
+              </a:rPr>
+              <a:t> Colombia</a:t>
             </a:r>
             <a:endParaRPr lang="en-US" sz="2100" dirty="0"/>
           </a:p>
@@ -6146,7 +6190,7 @@
                 <a:ea typeface="Trebuchet MS" pitchFamily="34" charset="-122"/>
                 <a:cs typeface="Trebuchet MS" pitchFamily="34" charset="-120"/>
               </a:rPr>
-              <a:t>~1.5 s</a:t>
+              <a:t>~1 - 4 s</a:t>
             </a:r>
             <a:endParaRPr lang="en-US" sz="3000" dirty="0"/>
           </a:p>
@@ -6177,15 +6221,174 @@
               <a:buNone/>
             </a:pPr>
             <a:r>
+              <a:rPr lang="en-US" sz="1050" dirty="0" err="1">
+                <a:solidFill>
+                  <a:srgbClr val="2C3E50"/>
+                </a:solidFill>
+                <a:latin typeface="Calibri" pitchFamily="34" charset="0"/>
+                <a:cs typeface="Calibri" pitchFamily="34" charset="-120"/>
+              </a:rPr>
+              <a:t>en</a:t>
+            </a:r>
+            <a:r>
               <a:rPr lang="en-US" sz="1050" dirty="0">
                 <a:solidFill>
                   <a:srgbClr val="2C3E50"/>
                 </a:solidFill>
                 <a:latin typeface="Calibri" pitchFamily="34" charset="0"/>
-                <a:ea typeface="Calibri" pitchFamily="34" charset="-122"/>
-                <a:cs typeface="Calibri" pitchFamily="34" charset="-120"/>
-              </a:rPr>
-              <a:t>interpreta la pregunta el motor de lenguaje (API de Claude); antes tomaba 31-45 s</a:t>
+                <a:cs typeface="Calibri" pitchFamily="34" charset="-120"/>
+              </a:rPr>
+              <a:t> </a:t>
+            </a:r>
+            <a:r>
+              <a:rPr lang="en-US" sz="1050" dirty="0" err="1">
+                <a:solidFill>
+                  <a:srgbClr val="2C3E50"/>
+                </a:solidFill>
+                <a:latin typeface="Calibri" pitchFamily="34" charset="0"/>
+                <a:cs typeface="Calibri" pitchFamily="34" charset="-120"/>
+              </a:rPr>
+              <a:t>tiempo</a:t>
+            </a:r>
+            <a:r>
+              <a:rPr lang="en-US" sz="1050" dirty="0">
+                <a:solidFill>
+                  <a:srgbClr val="2C3E50"/>
+                </a:solidFill>
+                <a:latin typeface="Calibri" pitchFamily="34" charset="0"/>
+                <a:cs typeface="Calibri" pitchFamily="34" charset="-120"/>
+              </a:rPr>
+              <a:t> de </a:t>
+            </a:r>
+            <a:r>
+              <a:rPr lang="en-US" sz="1050" dirty="0" err="1">
+                <a:solidFill>
+                  <a:srgbClr val="2C3E50"/>
+                </a:solidFill>
+                <a:latin typeface="Calibri" pitchFamily="34" charset="0"/>
+                <a:cs typeface="Calibri" pitchFamily="34" charset="-120"/>
+              </a:rPr>
+              <a:t>procesamiento</a:t>
+            </a:r>
+            <a:r>
+              <a:rPr lang="en-US" sz="1050" dirty="0">
+                <a:solidFill>
+                  <a:srgbClr val="2C3E50"/>
+                </a:solidFill>
+                <a:latin typeface="Calibri" pitchFamily="34" charset="0"/>
+                <a:cs typeface="Calibri" pitchFamily="34" charset="-120"/>
+              </a:rPr>
+              <a:t> de </a:t>
+            </a:r>
+            <a:r>
+              <a:rPr lang="en-US" sz="1050" dirty="0" err="1">
+                <a:solidFill>
+                  <a:srgbClr val="2C3E50"/>
+                </a:solidFill>
+                <a:latin typeface="Calibri" pitchFamily="34" charset="0"/>
+                <a:cs typeface="Calibri" pitchFamily="34" charset="-120"/>
+              </a:rPr>
+              <a:t>información</a:t>
+            </a:r>
+            <a:r>
+              <a:rPr lang="en-US" sz="1050" dirty="0">
+                <a:solidFill>
+                  <a:srgbClr val="2C3E50"/>
+                </a:solidFill>
+                <a:latin typeface="Calibri" pitchFamily="34" charset="0"/>
+                <a:cs typeface="Calibri" pitchFamily="34" charset="-120"/>
+              </a:rPr>
+              <a:t> para </a:t>
+            </a:r>
+            <a:r>
+              <a:rPr lang="en-US" sz="1050" dirty="0" err="1">
+                <a:solidFill>
+                  <a:srgbClr val="2C3E50"/>
+                </a:solidFill>
+                <a:latin typeface="Calibri" pitchFamily="34" charset="0"/>
+                <a:cs typeface="Calibri" pitchFamily="34" charset="-120"/>
+              </a:rPr>
+              <a:t>identificar</a:t>
+            </a:r>
+            <a:r>
+              <a:rPr lang="en-US" sz="1050" dirty="0">
+                <a:solidFill>
+                  <a:srgbClr val="2C3E50"/>
+                </a:solidFill>
+                <a:latin typeface="Calibri" pitchFamily="34" charset="0"/>
+                <a:cs typeface="Calibri" pitchFamily="34" charset="-120"/>
+              </a:rPr>
+              <a:t> un </a:t>
+            </a:r>
+            <a:r>
+              <a:rPr lang="en-US" sz="1050" dirty="0" err="1">
+                <a:solidFill>
+                  <a:srgbClr val="2C3E50"/>
+                </a:solidFill>
+                <a:latin typeface="Calibri" pitchFamily="34" charset="0"/>
+                <a:cs typeface="Calibri" pitchFamily="34" charset="-120"/>
+              </a:rPr>
+              <a:t>dato</a:t>
+            </a:r>
+            <a:r>
+              <a:rPr lang="en-US" sz="1050" dirty="0">
+                <a:solidFill>
+                  <a:srgbClr val="2C3E50"/>
+                </a:solidFill>
+                <a:latin typeface="Calibri" pitchFamily="34" charset="0"/>
+                <a:cs typeface="Calibri" pitchFamily="34" charset="-120"/>
+              </a:rPr>
+              <a:t> clave. Damos </a:t>
+            </a:r>
+            <a:r>
+              <a:rPr lang="en-US" sz="1050" dirty="0" err="1">
+                <a:solidFill>
+                  <a:srgbClr val="2C3E50"/>
+                </a:solidFill>
+                <a:latin typeface="Calibri" pitchFamily="34" charset="0"/>
+                <a:cs typeface="Calibri" pitchFamily="34" charset="-120"/>
+              </a:rPr>
+              <a:t>los</a:t>
+            </a:r>
+            <a:r>
+              <a:rPr lang="en-US" sz="1050" dirty="0">
+                <a:solidFill>
+                  <a:srgbClr val="2C3E50"/>
+                </a:solidFill>
+                <a:latin typeface="Calibri" pitchFamily="34" charset="0"/>
+                <a:cs typeface="Calibri" pitchFamily="34" charset="-120"/>
+              </a:rPr>
+              <a:t> </a:t>
+            </a:r>
+            <a:r>
+              <a:rPr lang="en-US" sz="1050" dirty="0" err="1">
+                <a:solidFill>
+                  <a:srgbClr val="2C3E50"/>
+                </a:solidFill>
+                <a:latin typeface="Calibri" pitchFamily="34" charset="0"/>
+                <a:cs typeface="Calibri" pitchFamily="34" charset="-120"/>
+              </a:rPr>
+              <a:t>datos</a:t>
+            </a:r>
+            <a:r>
+              <a:rPr lang="en-US" sz="1050" dirty="0">
+                <a:solidFill>
+                  <a:srgbClr val="2C3E50"/>
+                </a:solidFill>
+                <a:latin typeface="Calibri" pitchFamily="34" charset="0"/>
+                <a:cs typeface="Calibri" pitchFamily="34" charset="-120"/>
+              </a:rPr>
+              <a:t> y </a:t>
+            </a:r>
+            <a:r>
+              <a:rPr lang="en-US" sz="1050" dirty="0" err="1">
+                <a:solidFill>
+                  <a:srgbClr val="2C3E50"/>
+                </a:solidFill>
+                <a:latin typeface="Calibri" pitchFamily="34" charset="0"/>
+                <a:cs typeface="Calibri" pitchFamily="34" charset="-120"/>
+              </a:rPr>
+              <a:t>velocidad</a:t>
             </a:r>
             <a:endParaRPr lang="en-US" sz="1050" dirty="0"/>
           </a:p>
@@ -6467,7 +6670,7 @@
                 <a:ea typeface="Trebuchet MS" pitchFamily="34" charset="-122"/>
                 <a:cs typeface="Trebuchet MS" pitchFamily="34" charset="-120"/>
               </a:rPr>
-              <a:t>50</a:t>
+              <a:t>1 día</a:t>
             </a:r>
             <a:endParaRPr lang="en-US" sz="3000" dirty="0"/>
           </a:p>
@@ -6498,6 +6701,17 @@
               <a:buNone/>
             </a:pPr>
             <a:r>
+              <a:rPr lang="en-US" sz="1050" dirty="0" err="1">
+                <a:solidFill>
+                  <a:srgbClr val="2C3E50"/>
+                </a:solidFill>
+                <a:latin typeface="Calibri" pitchFamily="34" charset="0"/>
+                <a:ea typeface="Calibri" pitchFamily="34" charset="-122"/>
+                <a:cs typeface="Calibri" pitchFamily="34" charset="-120"/>
+              </a:rPr>
+              <a:t>periodo</a:t>
+            </a:r>
+            <a:r>
               <a:rPr lang="en-US" sz="1050" dirty="0">
                 <a:solidFill>
                   <a:srgbClr val="2C3E50"/>
@@ -6506,7 +6720,62 @@
                 <a:ea typeface="Calibri" pitchFamily="34" charset="-122"/>
                 <a:cs typeface="Calibri" pitchFamily="34" charset="-120"/>
               </a:rPr>
-              <a:t>preguntas ciudadanas evaluadas por ciclos, convertidas en mejoras estructurales</a:t>
+              <a:t> de </a:t>
+            </a:r>
+            <a:r>
+              <a:rPr lang="en-US" sz="1050" dirty="0" err="1">
+                <a:solidFill>
+                  <a:srgbClr val="2C3E50"/>
+                </a:solidFill>
+                <a:latin typeface="Calibri" pitchFamily="34" charset="0"/>
+                <a:ea typeface="Calibri" pitchFamily="34" charset="-122"/>
+                <a:cs typeface="Calibri" pitchFamily="34" charset="-120"/>
+              </a:rPr>
+              <a:t>actualización</a:t>
+            </a:r>
+            <a:r>
+              <a:rPr lang="en-US" sz="1050" dirty="0">
+                <a:solidFill>
+                  <a:srgbClr val="2C3E50"/>
+                </a:solidFill>
+                <a:latin typeface="Calibri" pitchFamily="34" charset="0"/>
+                <a:ea typeface="Calibri" pitchFamily="34" charset="-122"/>
+                <a:cs typeface="Calibri" pitchFamily="34" charset="-120"/>
+              </a:rPr>
+              <a:t> y </a:t>
+            </a:r>
+            <a:r>
+              <a:rPr lang="en-US" sz="1050" dirty="0" err="1">
+                <a:solidFill>
+                  <a:srgbClr val="2C3E50"/>
+                </a:solidFill>
+                <a:latin typeface="Calibri" pitchFamily="34" charset="0"/>
+                <a:ea typeface="Calibri" pitchFamily="34" charset="-122"/>
+                <a:cs typeface="Calibri" pitchFamily="34" charset="-120"/>
+              </a:rPr>
+              <a:t>autocatalogcación</a:t>
+            </a:r>
+            <a:r>
+              <a:rPr lang="en-US" sz="1050" dirty="0">
+                <a:solidFill>
+                  <a:srgbClr val="2C3E50"/>
+                </a:solidFill>
+                <a:latin typeface="Calibri" pitchFamily="34" charset="0"/>
+                <a:ea typeface="Calibri" pitchFamily="34" charset="-122"/>
+                <a:cs typeface="Calibri" pitchFamily="34" charset="-120"/>
+              </a:rPr>
+              <a:t> de </a:t>
+            </a:r>
+            <a:r>
+              <a:rPr lang="en-US" sz="1050" dirty="0" err="1">
+                <a:solidFill>
+                  <a:srgbClr val="2C3E50"/>
+                </a:solidFill>
+                <a:latin typeface="Calibri" pitchFamily="34" charset="0"/>
+                <a:ea typeface="Calibri" pitchFamily="34" charset="-122"/>
+                <a:cs typeface="Calibri" pitchFamily="34" charset="-120"/>
+              </a:rPr>
+              <a:t>datos</a:t>
             </a:r>
             <a:endParaRPr lang="en-US" sz="1050" dirty="0"/>
           </a:p>
@@ -6578,7 +6847,51 @@
                 <a:ea typeface="Calibri" pitchFamily="34" charset="-122"/>
                 <a:cs typeface="Calibri" pitchFamily="34" charset="-120"/>
               </a:rPr>
-              <a:t>filtros de año y municipio dentro del dataset · respuestas compuestas (KPI + tendencia + per cápita).</a:t>
+              <a:t>filtros de año y municipio dentro del dataset · respuestas </a:t>
+            </a:r>
+            <a:r>
+              <a:rPr lang="en-US" sz="1100" dirty="0" err="1">
+                <a:solidFill>
+                  <a:srgbClr val="2C3E50"/>
+                </a:solidFill>
+                <a:latin typeface="Calibri" pitchFamily="34" charset="0"/>
+                <a:ea typeface="Calibri" pitchFamily="34" charset="-122"/>
+                <a:cs typeface="Calibri" pitchFamily="34" charset="-120"/>
+              </a:rPr>
+              <a:t>compuestas</a:t>
+            </a:r>
+            <a:r>
+              <a:rPr lang="en-US" sz="1100" dirty="0">
+                <a:solidFill>
+                  <a:srgbClr val="2C3E50"/>
+                </a:solidFill>
+                <a:latin typeface="Calibri" pitchFamily="34" charset="0"/>
+                <a:ea typeface="Calibri" pitchFamily="34" charset="-122"/>
+                <a:cs typeface="Calibri" pitchFamily="34" charset="-120"/>
+              </a:rPr>
+              <a:t> y cruces </a:t>
+            </a:r>
+            <a:r>
+              <a:rPr lang="en-US" sz="1100" dirty="0" err="1">
+                <a:solidFill>
+                  <a:srgbClr val="2C3E50"/>
+                </a:solidFill>
+                <a:latin typeface="Calibri" pitchFamily="34" charset="0"/>
+                <a:ea typeface="Calibri" pitchFamily="34" charset="-122"/>
+                <a:cs typeface="Calibri" pitchFamily="34" charset="-120"/>
+              </a:rPr>
+              <a:t>avanzados</a:t>
+            </a:r>
+            <a:r>
+              <a:rPr lang="en-US" sz="1100" dirty="0">
+                <a:solidFill>
+                  <a:srgbClr val="2C3E50"/>
+                </a:solidFill>
+                <a:latin typeface="Calibri" pitchFamily="34" charset="0"/>
+                <a:ea typeface="Calibri" pitchFamily="34" charset="-122"/>
+                <a:cs typeface="Calibri" pitchFamily="34" charset="-120"/>
+              </a:rPr>
+              <a:t> de datasets.</a:t>
             </a:r>
             <a:endParaRPr lang="en-US" sz="1100" dirty="0"/>
           </a:p>
@@ -7628,14 +7941,15 @@
         </p:nvPicPr>
         <p:blipFill>
           <a:blip r:embed="rId3"/>
+          <a:srcRect t="7082" r="30655" b="11432"/>
           <a:stretch>
             <a:fillRect/>
           </a:stretch>
         </p:blipFill>
         <p:spPr>
           <a:xfrm>
-            <a:off x="502920" y="1234440"/>
-            <a:ext cx="8138160" cy="4069080"/>
+            <a:off x="1487887" y="1130079"/>
+            <a:ext cx="6168225" cy="3624006"/>
           </a:xfrm>
           <a:prstGeom prst="rect">
             <a:avLst/>
@@ -7812,7 +8126,7 @@
         <p:spPr>
           <a:xfrm>
             <a:off x="502920" y="548640"/>
-            <a:ext cx="8138160" cy="502920"/>
+            <a:ext cx="8434346" cy="502920"/>
           </a:xfrm>
           <a:prstGeom prst="rect">
             <a:avLst/>
@@ -7828,7 +8142,7 @@
               <a:buNone/>
             </a:pPr>
             <a:r>
-              <a:rPr lang="en-US" sz="2700" b="1" dirty="0">
+              <a:rPr lang="en-US" sz="2400" b="1" dirty="0">
                 <a:solidFill>
                   <a:srgbClr val="0B3C5D"/>
                 </a:solidFill>
@@ -7838,7 +8152,7 @@
               </a:rPr>
               <a:t>Motor NL2SQL: generar no basta — hay que verificar</a:t>
             </a:r>
-            <a:endParaRPr lang="en-US" sz="2700" dirty="0"/>
+            <a:endParaRPr lang="en-US" sz="2400" dirty="0"/>
           </a:p>
         </p:txBody>
       </p:sp>
@@ -7852,14 +8166,15 @@
         </p:nvPicPr>
         <p:blipFill>
           <a:blip r:embed="rId3"/>
+          <a:srcRect l="1051" t="10551" r="15998" b="28115"/>
           <a:stretch>
             <a:fillRect/>
           </a:stretch>
         </p:blipFill>
         <p:spPr>
           <a:xfrm>
-            <a:off x="502920" y="1280160"/>
-            <a:ext cx="8138160" cy="3616960"/>
+            <a:off x="445787" y="1457076"/>
+            <a:ext cx="8252425" cy="2711929"/>
           </a:xfrm>
           <a:prstGeom prst="rect">
             <a:avLst/>
@@ -8052,7 +8367,7 @@
               <a:buNone/>
             </a:pPr>
             <a:r>
-              <a:rPr lang="en-US" sz="2700" b="1" dirty="0">
+              <a:rPr lang="en-US" sz="2400" b="1" dirty="0">
                 <a:solidFill>
                   <a:srgbClr val="0B3C5D"/>
                 </a:solidFill>
@@ -8062,7 +8377,7 @@
               </a:rPr>
               <a:t>Modelo de datos: una vista curada como fuente única</a:t>
             </a:r>
-            <a:endParaRPr lang="en-US" sz="2700" dirty="0"/>
+            <a:endParaRPr lang="en-US" sz="2400" dirty="0"/>
           </a:p>
         </p:txBody>
       </p:sp>
@@ -8074,7 +8389,7 @@
         </p:nvSpPr>
         <p:spPr>
           <a:xfrm>
-            <a:off x="502920" y="1298448"/>
+            <a:off x="502920" y="1172718"/>
             <a:ext cx="8138160" cy="658368"/>
           </a:xfrm>
           <a:prstGeom prst="rect">
@@ -9778,130 +10093,13 @@
       </p:grpSpPr>
       <p:sp>
         <p:nvSpPr>
-          <p:cNvPr id="2" name="Text 0"/>
-          <p:cNvSpPr/>
-          <p:nvPr/>
-        </p:nvSpPr>
-        <p:spPr>
-          <a:xfrm>
-            <a:off x="502920" y="292608"/>
-            <a:ext cx="8138160" cy="256032"/>
-          </a:xfrm>
-          <a:prstGeom prst="rect">
-            <a:avLst/>
-          </a:prstGeom>
-          <a:noFill/>
-          <a:ln/>
-        </p:spPr>
-        <p:txBody>
-          <a:bodyPr wrap="square" lIns="0" tIns="0" rIns="0" bIns="0" rtlCol="0" anchor="ctr"/>
-          <a:lstStyle/>
-          <a:p>
-            <a:pPr marL="0" indent="0">
-              <a:buNone/>
-            </a:pPr>
-            <a:r>
-              <a:rPr lang="en-US" sz="1100" b="1" kern="0" spc="200" dirty="0">
-                <a:solidFill>
-                  <a:srgbClr val="1ABC9C"/>
-                </a:solidFill>
-                <a:latin typeface="Trebuchet MS" pitchFamily="34" charset="0"/>
-                <a:ea typeface="Trebuchet MS" pitchFamily="34" charset="-122"/>
-                <a:cs typeface="Trebuchet MS" pitchFamily="34" charset="-120"/>
-              </a:rPr>
-              <a:t>RESPALDO TÉCNICO · B5</a:t>
-            </a:r>
-            <a:endParaRPr lang="en-US" sz="1100" dirty="0"/>
-          </a:p>
-        </p:txBody>
-      </p:sp>
-      <p:sp>
-        <p:nvSpPr>
-          <p:cNvPr id="3" name="Text 1"/>
-          <p:cNvSpPr/>
-          <p:nvPr/>
-        </p:nvSpPr>
-        <p:spPr>
-          <a:xfrm>
-            <a:off x="502920" y="548640"/>
-            <a:ext cx="8138160" cy="502920"/>
-          </a:xfrm>
-          <a:prstGeom prst="rect">
-            <a:avLst/>
-          </a:prstGeom>
-          <a:noFill/>
-          <a:ln/>
-        </p:spPr>
-        <p:txBody>
-          <a:bodyPr wrap="square" lIns="0" tIns="0" rIns="0" bIns="0" rtlCol="0" anchor="ctr"/>
-          <a:lstStyle/>
-          <a:p>
-            <a:pPr marL="0" indent="0">
-              <a:buNone/>
-            </a:pPr>
-            <a:r>
-              <a:rPr lang="en-US" sz="2700" b="1" dirty="0">
-                <a:solidFill>
-                  <a:srgbClr val="0B3C5D"/>
-                </a:solidFill>
-                <a:latin typeface="Trebuchet MS" pitchFamily="34" charset="0"/>
-                <a:ea typeface="Trebuchet MS" pitchFamily="34" charset="-122"/>
-                <a:cs typeface="Trebuchet MS" pitchFamily="34" charset="-120"/>
-              </a:rPr>
-              <a:t>Evaluación y trazabilidad</a:t>
-            </a:r>
-            <a:endParaRPr lang="en-US" sz="2700" dirty="0"/>
-          </a:p>
-        </p:txBody>
-      </p:sp>
-      <p:sp>
-        <p:nvSpPr>
-          <p:cNvPr id="4" name="Text 2"/>
-          <p:cNvSpPr/>
-          <p:nvPr/>
-        </p:nvSpPr>
-        <p:spPr>
-          <a:xfrm>
-            <a:off x="502920" y="1298448"/>
-            <a:ext cx="8138160" cy="621792"/>
-          </a:xfrm>
-          <a:prstGeom prst="rect">
-            <a:avLst/>
-          </a:prstGeom>
-          <a:noFill/>
-          <a:ln/>
-        </p:spPr>
-        <p:txBody>
-          <a:bodyPr wrap="square" lIns="0" tIns="0" rIns="0" bIns="0" rtlCol="0" anchor="ctr"/>
-          <a:lstStyle/>
-          <a:p>
-            <a:pPr marL="0" indent="0">
-              <a:buNone/>
-            </a:pPr>
-            <a:r>
-              <a:rPr lang="en-US" sz="1200" dirty="0">
-                <a:solidFill>
-                  <a:srgbClr val="2C3E50"/>
-                </a:solidFill>
-                <a:latin typeface="Calibri" pitchFamily="34" charset="0"/>
-                <a:ea typeface="Calibri" pitchFamily="34" charset="-122"/>
-                <a:cs typeface="Calibri" pitchFamily="34" charset="-120"/>
-              </a:rPr>
-              <a:t>El motor se prueba en dos frentes: uno técnico, con casos de referencia versionados, y uno ciudadano, con preguntas reales cuya respuesta esperada se escribió antes de correrlas. Los patrones que fallan se convierten en mejoras estructurales y el ciclo se repite.</a:t>
-            </a:r>
-            <a:endParaRPr lang="en-US" sz="1200" dirty="0"/>
-          </a:p>
-        </p:txBody>
-      </p:sp>
-      <p:sp>
-        <p:nvSpPr>
-          <p:cNvPr id="5" name="Shape 3"/>
-          <p:cNvSpPr/>
-          <p:nvPr/>
-        </p:nvSpPr>
-        <p:spPr>
-          <a:xfrm>
-            <a:off x="502920" y="2057400"/>
+          <p:cNvPr id="9" name="Shape 6"/>
+          <p:cNvSpPr/>
+          <p:nvPr/>
+        </p:nvSpPr>
+        <p:spPr>
+          <a:xfrm>
+            <a:off x="4709160" y="2057400"/>
             <a:ext cx="3931920" cy="1097280"/>
           </a:xfrm>
           <a:prstGeom prst="roundRect">
@@ -9922,6 +10120,152 @@
           </a:effectLst>
         </p:spPr>
       </p:sp>
+      <p:sp>
+        <p:nvSpPr>
+          <p:cNvPr id="2" name="Text 0"/>
+          <p:cNvSpPr/>
+          <p:nvPr/>
+        </p:nvSpPr>
+        <p:spPr>
+          <a:xfrm>
+            <a:off x="502920" y="292608"/>
+            <a:ext cx="8138160" cy="256032"/>
+          </a:xfrm>
+          <a:prstGeom prst="rect">
+            <a:avLst/>
+          </a:prstGeom>
+          <a:noFill/>
+          <a:ln/>
+        </p:spPr>
+        <p:txBody>
+          <a:bodyPr wrap="square" lIns="0" tIns="0" rIns="0" bIns="0" rtlCol="0" anchor="ctr"/>
+          <a:lstStyle/>
+          <a:p>
+            <a:pPr marL="0" indent="0">
+              <a:buNone/>
+            </a:pPr>
+            <a:r>
+              <a:rPr lang="en-US" sz="1100" b="1" kern="0" spc="200" dirty="0">
+                <a:solidFill>
+                  <a:srgbClr val="1ABC9C"/>
+                </a:solidFill>
+                <a:latin typeface="Trebuchet MS" pitchFamily="34" charset="0"/>
+                <a:ea typeface="Trebuchet MS" pitchFamily="34" charset="-122"/>
+                <a:cs typeface="Trebuchet MS" pitchFamily="34" charset="-120"/>
+              </a:rPr>
+              <a:t>RESPALDO TÉCNICO · B5</a:t>
+            </a:r>
+            <a:endParaRPr lang="en-US" sz="1100" dirty="0"/>
+          </a:p>
+        </p:txBody>
+      </p:sp>
+      <p:sp>
+        <p:nvSpPr>
+          <p:cNvPr id="3" name="Text 1"/>
+          <p:cNvSpPr/>
+          <p:nvPr/>
+        </p:nvSpPr>
+        <p:spPr>
+          <a:xfrm>
+            <a:off x="502920" y="548640"/>
+            <a:ext cx="8138160" cy="502920"/>
+          </a:xfrm>
+          <a:prstGeom prst="rect">
+            <a:avLst/>
+          </a:prstGeom>
+          <a:noFill/>
+          <a:ln/>
+        </p:spPr>
+        <p:txBody>
+          <a:bodyPr wrap="square" lIns="0" tIns="0" rIns="0" bIns="0" rtlCol="0" anchor="ctr"/>
+          <a:lstStyle/>
+          <a:p>
+            <a:pPr marL="0" indent="0">
+              <a:buNone/>
+            </a:pPr>
+            <a:r>
+              <a:rPr lang="en-US" sz="2700" b="1" dirty="0">
+                <a:solidFill>
+                  <a:srgbClr val="0B3C5D"/>
+                </a:solidFill>
+                <a:latin typeface="Trebuchet MS" pitchFamily="34" charset="0"/>
+                <a:ea typeface="Trebuchet MS" pitchFamily="34" charset="-122"/>
+                <a:cs typeface="Trebuchet MS" pitchFamily="34" charset="-120"/>
+              </a:rPr>
+              <a:t>Evaluación y trazabilidad</a:t>
+            </a:r>
+            <a:endParaRPr lang="en-US" sz="2700" dirty="0"/>
+          </a:p>
+        </p:txBody>
+      </p:sp>
+      <p:sp>
+        <p:nvSpPr>
+          <p:cNvPr id="4" name="Text 2"/>
+          <p:cNvSpPr/>
+          <p:nvPr/>
+        </p:nvSpPr>
+        <p:spPr>
+          <a:xfrm>
+            <a:off x="502920" y="1298448"/>
+            <a:ext cx="8138160" cy="621792"/>
+          </a:xfrm>
+          <a:prstGeom prst="rect">
+            <a:avLst/>
+          </a:prstGeom>
+          <a:noFill/>
+          <a:ln/>
+        </p:spPr>
+        <p:txBody>
+          <a:bodyPr wrap="square" lIns="0" tIns="0" rIns="0" bIns="0" rtlCol="0" anchor="ctr"/>
+          <a:lstStyle/>
+          <a:p>
+            <a:pPr marL="0" indent="0">
+              <a:buNone/>
+            </a:pPr>
+            <a:r>
+              <a:rPr lang="en-US" sz="1200" dirty="0">
+                <a:solidFill>
+                  <a:srgbClr val="2C3E50"/>
+                </a:solidFill>
+                <a:latin typeface="Calibri" pitchFamily="34" charset="0"/>
+                <a:ea typeface="Calibri" pitchFamily="34" charset="-122"/>
+                <a:cs typeface="Calibri" pitchFamily="34" charset="-120"/>
+              </a:rPr>
+              <a:t>El motor se prueba en dos frentes: uno técnico, con casos de referencia versionados, y uno ciudadano, con preguntas reales cuya respuesta esperada se escribió antes de correrlas. Los patrones que fallan se convierten en mejoras estructurales y el ciclo se repite.</a:t>
+            </a:r>
+            <a:endParaRPr lang="en-US" sz="1200" dirty="0"/>
+          </a:p>
+        </p:txBody>
+      </p:sp>
+      <p:sp>
+        <p:nvSpPr>
+          <p:cNvPr id="5" name="Shape 3"/>
+          <p:cNvSpPr/>
+          <p:nvPr/>
+        </p:nvSpPr>
+        <p:spPr>
+          <a:xfrm>
+            <a:off x="502920" y="2057400"/>
+            <a:ext cx="3931920" cy="1097280"/>
+          </a:xfrm>
+          <a:prstGeom prst="roundRect">
+            <a:avLst>
+              <a:gd name="adj" fmla="val 5000"/>
+            </a:avLst>
+          </a:prstGeom>
+          <a:solidFill>
+            <a:srgbClr val="FFFFFF"/>
+          </a:solidFill>
+          <a:ln/>
+          <a:effectLst>
+            <a:outerShdw algn="bl" rotWithShape="0">
+              <a:srgbClr val="1A2530">
+                <a:alpha val="0"/>
+              </a:srgbClr>
+            </a:outerShdw>
+          </a:effectLst>
+        </p:spPr>
+      </p:sp>
       <p:pic>
         <p:nvPicPr>
           <p:cNvPr id="6" name="Image 0" descr="preencoded.png"/>
@@ -10026,13 +10370,91 @@
       </p:sp>
       <p:sp>
         <p:nvSpPr>
-          <p:cNvPr id="9" name="Shape 6"/>
-          <p:cNvSpPr/>
-          <p:nvPr/>
-        </p:nvSpPr>
-        <p:spPr>
-          <a:xfrm>
-            <a:off x="4709160" y="2057400"/>
+          <p:cNvPr id="11" name="Text 7"/>
+          <p:cNvSpPr/>
+          <p:nvPr/>
+        </p:nvSpPr>
+        <p:spPr>
+          <a:xfrm>
+            <a:off x="5330952" y="2157984"/>
+            <a:ext cx="3154680" cy="274320"/>
+          </a:xfrm>
+          <a:prstGeom prst="rect">
+            <a:avLst/>
+          </a:prstGeom>
+          <a:noFill/>
+          <a:ln/>
+        </p:spPr>
+        <p:txBody>
+          <a:bodyPr wrap="square" lIns="0" tIns="0" rIns="0" bIns="0" rtlCol="0" anchor="ctr"/>
+          <a:lstStyle/>
+          <a:p>
+            <a:pPr marL="0" indent="0">
+              <a:buNone/>
+            </a:pPr>
+            <a:r>
+              <a:rPr lang="en-US" sz="1150" b="1" dirty="0">
+                <a:solidFill>
+                  <a:srgbClr val="0B3C5D"/>
+                </a:solidFill>
+                <a:latin typeface="Trebuchet MS" pitchFamily="34" charset="0"/>
+                <a:ea typeface="Trebuchet MS" pitchFamily="34" charset="-122"/>
+                <a:cs typeface="Trebuchet MS" pitchFamily="34" charset="-120"/>
+              </a:rPr>
+              <a:t>Ciclo ciudadano de 50 preguntas</a:t>
+            </a:r>
+            <a:endParaRPr lang="en-US" sz="1150" dirty="0"/>
+          </a:p>
+        </p:txBody>
+      </p:sp>
+      <p:sp>
+        <p:nvSpPr>
+          <p:cNvPr id="12" name="Text 8"/>
+          <p:cNvSpPr/>
+          <p:nvPr/>
+        </p:nvSpPr>
+        <p:spPr>
+          <a:xfrm>
+            <a:off x="5330952" y="2441448"/>
+            <a:ext cx="3154680" cy="685800"/>
+          </a:xfrm>
+          <a:prstGeom prst="rect">
+            <a:avLst/>
+          </a:prstGeom>
+          <a:noFill/>
+          <a:ln/>
+        </p:spPr>
+        <p:txBody>
+          <a:bodyPr wrap="square" lIns="0" tIns="0" rIns="0" bIns="0" rtlCol="0" anchor="ctr"/>
+          <a:lstStyle/>
+          <a:p>
+            <a:pPr marL="0" indent="0">
+              <a:buNone/>
+            </a:pPr>
+            <a:r>
+              <a:rPr lang="en-US" sz="900" dirty="0">
+                <a:solidFill>
+                  <a:srgbClr val="2C3E50"/>
+                </a:solidFill>
+                <a:latin typeface="Calibri" pitchFamily="34" charset="0"/>
+                <a:ea typeface="Calibri" pitchFamily="34" charset="-122"/>
+                <a:cs typeface="Calibri" pitchFamily="34" charset="-120"/>
+              </a:rPr>
+              <a:t>Cada pregunta tiene respuesta esperada pre-registrada. Las fallas detectadas produjeron mejoras concretas: re-ranking semántico, respuesta de totales y honestidad de lejanía.</a:t>
+            </a:r>
+            <a:endParaRPr lang="en-US" sz="900" dirty="0"/>
+          </a:p>
+        </p:txBody>
+      </p:sp>
+      <p:sp>
+        <p:nvSpPr>
+          <p:cNvPr id="13" name="Shape 9"/>
+          <p:cNvSpPr/>
+          <p:nvPr/>
+        </p:nvSpPr>
+        <p:spPr>
+          <a:xfrm>
+            <a:off x="502920" y="3291840"/>
             <a:ext cx="3931920" cy="1097280"/>
           </a:xfrm>
           <a:prstGeom prst="roundRect">
@@ -10055,7 +10477,7 @@
       </p:sp>
       <p:pic>
         <p:nvPicPr>
-          <p:cNvPr id="10" name="Image 1" descr="preencoded.png"/>
+          <p:cNvPr id="14" name="Image 2" descr="preencoded.png"/>
           <p:cNvPicPr>
             <a:picLocks noChangeAspect="1"/>
           </p:cNvPicPr>
@@ -10069,7 +10491,7 @@
         </p:blipFill>
         <p:spPr>
           <a:xfrm>
-            <a:off x="4892040" y="2240280"/>
+            <a:off x="685800" y="3474720"/>
             <a:ext cx="310896" cy="310896"/>
           </a:xfrm>
           <a:prstGeom prst="rect">
@@ -10079,13 +10501,13 @@
       </p:pic>
       <p:sp>
         <p:nvSpPr>
-          <p:cNvPr id="11" name="Text 7"/>
-          <p:cNvSpPr/>
-          <p:nvPr/>
-        </p:nvSpPr>
-        <p:spPr>
-          <a:xfrm>
-            <a:off x="5330952" y="2157984"/>
+          <p:cNvPr id="15" name="Text 10"/>
+          <p:cNvSpPr/>
+          <p:nvPr/>
+        </p:nvSpPr>
+        <p:spPr>
+          <a:xfrm>
+            <a:off x="1124712" y="3392424"/>
             <a:ext cx="3154680" cy="274320"/>
           </a:xfrm>
           <a:prstGeom prst="rect">
@@ -10110,7 +10532,7 @@
                 <a:ea typeface="Trebuchet MS" pitchFamily="34" charset="-122"/>
                 <a:cs typeface="Trebuchet MS" pitchFamily="34" charset="-120"/>
               </a:rPr>
-              <a:t>Ciclo ciudadano de 50 preguntas</a:t>
+              <a:t>36 archivos de pruebas</a:t>
             </a:r>
             <a:endParaRPr lang="en-US" sz="1150" dirty="0"/>
           </a:p>
@@ -10118,13 +10540,13 @@
       </p:sp>
       <p:sp>
         <p:nvSpPr>
-          <p:cNvPr id="12" name="Text 8"/>
-          <p:cNvSpPr/>
-          <p:nvPr/>
-        </p:nvSpPr>
-        <p:spPr>
-          <a:xfrm>
-            <a:off x="5330952" y="2441448"/>
+          <p:cNvPr id="16" name="Text 11"/>
+          <p:cNvSpPr/>
+          <p:nvPr/>
+        </p:nvSpPr>
+        <p:spPr>
+          <a:xfrm>
+            <a:off x="1124712" y="3675888"/>
             <a:ext cx="3154680" cy="685800"/>
           </a:xfrm>
           <a:prstGeom prst="rect">
@@ -10149,7 +10571,7 @@
                 <a:ea typeface="Calibri" pitchFamily="34" charset="-122"/>
                 <a:cs typeface="Calibri" pitchFamily="34" charset="-120"/>
               </a:rPr>
-              <a:t>Cada pregunta tiene respuesta esperada pre-registrada. Las fallas detectadas produjeron mejoras concretas: re-ranking semántico, respuesta de totales y honestidad de lejanía.</a:t>
+              <a:t>Cubren el verificador SoQL, el validador anti-alucinación, la reparación, la inferencia territorial, la cosecha, el MCP y las rutas de la API.</a:t>
             </a:r>
             <a:endParaRPr lang="en-US" sz="900" dirty="0"/>
           </a:p>
@@ -10157,13 +10579,13 @@
       </p:sp>
       <p:sp>
         <p:nvSpPr>
-          <p:cNvPr id="13" name="Shape 9"/>
-          <p:cNvSpPr/>
-          <p:nvPr/>
-        </p:nvSpPr>
-        <p:spPr>
-          <a:xfrm>
-            <a:off x="502920" y="3291840"/>
+          <p:cNvPr id="17" name="Shape 12"/>
+          <p:cNvSpPr/>
+          <p:nvPr/>
+        </p:nvSpPr>
+        <p:spPr>
+          <a:xfrm>
+            <a:off x="4709160" y="3291840"/>
             <a:ext cx="3931920" cy="1097280"/>
           </a:xfrm>
           <a:prstGeom prst="roundRect">
@@ -10186,7 +10608,7 @@
       </p:sp>
       <p:pic>
         <p:nvPicPr>
-          <p:cNvPr id="14" name="Image 2" descr="preencoded.png"/>
+          <p:cNvPr id="18" name="Image 3" descr="preencoded.png"/>
           <p:cNvPicPr>
             <a:picLocks noChangeAspect="1"/>
           </p:cNvPicPr>
@@ -10200,7 +10622,7 @@
         </p:blipFill>
         <p:spPr>
           <a:xfrm>
-            <a:off x="685800" y="3474720"/>
+            <a:off x="4892040" y="3474720"/>
             <a:ext cx="310896" cy="310896"/>
           </a:xfrm>
           <a:prstGeom prst="rect">
@@ -10210,13 +10632,13 @@
       </p:pic>
       <p:sp>
         <p:nvSpPr>
-          <p:cNvPr id="15" name="Text 10"/>
-          <p:cNvSpPr/>
-          <p:nvPr/>
-        </p:nvSpPr>
-        <p:spPr>
-          <a:xfrm>
-            <a:off x="1124712" y="3392424"/>
+          <p:cNvPr id="19" name="Text 13"/>
+          <p:cNvSpPr/>
+          <p:nvPr/>
+        </p:nvSpPr>
+        <p:spPr>
+          <a:xfrm>
+            <a:off x="5330952" y="3392424"/>
             <a:ext cx="3154680" cy="274320"/>
           </a:xfrm>
           <a:prstGeom prst="rect">
@@ -10241,7 +10663,7 @@
                 <a:ea typeface="Trebuchet MS" pitchFamily="34" charset="-122"/>
                 <a:cs typeface="Trebuchet MS" pitchFamily="34" charset="-120"/>
               </a:rPr>
-              <a:t>36 archivos de pruebas</a:t>
+              <a:t>Decisiones documentadas (ADRs)</a:t>
             </a:r>
             <a:endParaRPr lang="en-US" sz="1150" dirty="0"/>
           </a:p>
@@ -10249,13 +10671,13 @@
       </p:sp>
       <p:sp>
         <p:nvSpPr>
-          <p:cNvPr id="16" name="Text 11"/>
-          <p:cNvSpPr/>
-          <p:nvPr/>
-        </p:nvSpPr>
-        <p:spPr>
-          <a:xfrm>
-            <a:off x="1124712" y="3675888"/>
+          <p:cNvPr id="20" name="Text 14"/>
+          <p:cNvSpPr/>
+          <p:nvPr/>
+        </p:nvSpPr>
+        <p:spPr>
+          <a:xfrm>
+            <a:off x="5330952" y="3675888"/>
             <a:ext cx="3154680" cy="685800"/>
           </a:xfrm>
           <a:prstGeom prst="rect">
@@ -10280,7 +10702,7 @@
                 <a:ea typeface="Calibri" pitchFamily="34" charset="-122"/>
                 <a:cs typeface="Calibri" pitchFamily="34" charset="-120"/>
               </a:rPr>
-              <a:t>Cubren el verificador SoQL, el validador anti-alucinación, la reparación, la inferencia territorial, la cosecha, el MCP y las rutas de la API.</a:t>
+              <a:t>Los registros públicos de decisión (017-024) trazan cada giro técnico, del principio “la IA razona, el motor verifica” al pivote panorama-decisor.</a:t>
             </a:r>
             <a:endParaRPr lang="en-US" sz="900" dirty="0"/>
           </a:p>
@@ -10288,36 +10710,102 @@
       </p:sp>
       <p:sp>
         <p:nvSpPr>
-          <p:cNvPr id="17" name="Shape 12"/>
-          <p:cNvSpPr/>
-          <p:nvPr/>
-        </p:nvSpPr>
-        <p:spPr>
-          <a:xfrm>
-            <a:off x="4709160" y="3291840"/>
-            <a:ext cx="3931920" cy="1097280"/>
-          </a:xfrm>
-          <a:prstGeom prst="roundRect">
-            <a:avLst>
-              <a:gd name="adj" fmla="val 5000"/>
-            </a:avLst>
-          </a:prstGeom>
-          <a:solidFill>
-            <a:srgbClr val="FFFFFF"/>
-          </a:solidFill>
-          <a:ln/>
-          <a:effectLst>
-            <a:outerShdw algn="bl" rotWithShape="0">
-              <a:srgbClr val="1A2530">
-                <a:alpha val="0"/>
-              </a:srgbClr>
-            </a:outerShdw>
-          </a:effectLst>
-        </p:spPr>
+          <p:cNvPr id="21" name="Text 15"/>
+          <p:cNvSpPr/>
+          <p:nvPr/>
+        </p:nvSpPr>
+        <p:spPr>
+          <a:xfrm>
+            <a:off x="502920" y="4832604"/>
+            <a:ext cx="7680960" cy="228600"/>
+          </a:xfrm>
+          <a:prstGeom prst="rect">
+            <a:avLst/>
+          </a:prstGeom>
+          <a:noFill/>
+          <a:ln/>
+        </p:spPr>
+        <p:txBody>
+          <a:bodyPr wrap="square" lIns="0" tIns="0" rIns="0" bIns="0" rtlCol="0" anchor="ctr"/>
+          <a:lstStyle/>
+          <a:p>
+            <a:pPr marL="0" indent="0">
+              <a:buNone/>
+            </a:pPr>
+            <a:r>
+              <a:rPr lang="en-US" sz="850" b="1" dirty="0">
+                <a:solidFill>
+                  <a:srgbClr val="0B3C5D"/>
+                </a:solidFill>
+                <a:latin typeface="Calibri" pitchFamily="34" charset="0"/>
+                <a:ea typeface="Calibri" pitchFamily="34" charset="-122"/>
+                <a:cs typeface="Calibri" pitchFamily="34" charset="-120"/>
+              </a:rPr>
+              <a:t>DatosVivos · datosvivos.co</a:t>
+            </a:r>
+            <a:r>
+              <a:rPr lang="en-US" sz="850" dirty="0">
+                <a:solidFill>
+                  <a:srgbClr val="7F8C8D"/>
+                </a:solidFill>
+                <a:latin typeface="Calibri" pitchFamily="34" charset="0"/>
+                <a:ea typeface="Calibri" pitchFamily="34" charset="-122"/>
+                <a:cs typeface="Calibri" pitchFamily="34" charset="-120"/>
+              </a:rPr>
+              <a:t>   |   Datos al Ecosistema 2026 · Equipo 93 · Reto 7 · Nivel Avanzado</a:t>
+            </a:r>
+            <a:endParaRPr lang="en-US" sz="850" dirty="0"/>
+          </a:p>
+        </p:txBody>
+      </p:sp>
+      <p:sp>
+        <p:nvSpPr>
+          <p:cNvPr id="22" name="Text 16"/>
+          <p:cNvSpPr/>
+          <p:nvPr/>
+        </p:nvSpPr>
+        <p:spPr>
+          <a:xfrm>
+            <a:off x="8275320" y="4832604"/>
+            <a:ext cx="365760" cy="228600"/>
+          </a:xfrm>
+          <a:prstGeom prst="rect">
+            <a:avLst/>
+          </a:prstGeom>
+          <a:noFill/>
+          <a:ln/>
+        </p:spPr>
+        <p:txBody>
+          <a:bodyPr wrap="square" lIns="0" tIns="0" rIns="0" bIns="0" rtlCol="0" anchor="ctr"/>
+          <a:lstStyle/>
+          <a:p>
+            <a:pPr marL="0" indent="0" algn="r">
+              <a:buNone/>
+            </a:pPr>
+            <a:r>
+              <a:rPr lang="en-US" sz="850" dirty="0">
+                <a:solidFill>
+                  <a:srgbClr val="7F8C8D"/>
+                </a:solidFill>
+                <a:latin typeface="Calibri" pitchFamily="34" charset="0"/>
+                <a:ea typeface="Calibri" pitchFamily="34" charset="-122"/>
+                <a:cs typeface="Calibri" pitchFamily="34" charset="-120"/>
+              </a:rPr>
+              <a:t>18</a:t>
+            </a:r>
+            <a:endParaRPr lang="en-US" sz="850" dirty="0"/>
+          </a:p>
+        </p:txBody>
       </p:sp>
       <p:pic>
         <p:nvPicPr>
-          <p:cNvPr id="18" name="Image 3" descr="preencoded.png"/>
+          <p:cNvPr id="23" name="Image 1" descr="preencoded.png">
+            <a:extLst>
+              <a:ext uri="{FF2B5EF4-FFF2-40B4-BE49-F238E27FC236}">
+                <a16:creationId xmlns:a16="http://schemas.microsoft.com/office/drawing/2014/main" id="{5D094D1C-ECA2-FE52-7421-7D627AB2024B}"/>
+              </a:ext>
+            </a:extLst>
+          </p:cNvPr>
           <p:cNvPicPr>
             <a:picLocks noChangeAspect="1"/>
           </p:cNvPicPr>
@@ -10331,7 +10819,7 @@
         </p:blipFill>
         <p:spPr>
           <a:xfrm>
-            <a:off x="4892040" y="3474720"/>
+            <a:off x="4892040" y="2240280"/>
             <a:ext cx="310896" cy="310896"/>
           </a:xfrm>
           <a:prstGeom prst="rect">
@@ -10339,173 +10827,36 @@
           </a:prstGeom>
         </p:spPr>
       </p:pic>
-      <p:sp>
-        <p:nvSpPr>
-          <p:cNvPr id="19" name="Text 13"/>
-          <p:cNvSpPr/>
-          <p:nvPr/>
-        </p:nvSpPr>
-        <p:spPr>
-          <a:xfrm>
-            <a:off x="5330952" y="3392424"/>
-            <a:ext cx="3154680" cy="274320"/>
-          </a:xfrm>
-          <a:prstGeom prst="rect">
-            <a:avLst/>
-          </a:prstGeom>
-          <a:noFill/>
-          <a:ln/>
-        </p:spPr>
-        <p:txBody>
-          <a:bodyPr wrap="square" lIns="0" tIns="0" rIns="0" bIns="0" rtlCol="0" anchor="ctr"/>
-          <a:lstStyle/>
-          <a:p>
-            <a:pPr marL="0" indent="0">
-              <a:buNone/>
-            </a:pPr>
-            <a:r>
-              <a:rPr lang="en-US" sz="1150" b="1" dirty="0">
-                <a:solidFill>
-                  <a:srgbClr val="0B3C5D"/>
-                </a:solidFill>
-                <a:latin typeface="Trebuchet MS" pitchFamily="34" charset="0"/>
-                <a:ea typeface="Trebuchet MS" pitchFamily="34" charset="-122"/>
-                <a:cs typeface="Trebuchet MS" pitchFamily="34" charset="-120"/>
-              </a:rPr>
-              <a:t>Decisiones documentadas (ADRs)</a:t>
-            </a:r>
-            <a:endParaRPr lang="en-US" sz="1150" dirty="0"/>
-          </a:p>
-        </p:txBody>
-      </p:sp>
-      <p:sp>
-        <p:nvSpPr>
-          <p:cNvPr id="20" name="Text 14"/>
-          <p:cNvSpPr/>
-          <p:nvPr/>
-        </p:nvSpPr>
-        <p:spPr>
-          <a:xfrm>
-            <a:off x="5330952" y="3675888"/>
-            <a:ext cx="3154680" cy="685800"/>
-          </a:xfrm>
-          <a:prstGeom prst="rect">
-            <a:avLst/>
-          </a:prstGeom>
-          <a:noFill/>
-          <a:ln/>
-        </p:spPr>
-        <p:txBody>
-          <a:bodyPr wrap="square" lIns="0" tIns="0" rIns="0" bIns="0" rtlCol="0" anchor="ctr"/>
-          <a:lstStyle/>
-          <a:p>
-            <a:pPr marL="0" indent="0">
-              <a:buNone/>
-            </a:pPr>
-            <a:r>
-              <a:rPr lang="en-US" sz="900" dirty="0">
-                <a:solidFill>
-                  <a:srgbClr val="2C3E50"/>
-                </a:solidFill>
-                <a:latin typeface="Calibri" pitchFamily="34" charset="0"/>
-                <a:ea typeface="Calibri" pitchFamily="34" charset="-122"/>
-                <a:cs typeface="Calibri" pitchFamily="34" charset="-120"/>
-              </a:rPr>
-              <a:t>Los registros públicos de decisión (017-024) trazan cada giro técnico, del principio “la IA razona, el motor verifica” al pivote panorama-decisor.</a:t>
-            </a:r>
-            <a:endParaRPr lang="en-US" sz="900" dirty="0"/>
-          </a:p>
-        </p:txBody>
-      </p:sp>
-      <p:sp>
-        <p:nvSpPr>
-          <p:cNvPr id="21" name="Text 15"/>
-          <p:cNvSpPr/>
-          <p:nvPr/>
-        </p:nvSpPr>
-        <p:spPr>
-          <a:xfrm>
-            <a:off x="502920" y="4832604"/>
-            <a:ext cx="7680960" cy="228600"/>
-          </a:xfrm>
-          <a:prstGeom prst="rect">
-            <a:avLst/>
-          </a:prstGeom>
-          <a:noFill/>
-          <a:ln/>
-        </p:spPr>
-        <p:txBody>
-          <a:bodyPr wrap="square" lIns="0" tIns="0" rIns="0" bIns="0" rtlCol="0" anchor="ctr"/>
-          <a:lstStyle/>
-          <a:p>
-            <a:pPr marL="0" indent="0">
-              <a:buNone/>
-            </a:pPr>
-            <a:r>
-              <a:rPr lang="en-US" sz="850" b="1" dirty="0">
-                <a:solidFill>
-                  <a:srgbClr val="0B3C5D"/>
-                </a:solidFill>
-                <a:latin typeface="Calibri" pitchFamily="34" charset="0"/>
-                <a:ea typeface="Calibri" pitchFamily="34" charset="-122"/>
-                <a:cs typeface="Calibri" pitchFamily="34" charset="-120"/>
-              </a:rPr>
-              <a:t>DatosVivos · datosvivos.co</a:t>
-            </a:r>
-            <a:r>
-              <a:rPr lang="en-US" sz="850" dirty="0">
-                <a:solidFill>
-                  <a:srgbClr val="7F8C8D"/>
-                </a:solidFill>
-                <a:latin typeface="Calibri" pitchFamily="34" charset="0"/>
-                <a:ea typeface="Calibri" pitchFamily="34" charset="-122"/>
-                <a:cs typeface="Calibri" pitchFamily="34" charset="-120"/>
-              </a:rPr>
-              <a:t>   |   Datos al Ecosistema 2026 · Equipo 93 · Reto 7 · Nivel Avanzado</a:t>
-            </a:r>
-            <a:endParaRPr lang="en-US" sz="850" dirty="0"/>
-          </a:p>
-        </p:txBody>
-      </p:sp>
-      <p:sp>
-        <p:nvSpPr>
-          <p:cNvPr id="22" name="Text 16"/>
-          <p:cNvSpPr/>
-          <p:nvPr/>
-        </p:nvSpPr>
-        <p:spPr>
-          <a:xfrm>
-            <a:off x="8275320" y="4832604"/>
-            <a:ext cx="365760" cy="228600"/>
-          </a:xfrm>
-          <a:prstGeom prst="rect">
-            <a:avLst/>
-          </a:prstGeom>
-          <a:noFill/>
-          <a:ln/>
-        </p:spPr>
-        <p:txBody>
-          <a:bodyPr wrap="square" lIns="0" tIns="0" rIns="0" bIns="0" rtlCol="0" anchor="ctr"/>
-          <a:lstStyle/>
-          <a:p>
-            <a:pPr marL="0" indent="0" algn="r">
-              <a:buNone/>
-            </a:pPr>
-            <a:r>
-              <a:rPr lang="en-US" sz="850" dirty="0">
-                <a:solidFill>
-                  <a:srgbClr val="7F8C8D"/>
-                </a:solidFill>
-                <a:latin typeface="Calibri" pitchFamily="34" charset="0"/>
-                <a:ea typeface="Calibri" pitchFamily="34" charset="-122"/>
-                <a:cs typeface="Calibri" pitchFamily="34" charset="-120"/>
-              </a:rPr>
-              <a:t>18</a:t>
-            </a:r>
-            <a:endParaRPr lang="en-US" sz="850" dirty="0"/>
-          </a:p>
-        </p:txBody>
-      </p:sp>
+      <p:pic>
+        <p:nvPicPr>
+          <p:cNvPr id="24" name="Image 3" descr="preencoded.png">
+            <a:extLst>
+              <a:ext uri="{FF2B5EF4-FFF2-40B4-BE49-F238E27FC236}">
+                <a16:creationId xmlns:a16="http://schemas.microsoft.com/office/drawing/2014/main" id="{5FC96C83-32CC-8A3D-5993-698800C1E89C}"/>
+              </a:ext>
+            </a:extLst>
+          </p:cNvPr>
+          <p:cNvPicPr>
+            <a:picLocks noChangeAspect="1"/>
+          </p:cNvPicPr>
+          <p:nvPr/>
+        </p:nvPicPr>
+        <p:blipFill>
+          <a:blip r:embed="rId5"/>
+          <a:stretch>
+            <a:fillRect/>
+          </a:stretch>
+        </p:blipFill>
+        <p:spPr>
+          <a:xfrm>
+            <a:off x="4864608" y="2291467"/>
+            <a:ext cx="310896" cy="310896"/>
+          </a:xfrm>
+          <a:prstGeom prst="rect">
+            <a:avLst/>
+          </a:prstGeom>
+        </p:spPr>
+      </p:pic>
     </p:spTree>
   </p:cSld>
   <p:clrMapOvr>
@@ -11288,7 +11639,7 @@
               <a:buNone/>
             </a:pPr>
             <a:r>
-              <a:rPr lang="en-US" sz="1450" b="1" dirty="0">
+              <a:rPr lang="en-US" sz="1400" b="1" dirty="0">
                 <a:solidFill>
                   <a:srgbClr val="0B3C5D"/>
                 </a:solidFill>
@@ -11296,9 +11647,42 @@
                 <a:ea typeface="Trebuchet MS" pitchFamily="34" charset="-122"/>
                 <a:cs typeface="Trebuchet MS" pitchFamily="34" charset="-120"/>
               </a:rPr>
-              <a:t>El dato público existe — pero nadie puede verlo completo ni usarlo sin conocimientos técnicos.</a:t>
-            </a:r>
-            <a:endParaRPr lang="en-US" sz="1450" dirty="0"/>
+              <a:t>El dato público existe — pero nadie puede verlo completo ni usarlo sin </a:t>
+            </a:r>
+            <a:r>
+              <a:rPr lang="en-US" sz="1400" b="1" dirty="0" err="1">
+                <a:solidFill>
+                  <a:srgbClr val="0B3C5D"/>
+                </a:solidFill>
+                <a:latin typeface="Trebuchet MS" pitchFamily="34" charset="0"/>
+                <a:ea typeface="Trebuchet MS" pitchFamily="34" charset="-122"/>
+                <a:cs typeface="Trebuchet MS" pitchFamily="34" charset="-120"/>
+              </a:rPr>
+              <a:t>conocimientos</a:t>
+            </a:r>
+            <a:r>
+              <a:rPr lang="en-US" sz="1400" b="1" dirty="0">
+                <a:solidFill>
+                  <a:srgbClr val="0B3C5D"/>
+                </a:solidFill>
+                <a:latin typeface="Trebuchet MS" pitchFamily="34" charset="0"/>
+                <a:ea typeface="Trebuchet MS" pitchFamily="34" charset="-122"/>
+                <a:cs typeface="Trebuchet MS" pitchFamily="34" charset="-120"/>
+              </a:rPr>
+              <a:t> </a:t>
+            </a:r>
+            <a:r>
+              <a:rPr lang="en-US" sz="1400" b="1" dirty="0" err="1">
+                <a:solidFill>
+                  <a:srgbClr val="0B3C5D"/>
+                </a:solidFill>
+                <a:latin typeface="Trebuchet MS" pitchFamily="34" charset="0"/>
+                <a:ea typeface="Trebuchet MS" pitchFamily="34" charset="-122"/>
+                <a:cs typeface="Trebuchet MS" pitchFamily="34" charset="-120"/>
+              </a:rPr>
+              <a:t>técnicos</a:t>
+            </a:r>
+            <a:endParaRPr lang="en-US" sz="1400" dirty="0"/>
           </a:p>
         </p:txBody>
       </p:sp>
@@ -12634,7 +13018,7 @@
         <p:spPr>
           <a:xfrm>
             <a:off x="1143000" y="1600200"/>
-            <a:ext cx="7040880" cy="1371600"/>
+            <a:ext cx="7155180" cy="1371600"/>
           </a:xfrm>
           <a:prstGeom prst="rect">
             <a:avLst/>
@@ -12675,7 +13059,51 @@
                 <a:ea typeface="Trebuchet MS" pitchFamily="34" charset="-122"/>
                 <a:cs typeface="Trebuchet MS" pitchFamily="34" charset="-120"/>
               </a:rPr>
-              <a:t>Y si no medimos, no podemos mejorar.”</a:t>
+              <a:t>Y si no medimos, no </a:t>
+            </a:r>
+            <a:r>
+              <a:rPr lang="en-US" sz="3000" b="1" dirty="0" err="1">
+                <a:solidFill>
+                  <a:srgbClr val="0B3C5D"/>
+                </a:solidFill>
+                <a:latin typeface="Trebuchet MS" pitchFamily="34" charset="0"/>
+                <a:ea typeface="Trebuchet MS" pitchFamily="34" charset="-122"/>
+                <a:cs typeface="Trebuchet MS" pitchFamily="34" charset="-120"/>
+              </a:rPr>
+              <a:t>podemos</a:t>
+            </a:r>
+            <a:r>
+              <a:rPr lang="en-US" sz="3000" b="1" dirty="0">
+                <a:solidFill>
+                  <a:srgbClr val="0B3C5D"/>
+                </a:solidFill>
+                <a:latin typeface="Trebuchet MS" pitchFamily="34" charset="0"/>
+                <a:ea typeface="Trebuchet MS" pitchFamily="34" charset="-122"/>
+                <a:cs typeface="Trebuchet MS" pitchFamily="34" charset="-120"/>
+              </a:rPr>
+              <a:t> </a:t>
+            </a:r>
+            <a:r>
+              <a:rPr lang="en-US" sz="3000" b="1" dirty="0" err="1">
+                <a:solidFill>
+                  <a:srgbClr val="0B3C5D"/>
+                </a:solidFill>
+                <a:latin typeface="Trebuchet MS" pitchFamily="34" charset="0"/>
+                <a:ea typeface="Trebuchet MS" pitchFamily="34" charset="-122"/>
+                <a:cs typeface="Trebuchet MS" pitchFamily="34" charset="-120"/>
+              </a:rPr>
+              <a:t>mejorar</a:t>
+            </a:r>
+            <a:r>
+              <a:rPr lang="en-US" sz="3000" b="1" dirty="0">
+                <a:solidFill>
+                  <a:srgbClr val="0B3C5D"/>
+                </a:solidFill>
+                <a:latin typeface="Trebuchet MS" pitchFamily="34" charset="0"/>
+                <a:ea typeface="Trebuchet MS" pitchFamily="34" charset="-122"/>
+                <a:cs typeface="Trebuchet MS" pitchFamily="34" charset="-120"/>
+              </a:rPr>
+              <a:t>.”</a:t>
             </a:r>
             <a:endParaRPr lang="en-US" sz="3000" dirty="0"/>
           </a:p>
@@ -12986,7 +13414,29 @@
                 <a:ea typeface="Trebuchet MS" pitchFamily="34" charset="-122"/>
                 <a:cs typeface="Trebuchet MS" pitchFamily="34" charset="-120"/>
               </a:rPr>
-              <a:t>Cuatro puertas, una por audiencia</a:t>
+              <a:t>Cuatro </a:t>
+            </a:r>
+            <a:r>
+              <a:rPr lang="en-US" sz="2700" b="1" dirty="0" err="1">
+                <a:solidFill>
+                  <a:srgbClr val="0B3C5D"/>
+                </a:solidFill>
+                <a:latin typeface="Trebuchet MS" pitchFamily="34" charset="0"/>
+                <a:ea typeface="Trebuchet MS" pitchFamily="34" charset="-122"/>
+                <a:cs typeface="Trebuchet MS" pitchFamily="34" charset="-120"/>
+              </a:rPr>
+              <a:t>ejes</a:t>
+            </a:r>
+            <a:r>
+              <a:rPr lang="en-US" sz="2700" b="1" dirty="0">
+                <a:solidFill>
+                  <a:srgbClr val="0B3C5D"/>
+                </a:solidFill>
+                <a:latin typeface="Trebuchet MS" pitchFamily="34" charset="0"/>
+                <a:ea typeface="Trebuchet MS" pitchFamily="34" charset="-122"/>
+                <a:cs typeface="Trebuchet MS" pitchFamily="34" charset="-120"/>
+              </a:rPr>
+              <a:t>, uno por audiencia</a:t>
             </a:r>
             <a:endParaRPr lang="en-US" sz="2700" dirty="0"/>
           </a:p>
@@ -13212,20 +13662,20 @@
         </p:nvSpPr>
         <p:spPr>
           <a:xfrm>
-            <a:off x="630936" y="2423160"/>
-            <a:ext cx="1607058" cy="1188720"/>
-          </a:xfrm>
-          <a:prstGeom prst="rect">
-            <a:avLst/>
-          </a:prstGeom>
-          <a:noFill/>
-          <a:ln/>
-        </p:spPr>
-        <p:txBody>
-          <a:bodyPr wrap="square" lIns="0" tIns="0" rIns="0" bIns="0" rtlCol="0" anchor="ctr"/>
-          <a:lstStyle/>
-          <a:p>
-            <a:pPr marL="0" indent="0">
+            <a:off x="567328" y="2423160"/>
+            <a:ext cx="1735074" cy="1188720"/>
+          </a:xfrm>
+          <a:prstGeom prst="rect">
+            <a:avLst/>
+          </a:prstGeom>
+          <a:noFill/>
+          <a:ln/>
+        </p:spPr>
+        <p:txBody>
+          <a:bodyPr wrap="square" lIns="0" tIns="0" rIns="0" bIns="0" rtlCol="0" anchor="ctr"/>
+          <a:lstStyle/>
+          <a:p>
+            <a:pPr marL="0" indent="0" algn="ctr">
               <a:buNone/>
             </a:pPr>
             <a:r>
@@ -13507,20 +13957,20 @@
         </p:nvSpPr>
         <p:spPr>
           <a:xfrm>
-            <a:off x="2722626" y="2423160"/>
-            <a:ext cx="1607058" cy="1188720"/>
-          </a:xfrm>
-          <a:prstGeom prst="rect">
-            <a:avLst/>
-          </a:prstGeom>
-          <a:noFill/>
-          <a:ln/>
-        </p:spPr>
-        <p:txBody>
-          <a:bodyPr wrap="square" lIns="0" tIns="0" rIns="0" bIns="0" rtlCol="0" anchor="ctr"/>
-          <a:lstStyle/>
-          <a:p>
-            <a:pPr marL="0" indent="0">
+            <a:off x="2659018" y="2423160"/>
+            <a:ext cx="1735074" cy="1188720"/>
+          </a:xfrm>
+          <a:prstGeom prst="rect">
+            <a:avLst/>
+          </a:prstGeom>
+          <a:noFill/>
+          <a:ln/>
+        </p:spPr>
+        <p:txBody>
+          <a:bodyPr wrap="square" lIns="0" tIns="0" rIns="0" bIns="0" rtlCol="0" anchor="ctr"/>
+          <a:lstStyle/>
+          <a:p>
+            <a:pPr marL="0" indent="0" algn="ctr">
               <a:buNone/>
             </a:pPr>
             <a:r>
@@ -13890,20 +14340,20 @@
         </p:nvSpPr>
         <p:spPr>
           <a:xfrm>
-            <a:off x="4814316" y="2423160"/>
-            <a:ext cx="1607058" cy="1188720"/>
-          </a:xfrm>
-          <a:prstGeom prst="rect">
-            <a:avLst/>
-          </a:prstGeom>
-          <a:noFill/>
-          <a:ln/>
-        </p:spPr>
-        <p:txBody>
-          <a:bodyPr wrap="square" lIns="0" tIns="0" rIns="0" bIns="0" rtlCol="0" anchor="ctr"/>
-          <a:lstStyle/>
-          <a:p>
-            <a:pPr marL="0" indent="0">
+            <a:off x="4750708" y="2423160"/>
+            <a:ext cx="1735074" cy="1188720"/>
+          </a:xfrm>
+          <a:prstGeom prst="rect">
+            <a:avLst/>
+          </a:prstGeom>
+          <a:noFill/>
+          <a:ln/>
+        </p:spPr>
+        <p:txBody>
+          <a:bodyPr wrap="square" lIns="0" tIns="0" rIns="0" bIns="0" rtlCol="0" anchor="ctr"/>
+          <a:lstStyle/>
+          <a:p>
+            <a:pPr marL="0" indent="0" algn="ctr">
               <a:buNone/>
             </a:pPr>
             <a:r>
@@ -14295,20 +14745,20 @@
         </p:nvSpPr>
         <p:spPr>
           <a:xfrm>
-            <a:off x="6906006" y="2423160"/>
-            <a:ext cx="1607058" cy="1188720"/>
-          </a:xfrm>
-          <a:prstGeom prst="rect">
-            <a:avLst/>
-          </a:prstGeom>
-          <a:noFill/>
-          <a:ln/>
-        </p:spPr>
-        <p:txBody>
-          <a:bodyPr wrap="square" lIns="0" tIns="0" rIns="0" bIns="0" rtlCol="0" anchor="ctr"/>
-          <a:lstStyle/>
-          <a:p>
-            <a:pPr marL="0" indent="0">
+            <a:off x="6842398" y="2423160"/>
+            <a:ext cx="1735074" cy="1188720"/>
+          </a:xfrm>
+          <a:prstGeom prst="rect">
+            <a:avLst/>
+          </a:prstGeom>
+          <a:noFill/>
+          <a:ln/>
+        </p:spPr>
+        <p:txBody>
+          <a:bodyPr wrap="square" lIns="0" tIns="0" rIns="0" bIns="0" rtlCol="0" anchor="ctr"/>
+          <a:lstStyle/>
+          <a:p>
+            <a:pPr marL="0" indent="0" algn="ctr">
               <a:buNone/>
             </a:pPr>
             <a:r>
@@ -14572,107 +15022,24 @@
       </p:grpSpPr>
       <p:sp>
         <p:nvSpPr>
-          <p:cNvPr id="2" name="Text 0"/>
-          <p:cNvSpPr/>
-          <p:nvPr/>
-        </p:nvSpPr>
-        <p:spPr>
-          <a:xfrm>
-            <a:off x="502920" y="292608"/>
-            <a:ext cx="8138160" cy="256032"/>
-          </a:xfrm>
-          <a:prstGeom prst="rect">
-            <a:avLst/>
-          </a:prstGeom>
-          <a:noFill/>
-          <a:ln/>
-        </p:spPr>
-        <p:txBody>
-          <a:bodyPr wrap="square" lIns="0" tIns="0" rIns="0" bIns="0" rtlCol="0" anchor="ctr"/>
-          <a:lstStyle/>
-          <a:p>
-            <a:pPr marL="0" indent="0">
-              <a:buNone/>
-            </a:pPr>
-            <a:r>
-              <a:rPr lang="en-US" sz="1100" b="1" kern="0" spc="200" dirty="0">
-                <a:solidFill>
-                  <a:srgbClr val="1ABC9C"/>
-                </a:solidFill>
-                <a:latin typeface="Trebuchet MS" pitchFamily="34" charset="0"/>
-                <a:ea typeface="Trebuchet MS" pitchFamily="34" charset="-122"/>
-                <a:cs typeface="Trebuchet MS" pitchFamily="34" charset="-120"/>
-              </a:rPr>
-              <a:t>DEMO 1/3 · INICIO</a:t>
-            </a:r>
-            <a:endParaRPr lang="en-US" sz="1100" dirty="0"/>
-          </a:p>
-        </p:txBody>
-      </p:sp>
-      <p:sp>
-        <p:nvSpPr>
-          <p:cNvPr id="3" name="Text 1"/>
-          <p:cNvSpPr/>
-          <p:nvPr/>
-        </p:nvSpPr>
-        <p:spPr>
-          <a:xfrm>
-            <a:off x="502920" y="548640"/>
-            <a:ext cx="8138160" cy="502920"/>
-          </a:xfrm>
-          <a:prstGeom prst="rect">
-            <a:avLst/>
-          </a:prstGeom>
-          <a:noFill/>
-          <a:ln/>
-        </p:spPr>
-        <p:txBody>
-          <a:bodyPr wrap="square" lIns="0" tIns="0" rIns="0" bIns="0" rtlCol="0" anchor="ctr"/>
-          <a:lstStyle/>
-          <a:p>
-            <a:pPr marL="0" indent="0">
-              <a:buNone/>
-            </a:pPr>
-            <a:r>
-              <a:rPr lang="en-US" sz="2700" b="1" dirty="0">
-                <a:solidFill>
-                  <a:srgbClr val="0B3C5D"/>
-                </a:solidFill>
-                <a:latin typeface="Trebuchet MS" pitchFamily="34" charset="0"/>
-                <a:ea typeface="Trebuchet MS" pitchFamily="34" charset="-122"/>
-                <a:cs typeface="Trebuchet MS" pitchFamily="34" charset="-120"/>
-              </a:rPr>
-              <a:t>El panorama en vivo y </a:t>
-            </a:r>
-            <a:r>
-              <a:rPr lang="en-US" sz="2700" b="1" dirty="0" err="1">
-                <a:solidFill>
-                  <a:srgbClr val="0B3C5D"/>
-                </a:solidFill>
-                <a:latin typeface="Trebuchet MS" pitchFamily="34" charset="0"/>
-                <a:ea typeface="Trebuchet MS" pitchFamily="34" charset="-122"/>
-                <a:cs typeface="Trebuchet MS" pitchFamily="34" charset="-120"/>
-              </a:rPr>
-              <a:t>actualizado</a:t>
-            </a:r>
-            <a:endParaRPr lang="en-US" sz="2700" dirty="0"/>
-          </a:p>
-        </p:txBody>
-      </p:sp>
-      <p:sp>
-        <p:nvSpPr>
-          <p:cNvPr id="4" name="Shape 2"/>
-          <p:cNvSpPr/>
-          <p:nvPr/>
-        </p:nvSpPr>
-        <p:spPr>
-          <a:xfrm>
-            <a:off x="502920" y="1298448"/>
-            <a:ext cx="1863090" cy="960120"/>
+          <p:cNvPr id="33" name="Shape 18">
+            <a:extLst>
+              <a:ext uri="{FF2B5EF4-FFF2-40B4-BE49-F238E27FC236}">
+                <a16:creationId xmlns:a16="http://schemas.microsoft.com/office/drawing/2014/main" id="{CA3467CC-6346-9801-245E-EBC9A6CF3A00}"/>
+              </a:ext>
+            </a:extLst>
+          </p:cNvPr>
+          <p:cNvSpPr/>
+          <p:nvPr/>
+        </p:nvSpPr>
+        <p:spPr>
+          <a:xfrm>
+            <a:off x="502920" y="3954780"/>
+            <a:ext cx="8138160" cy="774954"/>
           </a:xfrm>
           <a:prstGeom prst="roundRect">
             <a:avLst>
-              <a:gd name="adj" fmla="val 5714"/>
+              <a:gd name="adj" fmla="val 3871"/>
             </a:avLst>
           </a:prstGeom>
           <a:solidFill>
@@ -14690,111 +15057,102 @@
       </p:sp>
       <p:sp>
         <p:nvSpPr>
-          <p:cNvPr id="5" name="Shape 3"/>
-          <p:cNvSpPr/>
-          <p:nvPr/>
-        </p:nvSpPr>
-        <p:spPr>
-          <a:xfrm>
-            <a:off x="502920" y="1298448"/>
-            <a:ext cx="1863090" cy="64008"/>
-          </a:xfrm>
-          <a:prstGeom prst="rect">
-            <a:avLst/>
-          </a:prstGeom>
-          <a:solidFill>
-            <a:srgbClr val="0B3C5D"/>
-          </a:solidFill>
-          <a:ln/>
-        </p:spPr>
-      </p:sp>
-      <p:sp>
-        <p:nvSpPr>
-          <p:cNvPr id="6" name="Text 4"/>
-          <p:cNvSpPr/>
-          <p:nvPr/>
-        </p:nvSpPr>
-        <p:spPr>
-          <a:xfrm>
-            <a:off x="502920" y="1399032"/>
-            <a:ext cx="1863090" cy="457200"/>
-          </a:xfrm>
-          <a:prstGeom prst="rect">
-            <a:avLst/>
-          </a:prstGeom>
-          <a:noFill/>
-          <a:ln/>
-        </p:spPr>
-        <p:txBody>
-          <a:bodyPr wrap="square" lIns="0" tIns="0" rIns="0" bIns="0" rtlCol="0" anchor="ctr"/>
-          <a:lstStyle/>
-          <a:p>
-            <a:pPr marL="0" indent="0" algn="ctr">
-              <a:buNone/>
-            </a:pPr>
-            <a:r>
-              <a:rPr lang="en-US" sz="2600" b="1" dirty="0">
-                <a:solidFill>
-                  <a:srgbClr val="0B3C5D"/>
+          <p:cNvPr id="2" name="Text 0"/>
+          <p:cNvSpPr/>
+          <p:nvPr/>
+        </p:nvSpPr>
+        <p:spPr>
+          <a:xfrm>
+            <a:off x="502920" y="292608"/>
+            <a:ext cx="8138160" cy="256032"/>
+          </a:xfrm>
+          <a:prstGeom prst="rect">
+            <a:avLst/>
+          </a:prstGeom>
+          <a:noFill/>
+          <a:ln/>
+        </p:spPr>
+        <p:txBody>
+          <a:bodyPr wrap="square" lIns="0" tIns="0" rIns="0" bIns="0" rtlCol="0" anchor="ctr"/>
+          <a:lstStyle/>
+          <a:p>
+            <a:pPr marL="0" indent="0">
+              <a:buNone/>
+            </a:pPr>
+            <a:r>
+              <a:rPr lang="en-US" sz="1100" b="1" kern="0" spc="200" dirty="0">
+                <a:solidFill>
+                  <a:srgbClr val="1ABC9C"/>
                 </a:solidFill>
                 <a:latin typeface="Trebuchet MS" pitchFamily="34" charset="0"/>
                 <a:ea typeface="Trebuchet MS" pitchFamily="34" charset="-122"/>
                 <a:cs typeface="Trebuchet MS" pitchFamily="34" charset="-120"/>
               </a:rPr>
-              <a:t>25.234</a:t>
-            </a:r>
-            <a:endParaRPr lang="en-US" sz="2600" dirty="0"/>
-          </a:p>
-        </p:txBody>
-      </p:sp>
-      <p:sp>
-        <p:nvSpPr>
-          <p:cNvPr id="7" name="Text 5"/>
-          <p:cNvSpPr/>
-          <p:nvPr/>
-        </p:nvSpPr>
-        <p:spPr>
-          <a:xfrm>
-            <a:off x="548640" y="1874520"/>
-            <a:ext cx="1771650" cy="320040"/>
-          </a:xfrm>
-          <a:prstGeom prst="rect">
-            <a:avLst/>
-          </a:prstGeom>
-          <a:noFill/>
-          <a:ln/>
-        </p:spPr>
-        <p:txBody>
-          <a:bodyPr wrap="square" lIns="0" tIns="0" rIns="0" bIns="0" rtlCol="0" anchor="ctr"/>
-          <a:lstStyle/>
-          <a:p>
-            <a:pPr marL="0" indent="0" algn="ctr">
-              <a:buNone/>
-            </a:pPr>
-            <a:r>
-              <a:rPr lang="en-US" sz="950" dirty="0">
-                <a:solidFill>
-                  <a:srgbClr val="7F8C8D"/>
-                </a:solidFill>
-                <a:latin typeface="Calibri" pitchFamily="34" charset="0"/>
-                <a:ea typeface="Calibri" pitchFamily="34" charset="-122"/>
-                <a:cs typeface="Calibri" pitchFamily="34" charset="-120"/>
-              </a:rPr>
-              <a:t>datasets en el catálogo</a:t>
-            </a:r>
-            <a:endParaRPr lang="en-US" sz="950" dirty="0"/>
-          </a:p>
-        </p:txBody>
-      </p:sp>
-      <p:sp>
-        <p:nvSpPr>
-          <p:cNvPr id="8" name="Shape 6"/>
-          <p:cNvSpPr/>
-          <p:nvPr/>
-        </p:nvSpPr>
-        <p:spPr>
-          <a:xfrm>
-            <a:off x="2594610" y="1298448"/>
+              <a:t>DEMO 1/3 · INICIO</a:t>
+            </a:r>
+            <a:endParaRPr lang="en-US" sz="1100" dirty="0"/>
+          </a:p>
+        </p:txBody>
+      </p:sp>
+      <p:sp>
+        <p:nvSpPr>
+          <p:cNvPr id="3" name="Text 1"/>
+          <p:cNvSpPr/>
+          <p:nvPr/>
+        </p:nvSpPr>
+        <p:spPr>
+          <a:xfrm>
+            <a:off x="502920" y="548640"/>
+            <a:ext cx="8138160" cy="502920"/>
+          </a:xfrm>
+          <a:prstGeom prst="rect">
+            <a:avLst/>
+          </a:prstGeom>
+          <a:noFill/>
+          <a:ln/>
+        </p:spPr>
+        <p:txBody>
+          <a:bodyPr wrap="square" lIns="0" tIns="0" rIns="0" bIns="0" rtlCol="0" anchor="ctr"/>
+          <a:lstStyle/>
+          <a:p>
+            <a:pPr marL="0" indent="0">
+              <a:buNone/>
+            </a:pPr>
+            <a:r>
+              <a:rPr lang="en-US" sz="2700" b="1" dirty="0">
+                <a:solidFill>
+                  <a:srgbClr val="0B3C5D"/>
+                </a:solidFill>
+                <a:latin typeface="Trebuchet MS" pitchFamily="34" charset="0"/>
+                <a:ea typeface="Trebuchet MS" pitchFamily="34" charset="-122"/>
+                <a:cs typeface="Trebuchet MS" pitchFamily="34" charset="-120"/>
+              </a:rPr>
+              <a:t>El panorama en vivo y </a:t>
+            </a:r>
+            <a:r>
+              <a:rPr lang="en-US" sz="2700" b="1" dirty="0" err="1">
+                <a:solidFill>
+                  <a:srgbClr val="0B3C5D"/>
+                </a:solidFill>
+                <a:latin typeface="Trebuchet MS" pitchFamily="34" charset="0"/>
+                <a:ea typeface="Trebuchet MS" pitchFamily="34" charset="-122"/>
+                <a:cs typeface="Trebuchet MS" pitchFamily="34" charset="-120"/>
+              </a:rPr>
+              <a:t>actualizado</a:t>
+            </a:r>
+            <a:endParaRPr lang="en-US" sz="2700" dirty="0"/>
+          </a:p>
+        </p:txBody>
+      </p:sp>
+      <p:sp>
+        <p:nvSpPr>
+          <p:cNvPr id="4" name="Shape 2"/>
+          <p:cNvSpPr/>
+          <p:nvPr/>
+        </p:nvSpPr>
+        <p:spPr>
+          <a:xfrm>
+            <a:off x="502920" y="1298448"/>
             <a:ext cx="1863090" cy="960120"/>
           </a:xfrm>
           <a:prstGeom prst="roundRect">
@@ -14817,13 +15175,13 @@
       </p:sp>
       <p:sp>
         <p:nvSpPr>
-          <p:cNvPr id="9" name="Shape 7"/>
-          <p:cNvSpPr/>
-          <p:nvPr/>
-        </p:nvSpPr>
-        <p:spPr>
-          <a:xfrm>
-            <a:off x="2594610" y="1298448"/>
+          <p:cNvPr id="5" name="Shape 3"/>
+          <p:cNvSpPr/>
+          <p:nvPr/>
+        </p:nvSpPr>
+        <p:spPr>
+          <a:xfrm>
+            <a:off x="502920" y="1298448"/>
             <a:ext cx="1863090" cy="64008"/>
           </a:xfrm>
           <a:prstGeom prst="rect">
@@ -14837,13 +15195,13 @@
       </p:sp>
       <p:sp>
         <p:nvSpPr>
-          <p:cNvPr id="10" name="Text 8"/>
-          <p:cNvSpPr/>
-          <p:nvPr/>
-        </p:nvSpPr>
-        <p:spPr>
-          <a:xfrm>
-            <a:off x="2594610" y="1399032"/>
+          <p:cNvPr id="6" name="Text 4"/>
+          <p:cNvSpPr/>
+          <p:nvPr/>
+        </p:nvSpPr>
+        <p:spPr>
+          <a:xfrm>
+            <a:off x="502920" y="1399032"/>
             <a:ext cx="1863090" cy="457200"/>
           </a:xfrm>
           <a:prstGeom prst="rect">
@@ -14868,7 +15226,7 @@
                 <a:ea typeface="Trebuchet MS" pitchFamily="34" charset="-122"/>
                 <a:cs typeface="Trebuchet MS" pitchFamily="34" charset="-120"/>
               </a:rPr>
-              <a:t>1.423</a:t>
+              <a:t>25.234</a:t>
             </a:r>
             <a:endParaRPr lang="en-US" sz="2600" dirty="0"/>
           </a:p>
@@ -14876,13 +15234,13 @@
       </p:sp>
       <p:sp>
         <p:nvSpPr>
-          <p:cNvPr id="11" name="Text 9"/>
-          <p:cNvSpPr/>
-          <p:nvPr/>
-        </p:nvSpPr>
-        <p:spPr>
-          <a:xfrm>
-            <a:off x="2640330" y="1874520"/>
+          <p:cNvPr id="7" name="Text 5"/>
+          <p:cNvSpPr/>
+          <p:nvPr/>
+        </p:nvSpPr>
+        <p:spPr>
+          <a:xfrm>
+            <a:off x="548640" y="1874520"/>
             <a:ext cx="1771650" cy="320040"/>
           </a:xfrm>
           <a:prstGeom prst="rect">
@@ -14907,7 +15265,7 @@
                 <a:ea typeface="Calibri" pitchFamily="34" charset="-122"/>
                 <a:cs typeface="Calibri" pitchFamily="34" charset="-120"/>
               </a:rPr>
-              <a:t>entidades publicadoras</a:t>
+              <a:t>datasets en el catálogo</a:t>
             </a:r>
             <a:endParaRPr lang="en-US" sz="950" dirty="0"/>
           </a:p>
@@ -14915,13 +15273,13 @@
       </p:sp>
       <p:sp>
         <p:nvSpPr>
-          <p:cNvPr id="12" name="Shape 10"/>
-          <p:cNvSpPr/>
-          <p:nvPr/>
-        </p:nvSpPr>
-        <p:spPr>
-          <a:xfrm>
-            <a:off x="4686300" y="1298448"/>
+          <p:cNvPr id="8" name="Shape 6"/>
+          <p:cNvSpPr/>
+          <p:nvPr/>
+        </p:nvSpPr>
+        <p:spPr>
+          <a:xfrm>
+            <a:off x="2594610" y="1298448"/>
             <a:ext cx="1863090" cy="960120"/>
           </a:xfrm>
           <a:prstGeom prst="roundRect">
@@ -14944,13 +15302,13 @@
       </p:sp>
       <p:sp>
         <p:nvSpPr>
-          <p:cNvPr id="13" name="Shape 11"/>
-          <p:cNvSpPr/>
-          <p:nvPr/>
-        </p:nvSpPr>
-        <p:spPr>
-          <a:xfrm>
-            <a:off x="4686300" y="1298448"/>
+          <p:cNvPr id="9" name="Shape 7"/>
+          <p:cNvSpPr/>
+          <p:nvPr/>
+        </p:nvSpPr>
+        <p:spPr>
+          <a:xfrm>
+            <a:off x="2594610" y="1298448"/>
             <a:ext cx="1863090" cy="64008"/>
           </a:xfrm>
           <a:prstGeom prst="rect">
@@ -14964,13 +15322,13 @@
       </p:sp>
       <p:sp>
         <p:nvSpPr>
-          <p:cNvPr id="14" name="Text 12"/>
-          <p:cNvSpPr/>
-          <p:nvPr/>
-        </p:nvSpPr>
-        <p:spPr>
-          <a:xfrm>
-            <a:off x="4686300" y="1399032"/>
+          <p:cNvPr id="10" name="Text 8"/>
+          <p:cNvSpPr/>
+          <p:nvPr/>
+        </p:nvSpPr>
+        <p:spPr>
+          <a:xfrm>
+            <a:off x="2594610" y="1399032"/>
             <a:ext cx="1863090" cy="457200"/>
           </a:xfrm>
           <a:prstGeom prst="rect">
@@ -14995,7 +15353,7 @@
                 <a:ea typeface="Trebuchet MS" pitchFamily="34" charset="-122"/>
                 <a:cs typeface="Trebuchet MS" pitchFamily="34" charset="-120"/>
               </a:rPr>
-              <a:t>9 %</a:t>
+              <a:t>1.423</a:t>
             </a:r>
             <a:endParaRPr lang="en-US" sz="2600" dirty="0"/>
           </a:p>
@@ -15003,13 +15361,13 @@
       </p:sp>
       <p:sp>
         <p:nvSpPr>
-          <p:cNvPr id="15" name="Text 13"/>
-          <p:cNvSpPr/>
-          <p:nvPr/>
-        </p:nvSpPr>
-        <p:spPr>
-          <a:xfrm>
-            <a:off x="4732020" y="1874520"/>
+          <p:cNvPr id="11" name="Text 9"/>
+          <p:cNvSpPr/>
+          <p:nvPr/>
+        </p:nvSpPr>
+        <p:spPr>
+          <a:xfrm>
+            <a:off x="2640330" y="1874520"/>
             <a:ext cx="1771650" cy="320040"/>
           </a:xfrm>
           <a:prstGeom prst="rect">
@@ -15034,7 +15392,7 @@
                 <a:ea typeface="Calibri" pitchFamily="34" charset="-122"/>
                 <a:cs typeface="Calibri" pitchFamily="34" charset="-120"/>
               </a:rPr>
-              <a:t>actualizados al día</a:t>
+              <a:t>entidades publicadoras</a:t>
             </a:r>
             <a:endParaRPr lang="en-US" sz="950" dirty="0"/>
           </a:p>
@@ -15042,13 +15400,13 @@
       </p:sp>
       <p:sp>
         <p:nvSpPr>
-          <p:cNvPr id="16" name="Shape 14"/>
-          <p:cNvSpPr/>
-          <p:nvPr/>
-        </p:nvSpPr>
-        <p:spPr>
-          <a:xfrm>
-            <a:off x="6777990" y="1298448"/>
+          <p:cNvPr id="12" name="Shape 10"/>
+          <p:cNvSpPr/>
+          <p:nvPr/>
+        </p:nvSpPr>
+        <p:spPr>
+          <a:xfrm>
+            <a:off x="4686300" y="1298448"/>
             <a:ext cx="1863090" cy="960120"/>
           </a:xfrm>
           <a:prstGeom prst="roundRect">
@@ -15071,13 +15429,13 @@
       </p:sp>
       <p:sp>
         <p:nvSpPr>
-          <p:cNvPr id="17" name="Shape 15"/>
-          <p:cNvSpPr/>
-          <p:nvPr/>
-        </p:nvSpPr>
-        <p:spPr>
-          <a:xfrm>
-            <a:off x="6777990" y="1298448"/>
+          <p:cNvPr id="13" name="Shape 11"/>
+          <p:cNvSpPr/>
+          <p:nvPr/>
+        </p:nvSpPr>
+        <p:spPr>
+          <a:xfrm>
+            <a:off x="4686300" y="1298448"/>
             <a:ext cx="1863090" cy="64008"/>
           </a:xfrm>
           <a:prstGeom prst="rect">
@@ -15091,13 +15449,13 @@
       </p:sp>
       <p:sp>
         <p:nvSpPr>
-          <p:cNvPr id="18" name="Text 16"/>
-          <p:cNvSpPr/>
-          <p:nvPr/>
-        </p:nvSpPr>
-        <p:spPr>
-          <a:xfrm>
-            <a:off x="6777990" y="1399032"/>
+          <p:cNvPr id="14" name="Text 12"/>
+          <p:cNvSpPr/>
+          <p:nvPr/>
+        </p:nvSpPr>
+        <p:spPr>
+          <a:xfrm>
+            <a:off x="4686300" y="1399032"/>
             <a:ext cx="1863090" cy="457200"/>
           </a:xfrm>
           <a:prstGeom prst="rect">
@@ -15122,7 +15480,7 @@
                 <a:ea typeface="Trebuchet MS" pitchFamily="34" charset="-122"/>
                 <a:cs typeface="Trebuchet MS" pitchFamily="34" charset="-120"/>
               </a:rPr>
-              <a:t>59 %</a:t>
+              <a:t>9 %</a:t>
             </a:r>
             <a:endParaRPr lang="en-US" sz="2600" dirty="0"/>
           </a:p>
@@ -15130,13 +15488,13 @@
       </p:sp>
       <p:sp>
         <p:nvSpPr>
-          <p:cNvPr id="19" name="Text 17"/>
-          <p:cNvSpPr/>
-          <p:nvPr/>
-        </p:nvSpPr>
-        <p:spPr>
-          <a:xfrm>
-            <a:off x="6823710" y="1874520"/>
+          <p:cNvPr id="15" name="Text 13"/>
+          <p:cNvSpPr/>
+          <p:nvPr/>
+        </p:nvSpPr>
+        <p:spPr>
+          <a:xfrm>
+            <a:off x="4732020" y="1874520"/>
             <a:ext cx="1771650" cy="320040"/>
           </a:xfrm>
           <a:prstGeom prst="rect">
@@ -15161,7 +15519,7 @@
                 <a:ea typeface="Calibri" pitchFamily="34" charset="-122"/>
                 <a:cs typeface="Calibri" pitchFamily="34" charset="-120"/>
               </a:rPr>
-              <a:t>consultables como tabla</a:t>
+              <a:t>actualizados al día</a:t>
             </a:r>
             <a:endParaRPr lang="en-US" sz="950" dirty="0"/>
           </a:p>
@@ -15169,18 +15527,18 @@
       </p:sp>
       <p:sp>
         <p:nvSpPr>
-          <p:cNvPr id="20" name="Shape 18"/>
-          <p:cNvSpPr/>
-          <p:nvPr/>
-        </p:nvSpPr>
-        <p:spPr>
-          <a:xfrm>
-            <a:off x="502920" y="2450592"/>
-            <a:ext cx="3931920" cy="1417320"/>
+          <p:cNvPr id="16" name="Shape 14"/>
+          <p:cNvSpPr/>
+          <p:nvPr/>
+        </p:nvSpPr>
+        <p:spPr>
+          <a:xfrm>
+            <a:off x="6777990" y="1298448"/>
+            <a:ext cx="1863090" cy="960120"/>
           </a:xfrm>
           <a:prstGeom prst="roundRect">
             <a:avLst>
-              <a:gd name="adj" fmla="val 3871"/>
+              <a:gd name="adj" fmla="val 5714"/>
             </a:avLst>
           </a:prstGeom>
           <a:solidFill>
@@ -15198,152 +15556,140 @@
       </p:sp>
       <p:sp>
         <p:nvSpPr>
-          <p:cNvPr id="21" name="Text 19"/>
-          <p:cNvSpPr/>
-          <p:nvPr/>
-        </p:nvSpPr>
-        <p:spPr>
-          <a:xfrm>
-            <a:off x="704088" y="2578608"/>
-            <a:ext cx="3529584" cy="237744"/>
-          </a:xfrm>
-          <a:prstGeom prst="rect">
-            <a:avLst/>
-          </a:prstGeom>
-          <a:noFill/>
-          <a:ln/>
-        </p:spPr>
-        <p:txBody>
-          <a:bodyPr wrap="square" lIns="0" tIns="0" rIns="0" bIns="0" rtlCol="0" anchor="ctr"/>
-          <a:lstStyle/>
-          <a:p>
-            <a:pPr marL="0" indent="0">
-              <a:buNone/>
-            </a:pPr>
-            <a:r>
-              <a:rPr lang="en-US" sz="1050" b="1" kern="0" spc="100" dirty="0">
-                <a:solidFill>
-                  <a:srgbClr val="1ABC9C"/>
+          <p:cNvPr id="17" name="Shape 15"/>
+          <p:cNvSpPr/>
+          <p:nvPr/>
+        </p:nvSpPr>
+        <p:spPr>
+          <a:xfrm>
+            <a:off x="6777990" y="1298448"/>
+            <a:ext cx="1863090" cy="64008"/>
+          </a:xfrm>
+          <a:prstGeom prst="rect">
+            <a:avLst/>
+          </a:prstGeom>
+          <a:solidFill>
+            <a:srgbClr val="0B3C5D"/>
+          </a:solidFill>
+          <a:ln/>
+        </p:spPr>
+      </p:sp>
+      <p:sp>
+        <p:nvSpPr>
+          <p:cNvPr id="18" name="Text 16"/>
+          <p:cNvSpPr/>
+          <p:nvPr/>
+        </p:nvSpPr>
+        <p:spPr>
+          <a:xfrm>
+            <a:off x="6777990" y="1399032"/>
+            <a:ext cx="1863090" cy="457200"/>
+          </a:xfrm>
+          <a:prstGeom prst="rect">
+            <a:avLst/>
+          </a:prstGeom>
+          <a:noFill/>
+          <a:ln/>
+        </p:spPr>
+        <p:txBody>
+          <a:bodyPr wrap="square" lIns="0" tIns="0" rIns="0" bIns="0" rtlCol="0" anchor="ctr"/>
+          <a:lstStyle/>
+          <a:p>
+            <a:pPr marL="0" indent="0" algn="ctr">
+              <a:buNone/>
+            </a:pPr>
+            <a:r>
+              <a:rPr lang="en-US" sz="2600" b="1" dirty="0">
+                <a:solidFill>
+                  <a:srgbClr val="0B3C5D"/>
                 </a:solidFill>
                 <a:latin typeface="Trebuchet MS" pitchFamily="34" charset="0"/>
                 <a:ea typeface="Trebuchet MS" pitchFamily="34" charset="-122"/>
                 <a:cs typeface="Trebuchet MS" pitchFamily="34" charset="-120"/>
               </a:rPr>
-              <a:t>CÓMO HA CRECIDO EL CATÁLOGO</a:t>
-            </a:r>
-            <a:endParaRPr lang="en-US" sz="1050" dirty="0"/>
-          </a:p>
-        </p:txBody>
-      </p:sp>
-      <p:sp>
-        <p:nvSpPr>
-          <p:cNvPr id="22" name="Text 20"/>
-          <p:cNvSpPr/>
-          <p:nvPr/>
-        </p:nvSpPr>
-        <p:spPr>
-          <a:xfrm>
-            <a:off x="704088" y="2852928"/>
-            <a:ext cx="3529584" cy="274320"/>
-          </a:xfrm>
-          <a:prstGeom prst="rect">
-            <a:avLst/>
-          </a:prstGeom>
-          <a:noFill/>
-          <a:ln/>
-        </p:spPr>
-        <p:txBody>
-          <a:bodyPr wrap="square" lIns="0" tIns="0" rIns="0" bIns="0" rtlCol="0" anchor="ctr"/>
-          <a:lstStyle/>
-          <a:p>
-            <a:pPr marL="0" indent="0">
-              <a:buNone/>
-            </a:pPr>
-            <a:r>
-              <a:rPr lang="en-US" sz="1250" b="1" dirty="0">
-                <a:solidFill>
-                  <a:srgbClr val="0B3C5D"/>
-                </a:solidFill>
-                <a:latin typeface="Calibri" pitchFamily="34" charset="0"/>
-                <a:ea typeface="Calibri" pitchFamily="34" charset="-122"/>
-                <a:cs typeface="Calibri" pitchFamily="34" charset="-120"/>
-              </a:rPr>
-              <a:t>9 datasets</a:t>
-            </a:r>
-            <a:r>
-              <a:rPr lang="en-US" sz="1250" dirty="0">
-                <a:solidFill>
-                  <a:srgbClr val="2C3E50"/>
-                </a:solidFill>
-                <a:latin typeface="Calibri" pitchFamily="34" charset="0"/>
-                <a:ea typeface="Calibri" pitchFamily="34" charset="-122"/>
-                <a:cs typeface="Calibri" pitchFamily="34" charset="-120"/>
-              </a:rPr>
-              <a:t> hasta 2015  →  </a:t>
-            </a:r>
-            <a:r>
-              <a:rPr lang="en-US" sz="1250" b="1" dirty="0">
-                <a:solidFill>
-                  <a:srgbClr val="0B3C5D"/>
-                </a:solidFill>
-                <a:latin typeface="Calibri" pitchFamily="34" charset="0"/>
-                <a:ea typeface="Calibri" pitchFamily="34" charset="-122"/>
-                <a:cs typeface="Calibri" pitchFamily="34" charset="-120"/>
-              </a:rPr>
-              <a:t>25.234 hoy</a:t>
-            </a:r>
-            <a:endParaRPr lang="en-US" sz="1250" dirty="0"/>
-          </a:p>
-        </p:txBody>
-      </p:sp>
-      <p:sp>
-        <p:nvSpPr>
-          <p:cNvPr id="23" name="Text 21"/>
-          <p:cNvSpPr/>
-          <p:nvPr/>
-        </p:nvSpPr>
-        <p:spPr>
-          <a:xfrm>
-            <a:off x="704088" y="3154680"/>
-            <a:ext cx="3529584" cy="594360"/>
-          </a:xfrm>
-          <a:prstGeom prst="rect">
-            <a:avLst/>
-          </a:prstGeom>
-          <a:noFill/>
-          <a:ln/>
-        </p:spPr>
-        <p:txBody>
-          <a:bodyPr wrap="square" lIns="0" tIns="0" rIns="0" bIns="0" rtlCol="0" anchor="ctr"/>
-          <a:lstStyle/>
-          <a:p>
-            <a:pPr marL="0" indent="0">
-              <a:buNone/>
-            </a:pPr>
-            <a:r>
-              <a:rPr lang="en-US" sz="1000" dirty="0">
+              <a:t>0.3 %</a:t>
+            </a:r>
+            <a:endParaRPr lang="en-US" sz="2600" dirty="0"/>
+          </a:p>
+        </p:txBody>
+      </p:sp>
+      <p:sp>
+        <p:nvSpPr>
+          <p:cNvPr id="19" name="Text 17"/>
+          <p:cNvSpPr/>
+          <p:nvPr/>
+        </p:nvSpPr>
+        <p:spPr>
+          <a:xfrm>
+            <a:off x="6823710" y="1874520"/>
+            <a:ext cx="1771650" cy="320040"/>
+          </a:xfrm>
+          <a:prstGeom prst="rect">
+            <a:avLst/>
+          </a:prstGeom>
+          <a:noFill/>
+          <a:ln/>
+        </p:spPr>
+        <p:txBody>
+          <a:bodyPr wrap="square" lIns="0" tIns="0" rIns="0" bIns="0" rtlCol="0" anchor="ctr"/>
+          <a:lstStyle/>
+          <a:p>
+            <a:pPr marL="0" indent="0" algn="ctr">
+              <a:buNone/>
+            </a:pPr>
+            <a:r>
+              <a:rPr lang="en-US" sz="950" dirty="0">
                 <a:solidFill>
                   <a:srgbClr val="7F8C8D"/>
                 </a:solidFill>
                 <a:latin typeface="Calibri" pitchFamily="34" charset="0"/>
-                <a:ea typeface="Calibri" pitchFamily="34" charset="-122"/>
-                <a:cs typeface="Calibri" pitchFamily="34" charset="-120"/>
-              </a:rPr>
-              <a:t>La curva se acelera desde 2023 — la federación de portales territoriales duplicó el catálogo visible en dos años.</a:t>
-            </a:r>
-            <a:endParaRPr lang="en-US" sz="1000" dirty="0"/>
-          </a:p>
-        </p:txBody>
-      </p:sp>
-      <p:sp>
-        <p:nvSpPr>
-          <p:cNvPr id="24" name="Shape 22"/>
-          <p:cNvSpPr/>
-          <p:nvPr/>
-        </p:nvSpPr>
-        <p:spPr>
-          <a:xfrm>
-            <a:off x="4709160" y="2450592"/>
+                <a:cs typeface="Calibri" pitchFamily="34" charset="-120"/>
+              </a:rPr>
+              <a:t>con </a:t>
+            </a:r>
+            <a:r>
+              <a:rPr lang="en-US" sz="950" dirty="0" err="1">
+                <a:solidFill>
+                  <a:srgbClr val="7F8C8D"/>
+                </a:solidFill>
+                <a:latin typeface="Calibri" pitchFamily="34" charset="0"/>
+                <a:cs typeface="Calibri" pitchFamily="34" charset="-120"/>
+              </a:rPr>
+              <a:t>interacción</a:t>
+            </a:r>
+            <a:r>
+              <a:rPr lang="en-US" sz="950" dirty="0">
+                <a:solidFill>
+                  <a:srgbClr val="7F8C8D"/>
+                </a:solidFill>
+                <a:latin typeface="Calibri" pitchFamily="34" charset="0"/>
+                <a:cs typeface="Calibri" pitchFamily="34" charset="-120"/>
+              </a:rPr>
+              <a:t> </a:t>
+            </a:r>
+            <a:r>
+              <a:rPr lang="en-US" sz="950" dirty="0" err="1">
+                <a:solidFill>
+                  <a:srgbClr val="7F8C8D"/>
+                </a:solidFill>
+                <a:latin typeface="Calibri" pitchFamily="34" charset="0"/>
+                <a:cs typeface="Calibri" pitchFamily="34" charset="-120"/>
+              </a:rPr>
+              <a:t>ciudadana</a:t>
+            </a:r>
+            <a:endParaRPr lang="en-US" sz="950" dirty="0"/>
+          </a:p>
+        </p:txBody>
+      </p:sp>
+      <p:sp>
+        <p:nvSpPr>
+          <p:cNvPr id="20" name="Shape 18"/>
+          <p:cNvSpPr/>
+          <p:nvPr/>
+        </p:nvSpPr>
+        <p:spPr>
+          <a:xfrm>
+            <a:off x="502920" y="2450592"/>
             <a:ext cx="3931920" cy="1417320"/>
           </a:xfrm>
           <a:prstGeom prst="roundRect">
@@ -15366,13 +15712,13 @@
       </p:sp>
       <p:sp>
         <p:nvSpPr>
-          <p:cNvPr id="25" name="Text 23"/>
-          <p:cNvSpPr/>
-          <p:nvPr/>
-        </p:nvSpPr>
-        <p:spPr>
-          <a:xfrm>
-            <a:off x="4910328" y="2578608"/>
+          <p:cNvPr id="21" name="Text 19"/>
+          <p:cNvSpPr/>
+          <p:nvPr/>
+        </p:nvSpPr>
+        <p:spPr>
+          <a:xfrm>
+            <a:off x="704088" y="2578608"/>
             <a:ext cx="3529584" cy="237744"/>
           </a:xfrm>
           <a:prstGeom prst="rect">
@@ -15397,6 +15743,174 @@
                 <a:ea typeface="Trebuchet MS" pitchFamily="34" charset="-122"/>
                 <a:cs typeface="Trebuchet MS" pitchFamily="34" charset="-120"/>
               </a:rPr>
+              <a:t>CÓMO HA CRECIDO EL CATÁLOGO</a:t>
+            </a:r>
+            <a:endParaRPr lang="en-US" sz="1050" dirty="0"/>
+          </a:p>
+        </p:txBody>
+      </p:sp>
+      <p:sp>
+        <p:nvSpPr>
+          <p:cNvPr id="22" name="Text 20"/>
+          <p:cNvSpPr/>
+          <p:nvPr/>
+        </p:nvSpPr>
+        <p:spPr>
+          <a:xfrm>
+            <a:off x="704088" y="2852928"/>
+            <a:ext cx="3529584" cy="274320"/>
+          </a:xfrm>
+          <a:prstGeom prst="rect">
+            <a:avLst/>
+          </a:prstGeom>
+          <a:noFill/>
+          <a:ln/>
+        </p:spPr>
+        <p:txBody>
+          <a:bodyPr wrap="square" lIns="0" tIns="0" rIns="0" bIns="0" rtlCol="0" anchor="ctr"/>
+          <a:lstStyle/>
+          <a:p>
+            <a:pPr marL="0" indent="0">
+              <a:buNone/>
+            </a:pPr>
+            <a:r>
+              <a:rPr lang="en-US" sz="1250" b="1" dirty="0">
+                <a:solidFill>
+                  <a:srgbClr val="0B3C5D"/>
+                </a:solidFill>
+                <a:latin typeface="Calibri" pitchFamily="34" charset="0"/>
+                <a:ea typeface="Calibri" pitchFamily="34" charset="-122"/>
+                <a:cs typeface="Calibri" pitchFamily="34" charset="-120"/>
+              </a:rPr>
+              <a:t>9 datasets</a:t>
+            </a:r>
+            <a:r>
+              <a:rPr lang="en-US" sz="1250" dirty="0">
+                <a:solidFill>
+                  <a:srgbClr val="2C3E50"/>
+                </a:solidFill>
+                <a:latin typeface="Calibri" pitchFamily="34" charset="0"/>
+                <a:ea typeface="Calibri" pitchFamily="34" charset="-122"/>
+                <a:cs typeface="Calibri" pitchFamily="34" charset="-120"/>
+              </a:rPr>
+              <a:t> hasta 2015  →  </a:t>
+            </a:r>
+            <a:r>
+              <a:rPr lang="en-US" sz="1250" b="1" dirty="0">
+                <a:solidFill>
+                  <a:srgbClr val="0B3C5D"/>
+                </a:solidFill>
+                <a:latin typeface="Calibri" pitchFamily="34" charset="0"/>
+                <a:ea typeface="Calibri" pitchFamily="34" charset="-122"/>
+                <a:cs typeface="Calibri" pitchFamily="34" charset="-120"/>
+              </a:rPr>
+              <a:t>25.234 hoy</a:t>
+            </a:r>
+            <a:endParaRPr lang="en-US" sz="1250" dirty="0"/>
+          </a:p>
+        </p:txBody>
+      </p:sp>
+      <p:sp>
+        <p:nvSpPr>
+          <p:cNvPr id="23" name="Text 21"/>
+          <p:cNvSpPr/>
+          <p:nvPr/>
+        </p:nvSpPr>
+        <p:spPr>
+          <a:xfrm>
+            <a:off x="704088" y="3154680"/>
+            <a:ext cx="3529584" cy="594360"/>
+          </a:xfrm>
+          <a:prstGeom prst="rect">
+            <a:avLst/>
+          </a:prstGeom>
+          <a:noFill/>
+          <a:ln/>
+        </p:spPr>
+        <p:txBody>
+          <a:bodyPr wrap="square" lIns="0" tIns="0" rIns="0" bIns="0" rtlCol="0" anchor="ctr"/>
+          <a:lstStyle/>
+          <a:p>
+            <a:pPr marL="0" indent="0">
+              <a:buNone/>
+            </a:pPr>
+            <a:r>
+              <a:rPr lang="en-US" sz="1000" dirty="0">
+                <a:solidFill>
+                  <a:srgbClr val="7F8C8D"/>
+                </a:solidFill>
+                <a:latin typeface="Calibri" pitchFamily="34" charset="0"/>
+                <a:ea typeface="Calibri" pitchFamily="34" charset="-122"/>
+                <a:cs typeface="Calibri" pitchFamily="34" charset="-120"/>
+              </a:rPr>
+              <a:t>La curva se acelera desde 2023 — la federación de portales territoriales duplicó el catálogo visible en dos años.</a:t>
+            </a:r>
+            <a:endParaRPr lang="en-US" sz="1000" dirty="0"/>
+          </a:p>
+        </p:txBody>
+      </p:sp>
+      <p:sp>
+        <p:nvSpPr>
+          <p:cNvPr id="24" name="Shape 22"/>
+          <p:cNvSpPr/>
+          <p:nvPr/>
+        </p:nvSpPr>
+        <p:spPr>
+          <a:xfrm>
+            <a:off x="4709160" y="2450592"/>
+            <a:ext cx="3931920" cy="1417320"/>
+          </a:xfrm>
+          <a:prstGeom prst="roundRect">
+            <a:avLst>
+              <a:gd name="adj" fmla="val 3871"/>
+            </a:avLst>
+          </a:prstGeom>
+          <a:solidFill>
+            <a:srgbClr val="FFFFFF"/>
+          </a:solidFill>
+          <a:ln/>
+          <a:effectLst>
+            <a:outerShdw algn="bl" rotWithShape="0">
+              <a:srgbClr val="1A2530">
+                <a:alpha val="0"/>
+              </a:srgbClr>
+            </a:outerShdw>
+          </a:effectLst>
+        </p:spPr>
+      </p:sp>
+      <p:sp>
+        <p:nvSpPr>
+          <p:cNvPr id="25" name="Text 23"/>
+          <p:cNvSpPr/>
+          <p:nvPr/>
+        </p:nvSpPr>
+        <p:spPr>
+          <a:xfrm>
+            <a:off x="4910328" y="2578608"/>
+            <a:ext cx="3529584" cy="237744"/>
+          </a:xfrm>
+          <a:prstGeom prst="rect">
+            <a:avLst/>
+          </a:prstGeom>
+          <a:noFill/>
+          <a:ln/>
+        </p:spPr>
+        <p:txBody>
+          <a:bodyPr wrap="square" lIns="0" tIns="0" rIns="0" bIns="0" rtlCol="0" anchor="ctr"/>
+          <a:lstStyle/>
+          <a:p>
+            <a:pPr marL="0" indent="0">
+              <a:buNone/>
+            </a:pPr>
+            <a:r>
+              <a:rPr lang="en-US" sz="1050" b="1" kern="0" spc="100" dirty="0">
+                <a:solidFill>
+                  <a:srgbClr val="1ABC9C"/>
+                </a:solidFill>
+                <a:latin typeface="Trebuchet MS" pitchFamily="34" charset="0"/>
+                <a:ea typeface="Trebuchet MS" pitchFamily="34" charset="-122"/>
+                <a:cs typeface="Trebuchet MS" pitchFamily="34" charset="-120"/>
+              </a:rPr>
               <a:t>SECTORES Y TERRITORIO</a:t>
             </a:r>
             <a:endParaRPr lang="en-US" sz="1050" dirty="0"/>
@@ -15447,8 +15961,26 @@
                 <a:ea typeface="Calibri" pitchFamily="34" charset="-122"/>
                 <a:cs typeface="Calibri" pitchFamily="34" charset="-120"/>
               </a:rPr>
-              <a:t> lideran por sector. </a:t>
-            </a:r>
+              <a:t> lideran por sector.</a:t>
+            </a:r>
+          </a:p>
+          <a:p>
+            <a:pPr marL="0" indent="0">
+              <a:buNone/>
+            </a:pPr>
+            <a:endParaRPr lang="en-US" sz="1050" dirty="0">
+              <a:solidFill>
+                <a:srgbClr val="2C3E50"/>
+              </a:solidFill>
+              <a:latin typeface="Calibri" pitchFamily="34" charset="0"/>
+              <a:ea typeface="Calibri" pitchFamily="34" charset="-122"/>
+              <a:cs typeface="Calibri" pitchFamily="34" charset="-120"/>
+            </a:endParaRPr>
+          </a:p>
+          <a:p>
+            <a:pPr marL="0" indent="0">
+              <a:buNone/>
+            </a:pPr>
             <a:r>
               <a:rPr lang="en-US" sz="1050" b="1" dirty="0">
                 <a:solidFill>
@@ -15483,7 +16015,7 @@
         </p:nvSpPr>
         <p:spPr>
           <a:xfrm>
-            <a:off x="502920" y="4041648"/>
+            <a:off x="813018" y="4041648"/>
             <a:ext cx="8138160" cy="274320"/>
           </a:xfrm>
           <a:prstGeom prst="rect">
@@ -15588,7 +16120,7 @@
         </p:nvSpPr>
         <p:spPr>
           <a:xfrm>
-            <a:off x="502920" y="4370832"/>
+            <a:off x="820973" y="4370832"/>
             <a:ext cx="8138160" cy="256032"/>
           </a:xfrm>
           <a:prstGeom prst="rect">
@@ -16264,7 +16796,7 @@
               <a:buNone/>
             </a:pPr>
             <a:r>
-              <a:rPr lang="en-US" sz="1400" b="1" dirty="0">
+              <a:rPr lang="en-US" sz="1400" b="1" dirty="0" err="1">
                 <a:solidFill>
                   <a:srgbClr val="0B3C5D"/>
                 </a:solidFill>
@@ -16272,7 +16804,7 @@
                 <a:ea typeface="Trebuchet MS" pitchFamily="34" charset="-122"/>
                 <a:cs typeface="Trebuchet MS" pitchFamily="34" charset="-120"/>
               </a:rPr>
-              <a:t>Territorio DIVIPOLA</a:t>
+              <a:t>Territorio</a:t>
             </a:r>
             <a:endParaRPr lang="en-US" sz="1400" dirty="0"/>
           </a:p>
@@ -16311,7 +16843,95 @@
                 <a:ea typeface="Calibri" pitchFamily="34" charset="-122"/>
                 <a:cs typeface="Calibri" pitchFamily="34" charset="-120"/>
               </a:rPr>
-              <a:t>Mapa con drill de departamento a municipio, con cerca del 89 % de cobertura territorial inferida con IA.</a:t>
+              <a:t>Mapa de árbol del </a:t>
+            </a:r>
+            <a:r>
+              <a:rPr lang="en-US" sz="1000" dirty="0" err="1">
+                <a:solidFill>
+                  <a:srgbClr val="2C3E50"/>
+                </a:solidFill>
+                <a:latin typeface="Calibri" pitchFamily="34" charset="0"/>
+                <a:ea typeface="Calibri" pitchFamily="34" charset="-122"/>
+                <a:cs typeface="Calibri" pitchFamily="34" charset="-120"/>
+              </a:rPr>
+              <a:t>alcance</a:t>
+            </a:r>
+            <a:r>
+              <a:rPr lang="en-US" sz="1000" dirty="0">
+                <a:solidFill>
+                  <a:srgbClr val="2C3E50"/>
+                </a:solidFill>
+                <a:latin typeface="Calibri" pitchFamily="34" charset="0"/>
+                <a:ea typeface="Calibri" pitchFamily="34" charset="-122"/>
+                <a:cs typeface="Calibri" pitchFamily="34" charset="-120"/>
+              </a:rPr>
+              <a:t> de </a:t>
+            </a:r>
+            <a:r>
+              <a:rPr lang="en-US" sz="1000" dirty="0" err="1">
+                <a:solidFill>
+                  <a:srgbClr val="2C3E50"/>
+                </a:solidFill>
+                <a:latin typeface="Calibri" pitchFamily="34" charset="0"/>
+                <a:ea typeface="Calibri" pitchFamily="34" charset="-122"/>
+                <a:cs typeface="Calibri" pitchFamily="34" charset="-120"/>
+              </a:rPr>
+              <a:t>los</a:t>
+            </a:r>
+            <a:r>
+              <a:rPr lang="en-US" sz="1000" dirty="0">
+                <a:solidFill>
+                  <a:srgbClr val="2C3E50"/>
+                </a:solidFill>
+                <a:latin typeface="Calibri" pitchFamily="34" charset="0"/>
+                <a:ea typeface="Calibri" pitchFamily="34" charset="-122"/>
+                <a:cs typeface="Calibri" pitchFamily="34" charset="-120"/>
+              </a:rPr>
+              <a:t> </a:t>
+            </a:r>
+            <a:r>
+              <a:rPr lang="en-US" sz="1000" dirty="0" err="1">
+                <a:solidFill>
+                  <a:srgbClr val="2C3E50"/>
+                </a:solidFill>
+                <a:latin typeface="Calibri" pitchFamily="34" charset="0"/>
+                <a:ea typeface="Calibri" pitchFamily="34" charset="-122"/>
+                <a:cs typeface="Calibri" pitchFamily="34" charset="-120"/>
+              </a:rPr>
+              <a:t>datos</a:t>
+            </a:r>
+            <a:r>
+              <a:rPr lang="en-US" sz="1000" dirty="0">
+                <a:solidFill>
+                  <a:srgbClr val="2C3E50"/>
+                </a:solidFill>
+                <a:latin typeface="Calibri" pitchFamily="34" charset="0"/>
+                <a:ea typeface="Calibri" pitchFamily="34" charset="-122"/>
+                <a:cs typeface="Calibri" pitchFamily="34" charset="-120"/>
+              </a:rPr>
+              <a:t> </a:t>
+            </a:r>
+            <a:r>
+              <a:rPr lang="en-US" sz="1000" dirty="0" err="1">
+                <a:solidFill>
+                  <a:srgbClr val="2C3E50"/>
+                </a:solidFill>
+                <a:latin typeface="Calibri" pitchFamily="34" charset="0"/>
+                <a:ea typeface="Calibri" pitchFamily="34" charset="-122"/>
+                <a:cs typeface="Calibri" pitchFamily="34" charset="-120"/>
+              </a:rPr>
+              <a:t>publicados</a:t>
+            </a:r>
+            <a:r>
+              <a:rPr lang="en-US" sz="1000" dirty="0">
+                <a:solidFill>
+                  <a:srgbClr val="2C3E50"/>
+                </a:solidFill>
+                <a:latin typeface="Calibri" pitchFamily="34" charset="0"/>
+                <a:ea typeface="Calibri" pitchFamily="34" charset="-122"/>
+                <a:cs typeface="Calibri" pitchFamily="34" charset="-120"/>
+              </a:rPr>
+              <a:t>, con cerca del 89 % de cobertura territorial inferida con IA.</a:t>
             </a:r>
             <a:endParaRPr lang="en-US" sz="1000" dirty="0"/>
           </a:p>
@@ -19526,78 +20146,6 @@
               <a:t>Modo voz + narración (Ley 1618)</a:t>
             </a:r>
             <a:endParaRPr kumimoji="0" lang="en-US" sz="950" b="0" i="0" u="none" strike="noStrike" kern="1200" cap="none" spc="0" normalizeH="0" baseline="0" noProof="0" dirty="0">
-              <a:ln>
-                <a:noFill/>
-              </a:ln>
-              <a:solidFill>
-                <a:prstClr val="black"/>
-              </a:solidFill>
-              <a:effectLst/>
-              <a:uLnTx/>
-              <a:uFillTx/>
-              <a:latin typeface="Calibri" panose="020F0502020204030204"/>
-              <a:ea typeface="+mn-ea"/>
-              <a:cs typeface="+mn-cs"/>
-            </a:endParaRPr>
-          </a:p>
-        </p:txBody>
-      </p:sp>
-      <p:sp>
-        <p:nvSpPr>
-          <p:cNvPr id="28" name="Text 26"/>
-          <p:cNvSpPr/>
-          <p:nvPr/>
-        </p:nvSpPr>
-        <p:spPr>
-          <a:xfrm>
-            <a:off x="502920" y="4069080"/>
-            <a:ext cx="8138160" cy="274320"/>
-          </a:xfrm>
-          <a:prstGeom prst="rect">
-            <a:avLst/>
-          </a:prstGeom>
-          <a:noFill/>
-          <a:ln/>
-        </p:spPr>
-        <p:txBody>
-          <a:bodyPr wrap="square" lIns="0" tIns="0" rIns="0" bIns="0" rtlCol="0" anchor="ctr"/>
-          <a:lstStyle/>
-          <a:p>
-            <a:pPr marL="0" marR="0" lvl="0" indent="0" algn="ctr" defTabSz="914400" rtl="0" eaLnBrk="1" fontAlgn="auto" latinLnBrk="0" hangingPunct="1">
-              <a:lnSpc>
-                <a:spcPct val="100000"/>
-              </a:lnSpc>
-              <a:spcBef>
-                <a:spcPts val="0"/>
-              </a:spcBef>
-              <a:spcAft>
-                <a:spcPts val="0"/>
-              </a:spcAft>
-              <a:buClrTx/>
-              <a:buSzTx/>
-              <a:buFontTx/>
-              <a:buNone/>
-              <a:tabLst/>
-              <a:defRPr/>
-            </a:pPr>
-            <a:r>
-              <a:rPr kumimoji="0" lang="en-US" sz="1050" b="0" i="1" u="none" strike="noStrike" kern="1200" cap="none" spc="0" normalizeH="0" baseline="0" noProof="0" dirty="0">
-                <a:ln>
-                  <a:noFill/>
-                </a:ln>
-                <a:solidFill>
-                  <a:srgbClr val="7F97AB"/>
-                </a:solidFill>
-                <a:effectLst/>
-                <a:uLnTx/>
-                <a:uFillTx/>
-                <a:latin typeface="Calibri" pitchFamily="34" charset="0"/>
-                <a:ea typeface="Calibri" pitchFamily="34" charset="-122"/>
-                <a:cs typeface="Calibri" pitchFamily="34" charset="-120"/>
-              </a:rPr>
-              <a:t>~4 minutos · Si la red falla: capturas de respaldo al final de este archivo.</a:t>
-            </a:r>
-            <a:endParaRPr kumimoji="0" lang="en-US" sz="1050" b="0" i="0" u="none" strike="noStrike" kern="1200" cap="none" spc="0" normalizeH="0" baseline="0" noProof="0" dirty="0">
               <a:ln>
                 <a:noFill/>
               </a:ln>
